--- a/examples/dify-intro/deck.pptx
+++ b/examples/dify-intro/deck.pptx
@@ -3088,14 +3088,6 @@
 <file path=ppt/slides/slide1.xml><?xml version="1.0" encoding="utf-8"?>
 <p:sld xmlns:a="http://schemas.openxmlformats.org/drawingml/2006/main" xmlns:p="http://schemas.openxmlformats.org/presentationml/2006/main" xmlns:r="http://schemas.openxmlformats.org/officeDocument/2006/relationships">
   <p:cSld>
-    <p:bg>
-      <p:bgPr>
-        <a:solidFill>
-          <a:srgbClr val="0A0E27"/>
-        </a:solidFill>
-        <a:effectLst/>
-      </p:bgPr>
-    </p:bg>
     <p:spTree>
       <p:nvGrpSpPr>
         <p:cNvPr id="1" name=""/>
@@ -3105,7 +3097,50 @@
       <p:grpSpPr/>
       <p:sp>
         <p:nvSpPr>
-          <p:cNvPr id="2" name="Rounded Rectangle 1"/>
+          <p:cNvPr id="2" name="Rectangle 1"/>
+          <p:cNvSpPr/>
+          <p:nvPr/>
+        </p:nvSpPr>
+        <p:spPr>
+          <a:xfrm>
+            <a:off x="0" y="0"/>
+            <a:ext cx="12191695" cy="6858000"/>
+          </a:xfrm>
+          <a:prstGeom prst="rect">
+            <a:avLst/>
+          </a:prstGeom>
+          <a:solidFill>
+            <a:srgbClr val="0A0E27"/>
+          </a:solidFill>
+          <a:ln>
+            <a:noFill/>
+          </a:ln>
+        </p:spPr>
+        <p:style>
+          <a:lnRef idx="1">
+            <a:schemeClr val="accent1"/>
+          </a:lnRef>
+          <a:fillRef idx="3">
+            <a:schemeClr val="accent1"/>
+          </a:fillRef>
+          <a:effectRef idx="2">
+            <a:schemeClr val="accent1"/>
+          </a:effectRef>
+          <a:fontRef idx="minor">
+            <a:schemeClr val="lt1"/>
+          </a:fontRef>
+        </p:style>
+        <p:txBody>
+          <a:bodyPr rtlCol="0" anchor="ctr"/>
+          <a:lstStyle/>
+          <a:p>
+            <a:pPr algn="ctr"/>
+          </a:p>
+        </p:txBody>
+      </p:sp>
+      <p:sp>
+        <p:nvSpPr>
+          <p:cNvPr id="3" name="Rounded Rectangle 2"/>
           <p:cNvSpPr/>
           <p:nvPr/>
         </p:nvSpPr>
@@ -3152,7 +3187,7 @@
       </p:sp>
       <p:sp>
         <p:nvSpPr>
-          <p:cNvPr id="3" name="TextBox 2"/>
+          <p:cNvPr id="4" name="TextBox 3"/>
           <p:cNvSpPr txBox="1"/>
           <p:nvPr/>
         </p:nvSpPr>
@@ -3189,7 +3224,7 @@
       </p:sp>
       <p:sp>
         <p:nvSpPr>
-          <p:cNvPr id="4" name="TextBox 3"/>
+          <p:cNvPr id="5" name="TextBox 4"/>
           <p:cNvSpPr txBox="1"/>
           <p:nvPr/>
         </p:nvSpPr>
@@ -3224,7 +3259,7 @@
       </p:sp>
       <p:sp>
         <p:nvSpPr>
-          <p:cNvPr id="5" name="TextBox 4"/>
+          <p:cNvPr id="6" name="TextBox 5"/>
           <p:cNvSpPr txBox="1"/>
           <p:nvPr/>
         </p:nvSpPr>
@@ -3259,7 +3294,7 @@
       </p:sp>
       <p:sp>
         <p:nvSpPr>
-          <p:cNvPr id="6" name="TextBox 5"/>
+          <p:cNvPr id="7" name="TextBox 6"/>
           <p:cNvSpPr txBox="1"/>
           <p:nvPr/>
         </p:nvSpPr>
@@ -3294,7 +3329,7 @@
       </p:sp>
       <p:sp>
         <p:nvSpPr>
-          <p:cNvPr id="7" name="Rounded Rectangle 6"/>
+          <p:cNvPr id="8" name="Rounded Rectangle 7"/>
           <p:cNvSpPr/>
           <p:nvPr/>
         </p:nvSpPr>
@@ -3341,7 +3376,7 @@
       </p:sp>
       <p:sp>
         <p:nvSpPr>
-          <p:cNvPr id="8" name="TextBox 7"/>
+          <p:cNvPr id="9" name="TextBox 8"/>
           <p:cNvSpPr txBox="1"/>
           <p:nvPr/>
         </p:nvSpPr>
@@ -3376,7 +3411,7 @@
       </p:sp>
       <p:sp>
         <p:nvSpPr>
-          <p:cNvPr id="9" name="TextBox 8"/>
+          <p:cNvPr id="10" name="TextBox 9"/>
           <p:cNvSpPr txBox="1"/>
           <p:nvPr/>
         </p:nvSpPr>
@@ -3411,7 +3446,7 @@
       </p:sp>
       <p:sp>
         <p:nvSpPr>
-          <p:cNvPr id="10" name="Rectangle 9"/>
+          <p:cNvPr id="11" name="Rectangle 10"/>
           <p:cNvSpPr/>
           <p:nvPr/>
         </p:nvSpPr>
@@ -3454,7 +3489,7 @@
       </p:sp>
       <p:sp>
         <p:nvSpPr>
-          <p:cNvPr id="11" name="TextBox 10"/>
+          <p:cNvPr id="12" name="TextBox 11"/>
           <p:cNvSpPr txBox="1"/>
           <p:nvPr/>
         </p:nvSpPr>
@@ -3489,7 +3524,7 @@
       </p:sp>
       <p:sp>
         <p:nvSpPr>
-          <p:cNvPr id="12" name="TextBox 11"/>
+          <p:cNvPr id="13" name="TextBox 12"/>
           <p:cNvSpPr txBox="1"/>
           <p:nvPr/>
         </p:nvSpPr>
@@ -3524,7 +3559,7 @@
       </p:sp>
       <p:sp>
         <p:nvSpPr>
-          <p:cNvPr id="13" name="TextBox 12"/>
+          <p:cNvPr id="14" name="TextBox 13"/>
           <p:cNvSpPr txBox="1"/>
           <p:nvPr/>
         </p:nvSpPr>
@@ -3559,7 +3594,7 @@
       </p:sp>
       <p:sp>
         <p:nvSpPr>
-          <p:cNvPr id="14" name="TextBox 13"/>
+          <p:cNvPr id="15" name="TextBox 14"/>
           <p:cNvSpPr txBox="1"/>
           <p:nvPr/>
         </p:nvSpPr>
@@ -3594,7 +3629,7 @@
       </p:sp>
       <p:sp>
         <p:nvSpPr>
-          <p:cNvPr id="15" name="TextBox 14"/>
+          <p:cNvPr id="16" name="TextBox 15"/>
           <p:cNvSpPr txBox="1"/>
           <p:nvPr/>
         </p:nvSpPr>
@@ -3629,7 +3664,7 @@
       </p:sp>
       <p:sp>
         <p:nvSpPr>
-          <p:cNvPr id="16" name="TextBox 15"/>
+          <p:cNvPr id="17" name="TextBox 16"/>
           <p:cNvSpPr txBox="1"/>
           <p:nvPr/>
         </p:nvSpPr>
@@ -3664,7 +3699,7 @@
       </p:sp>
       <p:sp>
         <p:nvSpPr>
-          <p:cNvPr id="17" name="TextBox 16"/>
+          <p:cNvPr id="18" name="TextBox 17"/>
           <p:cNvSpPr txBox="1"/>
           <p:nvPr/>
         </p:nvSpPr>
@@ -3699,7 +3734,7 @@
       </p:sp>
       <p:sp>
         <p:nvSpPr>
-          <p:cNvPr id="18" name="TextBox 17"/>
+          <p:cNvPr id="19" name="TextBox 18"/>
           <p:cNvSpPr txBox="1"/>
           <p:nvPr/>
         </p:nvSpPr>
@@ -3743,14 +3778,6 @@
 <file path=ppt/slides/slide2.xml><?xml version="1.0" encoding="utf-8"?>
 <p:sld xmlns:a="http://schemas.openxmlformats.org/drawingml/2006/main" xmlns:p="http://schemas.openxmlformats.org/presentationml/2006/main" xmlns:r="http://schemas.openxmlformats.org/officeDocument/2006/relationships">
   <p:cSld>
-    <p:bg>
-      <p:bgPr>
-        <a:solidFill>
-          <a:srgbClr val="0A0E27"/>
-        </a:solidFill>
-        <a:effectLst/>
-      </p:bgPr>
-    </p:bg>
     <p:spTree>
       <p:nvGrpSpPr>
         <p:cNvPr id="1" name=""/>
@@ -3760,7 +3787,50 @@
       <p:grpSpPr/>
       <p:sp>
         <p:nvSpPr>
-          <p:cNvPr id="2" name="Rounded Rectangle 1"/>
+          <p:cNvPr id="2" name="Rectangle 1"/>
+          <p:cNvSpPr/>
+          <p:nvPr/>
+        </p:nvSpPr>
+        <p:spPr>
+          <a:xfrm>
+            <a:off x="0" y="0"/>
+            <a:ext cx="12191695" cy="6858000"/>
+          </a:xfrm>
+          <a:prstGeom prst="rect">
+            <a:avLst/>
+          </a:prstGeom>
+          <a:solidFill>
+            <a:srgbClr val="0A0E27"/>
+          </a:solidFill>
+          <a:ln>
+            <a:noFill/>
+          </a:ln>
+        </p:spPr>
+        <p:style>
+          <a:lnRef idx="1">
+            <a:schemeClr val="accent1"/>
+          </a:lnRef>
+          <a:fillRef idx="3">
+            <a:schemeClr val="accent1"/>
+          </a:fillRef>
+          <a:effectRef idx="2">
+            <a:schemeClr val="accent1"/>
+          </a:effectRef>
+          <a:fontRef idx="minor">
+            <a:schemeClr val="lt1"/>
+          </a:fontRef>
+        </p:style>
+        <p:txBody>
+          <a:bodyPr rtlCol="0" anchor="ctr"/>
+          <a:lstStyle/>
+          <a:p>
+            <a:pPr algn="ctr"/>
+          </a:p>
+        </p:txBody>
+      </p:sp>
+      <p:sp>
+        <p:nvSpPr>
+          <p:cNvPr id="3" name="Rounded Rectangle 2"/>
           <p:cNvSpPr/>
           <p:nvPr/>
         </p:nvSpPr>
@@ -3807,7 +3877,7 @@
       </p:sp>
       <p:sp>
         <p:nvSpPr>
-          <p:cNvPr id="3" name="TextBox 2"/>
+          <p:cNvPr id="4" name="TextBox 3"/>
           <p:cNvSpPr txBox="1"/>
           <p:nvPr/>
         </p:nvSpPr>
@@ -3842,7 +3912,7 @@
       </p:sp>
       <p:sp>
         <p:nvSpPr>
-          <p:cNvPr id="4" name="TextBox 3"/>
+          <p:cNvPr id="5" name="TextBox 4"/>
           <p:cNvSpPr txBox="1"/>
           <p:nvPr/>
         </p:nvSpPr>
@@ -3877,7 +3947,7 @@
       </p:sp>
       <p:sp>
         <p:nvSpPr>
-          <p:cNvPr id="5" name="TextBox 4"/>
+          <p:cNvPr id="6" name="TextBox 5"/>
           <p:cNvSpPr txBox="1"/>
           <p:nvPr/>
         </p:nvSpPr>
@@ -3912,7 +3982,7 @@
       </p:sp>
       <p:sp>
         <p:nvSpPr>
-          <p:cNvPr id="6" name="TextBox 5"/>
+          <p:cNvPr id="7" name="TextBox 6"/>
           <p:cNvSpPr txBox="1"/>
           <p:nvPr/>
         </p:nvSpPr>
@@ -3947,7 +4017,7 @@
       </p:sp>
       <p:sp>
         <p:nvSpPr>
-          <p:cNvPr id="7" name="Rectangle 6"/>
+          <p:cNvPr id="8" name="Rectangle 7"/>
           <p:cNvSpPr/>
           <p:nvPr/>
         </p:nvSpPr>
@@ -3990,7 +4060,7 @@
       </p:sp>
       <p:sp>
         <p:nvSpPr>
-          <p:cNvPr id="8" name="TextBox 7"/>
+          <p:cNvPr id="9" name="TextBox 8"/>
           <p:cNvSpPr txBox="1"/>
           <p:nvPr/>
         </p:nvSpPr>
@@ -4025,7 +4095,7 @@
       </p:sp>
       <p:sp>
         <p:nvSpPr>
-          <p:cNvPr id="9" name="Rounded Rectangle 8"/>
+          <p:cNvPr id="10" name="Rounded Rectangle 9"/>
           <p:cNvSpPr/>
           <p:nvPr/>
         </p:nvSpPr>
@@ -4072,7 +4142,7 @@
       </p:sp>
       <p:sp>
         <p:nvSpPr>
-          <p:cNvPr id="10" name="TextBox 9"/>
+          <p:cNvPr id="11" name="TextBox 10"/>
           <p:cNvSpPr txBox="1"/>
           <p:nvPr/>
         </p:nvSpPr>
@@ -4107,7 +4177,7 @@
       </p:sp>
       <p:sp>
         <p:nvSpPr>
-          <p:cNvPr id="11" name="TextBox 10"/>
+          <p:cNvPr id="12" name="TextBox 11"/>
           <p:cNvSpPr txBox="1"/>
           <p:nvPr/>
         </p:nvSpPr>
@@ -4142,7 +4212,7 @@
       </p:sp>
       <p:sp>
         <p:nvSpPr>
-          <p:cNvPr id="12" name="TextBox 11"/>
+          <p:cNvPr id="13" name="TextBox 12"/>
           <p:cNvSpPr txBox="1"/>
           <p:nvPr/>
         </p:nvSpPr>
@@ -4177,7 +4247,7 @@
       </p:sp>
       <p:sp>
         <p:nvSpPr>
-          <p:cNvPr id="13" name="TextBox 12"/>
+          <p:cNvPr id="14" name="TextBox 13"/>
           <p:cNvSpPr txBox="1"/>
           <p:nvPr/>
         </p:nvSpPr>
@@ -4212,7 +4282,7 @@
       </p:sp>
       <p:sp>
         <p:nvSpPr>
-          <p:cNvPr id="14" name="Rectangle 13"/>
+          <p:cNvPr id="15" name="Rectangle 14"/>
           <p:cNvSpPr/>
           <p:nvPr/>
         </p:nvSpPr>
@@ -4255,7 +4325,7 @@
       </p:sp>
       <p:sp>
         <p:nvSpPr>
-          <p:cNvPr id="15" name="TextBox 14"/>
+          <p:cNvPr id="16" name="TextBox 15"/>
           <p:cNvSpPr txBox="1"/>
           <p:nvPr/>
         </p:nvSpPr>
@@ -4290,7 +4360,7 @@
       </p:sp>
       <p:sp>
         <p:nvSpPr>
-          <p:cNvPr id="16" name="TextBox 15"/>
+          <p:cNvPr id="17" name="TextBox 16"/>
           <p:cNvSpPr txBox="1"/>
           <p:nvPr/>
         </p:nvSpPr>
@@ -4325,7 +4395,7 @@
       </p:sp>
       <p:sp>
         <p:nvSpPr>
-          <p:cNvPr id="17" name="TextBox 16"/>
+          <p:cNvPr id="18" name="TextBox 17"/>
           <p:cNvSpPr txBox="1"/>
           <p:nvPr/>
         </p:nvSpPr>
@@ -4369,14 +4439,6 @@
 <file path=ppt/slides/slide3.xml><?xml version="1.0" encoding="utf-8"?>
 <p:sld xmlns:a="http://schemas.openxmlformats.org/drawingml/2006/main" xmlns:p="http://schemas.openxmlformats.org/presentationml/2006/main" xmlns:r="http://schemas.openxmlformats.org/officeDocument/2006/relationships">
   <p:cSld>
-    <p:bg>
-      <p:bgPr>
-        <a:solidFill>
-          <a:srgbClr val="0A0E27"/>
-        </a:solidFill>
-        <a:effectLst/>
-      </p:bgPr>
-    </p:bg>
     <p:spTree>
       <p:nvGrpSpPr>
         <p:cNvPr id="1" name=""/>
@@ -4386,7 +4448,50 @@
       <p:grpSpPr/>
       <p:sp>
         <p:nvSpPr>
-          <p:cNvPr id="2" name="Rounded Rectangle 1"/>
+          <p:cNvPr id="2" name="Rectangle 1"/>
+          <p:cNvSpPr/>
+          <p:nvPr/>
+        </p:nvSpPr>
+        <p:spPr>
+          <a:xfrm>
+            <a:off x="0" y="0"/>
+            <a:ext cx="12191695" cy="6858000"/>
+          </a:xfrm>
+          <a:prstGeom prst="rect">
+            <a:avLst/>
+          </a:prstGeom>
+          <a:solidFill>
+            <a:srgbClr val="0A0E27"/>
+          </a:solidFill>
+          <a:ln>
+            <a:noFill/>
+          </a:ln>
+        </p:spPr>
+        <p:style>
+          <a:lnRef idx="1">
+            <a:schemeClr val="accent1"/>
+          </a:lnRef>
+          <a:fillRef idx="3">
+            <a:schemeClr val="accent1"/>
+          </a:fillRef>
+          <a:effectRef idx="2">
+            <a:schemeClr val="accent1"/>
+          </a:effectRef>
+          <a:fontRef idx="minor">
+            <a:schemeClr val="lt1"/>
+          </a:fontRef>
+        </p:style>
+        <p:txBody>
+          <a:bodyPr rtlCol="0" anchor="ctr"/>
+          <a:lstStyle/>
+          <a:p>
+            <a:pPr algn="ctr"/>
+          </a:p>
+        </p:txBody>
+      </p:sp>
+      <p:sp>
+        <p:nvSpPr>
+          <p:cNvPr id="3" name="Rounded Rectangle 2"/>
           <p:cNvSpPr/>
           <p:nvPr/>
         </p:nvSpPr>
@@ -4433,7 +4538,7 @@
       </p:sp>
       <p:sp>
         <p:nvSpPr>
-          <p:cNvPr id="3" name="TextBox 2"/>
+          <p:cNvPr id="4" name="TextBox 3"/>
           <p:cNvSpPr txBox="1"/>
           <p:nvPr/>
         </p:nvSpPr>
@@ -4468,7 +4573,7 @@
       </p:sp>
       <p:sp>
         <p:nvSpPr>
-          <p:cNvPr id="4" name="TextBox 3"/>
+          <p:cNvPr id="5" name="TextBox 4"/>
           <p:cNvSpPr txBox="1"/>
           <p:nvPr/>
         </p:nvSpPr>
@@ -4503,7 +4608,7 @@
       </p:sp>
       <p:sp>
         <p:nvSpPr>
-          <p:cNvPr id="5" name="TextBox 4"/>
+          <p:cNvPr id="6" name="TextBox 5"/>
           <p:cNvSpPr txBox="1"/>
           <p:nvPr/>
         </p:nvSpPr>
@@ -4558,7 +4663,7 @@
       </p:sp>
       <p:sp>
         <p:nvSpPr>
-          <p:cNvPr id="6" name="Rounded Rectangle 5"/>
+          <p:cNvPr id="7" name="Rounded Rectangle 6"/>
           <p:cNvSpPr/>
           <p:nvPr/>
         </p:nvSpPr>
@@ -4605,7 +4710,7 @@
       </p:sp>
       <p:sp>
         <p:nvSpPr>
-          <p:cNvPr id="7" name="TextBox 6"/>
+          <p:cNvPr id="8" name="TextBox 7"/>
           <p:cNvSpPr txBox="1"/>
           <p:nvPr/>
         </p:nvSpPr>
@@ -4640,7 +4745,7 @@
       </p:sp>
       <p:sp>
         <p:nvSpPr>
-          <p:cNvPr id="8" name="Rounded Rectangle 7"/>
+          <p:cNvPr id="9" name="Rounded Rectangle 8"/>
           <p:cNvSpPr/>
           <p:nvPr/>
         </p:nvSpPr>
@@ -4685,7 +4790,7 @@
       </p:sp>
       <p:sp>
         <p:nvSpPr>
-          <p:cNvPr id="9" name="TextBox 8"/>
+          <p:cNvPr id="10" name="TextBox 9"/>
           <p:cNvSpPr txBox="1"/>
           <p:nvPr/>
         </p:nvSpPr>
@@ -4720,7 +4825,7 @@
       </p:sp>
       <p:sp>
         <p:nvSpPr>
-          <p:cNvPr id="10" name="TextBox 9"/>
+          <p:cNvPr id="11" name="TextBox 10"/>
           <p:cNvSpPr txBox="1"/>
           <p:nvPr/>
         </p:nvSpPr>
@@ -4755,7 +4860,7 @@
       </p:sp>
       <p:sp>
         <p:nvSpPr>
-          <p:cNvPr id="11" name="TextBox 10"/>
+          <p:cNvPr id="12" name="TextBox 11"/>
           <p:cNvSpPr txBox="1"/>
           <p:nvPr/>
         </p:nvSpPr>
@@ -4790,7 +4895,7 @@
       </p:sp>
       <p:sp>
         <p:nvSpPr>
-          <p:cNvPr id="12" name="Rounded Rectangle 11"/>
+          <p:cNvPr id="13" name="Rounded Rectangle 12"/>
           <p:cNvSpPr/>
           <p:nvPr/>
         </p:nvSpPr>
@@ -4835,7 +4940,7 @@
       </p:sp>
       <p:sp>
         <p:nvSpPr>
-          <p:cNvPr id="13" name="TextBox 12"/>
+          <p:cNvPr id="14" name="TextBox 13"/>
           <p:cNvSpPr txBox="1"/>
           <p:nvPr/>
         </p:nvSpPr>
@@ -4870,7 +4975,7 @@
       </p:sp>
       <p:sp>
         <p:nvSpPr>
-          <p:cNvPr id="14" name="TextBox 13"/>
+          <p:cNvPr id="15" name="TextBox 14"/>
           <p:cNvSpPr txBox="1"/>
           <p:nvPr/>
         </p:nvSpPr>
@@ -4905,7 +5010,7 @@
       </p:sp>
       <p:sp>
         <p:nvSpPr>
-          <p:cNvPr id="15" name="TextBox 14"/>
+          <p:cNvPr id="16" name="TextBox 15"/>
           <p:cNvSpPr txBox="1"/>
           <p:nvPr/>
         </p:nvSpPr>
@@ -4940,7 +5045,7 @@
       </p:sp>
       <p:sp>
         <p:nvSpPr>
-          <p:cNvPr id="16" name="Rounded Rectangle 15"/>
+          <p:cNvPr id="17" name="Rounded Rectangle 16"/>
           <p:cNvSpPr/>
           <p:nvPr/>
         </p:nvSpPr>
@@ -4985,7 +5090,7 @@
       </p:sp>
       <p:sp>
         <p:nvSpPr>
-          <p:cNvPr id="17" name="TextBox 16"/>
+          <p:cNvPr id="18" name="TextBox 17"/>
           <p:cNvSpPr txBox="1"/>
           <p:nvPr/>
         </p:nvSpPr>
@@ -5020,7 +5125,7 @@
       </p:sp>
       <p:sp>
         <p:nvSpPr>
-          <p:cNvPr id="18" name="TextBox 17"/>
+          <p:cNvPr id="19" name="TextBox 18"/>
           <p:cNvSpPr txBox="1"/>
           <p:nvPr/>
         </p:nvSpPr>
@@ -5055,7 +5160,7 @@
       </p:sp>
       <p:sp>
         <p:nvSpPr>
-          <p:cNvPr id="19" name="TextBox 18"/>
+          <p:cNvPr id="20" name="TextBox 19"/>
           <p:cNvSpPr txBox="1"/>
           <p:nvPr/>
         </p:nvSpPr>
@@ -5090,7 +5195,7 @@
       </p:sp>
       <p:sp>
         <p:nvSpPr>
-          <p:cNvPr id="20" name="Rounded Rectangle 19"/>
+          <p:cNvPr id="21" name="Rounded Rectangle 20"/>
           <p:cNvSpPr/>
           <p:nvPr/>
         </p:nvSpPr>
@@ -5135,7 +5240,7 @@
       </p:sp>
       <p:sp>
         <p:nvSpPr>
-          <p:cNvPr id="21" name="TextBox 20"/>
+          <p:cNvPr id="22" name="TextBox 21"/>
           <p:cNvSpPr txBox="1"/>
           <p:nvPr/>
         </p:nvSpPr>
@@ -5170,7 +5275,7 @@
       </p:sp>
       <p:sp>
         <p:nvSpPr>
-          <p:cNvPr id="22" name="TextBox 21"/>
+          <p:cNvPr id="23" name="TextBox 22"/>
           <p:cNvSpPr txBox="1"/>
           <p:nvPr/>
         </p:nvSpPr>
@@ -5205,7 +5310,7 @@
       </p:sp>
       <p:sp>
         <p:nvSpPr>
-          <p:cNvPr id="23" name="TextBox 22"/>
+          <p:cNvPr id="24" name="TextBox 23"/>
           <p:cNvSpPr txBox="1"/>
           <p:nvPr/>
         </p:nvSpPr>
@@ -5240,7 +5345,7 @@
       </p:sp>
       <p:sp>
         <p:nvSpPr>
-          <p:cNvPr id="24" name="TextBox 23"/>
+          <p:cNvPr id="25" name="TextBox 24"/>
           <p:cNvSpPr txBox="1"/>
           <p:nvPr/>
         </p:nvSpPr>
@@ -5275,7 +5380,7 @@
       </p:sp>
       <p:sp>
         <p:nvSpPr>
-          <p:cNvPr id="25" name="TextBox 24"/>
+          <p:cNvPr id="26" name="TextBox 25"/>
           <p:cNvSpPr txBox="1"/>
           <p:nvPr/>
         </p:nvSpPr>
@@ -5319,14 +5424,6 @@
 <file path=ppt/slides/slide4.xml><?xml version="1.0" encoding="utf-8"?>
 <p:sld xmlns:a="http://schemas.openxmlformats.org/drawingml/2006/main" xmlns:p="http://schemas.openxmlformats.org/presentationml/2006/main" xmlns:r="http://schemas.openxmlformats.org/officeDocument/2006/relationships">
   <p:cSld>
-    <p:bg>
-      <p:bgPr>
-        <a:solidFill>
-          <a:srgbClr val="0A0E27"/>
-        </a:solidFill>
-        <a:effectLst/>
-      </p:bgPr>
-    </p:bg>
     <p:spTree>
       <p:nvGrpSpPr>
         <p:cNvPr id="1" name=""/>
@@ -5336,7 +5433,50 @@
       <p:grpSpPr/>
       <p:sp>
         <p:nvSpPr>
-          <p:cNvPr id="2" name="Rounded Rectangle 1"/>
+          <p:cNvPr id="2" name="Rectangle 1"/>
+          <p:cNvSpPr/>
+          <p:nvPr/>
+        </p:nvSpPr>
+        <p:spPr>
+          <a:xfrm>
+            <a:off x="0" y="0"/>
+            <a:ext cx="12191695" cy="6858000"/>
+          </a:xfrm>
+          <a:prstGeom prst="rect">
+            <a:avLst/>
+          </a:prstGeom>
+          <a:solidFill>
+            <a:srgbClr val="0A0E27"/>
+          </a:solidFill>
+          <a:ln>
+            <a:noFill/>
+          </a:ln>
+        </p:spPr>
+        <p:style>
+          <a:lnRef idx="1">
+            <a:schemeClr val="accent1"/>
+          </a:lnRef>
+          <a:fillRef idx="3">
+            <a:schemeClr val="accent1"/>
+          </a:fillRef>
+          <a:effectRef idx="2">
+            <a:schemeClr val="accent1"/>
+          </a:effectRef>
+          <a:fontRef idx="minor">
+            <a:schemeClr val="lt1"/>
+          </a:fontRef>
+        </p:style>
+        <p:txBody>
+          <a:bodyPr rtlCol="0" anchor="ctr"/>
+          <a:lstStyle/>
+          <a:p>
+            <a:pPr algn="ctr"/>
+          </a:p>
+        </p:txBody>
+      </p:sp>
+      <p:sp>
+        <p:nvSpPr>
+          <p:cNvPr id="3" name="Rounded Rectangle 2"/>
           <p:cNvSpPr/>
           <p:nvPr/>
         </p:nvSpPr>
@@ -5383,7 +5523,7 @@
       </p:sp>
       <p:sp>
         <p:nvSpPr>
-          <p:cNvPr id="3" name="TextBox 2"/>
+          <p:cNvPr id="4" name="TextBox 3"/>
           <p:cNvSpPr txBox="1"/>
           <p:nvPr/>
         </p:nvSpPr>
@@ -5418,7 +5558,7 @@
       </p:sp>
       <p:sp>
         <p:nvSpPr>
-          <p:cNvPr id="4" name="TextBox 3"/>
+          <p:cNvPr id="5" name="TextBox 4"/>
           <p:cNvSpPr txBox="1"/>
           <p:nvPr/>
         </p:nvSpPr>
@@ -5453,7 +5593,7 @@
       </p:sp>
       <p:sp>
         <p:nvSpPr>
-          <p:cNvPr id="5" name="TextBox 4"/>
+          <p:cNvPr id="6" name="TextBox 5"/>
           <p:cNvSpPr txBox="1"/>
           <p:nvPr/>
         </p:nvSpPr>
@@ -5488,7 +5628,7 @@
       </p:sp>
       <p:sp>
         <p:nvSpPr>
-          <p:cNvPr id="6" name="Rectangle 5"/>
+          <p:cNvPr id="7" name="Rectangle 6"/>
           <p:cNvSpPr/>
           <p:nvPr/>
         </p:nvSpPr>
@@ -5531,7 +5671,7 @@
       </p:sp>
       <p:sp>
         <p:nvSpPr>
-          <p:cNvPr id="7" name="TextBox 6"/>
+          <p:cNvPr id="8" name="TextBox 7"/>
           <p:cNvSpPr txBox="1"/>
           <p:nvPr/>
         </p:nvSpPr>
@@ -5566,7 +5706,7 @@
       </p:sp>
       <p:sp>
         <p:nvSpPr>
-          <p:cNvPr id="8" name="Rounded Rectangle 7"/>
+          <p:cNvPr id="9" name="Rounded Rectangle 8"/>
           <p:cNvSpPr/>
           <p:nvPr/>
         </p:nvSpPr>
@@ -5613,7 +5753,7 @@
       </p:sp>
       <p:sp>
         <p:nvSpPr>
-          <p:cNvPr id="9" name="TextBox 8"/>
+          <p:cNvPr id="10" name="TextBox 9"/>
           <p:cNvSpPr txBox="1"/>
           <p:nvPr/>
         </p:nvSpPr>
@@ -5648,7 +5788,7 @@
       </p:sp>
       <p:sp>
         <p:nvSpPr>
-          <p:cNvPr id="10" name="TextBox 9"/>
+          <p:cNvPr id="11" name="TextBox 10"/>
           <p:cNvSpPr txBox="1"/>
           <p:nvPr/>
         </p:nvSpPr>
@@ -5683,7 +5823,7 @@
       </p:sp>
       <p:sp>
         <p:nvSpPr>
-          <p:cNvPr id="11" name="TextBox 10"/>
+          <p:cNvPr id="12" name="TextBox 11"/>
           <p:cNvSpPr txBox="1"/>
           <p:nvPr/>
         </p:nvSpPr>
@@ -5718,7 +5858,7 @@
       </p:sp>
       <p:sp>
         <p:nvSpPr>
-          <p:cNvPr id="12" name="Rectangle 11"/>
+          <p:cNvPr id="13" name="Rectangle 12"/>
           <p:cNvSpPr/>
           <p:nvPr/>
         </p:nvSpPr>
@@ -5761,7 +5901,7 @@
       </p:sp>
       <p:sp>
         <p:nvSpPr>
-          <p:cNvPr id="13" name="TextBox 12"/>
+          <p:cNvPr id="14" name="TextBox 13"/>
           <p:cNvSpPr txBox="1"/>
           <p:nvPr/>
         </p:nvSpPr>
@@ -5796,7 +5936,7 @@
       </p:sp>
       <p:sp>
         <p:nvSpPr>
-          <p:cNvPr id="14" name="Rounded Rectangle 13"/>
+          <p:cNvPr id="15" name="Rounded Rectangle 14"/>
           <p:cNvSpPr/>
           <p:nvPr/>
         </p:nvSpPr>
@@ -5843,7 +5983,7 @@
       </p:sp>
       <p:sp>
         <p:nvSpPr>
-          <p:cNvPr id="15" name="TextBox 14"/>
+          <p:cNvPr id="16" name="TextBox 15"/>
           <p:cNvSpPr txBox="1"/>
           <p:nvPr/>
         </p:nvSpPr>
@@ -5878,7 +6018,7 @@
       </p:sp>
       <p:sp>
         <p:nvSpPr>
-          <p:cNvPr id="16" name="TextBox 15"/>
+          <p:cNvPr id="17" name="TextBox 16"/>
           <p:cNvSpPr txBox="1"/>
           <p:nvPr/>
         </p:nvSpPr>
@@ -5913,7 +6053,7 @@
       </p:sp>
       <p:sp>
         <p:nvSpPr>
-          <p:cNvPr id="17" name="TextBox 16"/>
+          <p:cNvPr id="18" name="TextBox 17"/>
           <p:cNvSpPr txBox="1"/>
           <p:nvPr/>
         </p:nvSpPr>
@@ -5948,7 +6088,7 @@
       </p:sp>
       <p:sp>
         <p:nvSpPr>
-          <p:cNvPr id="18" name="Rectangle 17"/>
+          <p:cNvPr id="19" name="Rectangle 18"/>
           <p:cNvSpPr/>
           <p:nvPr/>
         </p:nvSpPr>
@@ -5991,7 +6131,7 @@
       </p:sp>
       <p:sp>
         <p:nvSpPr>
-          <p:cNvPr id="19" name="TextBox 18"/>
+          <p:cNvPr id="20" name="TextBox 19"/>
           <p:cNvSpPr txBox="1"/>
           <p:nvPr/>
         </p:nvSpPr>
@@ -6026,7 +6166,7 @@
       </p:sp>
       <p:sp>
         <p:nvSpPr>
-          <p:cNvPr id="20" name="TextBox 19"/>
+          <p:cNvPr id="21" name="TextBox 20"/>
           <p:cNvSpPr txBox="1"/>
           <p:nvPr/>
         </p:nvSpPr>
@@ -6061,7 +6201,7 @@
       </p:sp>
       <p:sp>
         <p:nvSpPr>
-          <p:cNvPr id="21" name="TextBox 20"/>
+          <p:cNvPr id="22" name="TextBox 21"/>
           <p:cNvSpPr txBox="1"/>
           <p:nvPr/>
         </p:nvSpPr>
@@ -6105,14 +6245,6 @@
 <file path=ppt/slides/slide5.xml><?xml version="1.0" encoding="utf-8"?>
 <p:sld xmlns:a="http://schemas.openxmlformats.org/drawingml/2006/main" xmlns:p="http://schemas.openxmlformats.org/presentationml/2006/main" xmlns:r="http://schemas.openxmlformats.org/officeDocument/2006/relationships">
   <p:cSld>
-    <p:bg>
-      <p:bgPr>
-        <a:solidFill>
-          <a:srgbClr val="0A0E27"/>
-        </a:solidFill>
-        <a:effectLst/>
-      </p:bgPr>
-    </p:bg>
     <p:spTree>
       <p:nvGrpSpPr>
         <p:cNvPr id="1" name=""/>
@@ -6122,7 +6254,50 @@
       <p:grpSpPr/>
       <p:sp>
         <p:nvSpPr>
-          <p:cNvPr id="2" name="Rounded Rectangle 1"/>
+          <p:cNvPr id="2" name="Rectangle 1"/>
+          <p:cNvSpPr/>
+          <p:nvPr/>
+        </p:nvSpPr>
+        <p:spPr>
+          <a:xfrm>
+            <a:off x="0" y="0"/>
+            <a:ext cx="12191695" cy="6858000"/>
+          </a:xfrm>
+          <a:prstGeom prst="rect">
+            <a:avLst/>
+          </a:prstGeom>
+          <a:solidFill>
+            <a:srgbClr val="0A0E27"/>
+          </a:solidFill>
+          <a:ln>
+            <a:noFill/>
+          </a:ln>
+        </p:spPr>
+        <p:style>
+          <a:lnRef idx="1">
+            <a:schemeClr val="accent1"/>
+          </a:lnRef>
+          <a:fillRef idx="3">
+            <a:schemeClr val="accent1"/>
+          </a:fillRef>
+          <a:effectRef idx="2">
+            <a:schemeClr val="accent1"/>
+          </a:effectRef>
+          <a:fontRef idx="minor">
+            <a:schemeClr val="lt1"/>
+          </a:fontRef>
+        </p:style>
+        <p:txBody>
+          <a:bodyPr rtlCol="0" anchor="ctr"/>
+          <a:lstStyle/>
+          <a:p>
+            <a:pPr algn="ctr"/>
+          </a:p>
+        </p:txBody>
+      </p:sp>
+      <p:sp>
+        <p:nvSpPr>
+          <p:cNvPr id="3" name="Rounded Rectangle 2"/>
           <p:cNvSpPr/>
           <p:nvPr/>
         </p:nvSpPr>
@@ -6169,7 +6344,7 @@
       </p:sp>
       <p:sp>
         <p:nvSpPr>
-          <p:cNvPr id="3" name="Rounded Rectangle 2"/>
+          <p:cNvPr id="4" name="Rounded Rectangle 3"/>
           <p:cNvSpPr/>
           <p:nvPr/>
         </p:nvSpPr>
@@ -6214,7 +6389,7 @@
       </p:sp>
       <p:sp>
         <p:nvSpPr>
-          <p:cNvPr id="4" name="TextBox 3"/>
+          <p:cNvPr id="5" name="TextBox 4"/>
           <p:cNvSpPr txBox="1"/>
           <p:nvPr/>
         </p:nvSpPr>
@@ -6249,7 +6424,7 @@
       </p:sp>
       <p:sp>
         <p:nvSpPr>
-          <p:cNvPr id="5" name="Rectangle 4"/>
+          <p:cNvPr id="6" name="Rectangle 5"/>
           <p:cNvSpPr/>
           <p:nvPr/>
         </p:nvSpPr>
@@ -6292,7 +6467,7 @@
       </p:sp>
       <p:sp>
         <p:nvSpPr>
-          <p:cNvPr id="6" name="TextBox 5"/>
+          <p:cNvPr id="7" name="TextBox 6"/>
           <p:cNvSpPr txBox="1"/>
           <p:nvPr/>
         </p:nvSpPr>
@@ -6327,7 +6502,7 @@
       </p:sp>
       <p:sp>
         <p:nvSpPr>
-          <p:cNvPr id="7" name="TextBox 6"/>
+          <p:cNvPr id="8" name="TextBox 7"/>
           <p:cNvSpPr txBox="1"/>
           <p:nvPr/>
         </p:nvSpPr>
@@ -6362,7 +6537,7 @@
       </p:sp>
       <p:sp>
         <p:nvSpPr>
-          <p:cNvPr id="8" name="Rounded Rectangle 7"/>
+          <p:cNvPr id="9" name="Rounded Rectangle 8"/>
           <p:cNvSpPr/>
           <p:nvPr/>
         </p:nvSpPr>
@@ -6409,7 +6584,7 @@
       </p:sp>
       <p:sp>
         <p:nvSpPr>
-          <p:cNvPr id="9" name="TextBox 8"/>
+          <p:cNvPr id="10" name="TextBox 9"/>
           <p:cNvSpPr txBox="1"/>
           <p:nvPr/>
         </p:nvSpPr>
@@ -6444,7 +6619,7 @@
       </p:sp>
       <p:sp>
         <p:nvSpPr>
-          <p:cNvPr id="10" name="TextBox 9"/>
+          <p:cNvPr id="11" name="TextBox 10"/>
           <p:cNvSpPr txBox="1"/>
           <p:nvPr/>
         </p:nvSpPr>
@@ -6479,7 +6654,7 @@
       </p:sp>
       <p:sp>
         <p:nvSpPr>
-          <p:cNvPr id="11" name="TextBox 10"/>
+          <p:cNvPr id="12" name="TextBox 11"/>
           <p:cNvSpPr txBox="1"/>
           <p:nvPr/>
         </p:nvSpPr>
@@ -6514,7 +6689,7 @@
       </p:sp>
       <p:sp>
         <p:nvSpPr>
-          <p:cNvPr id="12" name="Rectangle 11"/>
+          <p:cNvPr id="13" name="Rectangle 12"/>
           <p:cNvSpPr/>
           <p:nvPr/>
         </p:nvSpPr>
@@ -6557,7 +6732,7 @@
       </p:sp>
       <p:sp>
         <p:nvSpPr>
-          <p:cNvPr id="13" name="Rounded Rectangle 12"/>
+          <p:cNvPr id="14" name="Rounded Rectangle 13"/>
           <p:cNvSpPr/>
           <p:nvPr/>
         </p:nvSpPr>
@@ -6604,7 +6779,7 @@
       </p:sp>
       <p:sp>
         <p:nvSpPr>
-          <p:cNvPr id="14" name="TextBox 13"/>
+          <p:cNvPr id="15" name="TextBox 14"/>
           <p:cNvSpPr txBox="1"/>
           <p:nvPr/>
         </p:nvSpPr>
@@ -6639,7 +6814,7 @@
       </p:sp>
       <p:sp>
         <p:nvSpPr>
-          <p:cNvPr id="15" name="TextBox 14"/>
+          <p:cNvPr id="16" name="TextBox 15"/>
           <p:cNvSpPr txBox="1"/>
           <p:nvPr/>
         </p:nvSpPr>
@@ -6674,7 +6849,7 @@
       </p:sp>
       <p:sp>
         <p:nvSpPr>
-          <p:cNvPr id="16" name="TextBox 15"/>
+          <p:cNvPr id="17" name="TextBox 16"/>
           <p:cNvSpPr txBox="1"/>
           <p:nvPr/>
         </p:nvSpPr>
@@ -6709,7 +6884,7 @@
       </p:sp>
       <p:sp>
         <p:nvSpPr>
-          <p:cNvPr id="17" name="Rectangle 16"/>
+          <p:cNvPr id="18" name="Rectangle 17"/>
           <p:cNvSpPr/>
           <p:nvPr/>
         </p:nvSpPr>
@@ -6752,7 +6927,7 @@
       </p:sp>
       <p:sp>
         <p:nvSpPr>
-          <p:cNvPr id="18" name="Rounded Rectangle 17"/>
+          <p:cNvPr id="19" name="Rounded Rectangle 18"/>
           <p:cNvSpPr/>
           <p:nvPr/>
         </p:nvSpPr>
@@ -6799,7 +6974,7 @@
       </p:sp>
       <p:sp>
         <p:nvSpPr>
-          <p:cNvPr id="19" name="TextBox 18"/>
+          <p:cNvPr id="20" name="TextBox 19"/>
           <p:cNvSpPr txBox="1"/>
           <p:nvPr/>
         </p:nvSpPr>
@@ -6834,7 +7009,7 @@
       </p:sp>
       <p:sp>
         <p:nvSpPr>
-          <p:cNvPr id="20" name="TextBox 19"/>
+          <p:cNvPr id="21" name="TextBox 20"/>
           <p:cNvSpPr txBox="1"/>
           <p:nvPr/>
         </p:nvSpPr>
@@ -6869,7 +7044,7 @@
       </p:sp>
       <p:sp>
         <p:nvSpPr>
-          <p:cNvPr id="21" name="Rectangle 20"/>
+          <p:cNvPr id="22" name="Rectangle 21"/>
           <p:cNvSpPr/>
           <p:nvPr/>
         </p:nvSpPr>
@@ -6912,7 +7087,7 @@
       </p:sp>
       <p:sp>
         <p:nvSpPr>
-          <p:cNvPr id="22" name="TextBox 21"/>
+          <p:cNvPr id="23" name="TextBox 22"/>
           <p:cNvSpPr txBox="1"/>
           <p:nvPr/>
         </p:nvSpPr>
@@ -6947,7 +7122,7 @@
       </p:sp>
       <p:sp>
         <p:nvSpPr>
-          <p:cNvPr id="23" name="Rounded Rectangle 22"/>
+          <p:cNvPr id="24" name="Rounded Rectangle 23"/>
           <p:cNvSpPr/>
           <p:nvPr/>
         </p:nvSpPr>
@@ -6994,7 +7169,7 @@
       </p:sp>
       <p:sp>
         <p:nvSpPr>
-          <p:cNvPr id="24" name="TextBox 23"/>
+          <p:cNvPr id="25" name="TextBox 24"/>
           <p:cNvSpPr txBox="1"/>
           <p:nvPr/>
         </p:nvSpPr>
@@ -7029,7 +7204,7 @@
       </p:sp>
       <p:sp>
         <p:nvSpPr>
-          <p:cNvPr id="25" name="TextBox 24"/>
+          <p:cNvPr id="26" name="TextBox 25"/>
           <p:cNvSpPr txBox="1"/>
           <p:nvPr/>
         </p:nvSpPr>
@@ -7064,7 +7239,7 @@
       </p:sp>
       <p:sp>
         <p:nvSpPr>
-          <p:cNvPr id="26" name="TextBox 25"/>
+          <p:cNvPr id="27" name="TextBox 26"/>
           <p:cNvSpPr txBox="1"/>
           <p:nvPr/>
         </p:nvSpPr>
@@ -7099,7 +7274,7 @@
       </p:sp>
       <p:sp>
         <p:nvSpPr>
-          <p:cNvPr id="27" name="Rectangle 26"/>
+          <p:cNvPr id="28" name="Rectangle 27"/>
           <p:cNvSpPr/>
           <p:nvPr/>
         </p:nvSpPr>
@@ -7142,7 +7317,7 @@
       </p:sp>
       <p:sp>
         <p:nvSpPr>
-          <p:cNvPr id="28" name="TextBox 27"/>
+          <p:cNvPr id="29" name="TextBox 28"/>
           <p:cNvSpPr txBox="1"/>
           <p:nvPr/>
         </p:nvSpPr>
@@ -7177,7 +7352,7 @@
       </p:sp>
       <p:sp>
         <p:nvSpPr>
-          <p:cNvPr id="29" name="TextBox 28"/>
+          <p:cNvPr id="30" name="TextBox 29"/>
           <p:cNvSpPr txBox="1"/>
           <p:nvPr/>
         </p:nvSpPr>
@@ -7221,14 +7396,6 @@
 <file path=ppt/slides/slide6.xml><?xml version="1.0" encoding="utf-8"?>
 <p:sld xmlns:a="http://schemas.openxmlformats.org/drawingml/2006/main" xmlns:p="http://schemas.openxmlformats.org/presentationml/2006/main" xmlns:r="http://schemas.openxmlformats.org/officeDocument/2006/relationships">
   <p:cSld>
-    <p:bg>
-      <p:bgPr>
-        <a:solidFill>
-          <a:srgbClr val="0A0E27"/>
-        </a:solidFill>
-        <a:effectLst/>
-      </p:bgPr>
-    </p:bg>
     <p:spTree>
       <p:nvGrpSpPr>
         <p:cNvPr id="1" name=""/>
@@ -7238,7 +7405,50 @@
       <p:grpSpPr/>
       <p:sp>
         <p:nvSpPr>
-          <p:cNvPr id="2" name="Rounded Rectangle 1"/>
+          <p:cNvPr id="2" name="Rectangle 1"/>
+          <p:cNvSpPr/>
+          <p:nvPr/>
+        </p:nvSpPr>
+        <p:spPr>
+          <a:xfrm>
+            <a:off x="0" y="0"/>
+            <a:ext cx="12191695" cy="6858000"/>
+          </a:xfrm>
+          <a:prstGeom prst="rect">
+            <a:avLst/>
+          </a:prstGeom>
+          <a:solidFill>
+            <a:srgbClr val="0A0E27"/>
+          </a:solidFill>
+          <a:ln>
+            <a:noFill/>
+          </a:ln>
+        </p:spPr>
+        <p:style>
+          <a:lnRef idx="1">
+            <a:schemeClr val="accent1"/>
+          </a:lnRef>
+          <a:fillRef idx="3">
+            <a:schemeClr val="accent1"/>
+          </a:fillRef>
+          <a:effectRef idx="2">
+            <a:schemeClr val="accent1"/>
+          </a:effectRef>
+          <a:fontRef idx="minor">
+            <a:schemeClr val="lt1"/>
+          </a:fontRef>
+        </p:style>
+        <p:txBody>
+          <a:bodyPr rtlCol="0" anchor="ctr"/>
+          <a:lstStyle/>
+          <a:p>
+            <a:pPr algn="ctr"/>
+          </a:p>
+        </p:txBody>
+      </p:sp>
+      <p:sp>
+        <p:nvSpPr>
+          <p:cNvPr id="3" name="Rounded Rectangle 2"/>
           <p:cNvSpPr/>
           <p:nvPr/>
         </p:nvSpPr>
@@ -7285,7 +7495,7 @@
       </p:sp>
       <p:sp>
         <p:nvSpPr>
-          <p:cNvPr id="3" name="TextBox 2"/>
+          <p:cNvPr id="4" name="TextBox 3"/>
           <p:cNvSpPr txBox="1"/>
           <p:nvPr/>
         </p:nvSpPr>
@@ -7320,7 +7530,7 @@
       </p:sp>
       <p:sp>
         <p:nvSpPr>
-          <p:cNvPr id="4" name="TextBox 3"/>
+          <p:cNvPr id="5" name="TextBox 4"/>
           <p:cNvSpPr txBox="1"/>
           <p:nvPr/>
         </p:nvSpPr>
@@ -7355,7 +7565,7 @@
       </p:sp>
       <p:sp>
         <p:nvSpPr>
-          <p:cNvPr id="5" name="TextBox 4"/>
+          <p:cNvPr id="6" name="TextBox 5"/>
           <p:cNvSpPr txBox="1"/>
           <p:nvPr/>
         </p:nvSpPr>
@@ -7390,7 +7600,7 @@
       </p:sp>
       <p:sp>
         <p:nvSpPr>
-          <p:cNvPr id="6" name="Rounded Rectangle 5"/>
+          <p:cNvPr id="7" name="Rounded Rectangle 6"/>
           <p:cNvSpPr/>
           <p:nvPr/>
         </p:nvSpPr>
@@ -7437,7 +7647,7 @@
       </p:sp>
       <p:sp>
         <p:nvSpPr>
-          <p:cNvPr id="7" name="TextBox 6"/>
+          <p:cNvPr id="8" name="TextBox 7"/>
           <p:cNvSpPr txBox="1"/>
           <p:nvPr/>
         </p:nvSpPr>
@@ -7472,7 +7682,7 @@
       </p:sp>
       <p:sp>
         <p:nvSpPr>
-          <p:cNvPr id="8" name="Rectangle 7"/>
+          <p:cNvPr id="9" name="Rectangle 8"/>
           <p:cNvSpPr/>
           <p:nvPr/>
         </p:nvSpPr>
@@ -7515,7 +7725,7 @@
       </p:sp>
       <p:sp>
         <p:nvSpPr>
-          <p:cNvPr id="9" name="Rounded Rectangle 8"/>
+          <p:cNvPr id="10" name="Rounded Rectangle 9"/>
           <p:cNvSpPr/>
           <p:nvPr/>
         </p:nvSpPr>
@@ -7560,7 +7770,7 @@
       </p:sp>
       <p:sp>
         <p:nvSpPr>
-          <p:cNvPr id="10" name="TextBox 9"/>
+          <p:cNvPr id="11" name="TextBox 10"/>
           <p:cNvSpPr txBox="1"/>
           <p:nvPr/>
         </p:nvSpPr>
@@ -7595,7 +7805,7 @@
       </p:sp>
       <p:sp>
         <p:nvSpPr>
-          <p:cNvPr id="11" name="TextBox 10"/>
+          <p:cNvPr id="12" name="TextBox 11"/>
           <p:cNvSpPr txBox="1"/>
           <p:nvPr/>
         </p:nvSpPr>
@@ -7630,7 +7840,7 @@
       </p:sp>
       <p:sp>
         <p:nvSpPr>
-          <p:cNvPr id="12" name="Rounded Rectangle 11"/>
+          <p:cNvPr id="13" name="Rounded Rectangle 12"/>
           <p:cNvSpPr/>
           <p:nvPr/>
         </p:nvSpPr>
@@ -7675,7 +7885,7 @@
       </p:sp>
       <p:sp>
         <p:nvSpPr>
-          <p:cNvPr id="13" name="TextBox 12"/>
+          <p:cNvPr id="14" name="TextBox 13"/>
           <p:cNvSpPr txBox="1"/>
           <p:nvPr/>
         </p:nvSpPr>
@@ -7710,7 +7920,7 @@
       </p:sp>
       <p:sp>
         <p:nvSpPr>
-          <p:cNvPr id="14" name="TextBox 13"/>
+          <p:cNvPr id="15" name="TextBox 14"/>
           <p:cNvSpPr txBox="1"/>
           <p:nvPr/>
         </p:nvSpPr>
@@ -7745,7 +7955,7 @@
       </p:sp>
       <p:sp>
         <p:nvSpPr>
-          <p:cNvPr id="15" name="Rounded Rectangle 14"/>
+          <p:cNvPr id="16" name="Rounded Rectangle 15"/>
           <p:cNvSpPr/>
           <p:nvPr/>
         </p:nvSpPr>
@@ -7790,7 +8000,7 @@
       </p:sp>
       <p:sp>
         <p:nvSpPr>
-          <p:cNvPr id="16" name="TextBox 15"/>
+          <p:cNvPr id="17" name="TextBox 16"/>
           <p:cNvSpPr txBox="1"/>
           <p:nvPr/>
         </p:nvSpPr>
@@ -7825,7 +8035,7 @@
       </p:sp>
       <p:sp>
         <p:nvSpPr>
-          <p:cNvPr id="17" name="TextBox 16"/>
+          <p:cNvPr id="18" name="TextBox 17"/>
           <p:cNvSpPr txBox="1"/>
           <p:nvPr/>
         </p:nvSpPr>
@@ -7860,7 +8070,7 @@
       </p:sp>
       <p:sp>
         <p:nvSpPr>
-          <p:cNvPr id="18" name="Rounded Rectangle 17"/>
+          <p:cNvPr id="19" name="Rounded Rectangle 18"/>
           <p:cNvSpPr/>
           <p:nvPr/>
         </p:nvSpPr>
@@ -7907,7 +8117,7 @@
       </p:sp>
       <p:sp>
         <p:nvSpPr>
-          <p:cNvPr id="19" name="TextBox 18"/>
+          <p:cNvPr id="20" name="TextBox 19"/>
           <p:cNvSpPr txBox="1"/>
           <p:nvPr/>
         </p:nvSpPr>
@@ -7942,7 +8152,7 @@
       </p:sp>
       <p:sp>
         <p:nvSpPr>
-          <p:cNvPr id="20" name="Rectangle 19"/>
+          <p:cNvPr id="21" name="Rectangle 20"/>
           <p:cNvSpPr/>
           <p:nvPr/>
         </p:nvSpPr>
@@ -7985,7 +8195,7 @@
       </p:sp>
       <p:sp>
         <p:nvSpPr>
-          <p:cNvPr id="21" name="Rounded Rectangle 20"/>
+          <p:cNvPr id="22" name="Rounded Rectangle 21"/>
           <p:cNvSpPr/>
           <p:nvPr/>
         </p:nvSpPr>
@@ -8030,7 +8240,7 @@
       </p:sp>
       <p:sp>
         <p:nvSpPr>
-          <p:cNvPr id="22" name="TextBox 21"/>
+          <p:cNvPr id="23" name="TextBox 22"/>
           <p:cNvSpPr txBox="1"/>
           <p:nvPr/>
         </p:nvSpPr>
@@ -8065,7 +8275,7 @@
       </p:sp>
       <p:sp>
         <p:nvSpPr>
-          <p:cNvPr id="23" name="TextBox 22"/>
+          <p:cNvPr id="24" name="TextBox 23"/>
           <p:cNvSpPr txBox="1"/>
           <p:nvPr/>
         </p:nvSpPr>
@@ -8100,7 +8310,7 @@
       </p:sp>
       <p:sp>
         <p:nvSpPr>
-          <p:cNvPr id="24" name="Rounded Rectangle 23"/>
+          <p:cNvPr id="25" name="Rounded Rectangle 24"/>
           <p:cNvSpPr/>
           <p:nvPr/>
         </p:nvSpPr>
@@ -8145,7 +8355,7 @@
       </p:sp>
       <p:sp>
         <p:nvSpPr>
-          <p:cNvPr id="25" name="TextBox 24"/>
+          <p:cNvPr id="26" name="TextBox 25"/>
           <p:cNvSpPr txBox="1"/>
           <p:nvPr/>
         </p:nvSpPr>
@@ -8180,7 +8390,7 @@
       </p:sp>
       <p:sp>
         <p:nvSpPr>
-          <p:cNvPr id="26" name="TextBox 25"/>
+          <p:cNvPr id="27" name="TextBox 26"/>
           <p:cNvSpPr txBox="1"/>
           <p:nvPr/>
         </p:nvSpPr>
@@ -8215,7 +8425,7 @@
       </p:sp>
       <p:sp>
         <p:nvSpPr>
-          <p:cNvPr id="27" name="Rounded Rectangle 26"/>
+          <p:cNvPr id="28" name="Rounded Rectangle 27"/>
           <p:cNvSpPr/>
           <p:nvPr/>
         </p:nvSpPr>
@@ -8260,7 +8470,7 @@
       </p:sp>
       <p:sp>
         <p:nvSpPr>
-          <p:cNvPr id="28" name="TextBox 27"/>
+          <p:cNvPr id="29" name="TextBox 28"/>
           <p:cNvSpPr txBox="1"/>
           <p:nvPr/>
         </p:nvSpPr>
@@ -8295,7 +8505,7 @@
       </p:sp>
       <p:sp>
         <p:nvSpPr>
-          <p:cNvPr id="29" name="TextBox 28"/>
+          <p:cNvPr id="30" name="TextBox 29"/>
           <p:cNvSpPr txBox="1"/>
           <p:nvPr/>
         </p:nvSpPr>
@@ -8330,7 +8540,7 @@
       </p:sp>
       <p:sp>
         <p:nvSpPr>
-          <p:cNvPr id="30" name="Rounded Rectangle 29"/>
+          <p:cNvPr id="31" name="Rounded Rectangle 30"/>
           <p:cNvSpPr/>
           <p:nvPr/>
         </p:nvSpPr>
@@ -8377,7 +8587,7 @@
       </p:sp>
       <p:sp>
         <p:nvSpPr>
-          <p:cNvPr id="31" name="TextBox 30"/>
+          <p:cNvPr id="32" name="TextBox 31"/>
           <p:cNvSpPr txBox="1"/>
           <p:nvPr/>
         </p:nvSpPr>
@@ -8412,7 +8622,7 @@
       </p:sp>
       <p:sp>
         <p:nvSpPr>
-          <p:cNvPr id="32" name="Rectangle 31"/>
+          <p:cNvPr id="33" name="Rectangle 32"/>
           <p:cNvSpPr/>
           <p:nvPr/>
         </p:nvSpPr>
@@ -8455,7 +8665,7 @@
       </p:sp>
       <p:sp>
         <p:nvSpPr>
-          <p:cNvPr id="33" name="Rounded Rectangle 32"/>
+          <p:cNvPr id="34" name="Rounded Rectangle 33"/>
           <p:cNvSpPr/>
           <p:nvPr/>
         </p:nvSpPr>
@@ -8500,7 +8710,7 @@
       </p:sp>
       <p:sp>
         <p:nvSpPr>
-          <p:cNvPr id="34" name="TextBox 33"/>
+          <p:cNvPr id="35" name="TextBox 34"/>
           <p:cNvSpPr txBox="1"/>
           <p:nvPr/>
         </p:nvSpPr>
@@ -8535,7 +8745,7 @@
       </p:sp>
       <p:sp>
         <p:nvSpPr>
-          <p:cNvPr id="35" name="TextBox 34"/>
+          <p:cNvPr id="36" name="TextBox 35"/>
           <p:cNvSpPr txBox="1"/>
           <p:nvPr/>
         </p:nvSpPr>
@@ -8570,7 +8780,7 @@
       </p:sp>
       <p:sp>
         <p:nvSpPr>
-          <p:cNvPr id="36" name="Rounded Rectangle 35"/>
+          <p:cNvPr id="37" name="Rounded Rectangle 36"/>
           <p:cNvSpPr/>
           <p:nvPr/>
         </p:nvSpPr>
@@ -8615,7 +8825,7 @@
       </p:sp>
       <p:sp>
         <p:nvSpPr>
-          <p:cNvPr id="37" name="TextBox 36"/>
+          <p:cNvPr id="38" name="TextBox 37"/>
           <p:cNvSpPr txBox="1"/>
           <p:nvPr/>
         </p:nvSpPr>
@@ -8650,7 +8860,7 @@
       </p:sp>
       <p:sp>
         <p:nvSpPr>
-          <p:cNvPr id="38" name="TextBox 37"/>
+          <p:cNvPr id="39" name="TextBox 38"/>
           <p:cNvSpPr txBox="1"/>
           <p:nvPr/>
         </p:nvSpPr>
@@ -8685,7 +8895,7 @@
       </p:sp>
       <p:sp>
         <p:nvSpPr>
-          <p:cNvPr id="39" name="Rounded Rectangle 38"/>
+          <p:cNvPr id="40" name="Rounded Rectangle 39"/>
           <p:cNvSpPr/>
           <p:nvPr/>
         </p:nvSpPr>
@@ -8730,7 +8940,7 @@
       </p:sp>
       <p:sp>
         <p:nvSpPr>
-          <p:cNvPr id="40" name="TextBox 39"/>
+          <p:cNvPr id="41" name="TextBox 40"/>
           <p:cNvSpPr txBox="1"/>
           <p:nvPr/>
         </p:nvSpPr>
@@ -8765,7 +8975,7 @@
       </p:sp>
       <p:sp>
         <p:nvSpPr>
-          <p:cNvPr id="41" name="TextBox 40"/>
+          <p:cNvPr id="42" name="TextBox 41"/>
           <p:cNvSpPr txBox="1"/>
           <p:nvPr/>
         </p:nvSpPr>
@@ -8800,7 +9010,7 @@
       </p:sp>
       <p:sp>
         <p:nvSpPr>
-          <p:cNvPr id="42" name="TextBox 41"/>
+          <p:cNvPr id="43" name="TextBox 42"/>
           <p:cNvSpPr txBox="1"/>
           <p:nvPr/>
         </p:nvSpPr>
@@ -8835,7 +9045,7 @@
       </p:sp>
       <p:sp>
         <p:nvSpPr>
-          <p:cNvPr id="43" name="TextBox 42"/>
+          <p:cNvPr id="44" name="TextBox 43"/>
           <p:cNvSpPr txBox="1"/>
           <p:nvPr/>
         </p:nvSpPr>
@@ -8879,14 +9089,6 @@
 <file path=ppt/slides/slide7.xml><?xml version="1.0" encoding="utf-8"?>
 <p:sld xmlns:a="http://schemas.openxmlformats.org/drawingml/2006/main" xmlns:p="http://schemas.openxmlformats.org/presentationml/2006/main" xmlns:r="http://schemas.openxmlformats.org/officeDocument/2006/relationships">
   <p:cSld>
-    <p:bg>
-      <p:bgPr>
-        <a:solidFill>
-          <a:srgbClr val="0A0E27"/>
-        </a:solidFill>
-        <a:effectLst/>
-      </p:bgPr>
-    </p:bg>
     <p:spTree>
       <p:nvGrpSpPr>
         <p:cNvPr id="1" name=""/>
@@ -8896,7 +9098,50 @@
       <p:grpSpPr/>
       <p:sp>
         <p:nvSpPr>
-          <p:cNvPr id="2" name="Rounded Rectangle 1"/>
+          <p:cNvPr id="2" name="Rectangle 1"/>
+          <p:cNvSpPr/>
+          <p:nvPr/>
+        </p:nvSpPr>
+        <p:spPr>
+          <a:xfrm>
+            <a:off x="0" y="0"/>
+            <a:ext cx="12191695" cy="6858000"/>
+          </a:xfrm>
+          <a:prstGeom prst="rect">
+            <a:avLst/>
+          </a:prstGeom>
+          <a:solidFill>
+            <a:srgbClr val="0A0E27"/>
+          </a:solidFill>
+          <a:ln>
+            <a:noFill/>
+          </a:ln>
+        </p:spPr>
+        <p:style>
+          <a:lnRef idx="1">
+            <a:schemeClr val="accent1"/>
+          </a:lnRef>
+          <a:fillRef idx="3">
+            <a:schemeClr val="accent1"/>
+          </a:fillRef>
+          <a:effectRef idx="2">
+            <a:schemeClr val="accent1"/>
+          </a:effectRef>
+          <a:fontRef idx="minor">
+            <a:schemeClr val="lt1"/>
+          </a:fontRef>
+        </p:style>
+        <p:txBody>
+          <a:bodyPr rtlCol="0" anchor="ctr"/>
+          <a:lstStyle/>
+          <a:p>
+            <a:pPr algn="ctr"/>
+          </a:p>
+        </p:txBody>
+      </p:sp>
+      <p:sp>
+        <p:nvSpPr>
+          <p:cNvPr id="3" name="Rounded Rectangle 2"/>
           <p:cNvSpPr/>
           <p:nvPr/>
         </p:nvSpPr>
@@ -8943,7 +9188,7 @@
       </p:sp>
       <p:sp>
         <p:nvSpPr>
-          <p:cNvPr id="3" name="TextBox 2"/>
+          <p:cNvPr id="4" name="TextBox 3"/>
           <p:cNvSpPr txBox="1"/>
           <p:nvPr/>
         </p:nvSpPr>
@@ -8978,7 +9223,7 @@
       </p:sp>
       <p:sp>
         <p:nvSpPr>
-          <p:cNvPr id="4" name="TextBox 3"/>
+          <p:cNvPr id="5" name="TextBox 4"/>
           <p:cNvSpPr txBox="1"/>
           <p:nvPr/>
         </p:nvSpPr>
@@ -9013,7 +9258,7 @@
       </p:sp>
       <p:sp>
         <p:nvSpPr>
-          <p:cNvPr id="5" name="Rounded Rectangle 4"/>
+          <p:cNvPr id="6" name="Rounded Rectangle 5"/>
           <p:cNvSpPr/>
           <p:nvPr/>
         </p:nvSpPr>
@@ -9058,7 +9303,7 @@
       </p:sp>
       <p:sp>
         <p:nvSpPr>
-          <p:cNvPr id="6" name="Rounded Rectangle 5"/>
+          <p:cNvPr id="7" name="Rounded Rectangle 6"/>
           <p:cNvSpPr/>
           <p:nvPr/>
         </p:nvSpPr>
@@ -9103,7 +9348,7 @@
       </p:sp>
       <p:sp>
         <p:nvSpPr>
-          <p:cNvPr id="7" name="TextBox 6"/>
+          <p:cNvPr id="8" name="TextBox 7"/>
           <p:cNvSpPr txBox="1"/>
           <p:nvPr/>
         </p:nvSpPr>
@@ -9138,7 +9383,7 @@
       </p:sp>
       <p:sp>
         <p:nvSpPr>
-          <p:cNvPr id="8" name="TextBox 7"/>
+          <p:cNvPr id="9" name="TextBox 8"/>
           <p:cNvSpPr txBox="1"/>
           <p:nvPr/>
         </p:nvSpPr>
@@ -9173,7 +9418,7 @@
       </p:sp>
       <p:sp>
         <p:nvSpPr>
-          <p:cNvPr id="9" name="Rounded Rectangle 8"/>
+          <p:cNvPr id="10" name="Rounded Rectangle 9"/>
           <p:cNvSpPr/>
           <p:nvPr/>
         </p:nvSpPr>
@@ -9218,7 +9463,7 @@
       </p:sp>
       <p:sp>
         <p:nvSpPr>
-          <p:cNvPr id="10" name="Rounded Rectangle 9"/>
+          <p:cNvPr id="11" name="Rounded Rectangle 10"/>
           <p:cNvSpPr/>
           <p:nvPr/>
         </p:nvSpPr>
@@ -9263,7 +9508,7 @@
       </p:sp>
       <p:sp>
         <p:nvSpPr>
-          <p:cNvPr id="11" name="TextBox 10"/>
+          <p:cNvPr id="12" name="TextBox 11"/>
           <p:cNvSpPr txBox="1"/>
           <p:nvPr/>
         </p:nvSpPr>
@@ -9298,7 +9543,7 @@
       </p:sp>
       <p:sp>
         <p:nvSpPr>
-          <p:cNvPr id="12" name="TextBox 11"/>
+          <p:cNvPr id="13" name="TextBox 12"/>
           <p:cNvSpPr txBox="1"/>
           <p:nvPr/>
         </p:nvSpPr>
@@ -9333,7 +9578,7 @@
       </p:sp>
       <p:sp>
         <p:nvSpPr>
-          <p:cNvPr id="13" name="Rounded Rectangle 12"/>
+          <p:cNvPr id="14" name="Rounded Rectangle 13"/>
           <p:cNvSpPr/>
           <p:nvPr/>
         </p:nvSpPr>
@@ -9378,7 +9623,7 @@
       </p:sp>
       <p:sp>
         <p:nvSpPr>
-          <p:cNvPr id="14" name="Rounded Rectangle 13"/>
+          <p:cNvPr id="15" name="Rounded Rectangle 14"/>
           <p:cNvSpPr/>
           <p:nvPr/>
         </p:nvSpPr>
@@ -9423,7 +9668,7 @@
       </p:sp>
       <p:sp>
         <p:nvSpPr>
-          <p:cNvPr id="15" name="TextBox 14"/>
+          <p:cNvPr id="16" name="TextBox 15"/>
           <p:cNvSpPr txBox="1"/>
           <p:nvPr/>
         </p:nvSpPr>
@@ -9458,7 +9703,7 @@
       </p:sp>
       <p:sp>
         <p:nvSpPr>
-          <p:cNvPr id="16" name="Rounded Rectangle 15"/>
+          <p:cNvPr id="17" name="Rounded Rectangle 16"/>
           <p:cNvSpPr/>
           <p:nvPr/>
         </p:nvSpPr>
@@ -9505,7 +9750,7 @@
       </p:sp>
       <p:sp>
         <p:nvSpPr>
-          <p:cNvPr id="17" name="TextBox 16"/>
+          <p:cNvPr id="18" name="TextBox 17"/>
           <p:cNvSpPr txBox="1"/>
           <p:nvPr/>
         </p:nvSpPr>
@@ -9540,7 +9785,7 @@
       </p:sp>
       <p:sp>
         <p:nvSpPr>
-          <p:cNvPr id="18" name="TextBox 17"/>
+          <p:cNvPr id="19" name="TextBox 18"/>
           <p:cNvSpPr txBox="1"/>
           <p:nvPr/>
         </p:nvSpPr>
@@ -9575,7 +9820,7 @@
       </p:sp>
       <p:sp>
         <p:nvSpPr>
-          <p:cNvPr id="19" name="TextBox 18"/>
+          <p:cNvPr id="20" name="TextBox 19"/>
           <p:cNvSpPr txBox="1"/>
           <p:nvPr/>
         </p:nvSpPr>
@@ -9610,7 +9855,7 @@
       </p:sp>
       <p:sp>
         <p:nvSpPr>
-          <p:cNvPr id="20" name="TextBox 19"/>
+          <p:cNvPr id="21" name="TextBox 20"/>
           <p:cNvSpPr txBox="1"/>
           <p:nvPr/>
         </p:nvSpPr>
@@ -9645,7 +9890,7 @@
       </p:sp>
       <p:sp>
         <p:nvSpPr>
-          <p:cNvPr id="21" name="TextBox 20"/>
+          <p:cNvPr id="22" name="TextBox 21"/>
           <p:cNvSpPr txBox="1"/>
           <p:nvPr/>
         </p:nvSpPr>
@@ -9680,7 +9925,7 @@
       </p:sp>
       <p:sp>
         <p:nvSpPr>
-          <p:cNvPr id="22" name="TextBox 21"/>
+          <p:cNvPr id="23" name="TextBox 22"/>
           <p:cNvSpPr txBox="1"/>
           <p:nvPr/>
         </p:nvSpPr>
@@ -9715,7 +9960,7 @@
       </p:sp>
       <p:sp>
         <p:nvSpPr>
-          <p:cNvPr id="23" name="TextBox 22"/>
+          <p:cNvPr id="24" name="TextBox 23"/>
           <p:cNvSpPr txBox="1"/>
           <p:nvPr/>
         </p:nvSpPr>
@@ -9750,7 +9995,7 @@
       </p:sp>
       <p:sp>
         <p:nvSpPr>
-          <p:cNvPr id="24" name="TextBox 23"/>
+          <p:cNvPr id="25" name="TextBox 24"/>
           <p:cNvSpPr txBox="1"/>
           <p:nvPr/>
         </p:nvSpPr>
@@ -9785,7 +10030,7 @@
       </p:sp>
       <p:sp>
         <p:nvSpPr>
-          <p:cNvPr id="25" name="Rounded Rectangle 24"/>
+          <p:cNvPr id="26" name="Rounded Rectangle 25"/>
           <p:cNvSpPr/>
           <p:nvPr/>
         </p:nvSpPr>
@@ -9830,7 +10075,7 @@
       </p:sp>
       <p:sp>
         <p:nvSpPr>
-          <p:cNvPr id="26" name="Rounded Rectangle 25"/>
+          <p:cNvPr id="27" name="Rounded Rectangle 26"/>
           <p:cNvSpPr/>
           <p:nvPr/>
         </p:nvSpPr>
@@ -9875,7 +10120,7 @@
       </p:sp>
       <p:sp>
         <p:nvSpPr>
-          <p:cNvPr id="27" name="TextBox 26"/>
+          <p:cNvPr id="28" name="TextBox 27"/>
           <p:cNvSpPr txBox="1"/>
           <p:nvPr/>
         </p:nvSpPr>
@@ -9910,7 +10155,7 @@
       </p:sp>
       <p:sp>
         <p:nvSpPr>
-          <p:cNvPr id="28" name="Rounded Rectangle 27"/>
+          <p:cNvPr id="29" name="Rounded Rectangle 28"/>
           <p:cNvSpPr/>
           <p:nvPr/>
         </p:nvSpPr>
@@ -9957,7 +10202,7 @@
       </p:sp>
       <p:sp>
         <p:nvSpPr>
-          <p:cNvPr id="29" name="TextBox 28"/>
+          <p:cNvPr id="30" name="TextBox 29"/>
           <p:cNvSpPr txBox="1"/>
           <p:nvPr/>
         </p:nvSpPr>
@@ -9992,7 +10237,7 @@
       </p:sp>
       <p:pic>
         <p:nvPicPr>
-          <p:cNvPr id="30" name="Picture 29" descr="b0f2e749292c.png"/>
+          <p:cNvPr id="31" name="Picture 30" descr="b0f2e749292c.png"/>
           <p:cNvPicPr>
             <a:picLocks noChangeAspect="1"/>
           </p:cNvPicPr>
@@ -10016,7 +10261,7 @@
       </p:pic>
       <p:sp>
         <p:nvSpPr>
-          <p:cNvPr id="31" name="Rounded Rectangle 30"/>
+          <p:cNvPr id="32" name="Rounded Rectangle 31"/>
           <p:cNvSpPr/>
           <p:nvPr/>
         </p:nvSpPr>
@@ -10063,7 +10308,7 @@
       </p:sp>
       <p:sp>
         <p:nvSpPr>
-          <p:cNvPr id="32" name="TextBox 31"/>
+          <p:cNvPr id="33" name="TextBox 32"/>
           <p:cNvSpPr txBox="1"/>
           <p:nvPr/>
         </p:nvSpPr>
@@ -10098,7 +10343,7 @@
       </p:sp>
       <p:sp>
         <p:nvSpPr>
-          <p:cNvPr id="33" name="TextBox 32"/>
+          <p:cNvPr id="34" name="TextBox 33"/>
           <p:cNvSpPr txBox="1"/>
           <p:nvPr/>
         </p:nvSpPr>
@@ -10153,7 +10398,7 @@
       </p:sp>
       <p:sp>
         <p:nvSpPr>
-          <p:cNvPr id="34" name="TextBox 33"/>
+          <p:cNvPr id="35" name="TextBox 34"/>
           <p:cNvSpPr txBox="1"/>
           <p:nvPr/>
         </p:nvSpPr>
@@ -10188,7 +10433,7 @@
       </p:sp>
       <p:sp>
         <p:nvSpPr>
-          <p:cNvPr id="35" name="TextBox 34"/>
+          <p:cNvPr id="36" name="TextBox 35"/>
           <p:cNvSpPr txBox="1"/>
           <p:nvPr/>
         </p:nvSpPr>
@@ -10232,14 +10477,6 @@
 <file path=ppt/slides/slide8.xml><?xml version="1.0" encoding="utf-8"?>
 <p:sld xmlns:a="http://schemas.openxmlformats.org/drawingml/2006/main" xmlns:p="http://schemas.openxmlformats.org/presentationml/2006/main" xmlns:r="http://schemas.openxmlformats.org/officeDocument/2006/relationships">
   <p:cSld>
-    <p:bg>
-      <p:bgPr>
-        <a:solidFill>
-          <a:srgbClr val="0A0E27"/>
-        </a:solidFill>
-        <a:effectLst/>
-      </p:bgPr>
-    </p:bg>
     <p:spTree>
       <p:nvGrpSpPr>
         <p:cNvPr id="1" name=""/>
@@ -10249,7 +10486,50 @@
       <p:grpSpPr/>
       <p:sp>
         <p:nvSpPr>
-          <p:cNvPr id="2" name="Rounded Rectangle 1"/>
+          <p:cNvPr id="2" name="Rectangle 1"/>
+          <p:cNvSpPr/>
+          <p:nvPr/>
+        </p:nvSpPr>
+        <p:spPr>
+          <a:xfrm>
+            <a:off x="0" y="0"/>
+            <a:ext cx="12191695" cy="6858000"/>
+          </a:xfrm>
+          <a:prstGeom prst="rect">
+            <a:avLst/>
+          </a:prstGeom>
+          <a:solidFill>
+            <a:srgbClr val="0A0E27"/>
+          </a:solidFill>
+          <a:ln>
+            <a:noFill/>
+          </a:ln>
+        </p:spPr>
+        <p:style>
+          <a:lnRef idx="1">
+            <a:schemeClr val="accent1"/>
+          </a:lnRef>
+          <a:fillRef idx="3">
+            <a:schemeClr val="accent1"/>
+          </a:fillRef>
+          <a:effectRef idx="2">
+            <a:schemeClr val="accent1"/>
+          </a:effectRef>
+          <a:fontRef idx="minor">
+            <a:schemeClr val="lt1"/>
+          </a:fontRef>
+        </p:style>
+        <p:txBody>
+          <a:bodyPr rtlCol="0" anchor="ctr"/>
+          <a:lstStyle/>
+          <a:p>
+            <a:pPr algn="ctr"/>
+          </a:p>
+        </p:txBody>
+      </p:sp>
+      <p:sp>
+        <p:nvSpPr>
+          <p:cNvPr id="3" name="Rounded Rectangle 2"/>
           <p:cNvSpPr/>
           <p:nvPr/>
         </p:nvSpPr>
@@ -10296,7 +10576,7 @@
       </p:sp>
       <p:sp>
         <p:nvSpPr>
-          <p:cNvPr id="3" name="TextBox 2"/>
+          <p:cNvPr id="4" name="TextBox 3"/>
           <p:cNvSpPr txBox="1"/>
           <p:nvPr/>
         </p:nvSpPr>
@@ -10331,7 +10611,7 @@
       </p:sp>
       <p:sp>
         <p:nvSpPr>
-          <p:cNvPr id="4" name="TextBox 3"/>
+          <p:cNvPr id="5" name="TextBox 4"/>
           <p:cNvSpPr txBox="1"/>
           <p:nvPr/>
         </p:nvSpPr>
@@ -10366,7 +10646,7 @@
       </p:sp>
       <p:sp>
         <p:nvSpPr>
-          <p:cNvPr id="5" name="TextBox 4"/>
+          <p:cNvPr id="6" name="TextBox 5"/>
           <p:cNvSpPr txBox="1"/>
           <p:nvPr/>
         </p:nvSpPr>
@@ -10401,7 +10681,7 @@
       </p:sp>
       <p:sp>
         <p:nvSpPr>
-          <p:cNvPr id="6" name="Rectangle 5"/>
+          <p:cNvPr id="7" name="Rectangle 6"/>
           <p:cNvSpPr/>
           <p:nvPr/>
         </p:nvSpPr>
@@ -10444,7 +10724,7 @@
       </p:sp>
       <p:sp>
         <p:nvSpPr>
-          <p:cNvPr id="7" name="TextBox 6"/>
+          <p:cNvPr id="8" name="TextBox 7"/>
           <p:cNvSpPr txBox="1"/>
           <p:nvPr/>
         </p:nvSpPr>
@@ -10479,7 +10759,7 @@
       </p:sp>
       <p:sp>
         <p:nvSpPr>
-          <p:cNvPr id="8" name="TextBox 7"/>
+          <p:cNvPr id="9" name="TextBox 8"/>
           <p:cNvSpPr txBox="1"/>
           <p:nvPr/>
         </p:nvSpPr>
@@ -10514,7 +10794,7 @@
       </p:sp>
       <p:sp>
         <p:nvSpPr>
-          <p:cNvPr id="9" name="TextBox 8"/>
+          <p:cNvPr id="10" name="TextBox 9"/>
           <p:cNvSpPr txBox="1"/>
           <p:nvPr/>
         </p:nvSpPr>

--- a/examples/dify-intro/deck.pptx
+++ b/examples/dify-intro/deck.pptx
@@ -4740,8 +4740,8 @@
         </p:nvSpPr>
         <p:spPr>
           <a:xfrm>
-            <a:off x="8496087" y="1085850"/>
-            <a:ext cx="2781230" cy="400050"/>
+            <a:off x="8496087" y="914400"/>
+            <a:ext cx="2781230" cy="352425"/>
           </a:xfrm>
           <a:prstGeom prst="rect">
             <a:avLst/>
@@ -4775,7 +4775,7 @@
         </p:nvSpPr>
         <p:spPr>
           <a:xfrm>
-            <a:off x="8496087" y="1638300"/>
+            <a:off x="8496087" y="1457325"/>
             <a:ext cx="304792" cy="304800"/>
           </a:xfrm>
           <a:prstGeom prst="roundRect">
@@ -4820,7 +4820,7 @@
         </p:nvSpPr>
         <p:spPr>
           <a:xfrm>
-            <a:off x="8496087" y="1695450"/>
+            <a:off x="8496087" y="1514475"/>
             <a:ext cx="304792" cy="209550"/>
           </a:xfrm>
           <a:prstGeom prst="rect">
@@ -4855,7 +4855,7 @@
         </p:nvSpPr>
         <p:spPr>
           <a:xfrm>
-            <a:off x="8953276" y="1676400"/>
+            <a:off x="8953276" y="1495425"/>
             <a:ext cx="2324041" cy="228600"/>
           </a:xfrm>
           <a:prstGeom prst="rect">
@@ -4890,7 +4890,7 @@
         </p:nvSpPr>
         <p:spPr>
           <a:xfrm>
-            <a:off x="8953276" y="1905000"/>
+            <a:off x="8953276" y="1724025"/>
             <a:ext cx="2324041" cy="209550"/>
           </a:xfrm>
           <a:prstGeom prst="rect">
@@ -4925,7 +4925,7 @@
         </p:nvSpPr>
         <p:spPr>
           <a:xfrm>
-            <a:off x="8496087" y="2400300"/>
+            <a:off x="8496087" y="2219325"/>
             <a:ext cx="304792" cy="304800"/>
           </a:xfrm>
           <a:prstGeom prst="roundRect">
@@ -4970,7 +4970,7 @@
         </p:nvSpPr>
         <p:spPr>
           <a:xfrm>
-            <a:off x="8496087" y="2457450"/>
+            <a:off x="8496087" y="2276475"/>
             <a:ext cx="304792" cy="209550"/>
           </a:xfrm>
           <a:prstGeom prst="rect">
@@ -5005,7 +5005,7 @@
         </p:nvSpPr>
         <p:spPr>
           <a:xfrm>
-            <a:off x="8953276" y="2438400"/>
+            <a:off x="8953276" y="2257425"/>
             <a:ext cx="2324041" cy="228600"/>
           </a:xfrm>
           <a:prstGeom prst="rect">
@@ -5040,7 +5040,7 @@
         </p:nvSpPr>
         <p:spPr>
           <a:xfrm>
-            <a:off x="8953276" y="2667000"/>
+            <a:off x="8953276" y="2486025"/>
             <a:ext cx="2324041" cy="209550"/>
           </a:xfrm>
           <a:prstGeom prst="rect">
@@ -5075,7 +5075,7 @@
         </p:nvSpPr>
         <p:spPr>
           <a:xfrm>
-            <a:off x="8496087" y="3162300"/>
+            <a:off x="8496087" y="2981325"/>
             <a:ext cx="304792" cy="304800"/>
           </a:xfrm>
           <a:prstGeom prst="roundRect">
@@ -5120,7 +5120,7 @@
         </p:nvSpPr>
         <p:spPr>
           <a:xfrm>
-            <a:off x="8496087" y="3219450"/>
+            <a:off x="8496087" y="3038475"/>
             <a:ext cx="304792" cy="209550"/>
           </a:xfrm>
           <a:prstGeom prst="rect">
@@ -5155,7 +5155,7 @@
         </p:nvSpPr>
         <p:spPr>
           <a:xfrm>
-            <a:off x="8953276" y="3200400"/>
+            <a:off x="8953276" y="3019425"/>
             <a:ext cx="2324041" cy="228600"/>
           </a:xfrm>
           <a:prstGeom prst="rect">
@@ -5190,7 +5190,7 @@
         </p:nvSpPr>
         <p:spPr>
           <a:xfrm>
-            <a:off x="8953276" y="3429000"/>
+            <a:off x="8953276" y="3248025"/>
             <a:ext cx="2324041" cy="209550"/>
           </a:xfrm>
           <a:prstGeom prst="rect">
@@ -5225,7 +5225,7 @@
         </p:nvSpPr>
         <p:spPr>
           <a:xfrm>
-            <a:off x="8496087" y="3924300"/>
+            <a:off x="8496087" y="3743325"/>
             <a:ext cx="304792" cy="304800"/>
           </a:xfrm>
           <a:prstGeom prst="roundRect">
@@ -5270,7 +5270,7 @@
         </p:nvSpPr>
         <p:spPr>
           <a:xfrm>
-            <a:off x="8496087" y="3981450"/>
+            <a:off x="8496087" y="3800475"/>
             <a:ext cx="304792" cy="209550"/>
           </a:xfrm>
           <a:prstGeom prst="rect">
@@ -5305,7 +5305,7 @@
         </p:nvSpPr>
         <p:spPr>
           <a:xfrm>
-            <a:off x="8953276" y="3962400"/>
+            <a:off x="8953276" y="3781425"/>
             <a:ext cx="2324041" cy="228600"/>
           </a:xfrm>
           <a:prstGeom prst="rect">
@@ -5340,7 +5340,7 @@
         </p:nvSpPr>
         <p:spPr>
           <a:xfrm>
-            <a:off x="8953276" y="4191000"/>
+            <a:off x="8953276" y="4010025"/>
             <a:ext cx="2324041" cy="209550"/>
           </a:xfrm>
           <a:prstGeom prst="rect">
@@ -7717,8 +7717,8 @@
         </p:nvSpPr>
         <p:spPr>
           <a:xfrm>
-            <a:off x="914377" y="3562350"/>
-            <a:ext cx="2819329" cy="400050"/>
+            <a:off x="914377" y="3390900"/>
+            <a:ext cx="2819329" cy="352425"/>
           </a:xfrm>
           <a:prstGeom prst="rect">
             <a:avLst/>
@@ -7752,8 +7752,8 @@
         </p:nvSpPr>
         <p:spPr>
           <a:xfrm>
-            <a:off x="800079" y="4076700"/>
-            <a:ext cx="38099" cy="381000"/>
+            <a:off x="800079" y="3933825"/>
+            <a:ext cx="38099" cy="485775"/>
           </a:xfrm>
           <a:prstGeom prst="rect">
             <a:avLst/>
@@ -7795,7 +7795,7 @@
         </p:nvSpPr>
         <p:spPr>
           <a:xfrm>
-            <a:off x="914377" y="4114800"/>
+            <a:off x="914377" y="3933825"/>
             <a:ext cx="304792" cy="304800"/>
           </a:xfrm>
           <a:prstGeom prst="roundRect">
@@ -7840,7 +7840,7 @@
         </p:nvSpPr>
         <p:spPr>
           <a:xfrm>
-            <a:off x="914377" y="4171950"/>
+            <a:off x="914377" y="3990975"/>
             <a:ext cx="304792" cy="209550"/>
           </a:xfrm>
           <a:prstGeom prst="rect">
@@ -7875,7 +7875,7 @@
         </p:nvSpPr>
         <p:spPr>
           <a:xfrm>
-            <a:off x="1371565" y="4152900"/>
+            <a:off x="1371565" y="3971925"/>
             <a:ext cx="2362140" cy="228600"/>
           </a:xfrm>
           <a:prstGeom prst="rect">
@@ -7910,7 +7910,7 @@
         </p:nvSpPr>
         <p:spPr>
           <a:xfrm>
-            <a:off x="914377" y="4572000"/>
+            <a:off x="914377" y="4457700"/>
             <a:ext cx="304792" cy="304800"/>
           </a:xfrm>
           <a:prstGeom prst="roundRect">
@@ -7955,7 +7955,7 @@
         </p:nvSpPr>
         <p:spPr>
           <a:xfrm>
-            <a:off x="914377" y="4629150"/>
+            <a:off x="914377" y="4514850"/>
             <a:ext cx="304792" cy="209550"/>
           </a:xfrm>
           <a:prstGeom prst="rect">
@@ -7990,7 +7990,7 @@
         </p:nvSpPr>
         <p:spPr>
           <a:xfrm>
-            <a:off x="1371565" y="4610100"/>
+            <a:off x="1371565" y="4495800"/>
             <a:ext cx="2362140" cy="228600"/>
           </a:xfrm>
           <a:prstGeom prst="rect">
@@ -8025,7 +8025,7 @@
         </p:nvSpPr>
         <p:spPr>
           <a:xfrm>
-            <a:off x="914377" y="5029200"/>
+            <a:off x="914377" y="4981575"/>
             <a:ext cx="304792" cy="304800"/>
           </a:xfrm>
           <a:prstGeom prst="roundRect">
@@ -8070,7 +8070,7 @@
         </p:nvSpPr>
         <p:spPr>
           <a:xfrm>
-            <a:off x="914377" y="5086350"/>
+            <a:off x="914377" y="5038725"/>
             <a:ext cx="304792" cy="209550"/>
           </a:xfrm>
           <a:prstGeom prst="rect">
@@ -8105,7 +8105,7 @@
         </p:nvSpPr>
         <p:spPr>
           <a:xfrm>
-            <a:off x="1371565" y="5067300"/>
+            <a:off x="1371565" y="5019675"/>
             <a:ext cx="2362140" cy="228600"/>
           </a:xfrm>
           <a:prstGeom prst="rect">
@@ -8191,8 +8191,8 @@
         </p:nvSpPr>
         <p:spPr>
           <a:xfrm>
-            <a:off x="4686182" y="3562350"/>
-            <a:ext cx="2819329" cy="400050"/>
+            <a:off x="4686182" y="3390900"/>
+            <a:ext cx="2819329" cy="352425"/>
           </a:xfrm>
           <a:prstGeom prst="rect">
             <a:avLst/>
@@ -8226,8 +8226,8 @@
         </p:nvSpPr>
         <p:spPr>
           <a:xfrm>
-            <a:off x="4571885" y="4076700"/>
-            <a:ext cx="38099" cy="381000"/>
+            <a:off x="4571885" y="3933825"/>
+            <a:ext cx="38099" cy="485775"/>
           </a:xfrm>
           <a:prstGeom prst="rect">
             <a:avLst/>
@@ -8269,7 +8269,7 @@
         </p:nvSpPr>
         <p:spPr>
           <a:xfrm>
-            <a:off x="4686182" y="4114800"/>
+            <a:off x="4686182" y="3933825"/>
             <a:ext cx="304792" cy="304800"/>
           </a:xfrm>
           <a:prstGeom prst="roundRect">
@@ -8314,7 +8314,7 @@
         </p:nvSpPr>
         <p:spPr>
           <a:xfrm>
-            <a:off x="4686182" y="4171950"/>
+            <a:off x="4686182" y="3990975"/>
             <a:ext cx="304792" cy="209550"/>
           </a:xfrm>
           <a:prstGeom prst="rect">
@@ -8349,7 +8349,7 @@
         </p:nvSpPr>
         <p:spPr>
           <a:xfrm>
-            <a:off x="5143371" y="4152900"/>
+            <a:off x="5143371" y="3971925"/>
             <a:ext cx="2362140" cy="228600"/>
           </a:xfrm>
           <a:prstGeom prst="rect">
@@ -8384,7 +8384,7 @@
         </p:nvSpPr>
         <p:spPr>
           <a:xfrm>
-            <a:off x="4686182" y="4572000"/>
+            <a:off x="4686182" y="4457700"/>
             <a:ext cx="304792" cy="304800"/>
           </a:xfrm>
           <a:prstGeom prst="roundRect">
@@ -8429,7 +8429,7 @@
         </p:nvSpPr>
         <p:spPr>
           <a:xfrm>
-            <a:off x="4686182" y="4629150"/>
+            <a:off x="4686182" y="4514850"/>
             <a:ext cx="304792" cy="209550"/>
           </a:xfrm>
           <a:prstGeom prst="rect">
@@ -8464,7 +8464,7 @@
         </p:nvSpPr>
         <p:spPr>
           <a:xfrm>
-            <a:off x="5143371" y="4610100"/>
+            <a:off x="5143371" y="4495800"/>
             <a:ext cx="2362140" cy="228600"/>
           </a:xfrm>
           <a:prstGeom prst="rect">
@@ -8499,7 +8499,7 @@
         </p:nvSpPr>
         <p:spPr>
           <a:xfrm>
-            <a:off x="4686182" y="5029200"/>
+            <a:off x="4686182" y="4981575"/>
             <a:ext cx="304792" cy="304800"/>
           </a:xfrm>
           <a:prstGeom prst="roundRect">
@@ -8544,7 +8544,7 @@
         </p:nvSpPr>
         <p:spPr>
           <a:xfrm>
-            <a:off x="4686182" y="5086350"/>
+            <a:off x="4686182" y="5038725"/>
             <a:ext cx="304792" cy="209550"/>
           </a:xfrm>
           <a:prstGeom prst="rect">
@@ -8579,7 +8579,7 @@
         </p:nvSpPr>
         <p:spPr>
           <a:xfrm>
-            <a:off x="5143371" y="5067300"/>
+            <a:off x="5143371" y="5019675"/>
             <a:ext cx="2362140" cy="228600"/>
           </a:xfrm>
           <a:prstGeom prst="rect">
@@ -8665,8 +8665,8 @@
         </p:nvSpPr>
         <p:spPr>
           <a:xfrm>
-            <a:off x="8457988" y="3562350"/>
-            <a:ext cx="2819329" cy="400050"/>
+            <a:off x="8457988" y="3390900"/>
+            <a:ext cx="2819329" cy="352425"/>
           </a:xfrm>
           <a:prstGeom prst="rect">
             <a:avLst/>
@@ -8700,8 +8700,8 @@
         </p:nvSpPr>
         <p:spPr>
           <a:xfrm>
-            <a:off x="8343691" y="4076700"/>
-            <a:ext cx="38099" cy="381000"/>
+            <a:off x="8343691" y="3933825"/>
+            <a:ext cx="38099" cy="485775"/>
           </a:xfrm>
           <a:prstGeom prst="rect">
             <a:avLst/>
@@ -8743,7 +8743,7 @@
         </p:nvSpPr>
         <p:spPr>
           <a:xfrm>
-            <a:off x="8457988" y="4114800"/>
+            <a:off x="8457988" y="3933825"/>
             <a:ext cx="304792" cy="304800"/>
           </a:xfrm>
           <a:prstGeom prst="roundRect">
@@ -8788,7 +8788,7 @@
         </p:nvSpPr>
         <p:spPr>
           <a:xfrm>
-            <a:off x="8457988" y="4171950"/>
+            <a:off x="8457988" y="3990975"/>
             <a:ext cx="304792" cy="209550"/>
           </a:xfrm>
           <a:prstGeom prst="rect">
@@ -8823,7 +8823,7 @@
         </p:nvSpPr>
         <p:spPr>
           <a:xfrm>
-            <a:off x="8915176" y="4152900"/>
+            <a:off x="8915176" y="3971925"/>
             <a:ext cx="2362140" cy="228600"/>
           </a:xfrm>
           <a:prstGeom prst="rect">
@@ -8858,7 +8858,7 @@
         </p:nvSpPr>
         <p:spPr>
           <a:xfrm>
-            <a:off x="8457988" y="4572000"/>
+            <a:off x="8457988" y="4457700"/>
             <a:ext cx="304792" cy="304800"/>
           </a:xfrm>
           <a:prstGeom prst="roundRect">
@@ -8903,7 +8903,7 @@
         </p:nvSpPr>
         <p:spPr>
           <a:xfrm>
-            <a:off x="8457988" y="4629150"/>
+            <a:off x="8457988" y="4514850"/>
             <a:ext cx="304792" cy="209550"/>
           </a:xfrm>
           <a:prstGeom prst="rect">
@@ -8938,7 +8938,7 @@
         </p:nvSpPr>
         <p:spPr>
           <a:xfrm>
-            <a:off x="8915176" y="4610100"/>
+            <a:off x="8915176" y="4495800"/>
             <a:ext cx="2362140" cy="228600"/>
           </a:xfrm>
           <a:prstGeom prst="rect">
@@ -8973,7 +8973,7 @@
         </p:nvSpPr>
         <p:spPr>
           <a:xfrm>
-            <a:off x="8457988" y="5029200"/>
+            <a:off x="8457988" y="4981575"/>
             <a:ext cx="304792" cy="304800"/>
           </a:xfrm>
           <a:prstGeom prst="roundRect">
@@ -9018,7 +9018,7 @@
         </p:nvSpPr>
         <p:spPr>
           <a:xfrm>
-            <a:off x="8457988" y="5086350"/>
+            <a:off x="8457988" y="5038725"/>
             <a:ext cx="304792" cy="209550"/>
           </a:xfrm>
           <a:prstGeom prst="rect">
@@ -9053,7 +9053,7 @@
         </p:nvSpPr>
         <p:spPr>
           <a:xfrm>
-            <a:off x="8915176" y="5067300"/>
+            <a:off x="8915176" y="5019675"/>
             <a:ext cx="2362140" cy="228600"/>
           </a:xfrm>
           <a:prstGeom prst="rect">

--- a/examples/dify-intro/deck.pptx
+++ b/examples/dify-intro/deck.pptx
@@ -6435,16 +6435,16 @@
         </p:nvSpPr>
         <p:spPr>
           <a:xfrm>
-            <a:off x="3619409" y="1295400"/>
-            <a:ext cx="4952876" cy="3314700"/>
-          </a:xfrm>
-          <a:prstGeom prst="rect">
-            <a:avLst/>
-          </a:prstGeom>
-          <a:noFill/>
-        </p:spPr>
-        <p:txBody>
-          <a:bodyPr wrap="square" lIns="0" rIns="0" tIns="0" bIns="0">
+            <a:off x="3619409" y="1200150"/>
+            <a:ext cx="4952876" cy="3409950"/>
+          </a:xfrm>
+          <a:prstGeom prst="rect">
+            <a:avLst/>
+          </a:prstGeom>
+          <a:noFill/>
+        </p:spPr>
+        <p:txBody>
+          <a:bodyPr wrap="square" lIns="0" rIns="0" tIns="0" bIns="0" anchor="ctr">
             <a:spAutoFit/>
           </a:bodyPr>
           <a:lstStyle/>
@@ -7561,7 +7561,7 @@
         </p:nvSpPr>
         <p:spPr>
           <a:xfrm>
-            <a:off x="914377" y="952500"/>
+            <a:off x="914377" y="1152525"/>
             <a:ext cx="10362940" cy="209550"/>
           </a:xfrm>
           <a:prstGeom prst="rect">
@@ -7596,7 +7596,7 @@
         </p:nvSpPr>
         <p:spPr>
           <a:xfrm>
-            <a:off x="914377" y="1276350"/>
+            <a:off x="914377" y="1476375"/>
             <a:ext cx="10362940" cy="495300"/>
           </a:xfrm>
           <a:prstGeom prst="rect">
@@ -7631,7 +7631,7 @@
         </p:nvSpPr>
         <p:spPr>
           <a:xfrm>
-            <a:off x="914377" y="1943100"/>
+            <a:off x="914377" y="2143125"/>
             <a:ext cx="10362940" cy="285750"/>
           </a:xfrm>
           <a:prstGeom prst="rect">
@@ -7753,7 +7753,7 @@
         <p:spPr>
           <a:xfrm>
             <a:off x="800079" y="3933825"/>
-            <a:ext cx="38099" cy="485775"/>
+            <a:ext cx="38099" cy="304800"/>
           </a:xfrm>
           <a:prstGeom prst="rect">
             <a:avLst/>
@@ -8227,7 +8227,7 @@
         <p:spPr>
           <a:xfrm>
             <a:off x="4571885" y="3933825"/>
-            <a:ext cx="38099" cy="485775"/>
+            <a:ext cx="38099" cy="304800"/>
           </a:xfrm>
           <a:prstGeom prst="rect">
             <a:avLst/>
@@ -8701,7 +8701,7 @@
         <p:spPr>
           <a:xfrm>
             <a:off x="8343691" y="3933825"/>
-            <a:ext cx="38099" cy="485775"/>
+            <a:ext cx="38099" cy="304800"/>
           </a:xfrm>
           <a:prstGeom prst="rect">
             <a:avLst/>

--- a/examples/dify-intro/deck.pptx
+++ b/examples/dify-intro/deck.pptx
@@ -3340,7 +3340,7 @@
         <p:spPr>
           <a:xfrm>
             <a:off x="914377" y="2686050"/>
-            <a:ext cx="1238219" cy="209550"/>
+            <a:ext cx="1447763" cy="209550"/>
           </a:xfrm>
           <a:prstGeom prst="roundRect">
             <a:avLst>
@@ -3391,7 +3391,7 @@
         <p:spPr>
           <a:xfrm>
             <a:off x="914377" y="2714625"/>
-            <a:ext cx="1238219" cy="171450"/>
+            <a:ext cx="1447763" cy="171450"/>
           </a:xfrm>
           <a:prstGeom prst="rect">
             <a:avLst/>
@@ -3406,7 +3406,7 @@
           <a:p>
             <a:pPr algn="ctr"/>
             <a:r>
-              <a:rPr sz="825" b="1" i="0" spc="50">
+              <a:rPr sz="900" b="1" i="0" spc="100">
                 <a:solidFill>
                   <a:srgbClr val="FFFFFF"/>
                 </a:solidFill>
@@ -5601,7 +5601,7 @@
           <a:noFill/>
         </p:spPr>
         <p:txBody>
-          <a:bodyPr wrap="none" lIns="0" rIns="0" tIns="0" bIns="0">
+          <a:bodyPr wrap="square" lIns="0" rIns="0" tIns="0" bIns="0">
             <a:spAutoFit/>
           </a:bodyPr>
           <a:lstStyle/>
@@ -5835,7 +5835,7 @@
           <a:noFill/>
         </p:spPr>
         <p:txBody>
-          <a:bodyPr wrap="none" lIns="0" rIns="0" tIns="0" bIns="0">
+          <a:bodyPr wrap="square" lIns="0" rIns="0" tIns="0" bIns="0">
             <a:spAutoFit/>
           </a:bodyPr>
           <a:lstStyle/>
@@ -6069,7 +6069,7 @@
           <a:noFill/>
         </p:spPr>
         <p:txBody>
-          <a:bodyPr wrap="none" lIns="0" rIns="0" tIns="0" bIns="0">
+          <a:bodyPr wrap="square" lIns="0" rIns="0" tIns="0" bIns="0">
             <a:spAutoFit/>
           </a:bodyPr>
           <a:lstStyle/>
@@ -6678,7 +6678,7 @@
           <a:noFill/>
         </p:spPr>
         <p:txBody>
-          <a:bodyPr wrap="none" lIns="0" rIns="0" tIns="0" bIns="0">
+          <a:bodyPr wrap="square" lIns="0" rIns="0" tIns="0" bIns="0">
             <a:spAutoFit/>
           </a:bodyPr>
           <a:lstStyle/>
@@ -6877,7 +6877,7 @@
           <a:noFill/>
         </p:spPr>
         <p:txBody>
-          <a:bodyPr wrap="none" lIns="0" rIns="0" tIns="0" bIns="0">
+          <a:bodyPr wrap="square" lIns="0" rIns="0" tIns="0" bIns="0">
             <a:spAutoFit/>
           </a:bodyPr>
           <a:lstStyle/>
@@ -7076,7 +7076,7 @@
           <a:noFill/>
         </p:spPr>
         <p:txBody>
-          <a:bodyPr wrap="none" lIns="0" rIns="0" tIns="0" bIns="0">
+          <a:bodyPr wrap="square" lIns="0" rIns="0" tIns="0" bIns="0">
             <a:spAutoFit/>
           </a:bodyPr>
           <a:lstStyle/>
@@ -7275,7 +7275,7 @@
           <a:noFill/>
         </p:spPr>
         <p:txBody>
-          <a:bodyPr wrap="none" lIns="0" rIns="0" tIns="0" bIns="0">
+          <a:bodyPr wrap="square" lIns="0" rIns="0" tIns="0" bIns="0">
             <a:spAutoFit/>
           </a:bodyPr>
           <a:lstStyle/>
@@ -10327,33 +10327,95 @@
           </a:p>
         </p:txBody>
       </p:sp>
-      <p:pic>
-        <p:nvPicPr>
-          <p:cNvPr id="31" name="Picture 30" descr="b0f2e749292c.png"/>
-          <p:cNvPicPr>
-            <a:picLocks noChangeAspect="1"/>
-          </p:cNvPicPr>
-          <p:nvPr/>
-        </p:nvPicPr>
-        <p:blipFill>
-          <a:blip r:embed="rId2"/>
-          <a:stretch>
-            <a:fillRect/>
-          </a:stretch>
-        </p:blipFill>
+      <p:sp>
+        <p:nvSpPr>
+          <p:cNvPr id="31" name="Rounded Rectangle 30"/>
+          <p:cNvSpPr/>
+          <p:nvPr/>
+        </p:nvSpPr>
         <p:spPr>
           <a:xfrm>
             <a:off x="914377" y="4114800"/>
             <a:ext cx="2781230" cy="1466850"/>
           </a:xfrm>
-          <a:prstGeom prst="rect">
-            <a:avLst/>
-          </a:prstGeom>
-        </p:spPr>
-      </p:pic>
-      <p:sp>
-        <p:nvSpPr>
-          <p:cNvPr id="32" name="Rounded Rectangle 31"/>
+          <a:prstGeom prst="roundRect">
+            <a:avLst>
+              <a:gd name="adj" fmla="val 5000"/>
+            </a:avLst>
+          </a:prstGeom>
+          <a:solidFill>
+            <a:srgbClr val="7C5CFF">
+              <a:alpha val="10000"/>
+            </a:srgbClr>
+          </a:solidFill>
+          <a:ln w="12700">
+            <a:solidFill>
+              <a:srgbClr val="7C5CFF">
+                <a:alpha val="40000"/>
+              </a:srgbClr>
+            </a:solidFill>
+          </a:ln>
+        </p:spPr>
+        <p:style>
+          <a:lnRef idx="1">
+            <a:schemeClr val="accent1"/>
+          </a:lnRef>
+          <a:fillRef idx="3">
+            <a:schemeClr val="accent1"/>
+          </a:fillRef>
+          <a:effectRef idx="2">
+            <a:schemeClr val="accent1"/>
+          </a:effectRef>
+          <a:fontRef idx="minor">
+            <a:schemeClr val="lt1"/>
+          </a:fontRef>
+        </p:style>
+        <p:txBody>
+          <a:bodyPr rtlCol="0" anchor="ctr"/>
+          <a:lstStyle/>
+          <a:p>
+            <a:pPr algn="ctr"/>
+          </a:p>
+        </p:txBody>
+      </p:sp>
+      <p:sp>
+        <p:nvSpPr>
+          <p:cNvPr id="32" name="TextBox 31"/>
+          <p:cNvSpPr txBox="1"/>
+          <p:nvPr/>
+        </p:nvSpPr>
+        <p:spPr>
+          <a:xfrm>
+            <a:off x="914377" y="4733925"/>
+            <a:ext cx="2781230" cy="228600"/>
+          </a:xfrm>
+          <a:prstGeom prst="rect">
+            <a:avLst/>
+          </a:prstGeom>
+          <a:noFill/>
+        </p:spPr>
+        <p:txBody>
+          <a:bodyPr wrap="square" lIns="0" rIns="0" tIns="0" bIns="0">
+            <a:spAutoFit/>
+          </a:bodyPr>
+          <a:lstStyle/>
+          <a:p>
+            <a:pPr algn="ctr"/>
+            <a:r>
+              <a:rPr sz="1050" b="0" i="0">
+                <a:solidFill>
+                  <a:srgbClr val="BCC4D8"/>
+                </a:solidFill>
+                <a:latin typeface="PingFang SC"/>
+              </a:rPr>
+              <a:t>Workflow 编排画布概念图</a:t>
+            </a:r>
+          </a:p>
+        </p:txBody>
+      </p:sp>
+      <p:sp>
+        <p:nvSpPr>
+          <p:cNvPr id="33" name="Rounded Rectangle 32"/>
           <p:cNvSpPr/>
           <p:nvPr/>
         </p:nvSpPr>
@@ -10404,7 +10466,7 @@
       </p:sp>
       <p:sp>
         <p:nvSpPr>
-          <p:cNvPr id="33" name="TextBox 32"/>
+          <p:cNvPr id="34" name="TextBox 33"/>
           <p:cNvSpPr txBox="1"/>
           <p:nvPr/>
         </p:nvSpPr>
@@ -10439,7 +10501,7 @@
       </p:sp>
       <p:sp>
         <p:nvSpPr>
-          <p:cNvPr id="34" name="TextBox 33"/>
+          <p:cNvPr id="35" name="TextBox 34"/>
           <p:cNvSpPr txBox="1"/>
           <p:nvPr/>
         </p:nvSpPr>
@@ -10494,7 +10556,7 @@
       </p:sp>
       <p:sp>
         <p:nvSpPr>
-          <p:cNvPr id="35" name="TextBox 34"/>
+          <p:cNvPr id="36" name="TextBox 35"/>
           <p:cNvSpPr txBox="1"/>
           <p:nvPr/>
         </p:nvSpPr>
@@ -10529,7 +10591,7 @@
       </p:sp>
       <p:sp>
         <p:nvSpPr>
-          <p:cNvPr id="36" name="TextBox 35"/>
+          <p:cNvPr id="37" name="TextBox 36"/>
           <p:cNvSpPr txBox="1"/>
           <p:nvPr/>
         </p:nvSpPr>

--- a/examples/dify-intro/deck.pptx
+++ b/examples/dify-intro/deck.pptx
@@ -3109,12 +3109,20 @@
           <a:prstGeom prst="rect">
             <a:avLst/>
           </a:prstGeom>
-          <a:solidFill>
-            <a:srgbClr val="0A0E27"/>
-          </a:solidFill>
           <a:ln>
             <a:noFill/>
           </a:ln>
+          <a:gradFill>
+            <a:gsLst>
+              <a:gs pos="0">
+                <a:srgbClr val="0a0e27"/>
+              </a:gs>
+              <a:gs pos="100000">
+                <a:srgbClr val="1a1f3a"/>
+              </a:gs>
+            </a:gsLst>
+            <a:lin ang="5400000" scaled="1"/>
+          </a:gradFill>
         </p:spPr>
         <p:style>
           <a:lnRef idx="1">
@@ -3340,7 +3348,7 @@
         <p:spPr>
           <a:xfrm>
             <a:off x="914377" y="2686050"/>
-            <a:ext cx="1447763" cy="209550"/>
+            <a:ext cx="1447763" cy="228600"/>
           </a:xfrm>
           <a:prstGeom prst="roundRect">
             <a:avLst>
@@ -3807,12 +3815,20 @@
           <a:prstGeom prst="rect">
             <a:avLst/>
           </a:prstGeom>
-          <a:solidFill>
-            <a:srgbClr val="0A0E27"/>
-          </a:solidFill>
           <a:ln>
             <a:noFill/>
           </a:ln>
+          <a:gradFill>
+            <a:gsLst>
+              <a:gs pos="0">
+                <a:srgbClr val="0a0e27"/>
+              </a:gs>
+              <a:gs pos="100000">
+                <a:srgbClr val="1a1f3a"/>
+              </a:gs>
+            </a:gsLst>
+            <a:lin ang="5400000" scaled="1"/>
+          </a:gradFill>
         </p:spPr>
         <p:style>
           <a:lnRef idx="1">
@@ -4476,12 +4492,20 @@
           <a:prstGeom prst="rect">
             <a:avLst/>
           </a:prstGeom>
-          <a:solidFill>
-            <a:srgbClr val="0A0E27"/>
-          </a:solidFill>
           <a:ln>
             <a:noFill/>
           </a:ln>
+          <a:gradFill>
+            <a:gsLst>
+              <a:gs pos="0">
+                <a:srgbClr val="0a0e27"/>
+              </a:gs>
+              <a:gs pos="100000">
+                <a:srgbClr val="1a1f3a"/>
+              </a:gs>
+            </a:gsLst>
+            <a:lin ang="5400000" scaled="1"/>
+          </a:gradFill>
         </p:spPr>
         <p:style>
           <a:lnRef idx="1">
@@ -5469,12 +5493,20 @@
           <a:prstGeom prst="rect">
             <a:avLst/>
           </a:prstGeom>
-          <a:solidFill>
-            <a:srgbClr val="0A0E27"/>
-          </a:solidFill>
           <a:ln>
             <a:noFill/>
           </a:ln>
+          <a:gradFill>
+            <a:gsLst>
+              <a:gs pos="0">
+                <a:srgbClr val="0a0e27"/>
+              </a:gs>
+              <a:gs pos="100000">
+                <a:srgbClr val="1a1f3a"/>
+              </a:gs>
+            </a:gsLst>
+            <a:lin ang="5400000" scaled="1"/>
+          </a:gradFill>
         </p:spPr>
         <p:style>
           <a:lnRef idx="1">
@@ -6302,12 +6334,20 @@
           <a:prstGeom prst="rect">
             <a:avLst/>
           </a:prstGeom>
-          <a:solidFill>
-            <a:srgbClr val="0A0E27"/>
-          </a:solidFill>
           <a:ln>
             <a:noFill/>
           </a:ln>
+          <a:gradFill>
+            <a:gsLst>
+              <a:gs pos="0">
+                <a:srgbClr val="0a0e27"/>
+              </a:gs>
+              <a:gs pos="100000">
+                <a:srgbClr val="1a1f3a"/>
+              </a:gs>
+            </a:gsLst>
+            <a:lin ang="5400000" scaled="1"/>
+          </a:gradFill>
         </p:spPr>
         <p:style>
           <a:lnRef idx="1">
@@ -7473,12 +7513,20 @@
           <a:prstGeom prst="rect">
             <a:avLst/>
           </a:prstGeom>
-          <a:solidFill>
-            <a:srgbClr val="0A0E27"/>
-          </a:solidFill>
           <a:ln>
             <a:noFill/>
           </a:ln>
+          <a:gradFill>
+            <a:gsLst>
+              <a:gs pos="0">
+                <a:srgbClr val="0a0e27"/>
+              </a:gs>
+              <a:gs pos="100000">
+                <a:srgbClr val="1a1f3a"/>
+              </a:gs>
+            </a:gsLst>
+            <a:lin ang="5400000" scaled="1"/>
+          </a:gradFill>
         </p:spPr>
         <p:style>
           <a:lnRef idx="1">
@@ -9182,12 +9230,20 @@
           <a:prstGeom prst="rect">
             <a:avLst/>
           </a:prstGeom>
-          <a:solidFill>
-            <a:srgbClr val="0A0E27"/>
-          </a:solidFill>
           <a:ln>
             <a:noFill/>
           </a:ln>
+          <a:gradFill>
+            <a:gsLst>
+              <a:gs pos="0">
+                <a:srgbClr val="0a0e27"/>
+              </a:gs>
+              <a:gs pos="100000">
+                <a:srgbClr val="1a1f3a"/>
+              </a:gs>
+            </a:gsLst>
+            <a:lin ang="5400000" scaled="1"/>
+          </a:gradFill>
         </p:spPr>
         <p:style>
           <a:lnRef idx="1">
@@ -10656,12 +10712,20 @@
           <a:prstGeom prst="rect">
             <a:avLst/>
           </a:prstGeom>
-          <a:solidFill>
-            <a:srgbClr val="0A0E27"/>
-          </a:solidFill>
           <a:ln>
             <a:noFill/>
           </a:ln>
+          <a:gradFill>
+            <a:gsLst>
+              <a:gs pos="0">
+                <a:srgbClr val="0a0e27"/>
+              </a:gs>
+              <a:gs pos="100000">
+                <a:srgbClr val="1a1f3a"/>
+              </a:gs>
+            </a:gsLst>
+            <a:lin ang="5400000" scaled="1"/>
+          </a:gradFill>
         </p:spPr>
         <p:style>
           <a:lnRef idx="1">

--- a/examples/dify-intro/deck.pptx
+++ b/examples/dify-intro/deck.pptx
@@ -3109,12 +3109,20 @@
           <a:prstGeom prst="rect">
             <a:avLst/>
           </a:prstGeom>
-          <a:solidFill>
-            <a:srgbClr val="0A0E27"/>
-          </a:solidFill>
           <a:ln>
             <a:noFill/>
           </a:ln>
+          <a:gradFill>
+            <a:gsLst>
+              <a:gs pos="0">
+                <a:srgbClr val="F5F0E8"/>
+              </a:gs>
+              <a:gs pos="100000">
+                <a:srgbClr val="EDE6D8"/>
+              </a:gs>
+            </a:gsLst>
+            <a:lin ang="5400000" scaled="1"/>
+          </a:gradFill>
         </p:spPr>
         <p:style>
           <a:lnRef idx="1">
@@ -3151,18 +3159,18 @@
           </a:xfrm>
           <a:prstGeom prst="roundRect">
             <a:avLst>
-              <a:gd name="adj" fmla="val 4844"/>
+              <a:gd name="adj" fmla="val 3875"/>
             </a:avLst>
           </a:prstGeom>
           <a:solidFill>
             <a:srgbClr val="FFFFFF">
-              <a:alpha val="6000"/>
+              <a:alpha val="82000"/>
             </a:srgbClr>
           </a:solidFill>
           <a:ln w="12700">
             <a:solidFill>
-              <a:srgbClr val="FFFFFF">
-                <a:alpha val="12000"/>
+              <a:srgbClr val="1A1815">
+                <a:alpha val="7000"/>
               </a:srgbClr>
             </a:solidFill>
           </a:ln>
@@ -3216,7 +3224,7 @@
               <a:rPr sz="11925" b="1" i="0" spc="600">
                 <a:latin typeface="PingFang SC"/>
                 <a:solidFill>
-                  <a:srgbClr val="7c5cff">
+                  <a:srgbClr val="B8654A">
                     <a:alpha val="6999"/>
                   </a:srgbClr>
                 </a:solidFill>
@@ -3235,7 +3243,7 @@
         <p:spPr>
           <a:xfrm>
             <a:off x="914377" y="952500"/>
-            <a:ext cx="10362940" cy="209550"/>
+            <a:ext cx="10362940" cy="190500"/>
           </a:xfrm>
           <a:prstGeom prst="rect">
             <a:avLst/>
@@ -3250,9 +3258,9 @@
           <a:p>
             <a:pPr algn="l"/>
             <a:r>
-              <a:rPr sz="1200" b="1" i="0" spc="300">
-                <a:solidFill>
-                  <a:srgbClr val="00D4FF"/>
+              <a:rPr sz="1050" b="1" i="0" spc="300">
+                <a:solidFill>
+                  <a:srgbClr val="D4956B"/>
                 </a:solidFill>
                 <a:latin typeface="PingFang SC"/>
               </a:rPr>
@@ -3269,8 +3277,8 @@
         </p:nvSpPr>
         <p:spPr>
           <a:xfrm>
-            <a:off x="914377" y="1276350"/>
-            <a:ext cx="10362940" cy="685800"/>
+            <a:off x="914377" y="1257300"/>
+            <a:ext cx="10362940" cy="638175"/>
           </a:xfrm>
           <a:prstGeom prst="rect">
             <a:avLst/>
@@ -3285,9 +3293,9 @@
           <a:p>
             <a:pPr algn="l"/>
             <a:r>
-              <a:rPr sz="4500" b="1" i="0">
-                <a:solidFill>
-                  <a:srgbClr val="FFFFFF"/>
+              <a:rPr sz="4200" b="1" i="0">
+                <a:solidFill>
+                  <a:srgbClr val="1A1815"/>
                 </a:solidFill>
                 <a:latin typeface="PingFang SC"/>
               </a:rPr>
@@ -3304,8 +3312,8 @@
         </p:nvSpPr>
         <p:spPr>
           <a:xfrm>
-            <a:off x="914377" y="1962150"/>
-            <a:ext cx="10362940" cy="685800"/>
+            <a:off x="914377" y="1895475"/>
+            <a:ext cx="10362940" cy="638175"/>
           </a:xfrm>
           <a:prstGeom prst="rect">
             <a:avLst/>
@@ -3320,9 +3328,9 @@
           <a:p>
             <a:pPr algn="l"/>
             <a:r>
-              <a:rPr sz="4500" b="1" i="0">
-                <a:solidFill>
-                  <a:srgbClr val="FFFFFF"/>
+              <a:rPr sz="4200" b="1" i="0">
+                <a:solidFill>
+                  <a:srgbClr val="1A1815"/>
                 </a:solidFill>
                 <a:latin typeface="PingFang SC"/>
               </a:rPr>
@@ -3339,8 +3347,8 @@
         </p:nvSpPr>
         <p:spPr>
           <a:xfrm>
-            <a:off x="914377" y="2686050"/>
-            <a:ext cx="1447763" cy="209550"/>
+            <a:off x="914377" y="2571750"/>
+            <a:ext cx="1447763" cy="228600"/>
           </a:xfrm>
           <a:prstGeom prst="roundRect">
             <a:avLst>
@@ -3348,13 +3356,13 @@
             </a:avLst>
           </a:prstGeom>
           <a:solidFill>
-            <a:srgbClr val="7C5CFF">
+            <a:srgbClr val="B8654A">
               <a:alpha val="22000"/>
             </a:srgbClr>
           </a:solidFill>
           <a:ln w="6350">
             <a:solidFill>
-              <a:srgbClr val="7C5CFF">
+              <a:srgbClr val="B8654A">
                 <a:alpha val="55000"/>
               </a:srgbClr>
             </a:solidFill>
@@ -3390,7 +3398,7 @@
         </p:nvSpPr>
         <p:spPr>
           <a:xfrm>
-            <a:off x="914377" y="2714625"/>
+            <a:off x="914377" y="2600325"/>
             <a:ext cx="1447763" cy="171450"/>
           </a:xfrm>
           <a:prstGeom prst="rect">
@@ -3425,8 +3433,8 @@
         </p:nvSpPr>
         <p:spPr>
           <a:xfrm>
-            <a:off x="914377" y="3162300"/>
-            <a:ext cx="10362940" cy="400050"/>
+            <a:off x="914377" y="3048000"/>
+            <a:ext cx="10362940" cy="371475"/>
           </a:xfrm>
           <a:prstGeom prst="rect">
             <a:avLst/>
@@ -3441,9 +3449,9 @@
           <a:p>
             <a:pPr algn="l"/>
             <a:r>
-              <a:rPr sz="2250" b="0" i="0">
-                <a:solidFill>
-                  <a:srgbClr val="BCC4D8"/>
+              <a:rPr sz="2100" b="0" i="0">
+                <a:solidFill>
+                  <a:srgbClr val="5C5548"/>
                 </a:solidFill>
                 <a:latin typeface="PingFang SC"/>
               </a:rPr>
@@ -3467,7 +3475,7 @@
             <a:avLst/>
           </a:prstGeom>
           <a:solidFill>
-            <a:srgbClr val="7C5CFF"/>
+            <a:srgbClr val="B8654A"/>
           </a:solidFill>
           <a:ln>
             <a:noFill/>
@@ -3521,7 +3529,7 @@
             <a:r>
               <a:rPr sz="900" b="0" i="0" spc="200">
                 <a:solidFill>
-                  <a:srgbClr val="6B7392"/>
+                  <a:srgbClr val="9C9588"/>
                 </a:solidFill>
                 <a:latin typeface="PingFang SC"/>
               </a:rPr>
@@ -3556,7 +3564,7 @@
             <a:r>
               <a:rPr sz="1350" b="1" i="0">
                 <a:solidFill>
-                  <a:srgbClr val="FFFFFF"/>
+                  <a:srgbClr val="1A1815"/>
                 </a:solidFill>
                 <a:latin typeface="PingFang SC"/>
               </a:rPr>
@@ -3591,7 +3599,7 @@
             <a:r>
               <a:rPr sz="900" b="0" i="0" spc="200">
                 <a:solidFill>
-                  <a:srgbClr val="6B7392"/>
+                  <a:srgbClr val="9C9588"/>
                 </a:solidFill>
                 <a:latin typeface="PingFang SC"/>
               </a:rPr>
@@ -3626,7 +3634,7 @@
             <a:r>
               <a:rPr sz="1350" b="1" i="0">
                 <a:solidFill>
-                  <a:srgbClr val="FFFFFF"/>
+                  <a:srgbClr val="1A1815"/>
                 </a:solidFill>
                 <a:latin typeface="PingFang SC"/>
               </a:rPr>
@@ -3661,7 +3669,7 @@
             <a:r>
               <a:rPr sz="900" b="0" i="0" spc="200">
                 <a:solidFill>
-                  <a:srgbClr val="6B7392"/>
+                  <a:srgbClr val="9C9588"/>
                 </a:solidFill>
                 <a:latin typeface="PingFang SC"/>
               </a:rPr>
@@ -3696,7 +3704,7 @@
             <a:r>
               <a:rPr sz="1350" b="1" i="0">
                 <a:solidFill>
-                  <a:srgbClr val="FFFFFF"/>
+                  <a:srgbClr val="1A1815"/>
                 </a:solidFill>
                 <a:latin typeface="PingFang SC"/>
               </a:rPr>
@@ -3729,9 +3737,9 @@
           <a:p>
             <a:pPr algn="l"/>
             <a:r>
-              <a:rPr sz="1050" b="0" i="0">
-                <a:solidFill>
-                  <a:srgbClr val="6B7392"/>
+              <a:rPr sz="975" b="0" i="0">
+                <a:solidFill>
+                  <a:srgbClr val="9C9588"/>
                 </a:solidFill>
                 <a:latin typeface="PingFang SC"/>
               </a:rPr>
@@ -3764,9 +3772,9 @@
           <a:p>
             <a:pPr algn="r"/>
             <a:r>
-              <a:rPr sz="1050" b="0" i="0">
-                <a:solidFill>
-                  <a:srgbClr val="6B7392"/>
+              <a:rPr sz="975" b="0" i="0">
+                <a:solidFill>
+                  <a:srgbClr val="9C9588"/>
                 </a:solidFill>
                 <a:latin typeface="SF Mono"/>
               </a:rPr>
@@ -3807,12 +3815,20 @@
           <a:prstGeom prst="rect">
             <a:avLst/>
           </a:prstGeom>
-          <a:solidFill>
-            <a:srgbClr val="0A0E27"/>
-          </a:solidFill>
           <a:ln>
             <a:noFill/>
           </a:ln>
+          <a:gradFill>
+            <a:gsLst>
+              <a:gs pos="0">
+                <a:srgbClr val="F5F0E8"/>
+              </a:gs>
+              <a:gs pos="100000">
+                <a:srgbClr val="EDE6D8"/>
+              </a:gs>
+            </a:gsLst>
+            <a:lin ang="5400000" scaled="1"/>
+          </a:gradFill>
         </p:spPr>
         <p:style>
           <a:lnRef idx="1">
@@ -3849,18 +3865,18 @@
           </a:xfrm>
           <a:prstGeom prst="roundRect">
             <a:avLst>
-              <a:gd name="adj" fmla="val 4878"/>
+              <a:gd name="adj" fmla="val 3902"/>
             </a:avLst>
           </a:prstGeom>
           <a:solidFill>
             <a:srgbClr val="FFFFFF">
-              <a:alpha val="6000"/>
+              <a:alpha val="82000"/>
             </a:srgbClr>
           </a:solidFill>
           <a:ln w="12700">
             <a:solidFill>
-              <a:srgbClr val="FFFFFF">
-                <a:alpha val="12000"/>
+              <a:srgbClr val="1A1815">
+                <a:alpha val="7000"/>
               </a:srgbClr>
             </a:solidFill>
           </a:ln>
@@ -3896,7 +3912,7 @@
         <p:spPr>
           <a:xfrm>
             <a:off x="914377" y="952500"/>
-            <a:ext cx="4705232" cy="209550"/>
+            <a:ext cx="4705232" cy="190500"/>
           </a:xfrm>
           <a:prstGeom prst="rect">
             <a:avLst/>
@@ -3911,9 +3927,9 @@
           <a:p>
             <a:pPr algn="l"/>
             <a:r>
-              <a:rPr sz="1200" b="1" i="0" spc="300">
-                <a:solidFill>
-                  <a:srgbClr val="00D4FF"/>
+              <a:rPr sz="1050" b="1" i="0" spc="300">
+                <a:solidFill>
+                  <a:srgbClr val="D4956B"/>
                 </a:solidFill>
                 <a:latin typeface="PingFang SC"/>
               </a:rPr>
@@ -3930,8 +3946,8 @@
         </p:nvSpPr>
         <p:spPr>
           <a:xfrm>
-            <a:off x="914377" y="1371600"/>
-            <a:ext cx="4705232" cy="1257300"/>
+            <a:off x="914377" y="1352550"/>
+            <a:ext cx="4705232" cy="1143000"/>
           </a:xfrm>
           <a:prstGeom prst="rect">
             <a:avLst/>
@@ -3946,9 +3962,9 @@
           <a:p>
             <a:pPr algn="l"/>
             <a:r>
-              <a:rPr sz="8250" b="1" i="0">
-                <a:solidFill>
-                  <a:srgbClr val="FFFFFF"/>
+              <a:rPr sz="7500" b="1" i="0">
+                <a:solidFill>
+                  <a:srgbClr val="1A1815"/>
                 </a:solidFill>
                 <a:latin typeface="PingFang SC"/>
               </a:rPr>
@@ -3965,8 +3981,8 @@
         </p:nvSpPr>
         <p:spPr>
           <a:xfrm>
-            <a:off x="2705032" y="2114550"/>
-            <a:ext cx="533386" cy="400050"/>
+            <a:off x="2562160" y="2019300"/>
+            <a:ext cx="504812" cy="371475"/>
           </a:xfrm>
           <a:prstGeom prst="rect">
             <a:avLst/>
@@ -3981,9 +3997,9 @@
           <a:p>
             <a:pPr algn="l"/>
             <a:r>
-              <a:rPr sz="2250" b="1" i="0">
-                <a:solidFill>
-                  <a:srgbClr val="BCC4D8"/>
+              <a:rPr sz="2100" b="1" i="0">
+                <a:solidFill>
+                  <a:srgbClr val="5C5548"/>
                 </a:solidFill>
                 <a:latin typeface="PingFang SC"/>
               </a:rPr>
@@ -4000,7 +4016,7 @@
         </p:nvSpPr>
         <p:spPr>
           <a:xfrm>
-            <a:off x="914377" y="2571750"/>
+            <a:off x="914377" y="2457450"/>
             <a:ext cx="4705232" cy="285750"/>
           </a:xfrm>
           <a:prstGeom prst="rect">
@@ -4018,7 +4034,7 @@
             <a:r>
               <a:rPr sz="1650" b="1" i="0">
                 <a:solidFill>
-                  <a:srgbClr val="22D97F"/>
+                  <a:srgbClr val="7A8B5E"/>
                 </a:solidFill>
                 <a:latin typeface="PingFang SC"/>
               </a:rPr>
@@ -4042,7 +4058,7 @@
             <a:avLst/>
           </a:prstGeom>
           <a:solidFill>
-            <a:srgbClr val="7C5CFF"/>
+            <a:srgbClr val="B8654A"/>
           </a:solidFill>
           <a:ln>
             <a:noFill/>
@@ -4094,9 +4110,9 @@
           <a:p>
             <a:pPr algn="l"/>
             <a:r>
-              <a:rPr sz="1050" b="0" i="0">
-                <a:solidFill>
-                  <a:srgbClr val="BCC4D8"/>
+              <a:rPr sz="975" b="0" i="0">
+                <a:solidFill>
+                  <a:srgbClr val="5C5548"/>
                 </a:solidFill>
                 <a:latin typeface="PingFang SC"/>
               </a:rPr>
@@ -4118,18 +4134,18 @@
           </a:xfrm>
           <a:prstGeom prst="roundRect">
             <a:avLst>
-              <a:gd name="adj" fmla="val 4878"/>
+              <a:gd name="adj" fmla="val 3902"/>
             </a:avLst>
           </a:prstGeom>
           <a:solidFill>
             <a:srgbClr val="FFFFFF">
-              <a:alpha val="6000"/>
+              <a:alpha val="82000"/>
             </a:srgbClr>
           </a:solidFill>
           <a:ln w="12700">
             <a:solidFill>
-              <a:srgbClr val="FFFFFF">
-                <a:alpha val="12000"/>
+              <a:srgbClr val="1A1815">
+                <a:alpha val="7000"/>
               </a:srgbClr>
             </a:solidFill>
           </a:ln>
@@ -4165,7 +4181,7 @@
         <p:spPr>
           <a:xfrm>
             <a:off x="6572085" y="952500"/>
-            <a:ext cx="4705232" cy="209550"/>
+            <a:ext cx="4705232" cy="190500"/>
           </a:xfrm>
           <a:prstGeom prst="rect">
             <a:avLst/>
@@ -4180,9 +4196,9 @@
           <a:p>
             <a:pPr algn="l"/>
             <a:r>
-              <a:rPr sz="1200" b="1" i="0" spc="300">
-                <a:solidFill>
-                  <a:srgbClr val="00D4FF"/>
+              <a:rPr sz="1050" b="1" i="0" spc="300">
+                <a:solidFill>
+                  <a:srgbClr val="D4956B"/>
                 </a:solidFill>
                 <a:latin typeface="PingFang SC"/>
               </a:rPr>
@@ -4199,8 +4215,8 @@
         </p:nvSpPr>
         <p:spPr>
           <a:xfrm>
-            <a:off x="6572085" y="1371600"/>
-            <a:ext cx="4705232" cy="1257300"/>
+            <a:off x="6572085" y="1352550"/>
+            <a:ext cx="4705232" cy="1143000"/>
           </a:xfrm>
           <a:prstGeom prst="rect">
             <a:avLst/>
@@ -4215,9 +4231,9 @@
           <a:p>
             <a:pPr algn="l"/>
             <a:r>
-              <a:rPr sz="8250" b="1" i="0">
-                <a:solidFill>
-                  <a:srgbClr val="FFFFFF"/>
+              <a:rPr sz="7500" b="1" i="0">
+                <a:solidFill>
+                  <a:srgbClr val="1A1815"/>
                 </a:solidFill>
                 <a:latin typeface="PingFang SC"/>
               </a:rPr>
@@ -4234,8 +4250,8 @@
         </p:nvSpPr>
         <p:spPr>
           <a:xfrm>
-            <a:off x="9505712" y="2114550"/>
-            <a:ext cx="361940" cy="400050"/>
+            <a:off x="9267593" y="2019300"/>
+            <a:ext cx="342891" cy="371475"/>
           </a:xfrm>
           <a:prstGeom prst="rect">
             <a:avLst/>
@@ -4250,9 +4266,9 @@
           <a:p>
             <a:pPr algn="l"/>
             <a:r>
-              <a:rPr sz="2250" b="1" i="0">
-                <a:solidFill>
-                  <a:srgbClr val="BCC4D8"/>
+              <a:rPr sz="2100" b="1" i="0">
+                <a:solidFill>
+                  <a:srgbClr val="5C5548"/>
                 </a:solidFill>
                 <a:latin typeface="PingFang SC"/>
               </a:rPr>
@@ -4269,7 +4285,7 @@
         </p:nvSpPr>
         <p:spPr>
           <a:xfrm>
-            <a:off x="6572085" y="2571750"/>
+            <a:off x="6572085" y="2457450"/>
             <a:ext cx="4705232" cy="285750"/>
           </a:xfrm>
           <a:prstGeom prst="rect">
@@ -4287,7 +4303,7 @@
             <a:r>
               <a:rPr sz="1650" b="1" i="0">
                 <a:solidFill>
-                  <a:srgbClr val="22D97F"/>
+                  <a:srgbClr val="7A8B5E"/>
                 </a:solidFill>
                 <a:latin typeface="PingFang SC"/>
               </a:rPr>
@@ -4311,7 +4327,7 @@
             <a:avLst/>
           </a:prstGeom>
           <a:solidFill>
-            <a:srgbClr val="7C5CFF"/>
+            <a:srgbClr val="B8654A"/>
           </a:solidFill>
           <a:ln>
             <a:noFill/>
@@ -4363,9 +4379,9 @@
           <a:p>
             <a:pPr algn="l"/>
             <a:r>
-              <a:rPr sz="1050" b="0" i="0">
-                <a:solidFill>
-                  <a:srgbClr val="BCC4D8"/>
+              <a:rPr sz="975" b="0" i="0">
+                <a:solidFill>
+                  <a:srgbClr val="5C5548"/>
                 </a:solidFill>
                 <a:latin typeface="PingFang SC"/>
               </a:rPr>
@@ -4398,9 +4414,9 @@
           <a:p>
             <a:pPr algn="l"/>
             <a:r>
-              <a:rPr sz="1050" b="0" i="0">
-                <a:solidFill>
-                  <a:srgbClr val="6B7392"/>
+              <a:rPr sz="975" b="0" i="0">
+                <a:solidFill>
+                  <a:srgbClr val="9C9588"/>
                 </a:solidFill>
                 <a:latin typeface="PingFang SC"/>
               </a:rPr>
@@ -4433,9 +4449,9 @@
           <a:p>
             <a:pPr algn="r"/>
             <a:r>
-              <a:rPr sz="1050" b="0" i="0">
-                <a:solidFill>
-                  <a:srgbClr val="6B7392"/>
+              <a:rPr sz="975" b="0" i="0">
+                <a:solidFill>
+                  <a:srgbClr val="9C9588"/>
                 </a:solidFill>
                 <a:latin typeface="SF Mono"/>
               </a:rPr>
@@ -4476,12 +4492,20 @@
           <a:prstGeom prst="rect">
             <a:avLst/>
           </a:prstGeom>
-          <a:solidFill>
-            <a:srgbClr val="0A0E27"/>
-          </a:solidFill>
           <a:ln>
             <a:noFill/>
           </a:ln>
+          <a:gradFill>
+            <a:gsLst>
+              <a:gs pos="0">
+                <a:srgbClr val="F5F0E8"/>
+              </a:gs>
+              <a:gs pos="100000">
+                <a:srgbClr val="EDE6D8"/>
+              </a:gs>
+            </a:gsLst>
+            <a:lin ang="5400000" scaled="1"/>
+          </a:gradFill>
         </p:spPr>
         <p:style>
           <a:lnRef idx="1">
@@ -4518,18 +4542,18 @@
           </a:xfrm>
           <a:prstGeom prst="roundRect">
             <a:avLst>
-              <a:gd name="adj" fmla="val 4844"/>
+              <a:gd name="adj" fmla="val 3875"/>
             </a:avLst>
           </a:prstGeom>
           <a:solidFill>
             <a:srgbClr val="FFFFFF">
-              <a:alpha val="6000"/>
+              <a:alpha val="82000"/>
             </a:srgbClr>
           </a:solidFill>
           <a:ln w="12700">
             <a:solidFill>
-              <a:srgbClr val="FFFFFF">
-                <a:alpha val="12000"/>
+              <a:srgbClr val="1A1815">
+                <a:alpha val="7000"/>
               </a:srgbClr>
             </a:solidFill>
           </a:ln>
@@ -4565,7 +4589,7 @@
         <p:spPr>
           <a:xfrm>
             <a:off x="914377" y="952500"/>
-            <a:ext cx="6629234" cy="209550"/>
+            <a:ext cx="6629234" cy="190500"/>
           </a:xfrm>
           <a:prstGeom prst="rect">
             <a:avLst/>
@@ -4580,9 +4604,9 @@
           <a:p>
             <a:pPr algn="l"/>
             <a:r>
-              <a:rPr sz="1200" b="1" i="0" spc="300">
-                <a:solidFill>
-                  <a:srgbClr val="00D4FF"/>
+              <a:rPr sz="1050" b="1" i="0" spc="300">
+                <a:solidFill>
+                  <a:srgbClr val="D4956B"/>
                 </a:solidFill>
                 <a:latin typeface="PingFang SC"/>
               </a:rPr>
@@ -4599,8 +4623,8 @@
         </p:nvSpPr>
         <p:spPr>
           <a:xfrm>
-            <a:off x="914377" y="1352550"/>
-            <a:ext cx="6629234" cy="400050"/>
+            <a:off x="914377" y="1333500"/>
+            <a:ext cx="6629234" cy="371475"/>
           </a:xfrm>
           <a:prstGeom prst="rect">
             <a:avLst/>
@@ -4615,9 +4639,9 @@
           <a:p>
             <a:pPr algn="l"/>
             <a:r>
-              <a:rPr sz="2250" b="1" i="0">
-                <a:solidFill>
-                  <a:srgbClr val="FFFFFF"/>
+              <a:rPr sz="2100" b="1" i="0">
+                <a:solidFill>
+                  <a:srgbClr val="1A1815"/>
                 </a:solidFill>
                 <a:latin typeface="PingFang SC"/>
               </a:rPr>
@@ -4634,8 +4658,8 @@
         </p:nvSpPr>
         <p:spPr>
           <a:xfrm>
-            <a:off x="914377" y="1790700"/>
-            <a:ext cx="6629234" cy="3790950"/>
+            <a:off x="914377" y="1752600"/>
+            <a:ext cx="6629234" cy="3829050"/>
           </a:xfrm>
           <a:prstGeom prst="rect">
             <a:avLst/>
@@ -4654,9 +4678,9 @@
               </a:spcAft>
             </a:pPr>
             <a:r>
-              <a:rPr sz="1350">
-                <a:solidFill>
-                  <a:srgbClr val="BCC4D8"/>
+              <a:rPr sz="1275">
+                <a:solidFill>
+                  <a:srgbClr val="5C5548"/>
                 </a:solidFill>
                 <a:latin typeface="PingFang SC"/>
               </a:rPr>
@@ -4670,9 +4694,9 @@
               </a:spcAft>
             </a:pPr>
             <a:r>
-              <a:rPr sz="1350">
-                <a:solidFill>
-                  <a:srgbClr val="BCC4D8"/>
+              <a:rPr sz="1275">
+                <a:solidFill>
+                  <a:srgbClr val="5C5548"/>
                 </a:solidFill>
                 <a:latin typeface="PingFang SC"/>
               </a:rPr>
@@ -4694,18 +4718,18 @@
           </a:xfrm>
           <a:prstGeom prst="roundRect">
             <a:avLst>
-              <a:gd name="adj" fmla="val 7526"/>
+              <a:gd name="adj" fmla="val 6021"/>
             </a:avLst>
           </a:prstGeom>
           <a:solidFill>
             <a:srgbClr val="FFFFFF">
-              <a:alpha val="6000"/>
+              <a:alpha val="82000"/>
             </a:srgbClr>
           </a:solidFill>
           <a:ln w="12700">
             <a:solidFill>
-              <a:srgbClr val="FFFFFF">
-                <a:alpha val="12000"/>
+              <a:srgbClr val="1A1815">
+                <a:alpha val="7000"/>
               </a:srgbClr>
             </a:solidFill>
           </a:ln>
@@ -4741,7 +4765,7 @@
         <p:spPr>
           <a:xfrm>
             <a:off x="8496087" y="914400"/>
-            <a:ext cx="2781230" cy="352425"/>
+            <a:ext cx="2781230" cy="333375"/>
           </a:xfrm>
           <a:prstGeom prst="rect">
             <a:avLst/>
@@ -4756,9 +4780,9 @@
           <a:p>
             <a:pPr algn="l"/>
             <a:r>
-              <a:rPr sz="2250" b="1" i="0">
-                <a:solidFill>
-                  <a:srgbClr val="FFFFFF"/>
+              <a:rPr sz="2100" b="1" i="0">
+                <a:solidFill>
+                  <a:srgbClr val="1A1815"/>
                 </a:solidFill>
                 <a:latin typeface="PingFang SC"/>
               </a:rPr>
@@ -4775,7 +4799,7 @@
         </p:nvSpPr>
         <p:spPr>
           <a:xfrm>
-            <a:off x="8496087" y="1457325"/>
+            <a:off x="8496087" y="1438275"/>
             <a:ext cx="304792" cy="304800"/>
           </a:xfrm>
           <a:prstGeom prst="roundRect">
@@ -4784,7 +4808,7 @@
             </a:avLst>
           </a:prstGeom>
           <a:solidFill>
-            <a:srgbClr val="7C5CFF"/>
+            <a:srgbClr val="B8654A"/>
           </a:solidFill>
           <a:ln>
             <a:noFill/>
@@ -4820,7 +4844,7 @@
         </p:nvSpPr>
         <p:spPr>
           <a:xfrm>
-            <a:off x="8496087" y="1514475"/>
+            <a:off x="8496087" y="1495425"/>
             <a:ext cx="304792" cy="209550"/>
           </a:xfrm>
           <a:prstGeom prst="rect">
@@ -4838,7 +4862,7 @@
             <a:r>
               <a:rPr sz="1125" b="1" i="0">
                 <a:solidFill>
-                  <a:srgbClr val="0A0E27"/>
+                  <a:srgbClr val="FFFFFF"/>
                 </a:solidFill>
                 <a:latin typeface="PingFang SC"/>
               </a:rPr>
@@ -4855,7 +4879,7 @@
         </p:nvSpPr>
         <p:spPr>
           <a:xfrm>
-            <a:off x="8953276" y="1495425"/>
+            <a:off x="8953276" y="1476375"/>
             <a:ext cx="2324041" cy="228600"/>
           </a:xfrm>
           <a:prstGeom prst="rect">
@@ -4873,7 +4897,7 @@
             <a:r>
               <a:rPr sz="1350" b="1" i="0">
                 <a:solidFill>
-                  <a:srgbClr val="FFFFFF"/>
+                  <a:srgbClr val="1A1815"/>
                 </a:solidFill>
                 <a:latin typeface="PingFang SC"/>
               </a:rPr>
@@ -4890,7 +4914,7 @@
         </p:nvSpPr>
         <p:spPr>
           <a:xfrm>
-            <a:off x="8953276" y="1724025"/>
+            <a:off x="8953276" y="1704975"/>
             <a:ext cx="2324041" cy="209550"/>
           </a:xfrm>
           <a:prstGeom prst="rect">
@@ -4908,7 +4932,7 @@
             <a:r>
               <a:rPr sz="1050" b="0" i="0">
                 <a:solidFill>
-                  <a:srgbClr val="BCC4D8"/>
+                  <a:srgbClr val="5C5548"/>
                 </a:solidFill>
                 <a:latin typeface="PingFang SC"/>
               </a:rPr>
@@ -4925,7 +4949,7 @@
         </p:nvSpPr>
         <p:spPr>
           <a:xfrm>
-            <a:off x="8496087" y="2219325"/>
+            <a:off x="8496087" y="2200275"/>
             <a:ext cx="304792" cy="304800"/>
           </a:xfrm>
           <a:prstGeom prst="roundRect">
@@ -4934,7 +4958,7 @@
             </a:avLst>
           </a:prstGeom>
           <a:solidFill>
-            <a:srgbClr val="7C5CFF"/>
+            <a:srgbClr val="B8654A"/>
           </a:solidFill>
           <a:ln>
             <a:noFill/>
@@ -4970,7 +4994,7 @@
         </p:nvSpPr>
         <p:spPr>
           <a:xfrm>
-            <a:off x="8496087" y="2276475"/>
+            <a:off x="8496087" y="2257425"/>
             <a:ext cx="304792" cy="209550"/>
           </a:xfrm>
           <a:prstGeom prst="rect">
@@ -4988,7 +5012,7 @@
             <a:r>
               <a:rPr sz="1125" b="1" i="0">
                 <a:solidFill>
-                  <a:srgbClr val="0A0E27"/>
+                  <a:srgbClr val="FFFFFF"/>
                 </a:solidFill>
                 <a:latin typeface="PingFang SC"/>
               </a:rPr>
@@ -5005,7 +5029,7 @@
         </p:nvSpPr>
         <p:spPr>
           <a:xfrm>
-            <a:off x="8953276" y="2257425"/>
+            <a:off x="8953276" y="2238375"/>
             <a:ext cx="2324041" cy="228600"/>
           </a:xfrm>
           <a:prstGeom prst="rect">
@@ -5023,7 +5047,7 @@
             <a:r>
               <a:rPr sz="1350" b="1" i="0">
                 <a:solidFill>
-                  <a:srgbClr val="FFFFFF"/>
+                  <a:srgbClr val="1A1815"/>
                 </a:solidFill>
                 <a:latin typeface="PingFang SC"/>
               </a:rPr>
@@ -5040,7 +5064,7 @@
         </p:nvSpPr>
         <p:spPr>
           <a:xfrm>
-            <a:off x="8953276" y="2486025"/>
+            <a:off x="8953276" y="2466975"/>
             <a:ext cx="2324041" cy="209550"/>
           </a:xfrm>
           <a:prstGeom prst="rect">
@@ -5058,7 +5082,7 @@
             <a:r>
               <a:rPr sz="1050" b="0" i="0">
                 <a:solidFill>
-                  <a:srgbClr val="BCC4D8"/>
+                  <a:srgbClr val="5C5548"/>
                 </a:solidFill>
                 <a:latin typeface="PingFang SC"/>
               </a:rPr>
@@ -5075,7 +5099,7 @@
         </p:nvSpPr>
         <p:spPr>
           <a:xfrm>
-            <a:off x="8496087" y="2981325"/>
+            <a:off x="8496087" y="2962275"/>
             <a:ext cx="304792" cy="304800"/>
           </a:xfrm>
           <a:prstGeom prst="roundRect">
@@ -5084,7 +5108,7 @@
             </a:avLst>
           </a:prstGeom>
           <a:solidFill>
-            <a:srgbClr val="7C5CFF"/>
+            <a:srgbClr val="B8654A"/>
           </a:solidFill>
           <a:ln>
             <a:noFill/>
@@ -5120,7 +5144,7 @@
         </p:nvSpPr>
         <p:spPr>
           <a:xfrm>
-            <a:off x="8496087" y="3038475"/>
+            <a:off x="8496087" y="3019425"/>
             <a:ext cx="304792" cy="209550"/>
           </a:xfrm>
           <a:prstGeom prst="rect">
@@ -5138,7 +5162,7 @@
             <a:r>
               <a:rPr sz="1125" b="1" i="0">
                 <a:solidFill>
-                  <a:srgbClr val="0A0E27"/>
+                  <a:srgbClr val="FFFFFF"/>
                 </a:solidFill>
                 <a:latin typeface="PingFang SC"/>
               </a:rPr>
@@ -5155,7 +5179,7 @@
         </p:nvSpPr>
         <p:spPr>
           <a:xfrm>
-            <a:off x="8953276" y="3019425"/>
+            <a:off x="8953276" y="3000375"/>
             <a:ext cx="2324041" cy="228600"/>
           </a:xfrm>
           <a:prstGeom prst="rect">
@@ -5173,7 +5197,7 @@
             <a:r>
               <a:rPr sz="1350" b="1" i="0">
                 <a:solidFill>
-                  <a:srgbClr val="FFFFFF"/>
+                  <a:srgbClr val="1A1815"/>
                 </a:solidFill>
                 <a:latin typeface="PingFang SC"/>
               </a:rPr>
@@ -5190,7 +5214,7 @@
         </p:nvSpPr>
         <p:spPr>
           <a:xfrm>
-            <a:off x="8953276" y="3248025"/>
+            <a:off x="8953276" y="3228975"/>
             <a:ext cx="2324041" cy="209550"/>
           </a:xfrm>
           <a:prstGeom prst="rect">
@@ -5208,7 +5232,7 @@
             <a:r>
               <a:rPr sz="1050" b="0" i="0">
                 <a:solidFill>
-                  <a:srgbClr val="BCC4D8"/>
+                  <a:srgbClr val="5C5548"/>
                 </a:solidFill>
                 <a:latin typeface="PingFang SC"/>
               </a:rPr>
@@ -5225,7 +5249,7 @@
         </p:nvSpPr>
         <p:spPr>
           <a:xfrm>
-            <a:off x="8496087" y="3743325"/>
+            <a:off x="8496087" y="3724275"/>
             <a:ext cx="304792" cy="304800"/>
           </a:xfrm>
           <a:prstGeom prst="roundRect">
@@ -5234,7 +5258,7 @@
             </a:avLst>
           </a:prstGeom>
           <a:solidFill>
-            <a:srgbClr val="7C5CFF"/>
+            <a:srgbClr val="B8654A"/>
           </a:solidFill>
           <a:ln>
             <a:noFill/>
@@ -5270,7 +5294,7 @@
         </p:nvSpPr>
         <p:spPr>
           <a:xfrm>
-            <a:off x="8496087" y="3800475"/>
+            <a:off x="8496087" y="3781425"/>
             <a:ext cx="304792" cy="209550"/>
           </a:xfrm>
           <a:prstGeom prst="rect">
@@ -5288,7 +5312,7 @@
             <a:r>
               <a:rPr sz="1125" b="1" i="0">
                 <a:solidFill>
-                  <a:srgbClr val="0A0E27"/>
+                  <a:srgbClr val="FFFFFF"/>
                 </a:solidFill>
                 <a:latin typeface="PingFang SC"/>
               </a:rPr>
@@ -5305,7 +5329,7 @@
         </p:nvSpPr>
         <p:spPr>
           <a:xfrm>
-            <a:off x="8953276" y="3781425"/>
+            <a:off x="8953276" y="3762375"/>
             <a:ext cx="2324041" cy="228600"/>
           </a:xfrm>
           <a:prstGeom prst="rect">
@@ -5323,7 +5347,7 @@
             <a:r>
               <a:rPr sz="1350" b="1" i="0">
                 <a:solidFill>
-                  <a:srgbClr val="FFFFFF"/>
+                  <a:srgbClr val="1A1815"/>
                 </a:solidFill>
                 <a:latin typeface="PingFang SC"/>
               </a:rPr>
@@ -5340,7 +5364,7 @@
         </p:nvSpPr>
         <p:spPr>
           <a:xfrm>
-            <a:off x="8953276" y="4010025"/>
+            <a:off x="8953276" y="3990975"/>
             <a:ext cx="2324041" cy="209550"/>
           </a:xfrm>
           <a:prstGeom prst="rect">
@@ -5358,7 +5382,7 @@
             <a:r>
               <a:rPr sz="1050" b="0" i="0">
                 <a:solidFill>
-                  <a:srgbClr val="BCC4D8"/>
+                  <a:srgbClr val="5C5548"/>
                 </a:solidFill>
                 <a:latin typeface="PingFang SC"/>
               </a:rPr>
@@ -5391,9 +5415,9 @@
           <a:p>
             <a:pPr algn="l"/>
             <a:r>
-              <a:rPr sz="1050" b="0" i="0">
-                <a:solidFill>
-                  <a:srgbClr val="6B7392"/>
+              <a:rPr sz="975" b="0" i="0">
+                <a:solidFill>
+                  <a:srgbClr val="9C9588"/>
                 </a:solidFill>
                 <a:latin typeface="PingFang SC"/>
               </a:rPr>
@@ -5426,9 +5450,9 @@
           <a:p>
             <a:pPr algn="r"/>
             <a:r>
-              <a:rPr sz="1050" b="0" i="0">
-                <a:solidFill>
-                  <a:srgbClr val="6B7392"/>
+              <a:rPr sz="975" b="0" i="0">
+                <a:solidFill>
+                  <a:srgbClr val="9C9588"/>
                 </a:solidFill>
                 <a:latin typeface="SF Mono"/>
               </a:rPr>
@@ -5469,12 +5493,20 @@
           <a:prstGeom prst="rect">
             <a:avLst/>
           </a:prstGeom>
-          <a:solidFill>
-            <a:srgbClr val="0A0E27"/>
-          </a:solidFill>
           <a:ln>
             <a:noFill/>
           </a:ln>
+          <a:gradFill>
+            <a:gsLst>
+              <a:gs pos="0">
+                <a:srgbClr val="F5F0E8"/>
+              </a:gs>
+              <a:gs pos="100000">
+                <a:srgbClr val="EDE6D8"/>
+              </a:gs>
+            </a:gsLst>
+            <a:lin ang="5400000" scaled="1"/>
+          </a:gradFill>
         </p:spPr>
         <p:style>
           <a:lnRef idx="1">
@@ -5511,18 +5543,18 @@
           </a:xfrm>
           <a:prstGeom prst="roundRect">
             <a:avLst>
-              <a:gd name="adj" fmla="val 7446"/>
+              <a:gd name="adj" fmla="val 5957"/>
             </a:avLst>
           </a:prstGeom>
           <a:solidFill>
             <a:srgbClr val="FFFFFF">
-              <a:alpha val="6000"/>
+              <a:alpha val="82000"/>
             </a:srgbClr>
           </a:solidFill>
           <a:ln w="12700">
             <a:solidFill>
-              <a:srgbClr val="FFFFFF">
-                <a:alpha val="12000"/>
+              <a:srgbClr val="1A1815">
+                <a:alpha val="7000"/>
               </a:srgbClr>
             </a:solidFill>
           </a:ln>
@@ -5558,7 +5590,7 @@
         <p:spPr>
           <a:xfrm>
             <a:off x="914377" y="952500"/>
-            <a:ext cx="2819329" cy="209550"/>
+            <a:ext cx="2819329" cy="190500"/>
           </a:xfrm>
           <a:prstGeom prst="rect">
             <a:avLst/>
@@ -5573,9 +5605,9 @@
           <a:p>
             <a:pPr algn="l"/>
             <a:r>
-              <a:rPr sz="1200" b="1" i="0" spc="300">
-                <a:solidFill>
-                  <a:srgbClr val="00D4FF"/>
+              <a:rPr sz="1050" b="1" i="0" spc="300">
+                <a:solidFill>
+                  <a:srgbClr val="D4956B"/>
                 </a:solidFill>
                 <a:latin typeface="PingFang SC"/>
               </a:rPr>
@@ -5592,7 +5624,7 @@
         </p:nvSpPr>
         <p:spPr>
           <a:xfrm>
-            <a:off x="914377" y="1371600"/>
+            <a:off x="914377" y="1352550"/>
             <a:ext cx="2819329" cy="1000125"/>
           </a:xfrm>
           <a:prstGeom prst="rect">
@@ -5610,7 +5642,7 @@
             <a:r>
               <a:rPr sz="6600" b="1" i="0">
                 <a:solidFill>
-                  <a:srgbClr val="FFFFFF"/>
+                  <a:srgbClr val="1A1815"/>
                 </a:solidFill>
                 <a:latin typeface="PingFang SC"/>
               </a:rPr>
@@ -5627,7 +5659,7 @@
         </p:nvSpPr>
         <p:spPr>
           <a:xfrm>
-            <a:off x="1447763" y="1962150"/>
+            <a:off x="1447763" y="1943100"/>
             <a:ext cx="457188" cy="314325"/>
           </a:xfrm>
           <a:prstGeom prst="rect">
@@ -5645,7 +5677,7 @@
             <a:r>
               <a:rPr sz="1800" b="1" i="0">
                 <a:solidFill>
-                  <a:srgbClr val="BCC4D8"/>
+                  <a:srgbClr val="5C5548"/>
                 </a:solidFill>
                 <a:latin typeface="PingFang SC"/>
               </a:rPr>
@@ -5669,7 +5701,7 @@
             <a:avLst/>
           </a:prstGeom>
           <a:solidFill>
-            <a:srgbClr val="7C5CFF"/>
+            <a:srgbClr val="B8654A"/>
           </a:solidFill>
           <a:ln>
             <a:noFill/>
@@ -5721,9 +5753,9 @@
           <a:p>
             <a:pPr algn="l"/>
             <a:r>
-              <a:rPr sz="1050" b="0" i="0">
-                <a:solidFill>
-                  <a:srgbClr val="BCC4D8"/>
+              <a:rPr sz="975" b="0" i="0">
+                <a:solidFill>
+                  <a:srgbClr val="5C5548"/>
                 </a:solidFill>
                 <a:latin typeface="PingFang SC"/>
               </a:rPr>
@@ -5745,18 +5777,18 @@
           </a:xfrm>
           <a:prstGeom prst="roundRect">
             <a:avLst>
-              <a:gd name="adj" fmla="val 7446"/>
+              <a:gd name="adj" fmla="val 5957"/>
             </a:avLst>
           </a:prstGeom>
           <a:solidFill>
             <a:srgbClr val="FFFFFF">
-              <a:alpha val="6000"/>
+              <a:alpha val="82000"/>
             </a:srgbClr>
           </a:solidFill>
           <a:ln w="12700">
             <a:solidFill>
-              <a:srgbClr val="FFFFFF">
-                <a:alpha val="12000"/>
+              <a:srgbClr val="1A1815">
+                <a:alpha val="7000"/>
               </a:srgbClr>
             </a:solidFill>
           </a:ln>
@@ -5792,7 +5824,7 @@
         <p:spPr>
           <a:xfrm>
             <a:off x="4686182" y="952500"/>
-            <a:ext cx="2819329" cy="209550"/>
+            <a:ext cx="2819329" cy="190500"/>
           </a:xfrm>
           <a:prstGeom prst="rect">
             <a:avLst/>
@@ -5807,9 +5839,9 @@
           <a:p>
             <a:pPr algn="l"/>
             <a:r>
-              <a:rPr sz="1200" b="1" i="0" spc="300">
-                <a:solidFill>
-                  <a:srgbClr val="00D4FF"/>
+              <a:rPr sz="1050" b="1" i="0" spc="300">
+                <a:solidFill>
+                  <a:srgbClr val="D4956B"/>
                 </a:solidFill>
                 <a:latin typeface="PingFang SC"/>
               </a:rPr>
@@ -5826,7 +5858,7 @@
         </p:nvSpPr>
         <p:spPr>
           <a:xfrm>
-            <a:off x="4686182" y="1371600"/>
+            <a:off x="4686182" y="1352550"/>
             <a:ext cx="2819329" cy="1000125"/>
           </a:xfrm>
           <a:prstGeom prst="rect">
@@ -5844,7 +5876,7 @@
             <a:r>
               <a:rPr sz="6600" b="1" i="0">
                 <a:solidFill>
-                  <a:srgbClr val="FFFFFF"/>
+                  <a:srgbClr val="1A1815"/>
                 </a:solidFill>
                 <a:latin typeface="PingFang SC"/>
               </a:rPr>
@@ -5861,7 +5893,7 @@
         </p:nvSpPr>
         <p:spPr>
           <a:xfrm>
-            <a:off x="6133946" y="1962150"/>
+            <a:off x="6133946" y="1943100"/>
             <a:ext cx="323841" cy="314325"/>
           </a:xfrm>
           <a:prstGeom prst="rect">
@@ -5879,7 +5911,7 @@
             <a:r>
               <a:rPr sz="1800" b="1" i="0">
                 <a:solidFill>
-                  <a:srgbClr val="BCC4D8"/>
+                  <a:srgbClr val="5C5548"/>
                 </a:solidFill>
                 <a:latin typeface="PingFang SC"/>
               </a:rPr>
@@ -5903,7 +5935,7 @@
             <a:avLst/>
           </a:prstGeom>
           <a:solidFill>
-            <a:srgbClr val="7C5CFF"/>
+            <a:srgbClr val="B8654A"/>
           </a:solidFill>
           <a:ln>
             <a:noFill/>
@@ -5955,9 +5987,9 @@
           <a:p>
             <a:pPr algn="l"/>
             <a:r>
-              <a:rPr sz="1050" b="0" i="0">
-                <a:solidFill>
-                  <a:srgbClr val="BCC4D8"/>
+              <a:rPr sz="975" b="0" i="0">
+                <a:solidFill>
+                  <a:srgbClr val="5C5548"/>
                 </a:solidFill>
                 <a:latin typeface="PingFang SC"/>
               </a:rPr>
@@ -5979,18 +6011,18 @@
           </a:xfrm>
           <a:prstGeom prst="roundRect">
             <a:avLst>
-              <a:gd name="adj" fmla="val 7446"/>
+              <a:gd name="adj" fmla="val 5957"/>
             </a:avLst>
           </a:prstGeom>
           <a:solidFill>
             <a:srgbClr val="FFFFFF">
-              <a:alpha val="6000"/>
+              <a:alpha val="82000"/>
             </a:srgbClr>
           </a:solidFill>
           <a:ln w="12700">
             <a:solidFill>
-              <a:srgbClr val="FFFFFF">
-                <a:alpha val="12000"/>
+              <a:srgbClr val="1A1815">
+                <a:alpha val="7000"/>
               </a:srgbClr>
             </a:solidFill>
           </a:ln>
@@ -6026,7 +6058,7 @@
         <p:spPr>
           <a:xfrm>
             <a:off x="8457988" y="952500"/>
-            <a:ext cx="2819329" cy="209550"/>
+            <a:ext cx="2819329" cy="190500"/>
           </a:xfrm>
           <a:prstGeom prst="rect">
             <a:avLst/>
@@ -6041,9 +6073,9 @@
           <a:p>
             <a:pPr algn="l"/>
             <a:r>
-              <a:rPr sz="1200" b="1" i="0" spc="300">
-                <a:solidFill>
-                  <a:srgbClr val="00D4FF"/>
+              <a:rPr sz="1050" b="1" i="0" spc="300">
+                <a:solidFill>
+                  <a:srgbClr val="D4956B"/>
                 </a:solidFill>
                 <a:latin typeface="PingFang SC"/>
               </a:rPr>
@@ -6060,7 +6092,7 @@
         </p:nvSpPr>
         <p:spPr>
           <a:xfrm>
-            <a:off x="8457988" y="1371600"/>
+            <a:off x="8457988" y="1352550"/>
             <a:ext cx="2819329" cy="1000125"/>
           </a:xfrm>
           <a:prstGeom prst="rect">
@@ -6078,7 +6110,7 @@
             <a:r>
               <a:rPr sz="6600" b="1" i="0">
                 <a:solidFill>
-                  <a:srgbClr val="FFFFFF"/>
+                  <a:srgbClr val="1A1815"/>
                 </a:solidFill>
                 <a:latin typeface="PingFang SC"/>
               </a:rPr>
@@ -6095,7 +6127,7 @@
         </p:nvSpPr>
         <p:spPr>
           <a:xfrm>
-            <a:off x="9905752" y="1962150"/>
+            <a:off x="9905752" y="1943100"/>
             <a:ext cx="323841" cy="314325"/>
           </a:xfrm>
           <a:prstGeom prst="rect">
@@ -6113,7 +6145,7 @@
             <a:r>
               <a:rPr sz="1800" b="1" i="0">
                 <a:solidFill>
-                  <a:srgbClr val="BCC4D8"/>
+                  <a:srgbClr val="5C5548"/>
                 </a:solidFill>
                 <a:latin typeface="PingFang SC"/>
               </a:rPr>
@@ -6137,7 +6169,7 @@
             <a:avLst/>
           </a:prstGeom>
           <a:solidFill>
-            <a:srgbClr val="7C5CFF"/>
+            <a:srgbClr val="B8654A"/>
           </a:solidFill>
           <a:ln>
             <a:noFill/>
@@ -6189,9 +6221,9 @@
           <a:p>
             <a:pPr algn="l"/>
             <a:r>
-              <a:rPr sz="1050" b="0" i="0">
-                <a:solidFill>
-                  <a:srgbClr val="BCC4D8"/>
+              <a:rPr sz="975" b="0" i="0">
+                <a:solidFill>
+                  <a:srgbClr val="5C5548"/>
                 </a:solidFill>
                 <a:latin typeface="PingFang SC"/>
               </a:rPr>
@@ -6224,9 +6256,9 @@
           <a:p>
             <a:pPr algn="l"/>
             <a:r>
-              <a:rPr sz="1050" b="0" i="0">
-                <a:solidFill>
-                  <a:srgbClr val="6B7392"/>
+              <a:rPr sz="975" b="0" i="0">
+                <a:solidFill>
+                  <a:srgbClr val="9C9588"/>
                 </a:solidFill>
                 <a:latin typeface="PingFang SC"/>
               </a:rPr>
@@ -6259,9 +6291,9 @@
           <a:p>
             <a:pPr algn="r"/>
             <a:r>
-              <a:rPr sz="1050" b="0" i="0">
-                <a:solidFill>
-                  <a:srgbClr val="6B7392"/>
+              <a:rPr sz="975" b="0" i="0">
+                <a:solidFill>
+                  <a:srgbClr val="9C9588"/>
                 </a:solidFill>
                 <a:latin typeface="SF Mono"/>
               </a:rPr>
@@ -6302,12 +6334,20 @@
           <a:prstGeom prst="rect">
             <a:avLst/>
           </a:prstGeom>
-          <a:solidFill>
-            <a:srgbClr val="0A0E27"/>
-          </a:solidFill>
           <a:ln>
             <a:noFill/>
           </a:ln>
+          <a:gradFill>
+            <a:gsLst>
+              <a:gs pos="0">
+                <a:srgbClr val="F5F0E8"/>
+              </a:gs>
+              <a:gs pos="100000">
+                <a:srgbClr val="EDE6D8"/>
+              </a:gs>
+            </a:gsLst>
+            <a:lin ang="5400000" scaled="1"/>
+          </a:gradFill>
         </p:spPr>
         <p:style>
           <a:lnRef idx="1">
@@ -6344,18 +6384,18 @@
           </a:xfrm>
           <a:prstGeom prst="roundRect">
             <a:avLst>
-              <a:gd name="adj" fmla="val 4844"/>
+              <a:gd name="adj" fmla="val 3875"/>
             </a:avLst>
           </a:prstGeom>
           <a:solidFill>
             <a:srgbClr val="FFFFFF">
-              <a:alpha val="6000"/>
+              <a:alpha val="82000"/>
             </a:srgbClr>
           </a:solidFill>
           <a:ln w="12700">
             <a:solidFill>
-              <a:srgbClr val="FFFFFF">
-                <a:alpha val="12000"/>
+              <a:srgbClr val="1A1815">
+                <a:alpha val="7000"/>
               </a:srgbClr>
             </a:solidFill>
           </a:ln>
@@ -6399,7 +6439,7 @@
             </a:avLst>
           </a:prstGeom>
           <a:solidFill>
-            <a:srgbClr val="7C5CFF"/>
+            <a:srgbClr val="B8654A"/>
           </a:solidFill>
           <a:ln>
             <a:noFill/>
@@ -6451,9 +6491,9 @@
           <a:p>
             <a:pPr algn="l"/>
             <a:r>
-              <a:rPr sz="3300" b="0" i="1">
-                <a:solidFill>
-                  <a:srgbClr val="FFFFFF"/>
+              <a:rPr sz="3150" b="0" i="1">
+                <a:solidFill>
+                  <a:srgbClr val="1A1815"/>
                 </a:solidFill>
                 <a:latin typeface="PingFang SC"/>
               </a:rPr>
@@ -6477,7 +6517,7 @@
             <a:avLst/>
           </a:prstGeom>
           <a:solidFill>
-            <a:srgbClr val="7C5CFF"/>
+            <a:srgbClr val="B8654A"/>
           </a:solidFill>
           <a:ln>
             <a:noFill/>
@@ -6529,9 +6569,9 @@
           <a:p>
             <a:pPr algn="l"/>
             <a:r>
-              <a:rPr sz="1650" b="1" i="0">
-                <a:solidFill>
-                  <a:srgbClr val="FFFFFF"/>
+              <a:rPr sz="1500" b="1" i="0">
+                <a:solidFill>
+                  <a:srgbClr val="1A1815"/>
                 </a:solidFill>
                 <a:latin typeface="PingFang SC"/>
               </a:rPr>
@@ -6564,9 +6604,9 @@
           <a:p>
             <a:pPr algn="l"/>
             <a:r>
-              <a:rPr sz="1350" b="0" i="0">
-                <a:solidFill>
-                  <a:srgbClr val="6B7392"/>
+              <a:rPr sz="1275" b="0" i="0">
+                <a:solidFill>
+                  <a:srgbClr val="9C9588"/>
                 </a:solidFill>
                 <a:latin typeface="PingFang SC"/>
               </a:rPr>
@@ -6588,18 +6628,18 @@
           </a:xfrm>
           <a:prstGeom prst="roundRect">
             <a:avLst>
-              <a:gd name="adj" fmla="val 12068"/>
+              <a:gd name="adj" fmla="val 9655"/>
             </a:avLst>
           </a:prstGeom>
           <a:solidFill>
             <a:srgbClr val="FFFFFF">
-              <a:alpha val="6000"/>
+              <a:alpha val="82000"/>
             </a:srgbClr>
           </a:solidFill>
           <a:ln w="12700">
             <a:solidFill>
-              <a:srgbClr val="FFFFFF">
-                <a:alpha val="12000"/>
+              <a:srgbClr val="1A1815">
+                <a:alpha val="7000"/>
               </a:srgbClr>
             </a:solidFill>
           </a:ln>
@@ -6635,7 +6675,7 @@
         <p:spPr>
           <a:xfrm>
             <a:off x="914377" y="952500"/>
-            <a:ext cx="1447763" cy="209550"/>
+            <a:ext cx="1447763" cy="190500"/>
           </a:xfrm>
           <a:prstGeom prst="rect">
             <a:avLst/>
@@ -6650,9 +6690,9 @@
           <a:p>
             <a:pPr algn="l"/>
             <a:r>
-              <a:rPr sz="1200" b="1" i="0" spc="300">
-                <a:solidFill>
-                  <a:srgbClr val="00D4FF"/>
+              <a:rPr sz="1050" b="1" i="0" spc="300">
+                <a:solidFill>
+                  <a:srgbClr val="D4956B"/>
                 </a:solidFill>
                 <a:latin typeface="PingFang SC"/>
               </a:rPr>
@@ -6669,7 +6709,7 @@
         </p:nvSpPr>
         <p:spPr>
           <a:xfrm>
-            <a:off x="914377" y="1371600"/>
+            <a:off x="914377" y="1352550"/>
             <a:ext cx="1447763" cy="723900"/>
           </a:xfrm>
           <a:prstGeom prst="rect">
@@ -6687,7 +6727,7 @@
             <a:r>
               <a:rPr sz="4800" b="1" i="0">
                 <a:solidFill>
-                  <a:srgbClr val="FFFFFF"/>
+                  <a:srgbClr val="1A1815"/>
                 </a:solidFill>
                 <a:latin typeface="PingFang SC"/>
               </a:rPr>
@@ -6704,7 +6744,7 @@
         </p:nvSpPr>
         <p:spPr>
           <a:xfrm>
-            <a:off x="914377" y="2019300"/>
+            <a:off x="914377" y="2000250"/>
             <a:ext cx="1447763" cy="219075"/>
           </a:xfrm>
           <a:prstGeom prst="rect">
@@ -6722,7 +6762,7 @@
             <a:r>
               <a:rPr sz="1275" b="1" i="0">
                 <a:solidFill>
-                  <a:srgbClr val="BCC4D8"/>
+                  <a:srgbClr val="5C5548"/>
                 </a:solidFill>
                 <a:latin typeface="PingFang SC"/>
               </a:rPr>
@@ -6739,14 +6779,14 @@
         </p:nvSpPr>
         <p:spPr>
           <a:xfrm>
-            <a:off x="914377" y="2409825"/>
+            <a:off x="914377" y="2390775"/>
             <a:ext cx="571485" cy="28575"/>
           </a:xfrm>
           <a:prstGeom prst="rect">
             <a:avLst/>
           </a:prstGeom>
           <a:solidFill>
-            <a:srgbClr val="7C5CFF"/>
+            <a:srgbClr val="B8654A"/>
           </a:solidFill>
           <a:ln>
             <a:noFill/>
@@ -6787,18 +6827,18 @@
           </a:xfrm>
           <a:prstGeom prst="roundRect">
             <a:avLst>
-              <a:gd name="adj" fmla="val 12068"/>
+              <a:gd name="adj" fmla="val 9655"/>
             </a:avLst>
           </a:prstGeom>
           <a:solidFill>
             <a:srgbClr val="FFFFFF">
-              <a:alpha val="6000"/>
+              <a:alpha val="82000"/>
             </a:srgbClr>
           </a:solidFill>
           <a:ln w="12700">
             <a:solidFill>
-              <a:srgbClr val="FFFFFF">
-                <a:alpha val="12000"/>
+              <a:srgbClr val="1A1815">
+                <a:alpha val="7000"/>
               </a:srgbClr>
             </a:solidFill>
           </a:ln>
@@ -6834,7 +6874,7 @@
         <p:spPr>
           <a:xfrm>
             <a:off x="914377" y="3790950"/>
-            <a:ext cx="1447763" cy="209550"/>
+            <a:ext cx="1447763" cy="190500"/>
           </a:xfrm>
           <a:prstGeom prst="rect">
             <a:avLst/>
@@ -6849,9 +6889,9 @@
           <a:p>
             <a:pPr algn="l"/>
             <a:r>
-              <a:rPr sz="1200" b="1" i="0" spc="300">
-                <a:solidFill>
-                  <a:srgbClr val="00D4FF"/>
+              <a:rPr sz="1050" b="1" i="0" spc="300">
+                <a:solidFill>
+                  <a:srgbClr val="D4956B"/>
                 </a:solidFill>
                 <a:latin typeface="PingFang SC"/>
               </a:rPr>
@@ -6868,7 +6908,7 @@
         </p:nvSpPr>
         <p:spPr>
           <a:xfrm>
-            <a:off x="914377" y="4210050"/>
+            <a:off x="914377" y="4191000"/>
             <a:ext cx="1447763" cy="723900"/>
           </a:xfrm>
           <a:prstGeom prst="rect">
@@ -6886,7 +6926,7 @@
             <a:r>
               <a:rPr sz="4800" b="1" i="0">
                 <a:solidFill>
-                  <a:srgbClr val="FFFFFF"/>
+                  <a:srgbClr val="1A1815"/>
                 </a:solidFill>
                 <a:latin typeface="PingFang SC"/>
               </a:rPr>
@@ -6903,7 +6943,7 @@
         </p:nvSpPr>
         <p:spPr>
           <a:xfrm>
-            <a:off x="1657308" y="4638675"/>
+            <a:off x="1657308" y="4619625"/>
             <a:ext cx="285742" cy="219075"/>
           </a:xfrm>
           <a:prstGeom prst="rect">
@@ -6921,7 +6961,7 @@
             <a:r>
               <a:rPr sz="1275" b="1" i="0">
                 <a:solidFill>
-                  <a:srgbClr val="BCC4D8"/>
+                  <a:srgbClr val="5C5548"/>
                 </a:solidFill>
                 <a:latin typeface="PingFang SC"/>
               </a:rPr>
@@ -6945,7 +6985,7 @@
             <a:avLst/>
           </a:prstGeom>
           <a:solidFill>
-            <a:srgbClr val="7C5CFF"/>
+            <a:srgbClr val="B8654A"/>
           </a:solidFill>
           <a:ln>
             <a:noFill/>
@@ -6986,18 +7026,18 @@
           </a:xfrm>
           <a:prstGeom prst="roundRect">
             <a:avLst>
-              <a:gd name="adj" fmla="val 12068"/>
+              <a:gd name="adj" fmla="val 9655"/>
             </a:avLst>
           </a:prstGeom>
           <a:solidFill>
             <a:srgbClr val="FFFFFF">
-              <a:alpha val="6000"/>
+              <a:alpha val="82000"/>
             </a:srgbClr>
           </a:solidFill>
           <a:ln w="12700">
             <a:solidFill>
-              <a:srgbClr val="FFFFFF">
-                <a:alpha val="12000"/>
+              <a:srgbClr val="1A1815">
+                <a:alpha val="7000"/>
               </a:srgbClr>
             </a:solidFill>
           </a:ln>
@@ -7033,7 +7073,7 @@
         <p:spPr>
           <a:xfrm>
             <a:off x="9829554" y="952500"/>
-            <a:ext cx="1447763" cy="209550"/>
+            <a:ext cx="1447763" cy="190500"/>
           </a:xfrm>
           <a:prstGeom prst="rect">
             <a:avLst/>
@@ -7048,9 +7088,9 @@
           <a:p>
             <a:pPr algn="l"/>
             <a:r>
-              <a:rPr sz="1200" b="1" i="0" spc="300">
-                <a:solidFill>
-                  <a:srgbClr val="00D4FF"/>
+              <a:rPr sz="1050" b="1" i="0" spc="300">
+                <a:solidFill>
+                  <a:srgbClr val="D4956B"/>
                 </a:solidFill>
                 <a:latin typeface="PingFang SC"/>
               </a:rPr>
@@ -7067,7 +7107,7 @@
         </p:nvSpPr>
         <p:spPr>
           <a:xfrm>
-            <a:off x="9829554" y="1371600"/>
+            <a:off x="9829554" y="1352550"/>
             <a:ext cx="1447763" cy="723900"/>
           </a:xfrm>
           <a:prstGeom prst="rect">
@@ -7085,7 +7125,7 @@
             <a:r>
               <a:rPr sz="4800" b="1" i="0">
                 <a:solidFill>
-                  <a:srgbClr val="FFFFFF"/>
+                  <a:srgbClr val="1A1815"/>
                 </a:solidFill>
                 <a:latin typeface="PingFang SC"/>
               </a:rPr>
@@ -7109,7 +7149,7 @@
             <a:avLst/>
           </a:prstGeom>
           <a:solidFill>
-            <a:srgbClr val="7C5CFF"/>
+            <a:srgbClr val="B8654A"/>
           </a:solidFill>
           <a:ln>
             <a:noFill/>
@@ -7161,9 +7201,9 @@
           <a:p>
             <a:pPr algn="l"/>
             <a:r>
-              <a:rPr sz="1050" b="0" i="0">
-                <a:solidFill>
-                  <a:srgbClr val="BCC4D8"/>
+              <a:rPr sz="975" b="0" i="0">
+                <a:solidFill>
+                  <a:srgbClr val="5C5548"/>
                 </a:solidFill>
                 <a:latin typeface="PingFang SC"/>
               </a:rPr>
@@ -7185,18 +7225,18 @@
           </a:xfrm>
           <a:prstGeom prst="roundRect">
             <a:avLst>
-              <a:gd name="adj" fmla="val 12068"/>
+              <a:gd name="adj" fmla="val 9655"/>
             </a:avLst>
           </a:prstGeom>
           <a:solidFill>
             <a:srgbClr val="FFFFFF">
-              <a:alpha val="6000"/>
+              <a:alpha val="82000"/>
             </a:srgbClr>
           </a:solidFill>
           <a:ln w="12700">
             <a:solidFill>
-              <a:srgbClr val="FFFFFF">
-                <a:alpha val="12000"/>
+              <a:srgbClr val="1A1815">
+                <a:alpha val="7000"/>
               </a:srgbClr>
             </a:solidFill>
           </a:ln>
@@ -7232,7 +7272,7 @@
         <p:spPr>
           <a:xfrm>
             <a:off x="9829554" y="3790950"/>
-            <a:ext cx="1447763" cy="209550"/>
+            <a:ext cx="1447763" cy="190500"/>
           </a:xfrm>
           <a:prstGeom prst="rect">
             <a:avLst/>
@@ -7247,9 +7287,9 @@
           <a:p>
             <a:pPr algn="l"/>
             <a:r>
-              <a:rPr sz="1200" b="1" i="0" spc="300">
-                <a:solidFill>
-                  <a:srgbClr val="00D4FF"/>
+              <a:rPr sz="1050" b="1" i="0" spc="300">
+                <a:solidFill>
+                  <a:srgbClr val="D4956B"/>
                 </a:solidFill>
                 <a:latin typeface="PingFang SC"/>
               </a:rPr>
@@ -7266,7 +7306,7 @@
         </p:nvSpPr>
         <p:spPr>
           <a:xfrm>
-            <a:off x="9829554" y="4210050"/>
+            <a:off x="9829554" y="4191000"/>
             <a:ext cx="1447763" cy="723900"/>
           </a:xfrm>
           <a:prstGeom prst="rect">
@@ -7284,7 +7324,7 @@
             <a:r>
               <a:rPr sz="4800" b="1" i="0">
                 <a:solidFill>
-                  <a:srgbClr val="FFFFFF"/>
+                  <a:srgbClr val="1A1815"/>
                 </a:solidFill>
                 <a:latin typeface="PingFang SC"/>
               </a:rPr>
@@ -7301,7 +7341,7 @@
         </p:nvSpPr>
         <p:spPr>
           <a:xfrm>
-            <a:off x="10572485" y="4638675"/>
+            <a:off x="10572485" y="4619625"/>
             <a:ext cx="285742" cy="219075"/>
           </a:xfrm>
           <a:prstGeom prst="rect">
@@ -7319,7 +7359,7 @@
             <a:r>
               <a:rPr sz="1275" b="1" i="0">
                 <a:solidFill>
-                  <a:srgbClr val="BCC4D8"/>
+                  <a:srgbClr val="5C5548"/>
                 </a:solidFill>
                 <a:latin typeface="PingFang SC"/>
               </a:rPr>
@@ -7343,7 +7383,7 @@
             <a:avLst/>
           </a:prstGeom>
           <a:solidFill>
-            <a:srgbClr val="7C5CFF"/>
+            <a:srgbClr val="B8654A"/>
           </a:solidFill>
           <a:ln>
             <a:noFill/>
@@ -7395,9 +7435,9 @@
           <a:p>
             <a:pPr algn="l"/>
             <a:r>
-              <a:rPr sz="1050" b="0" i="0">
-                <a:solidFill>
-                  <a:srgbClr val="6B7392"/>
+              <a:rPr sz="975" b="0" i="0">
+                <a:solidFill>
+                  <a:srgbClr val="9C9588"/>
                 </a:solidFill>
                 <a:latin typeface="PingFang SC"/>
               </a:rPr>
@@ -7430,9 +7470,9 @@
           <a:p>
             <a:pPr algn="r"/>
             <a:r>
-              <a:rPr sz="1050" b="0" i="0">
-                <a:solidFill>
-                  <a:srgbClr val="6B7392"/>
+              <a:rPr sz="975" b="0" i="0">
+                <a:solidFill>
+                  <a:srgbClr val="9C9588"/>
                 </a:solidFill>
                 <a:latin typeface="SF Mono"/>
               </a:rPr>
@@ -7473,12 +7513,20 @@
           <a:prstGeom prst="rect">
             <a:avLst/>
           </a:prstGeom>
-          <a:solidFill>
-            <a:srgbClr val="0A0E27"/>
-          </a:solidFill>
           <a:ln>
             <a:noFill/>
           </a:ln>
+          <a:gradFill>
+            <a:gsLst>
+              <a:gs pos="0">
+                <a:srgbClr val="F5F0E8"/>
+              </a:gs>
+              <a:gs pos="100000">
+                <a:srgbClr val="EDE6D8"/>
+              </a:gs>
+            </a:gsLst>
+            <a:lin ang="5400000" scaled="1"/>
+          </a:gradFill>
         </p:spPr>
         <p:style>
           <a:lnRef idx="1">
@@ -7515,18 +7563,18 @@
           </a:xfrm>
           <a:prstGeom prst="roundRect">
             <a:avLst>
-              <a:gd name="adj" fmla="val 11666"/>
+              <a:gd name="adj" fmla="val 9333"/>
             </a:avLst>
           </a:prstGeom>
           <a:solidFill>
             <a:srgbClr val="FFFFFF">
-              <a:alpha val="6000"/>
+              <a:alpha val="82000"/>
             </a:srgbClr>
           </a:solidFill>
           <a:ln w="12700">
             <a:solidFill>
-              <a:srgbClr val="FFFFFF">
-                <a:alpha val="12000"/>
+              <a:srgbClr val="1A1815">
+                <a:alpha val="7000"/>
               </a:srgbClr>
             </a:solidFill>
           </a:ln>
@@ -7561,8 +7609,8 @@
         </p:nvSpPr>
         <p:spPr>
           <a:xfrm>
-            <a:off x="914377" y="1152525"/>
-            <a:ext cx="10362940" cy="209550"/>
+            <a:off x="914377" y="1181100"/>
+            <a:ext cx="10362940" cy="190500"/>
           </a:xfrm>
           <a:prstGeom prst="rect">
             <a:avLst/>
@@ -7577,9 +7625,9 @@
           <a:p>
             <a:pPr algn="l"/>
             <a:r>
-              <a:rPr sz="1200" b="1" i="0" spc="300">
-                <a:solidFill>
-                  <a:srgbClr val="00D4FF"/>
+              <a:rPr sz="1050" b="1" i="0" spc="300">
+                <a:solidFill>
+                  <a:srgbClr val="D4956B"/>
                 </a:solidFill>
                 <a:latin typeface="PingFang SC"/>
               </a:rPr>
@@ -7596,8 +7644,8 @@
         </p:nvSpPr>
         <p:spPr>
           <a:xfrm>
-            <a:off x="914377" y="1476375"/>
-            <a:ext cx="10362940" cy="495300"/>
+            <a:off x="914377" y="1485900"/>
+            <a:ext cx="10362940" cy="476250"/>
           </a:xfrm>
           <a:prstGeom prst="rect">
             <a:avLst/>
@@ -7612,9 +7660,9 @@
           <a:p>
             <a:pPr algn="l"/>
             <a:r>
-              <a:rPr sz="3300" b="1" i="0">
-                <a:solidFill>
-                  <a:srgbClr val="FFFFFF"/>
+              <a:rPr sz="3150" b="1" i="0">
+                <a:solidFill>
+                  <a:srgbClr val="1A1815"/>
                 </a:solidFill>
                 <a:latin typeface="PingFang SC"/>
               </a:rPr>
@@ -7631,8 +7679,8 @@
         </p:nvSpPr>
         <p:spPr>
           <a:xfrm>
-            <a:off x="914377" y="2143125"/>
-            <a:ext cx="10362940" cy="285750"/>
+            <a:off x="914377" y="2133600"/>
+            <a:ext cx="10362940" cy="266700"/>
           </a:xfrm>
           <a:prstGeom prst="rect">
             <a:avLst/>
@@ -7647,9 +7695,9 @@
           <a:p>
             <a:pPr algn="l"/>
             <a:r>
-              <a:rPr sz="1650" b="0" i="0">
-                <a:solidFill>
-                  <a:srgbClr val="BCC4D8"/>
+              <a:rPr sz="1500" b="0" i="0">
+                <a:solidFill>
+                  <a:srgbClr val="5C5548"/>
                 </a:solidFill>
                 <a:latin typeface="PingFang SC"/>
               </a:rPr>
@@ -7671,18 +7719,18 @@
           </a:xfrm>
           <a:prstGeom prst="roundRect">
             <a:avLst>
-              <a:gd name="adj" fmla="val 8805"/>
+              <a:gd name="adj" fmla="val 7044"/>
             </a:avLst>
           </a:prstGeom>
           <a:solidFill>
             <a:srgbClr val="FFFFFF">
-              <a:alpha val="6000"/>
+              <a:alpha val="82000"/>
             </a:srgbClr>
           </a:solidFill>
           <a:ln w="12700">
             <a:solidFill>
-              <a:srgbClr val="FFFFFF">
-                <a:alpha val="12000"/>
+              <a:srgbClr val="1A1815">
+                <a:alpha val="7000"/>
               </a:srgbClr>
             </a:solidFill>
           </a:ln>
@@ -7718,7 +7766,7 @@
         <p:spPr>
           <a:xfrm>
             <a:off x="914377" y="3390900"/>
-            <a:ext cx="2819329" cy="352425"/>
+            <a:ext cx="2819329" cy="333375"/>
           </a:xfrm>
           <a:prstGeom prst="rect">
             <a:avLst/>
@@ -7733,9 +7781,9 @@
           <a:p>
             <a:pPr algn="l"/>
             <a:r>
-              <a:rPr sz="2250" b="1" i="0">
-                <a:solidFill>
-                  <a:srgbClr val="FFFFFF"/>
+              <a:rPr sz="2100" b="1" i="0">
+                <a:solidFill>
+                  <a:srgbClr val="1A1815"/>
                 </a:solidFill>
                 <a:latin typeface="PingFang SC"/>
               </a:rPr>
@@ -7752,14 +7800,14 @@
         </p:nvSpPr>
         <p:spPr>
           <a:xfrm>
-            <a:off x="800079" y="3933825"/>
+            <a:off x="800079" y="3914775"/>
             <a:ext cx="38099" cy="304800"/>
           </a:xfrm>
           <a:prstGeom prst="rect">
             <a:avLst/>
           </a:prstGeom>
           <a:solidFill>
-            <a:srgbClr val="7C5CFF"/>
+            <a:srgbClr val="B8654A"/>
           </a:solidFill>
           <a:ln>
             <a:noFill/>
@@ -7795,7 +7843,7 @@
         </p:nvSpPr>
         <p:spPr>
           <a:xfrm>
-            <a:off x="914377" y="3933825"/>
+            <a:off x="914377" y="3914775"/>
             <a:ext cx="304792" cy="304800"/>
           </a:xfrm>
           <a:prstGeom prst="roundRect">
@@ -7804,7 +7852,7 @@
             </a:avLst>
           </a:prstGeom>
           <a:solidFill>
-            <a:srgbClr val="7C5CFF"/>
+            <a:srgbClr val="B8654A"/>
           </a:solidFill>
           <a:ln>
             <a:noFill/>
@@ -7840,7 +7888,7 @@
         </p:nvSpPr>
         <p:spPr>
           <a:xfrm>
-            <a:off x="914377" y="3990975"/>
+            <a:off x="914377" y="3971925"/>
             <a:ext cx="304792" cy="209550"/>
           </a:xfrm>
           <a:prstGeom prst="rect">
@@ -7858,7 +7906,7 @@
             <a:r>
               <a:rPr sz="1125" b="1" i="0">
                 <a:solidFill>
-                  <a:srgbClr val="0A0E27"/>
+                  <a:srgbClr val="FFFFFF"/>
                 </a:solidFill>
                 <a:latin typeface="PingFang SC"/>
               </a:rPr>
@@ -7875,7 +7923,7 @@
         </p:nvSpPr>
         <p:spPr>
           <a:xfrm>
-            <a:off x="1371565" y="3971925"/>
+            <a:off x="1371565" y="3952875"/>
             <a:ext cx="2362140" cy="228600"/>
           </a:xfrm>
           <a:prstGeom prst="rect">
@@ -7893,7 +7941,7 @@
             <a:r>
               <a:rPr sz="1350" b="1" i="0">
                 <a:solidFill>
-                  <a:srgbClr val="FFFFFF"/>
+                  <a:srgbClr val="1A1815"/>
                 </a:solidFill>
                 <a:latin typeface="PingFang SC"/>
               </a:rPr>
@@ -7910,7 +7958,7 @@
         </p:nvSpPr>
         <p:spPr>
           <a:xfrm>
-            <a:off x="914377" y="4457700"/>
+            <a:off x="914377" y="4438650"/>
             <a:ext cx="304792" cy="304800"/>
           </a:xfrm>
           <a:prstGeom prst="roundRect">
@@ -7919,7 +7967,7 @@
             </a:avLst>
           </a:prstGeom>
           <a:solidFill>
-            <a:srgbClr val="7C5CFF"/>
+            <a:srgbClr val="B8654A"/>
           </a:solidFill>
           <a:ln>
             <a:noFill/>
@@ -7955,7 +8003,7 @@
         </p:nvSpPr>
         <p:spPr>
           <a:xfrm>
-            <a:off x="914377" y="4514850"/>
+            <a:off x="914377" y="4495800"/>
             <a:ext cx="304792" cy="209550"/>
           </a:xfrm>
           <a:prstGeom prst="rect">
@@ -7973,7 +8021,7 @@
             <a:r>
               <a:rPr sz="1125" b="1" i="0">
                 <a:solidFill>
-                  <a:srgbClr val="0A0E27"/>
+                  <a:srgbClr val="FFFFFF"/>
                 </a:solidFill>
                 <a:latin typeface="PingFang SC"/>
               </a:rPr>
@@ -7990,7 +8038,7 @@
         </p:nvSpPr>
         <p:spPr>
           <a:xfrm>
-            <a:off x="1371565" y="4495800"/>
+            <a:off x="1371565" y="4476750"/>
             <a:ext cx="2362140" cy="228600"/>
           </a:xfrm>
           <a:prstGeom prst="rect">
@@ -8008,7 +8056,7 @@
             <a:r>
               <a:rPr sz="1350" b="1" i="0">
                 <a:solidFill>
-                  <a:srgbClr val="BCC4D8"/>
+                  <a:srgbClr val="5C5548"/>
                 </a:solidFill>
                 <a:latin typeface="PingFang SC"/>
               </a:rPr>
@@ -8025,7 +8073,7 @@
         </p:nvSpPr>
         <p:spPr>
           <a:xfrm>
-            <a:off x="914377" y="4981575"/>
+            <a:off x="914377" y="4962525"/>
             <a:ext cx="304792" cy="304800"/>
           </a:xfrm>
           <a:prstGeom prst="roundRect">
@@ -8034,7 +8082,7 @@
             </a:avLst>
           </a:prstGeom>
           <a:solidFill>
-            <a:srgbClr val="7C5CFF"/>
+            <a:srgbClr val="B8654A"/>
           </a:solidFill>
           <a:ln>
             <a:noFill/>
@@ -8070,7 +8118,7 @@
         </p:nvSpPr>
         <p:spPr>
           <a:xfrm>
-            <a:off x="914377" y="5038725"/>
+            <a:off x="914377" y="5019675"/>
             <a:ext cx="304792" cy="209550"/>
           </a:xfrm>
           <a:prstGeom prst="rect">
@@ -8088,7 +8136,7 @@
             <a:r>
               <a:rPr sz="1125" b="1" i="0">
                 <a:solidFill>
-                  <a:srgbClr val="0A0E27"/>
+                  <a:srgbClr val="FFFFFF"/>
                 </a:solidFill>
                 <a:latin typeface="PingFang SC"/>
               </a:rPr>
@@ -8105,7 +8153,7 @@
         </p:nvSpPr>
         <p:spPr>
           <a:xfrm>
-            <a:off x="1371565" y="5019675"/>
+            <a:off x="1371565" y="5000625"/>
             <a:ext cx="2362140" cy="228600"/>
           </a:xfrm>
           <a:prstGeom prst="rect">
@@ -8123,7 +8171,7 @@
             <a:r>
               <a:rPr sz="1350" b="1" i="0">
                 <a:solidFill>
-                  <a:srgbClr val="BCC4D8"/>
+                  <a:srgbClr val="5C5548"/>
                 </a:solidFill>
                 <a:latin typeface="PingFang SC"/>
               </a:rPr>
@@ -8145,18 +8193,18 @@
           </a:xfrm>
           <a:prstGeom prst="roundRect">
             <a:avLst>
-              <a:gd name="adj" fmla="val 8805"/>
+              <a:gd name="adj" fmla="val 7044"/>
             </a:avLst>
           </a:prstGeom>
           <a:solidFill>
             <a:srgbClr val="FFFFFF">
-              <a:alpha val="6000"/>
+              <a:alpha val="82000"/>
             </a:srgbClr>
           </a:solidFill>
           <a:ln w="12700">
             <a:solidFill>
-              <a:srgbClr val="FFFFFF">
-                <a:alpha val="12000"/>
+              <a:srgbClr val="1A1815">
+                <a:alpha val="7000"/>
               </a:srgbClr>
             </a:solidFill>
           </a:ln>
@@ -8192,7 +8240,7 @@
         <p:spPr>
           <a:xfrm>
             <a:off x="4686182" y="3390900"/>
-            <a:ext cx="2819329" cy="352425"/>
+            <a:ext cx="2819329" cy="333375"/>
           </a:xfrm>
           <a:prstGeom prst="rect">
             <a:avLst/>
@@ -8207,9 +8255,9 @@
           <a:p>
             <a:pPr algn="l"/>
             <a:r>
-              <a:rPr sz="2250" b="1" i="0">
-                <a:solidFill>
-                  <a:srgbClr val="FFFFFF"/>
+              <a:rPr sz="2100" b="1" i="0">
+                <a:solidFill>
+                  <a:srgbClr val="1A1815"/>
                 </a:solidFill>
                 <a:latin typeface="PingFang SC"/>
               </a:rPr>
@@ -8226,14 +8274,14 @@
         </p:nvSpPr>
         <p:spPr>
           <a:xfrm>
-            <a:off x="4571885" y="3933825"/>
+            <a:off x="4571885" y="3914775"/>
             <a:ext cx="38099" cy="304800"/>
           </a:xfrm>
           <a:prstGeom prst="rect">
             <a:avLst/>
           </a:prstGeom>
           <a:solidFill>
-            <a:srgbClr val="7C5CFF"/>
+            <a:srgbClr val="B8654A"/>
           </a:solidFill>
           <a:ln>
             <a:noFill/>
@@ -8269,7 +8317,7 @@
         </p:nvSpPr>
         <p:spPr>
           <a:xfrm>
-            <a:off x="4686182" y="3933825"/>
+            <a:off x="4686182" y="3914775"/>
             <a:ext cx="304792" cy="304800"/>
           </a:xfrm>
           <a:prstGeom prst="roundRect">
@@ -8278,7 +8326,7 @@
             </a:avLst>
           </a:prstGeom>
           <a:solidFill>
-            <a:srgbClr val="7C5CFF"/>
+            <a:srgbClr val="B8654A"/>
           </a:solidFill>
           <a:ln>
             <a:noFill/>
@@ -8314,7 +8362,7 @@
         </p:nvSpPr>
         <p:spPr>
           <a:xfrm>
-            <a:off x="4686182" y="3990975"/>
+            <a:off x="4686182" y="3971925"/>
             <a:ext cx="304792" cy="209550"/>
           </a:xfrm>
           <a:prstGeom prst="rect">
@@ -8332,7 +8380,7 @@
             <a:r>
               <a:rPr sz="1125" b="1" i="0">
                 <a:solidFill>
-                  <a:srgbClr val="0A0E27"/>
+                  <a:srgbClr val="FFFFFF"/>
                 </a:solidFill>
                 <a:latin typeface="PingFang SC"/>
               </a:rPr>
@@ -8349,7 +8397,7 @@
         </p:nvSpPr>
         <p:spPr>
           <a:xfrm>
-            <a:off x="5143371" y="3971925"/>
+            <a:off x="5143371" y="3952875"/>
             <a:ext cx="2362140" cy="228600"/>
           </a:xfrm>
           <a:prstGeom prst="rect">
@@ -8367,7 +8415,7 @@
             <a:r>
               <a:rPr sz="1350" b="1" i="0">
                 <a:solidFill>
-                  <a:srgbClr val="FFFFFF"/>
+                  <a:srgbClr val="1A1815"/>
                 </a:solidFill>
                 <a:latin typeface="PingFang SC"/>
               </a:rPr>
@@ -8384,7 +8432,7 @@
         </p:nvSpPr>
         <p:spPr>
           <a:xfrm>
-            <a:off x="4686182" y="4457700"/>
+            <a:off x="4686182" y="4438650"/>
             <a:ext cx="304792" cy="304800"/>
           </a:xfrm>
           <a:prstGeom prst="roundRect">
@@ -8393,7 +8441,7 @@
             </a:avLst>
           </a:prstGeom>
           <a:solidFill>
-            <a:srgbClr val="7C5CFF"/>
+            <a:srgbClr val="B8654A"/>
           </a:solidFill>
           <a:ln>
             <a:noFill/>
@@ -8429,7 +8477,7 @@
         </p:nvSpPr>
         <p:spPr>
           <a:xfrm>
-            <a:off x="4686182" y="4514850"/>
+            <a:off x="4686182" y="4495800"/>
             <a:ext cx="304792" cy="209550"/>
           </a:xfrm>
           <a:prstGeom prst="rect">
@@ -8447,7 +8495,7 @@
             <a:r>
               <a:rPr sz="1125" b="1" i="0">
                 <a:solidFill>
-                  <a:srgbClr val="0A0E27"/>
+                  <a:srgbClr val="FFFFFF"/>
                 </a:solidFill>
                 <a:latin typeface="PingFang SC"/>
               </a:rPr>
@@ -8464,7 +8512,7 @@
         </p:nvSpPr>
         <p:spPr>
           <a:xfrm>
-            <a:off x="5143371" y="4495800"/>
+            <a:off x="5143371" y="4476750"/>
             <a:ext cx="2362140" cy="228600"/>
           </a:xfrm>
           <a:prstGeom prst="rect">
@@ -8482,7 +8530,7 @@
             <a:r>
               <a:rPr sz="1350" b="1" i="0">
                 <a:solidFill>
-                  <a:srgbClr val="BCC4D8"/>
+                  <a:srgbClr val="5C5548"/>
                 </a:solidFill>
                 <a:latin typeface="PingFang SC"/>
               </a:rPr>
@@ -8499,7 +8547,7 @@
         </p:nvSpPr>
         <p:spPr>
           <a:xfrm>
-            <a:off x="4686182" y="4981575"/>
+            <a:off x="4686182" y="4962525"/>
             <a:ext cx="304792" cy="304800"/>
           </a:xfrm>
           <a:prstGeom prst="roundRect">
@@ -8508,7 +8556,7 @@
             </a:avLst>
           </a:prstGeom>
           <a:solidFill>
-            <a:srgbClr val="7C5CFF"/>
+            <a:srgbClr val="B8654A"/>
           </a:solidFill>
           <a:ln>
             <a:noFill/>
@@ -8544,7 +8592,7 @@
         </p:nvSpPr>
         <p:spPr>
           <a:xfrm>
-            <a:off x="4686182" y="5038725"/>
+            <a:off x="4686182" y="5019675"/>
             <a:ext cx="304792" cy="209550"/>
           </a:xfrm>
           <a:prstGeom prst="rect">
@@ -8562,7 +8610,7 @@
             <a:r>
               <a:rPr sz="1125" b="1" i="0">
                 <a:solidFill>
-                  <a:srgbClr val="0A0E27"/>
+                  <a:srgbClr val="FFFFFF"/>
                 </a:solidFill>
                 <a:latin typeface="PingFang SC"/>
               </a:rPr>
@@ -8579,7 +8627,7 @@
         </p:nvSpPr>
         <p:spPr>
           <a:xfrm>
-            <a:off x="5143371" y="5019675"/>
+            <a:off x="5143371" y="5000625"/>
             <a:ext cx="2362140" cy="228600"/>
           </a:xfrm>
           <a:prstGeom prst="rect">
@@ -8597,7 +8645,7 @@
             <a:r>
               <a:rPr sz="1350" b="1" i="0">
                 <a:solidFill>
-                  <a:srgbClr val="BCC4D8"/>
+                  <a:srgbClr val="5C5548"/>
                 </a:solidFill>
                 <a:latin typeface="PingFang SC"/>
               </a:rPr>
@@ -8619,18 +8667,18 @@
           </a:xfrm>
           <a:prstGeom prst="roundRect">
             <a:avLst>
-              <a:gd name="adj" fmla="val 8805"/>
+              <a:gd name="adj" fmla="val 7044"/>
             </a:avLst>
           </a:prstGeom>
           <a:solidFill>
             <a:srgbClr val="FFFFFF">
-              <a:alpha val="6000"/>
+              <a:alpha val="82000"/>
             </a:srgbClr>
           </a:solidFill>
           <a:ln w="12700">
             <a:solidFill>
-              <a:srgbClr val="FFFFFF">
-                <a:alpha val="12000"/>
+              <a:srgbClr val="1A1815">
+                <a:alpha val="7000"/>
               </a:srgbClr>
             </a:solidFill>
           </a:ln>
@@ -8666,7 +8714,7 @@
         <p:spPr>
           <a:xfrm>
             <a:off x="8457988" y="3390900"/>
-            <a:ext cx="2819329" cy="352425"/>
+            <a:ext cx="2819329" cy="333375"/>
           </a:xfrm>
           <a:prstGeom prst="rect">
             <a:avLst/>
@@ -8681,9 +8729,9 @@
           <a:p>
             <a:pPr algn="l"/>
             <a:r>
-              <a:rPr sz="2250" b="1" i="0">
-                <a:solidFill>
-                  <a:srgbClr val="FFFFFF"/>
+              <a:rPr sz="2100" b="1" i="0">
+                <a:solidFill>
+                  <a:srgbClr val="1A1815"/>
                 </a:solidFill>
                 <a:latin typeface="PingFang SC"/>
               </a:rPr>
@@ -8700,14 +8748,14 @@
         </p:nvSpPr>
         <p:spPr>
           <a:xfrm>
-            <a:off x="8343691" y="3933825"/>
+            <a:off x="8343691" y="3914775"/>
             <a:ext cx="38099" cy="304800"/>
           </a:xfrm>
           <a:prstGeom prst="rect">
             <a:avLst/>
           </a:prstGeom>
           <a:solidFill>
-            <a:srgbClr val="7C5CFF"/>
+            <a:srgbClr val="B8654A"/>
           </a:solidFill>
           <a:ln>
             <a:noFill/>
@@ -8743,7 +8791,7 @@
         </p:nvSpPr>
         <p:spPr>
           <a:xfrm>
-            <a:off x="8457988" y="3933825"/>
+            <a:off x="8457988" y="3914775"/>
             <a:ext cx="304792" cy="304800"/>
           </a:xfrm>
           <a:prstGeom prst="roundRect">
@@ -8752,7 +8800,7 @@
             </a:avLst>
           </a:prstGeom>
           <a:solidFill>
-            <a:srgbClr val="7C5CFF"/>
+            <a:srgbClr val="B8654A"/>
           </a:solidFill>
           <a:ln>
             <a:noFill/>
@@ -8788,7 +8836,7 @@
         </p:nvSpPr>
         <p:spPr>
           <a:xfrm>
-            <a:off x="8457988" y="3990975"/>
+            <a:off x="8457988" y="3971925"/>
             <a:ext cx="304792" cy="209550"/>
           </a:xfrm>
           <a:prstGeom prst="rect">
@@ -8806,7 +8854,7 @@
             <a:r>
               <a:rPr sz="1125" b="1" i="0">
                 <a:solidFill>
-                  <a:srgbClr val="0A0E27"/>
+                  <a:srgbClr val="FFFFFF"/>
                 </a:solidFill>
                 <a:latin typeface="PingFang SC"/>
               </a:rPr>
@@ -8823,7 +8871,7 @@
         </p:nvSpPr>
         <p:spPr>
           <a:xfrm>
-            <a:off x="8915176" y="3971925"/>
+            <a:off x="8915176" y="3952875"/>
             <a:ext cx="2362140" cy="228600"/>
           </a:xfrm>
           <a:prstGeom prst="rect">
@@ -8841,7 +8889,7 @@
             <a:r>
               <a:rPr sz="1350" b="1" i="0">
                 <a:solidFill>
-                  <a:srgbClr val="FFFFFF"/>
+                  <a:srgbClr val="1A1815"/>
                 </a:solidFill>
                 <a:latin typeface="PingFang SC"/>
               </a:rPr>
@@ -8858,7 +8906,7 @@
         </p:nvSpPr>
         <p:spPr>
           <a:xfrm>
-            <a:off x="8457988" y="4457700"/>
+            <a:off x="8457988" y="4438650"/>
             <a:ext cx="304792" cy="304800"/>
           </a:xfrm>
           <a:prstGeom prst="roundRect">
@@ -8867,7 +8915,7 @@
             </a:avLst>
           </a:prstGeom>
           <a:solidFill>
-            <a:srgbClr val="7C5CFF"/>
+            <a:srgbClr val="B8654A"/>
           </a:solidFill>
           <a:ln>
             <a:noFill/>
@@ -8903,7 +8951,7 @@
         </p:nvSpPr>
         <p:spPr>
           <a:xfrm>
-            <a:off x="8457988" y="4514850"/>
+            <a:off x="8457988" y="4495800"/>
             <a:ext cx="304792" cy="209550"/>
           </a:xfrm>
           <a:prstGeom prst="rect">
@@ -8921,7 +8969,7 @@
             <a:r>
               <a:rPr sz="1125" b="1" i="0">
                 <a:solidFill>
-                  <a:srgbClr val="0A0E27"/>
+                  <a:srgbClr val="FFFFFF"/>
                 </a:solidFill>
                 <a:latin typeface="PingFang SC"/>
               </a:rPr>
@@ -8938,7 +8986,7 @@
         </p:nvSpPr>
         <p:spPr>
           <a:xfrm>
-            <a:off x="8915176" y="4495800"/>
+            <a:off x="8915176" y="4476750"/>
             <a:ext cx="2362140" cy="228600"/>
           </a:xfrm>
           <a:prstGeom prst="rect">
@@ -8956,7 +9004,7 @@
             <a:r>
               <a:rPr sz="1350" b="1" i="0">
                 <a:solidFill>
-                  <a:srgbClr val="BCC4D8"/>
+                  <a:srgbClr val="5C5548"/>
                 </a:solidFill>
                 <a:latin typeface="PingFang SC"/>
               </a:rPr>
@@ -8973,7 +9021,7 @@
         </p:nvSpPr>
         <p:spPr>
           <a:xfrm>
-            <a:off x="8457988" y="4981575"/>
+            <a:off x="8457988" y="4962525"/>
             <a:ext cx="304792" cy="304800"/>
           </a:xfrm>
           <a:prstGeom prst="roundRect">
@@ -8982,7 +9030,7 @@
             </a:avLst>
           </a:prstGeom>
           <a:solidFill>
-            <a:srgbClr val="7C5CFF"/>
+            <a:srgbClr val="B8654A"/>
           </a:solidFill>
           <a:ln>
             <a:noFill/>
@@ -9018,7 +9066,7 @@
         </p:nvSpPr>
         <p:spPr>
           <a:xfrm>
-            <a:off x="8457988" y="5038725"/>
+            <a:off x="8457988" y="5019675"/>
             <a:ext cx="304792" cy="209550"/>
           </a:xfrm>
           <a:prstGeom prst="rect">
@@ -9036,7 +9084,7 @@
             <a:r>
               <a:rPr sz="1125" b="1" i="0">
                 <a:solidFill>
-                  <a:srgbClr val="0A0E27"/>
+                  <a:srgbClr val="FFFFFF"/>
                 </a:solidFill>
                 <a:latin typeface="PingFang SC"/>
               </a:rPr>
@@ -9053,7 +9101,7 @@
         </p:nvSpPr>
         <p:spPr>
           <a:xfrm>
-            <a:off x="8915176" y="5019675"/>
+            <a:off x="8915176" y="5000625"/>
             <a:ext cx="2362140" cy="228600"/>
           </a:xfrm>
           <a:prstGeom prst="rect">
@@ -9071,7 +9119,7 @@
             <a:r>
               <a:rPr sz="1350" b="1" i="0">
                 <a:solidFill>
-                  <a:srgbClr val="BCC4D8"/>
+                  <a:srgbClr val="5C5548"/>
                 </a:solidFill>
                 <a:latin typeface="PingFang SC"/>
               </a:rPr>
@@ -9104,9 +9152,9 @@
           <a:p>
             <a:pPr algn="l"/>
             <a:r>
-              <a:rPr sz="1050" b="0" i="0">
-                <a:solidFill>
-                  <a:srgbClr val="6B7392"/>
+              <a:rPr sz="975" b="0" i="0">
+                <a:solidFill>
+                  <a:srgbClr val="9C9588"/>
                 </a:solidFill>
                 <a:latin typeface="PingFang SC"/>
               </a:rPr>
@@ -9139,9 +9187,9 @@
           <a:p>
             <a:pPr algn="r"/>
             <a:r>
-              <a:rPr sz="1050" b="0" i="0">
-                <a:solidFill>
-                  <a:srgbClr val="6B7392"/>
+              <a:rPr sz="975" b="0" i="0">
+                <a:solidFill>
+                  <a:srgbClr val="9C9588"/>
                 </a:solidFill>
                 <a:latin typeface="SF Mono"/>
               </a:rPr>
@@ -9182,12 +9230,20 @@
           <a:prstGeom prst="rect">
             <a:avLst/>
           </a:prstGeom>
-          <a:solidFill>
-            <a:srgbClr val="0A0E27"/>
-          </a:solidFill>
           <a:ln>
             <a:noFill/>
           </a:ln>
+          <a:gradFill>
+            <a:gsLst>
+              <a:gs pos="0">
+                <a:srgbClr val="F5F0E8"/>
+              </a:gs>
+              <a:gs pos="100000">
+                <a:srgbClr val="EDE6D8"/>
+              </a:gs>
+            </a:gsLst>
+            <a:lin ang="5400000" scaled="1"/>
+          </a:gradFill>
         </p:spPr>
         <p:style>
           <a:lnRef idx="1">
@@ -9224,18 +9280,18 @@
           </a:xfrm>
           <a:prstGeom prst="roundRect">
             <a:avLst>
-              <a:gd name="adj" fmla="val 10000"/>
+              <a:gd name="adj" fmla="val 7999"/>
             </a:avLst>
           </a:prstGeom>
           <a:solidFill>
             <a:srgbClr val="FFFFFF">
-              <a:alpha val="6000"/>
+              <a:alpha val="82000"/>
             </a:srgbClr>
           </a:solidFill>
           <a:ln w="12700">
             <a:solidFill>
-              <a:srgbClr val="FFFFFF">
-                <a:alpha val="12000"/>
+              <a:srgbClr val="1A1815">
+                <a:alpha val="7000"/>
               </a:srgbClr>
             </a:solidFill>
           </a:ln>
@@ -9271,7 +9327,7 @@
         <p:spPr>
           <a:xfrm>
             <a:off x="914377" y="914400"/>
-            <a:ext cx="6629234" cy="209550"/>
+            <a:ext cx="6629234" cy="190500"/>
           </a:xfrm>
           <a:prstGeom prst="rect">
             <a:avLst/>
@@ -9286,9 +9342,9 @@
           <a:p>
             <a:pPr algn="l"/>
             <a:r>
-              <a:rPr sz="1200" b="1" i="0" spc="300">
-                <a:solidFill>
-                  <a:srgbClr val="00D4FF"/>
+              <a:rPr sz="1050" b="1" i="0" spc="300">
+                <a:solidFill>
+                  <a:srgbClr val="D4956B"/>
                 </a:solidFill>
                 <a:latin typeface="PingFang SC"/>
               </a:rPr>
@@ -9321,9 +9377,9 @@
           <a:p>
             <a:pPr algn="l"/>
             <a:r>
-              <a:rPr sz="1350" b="0" i="0">
-                <a:solidFill>
-                  <a:srgbClr val="FFFFFF"/>
+              <a:rPr sz="1275" b="0" i="0">
+                <a:solidFill>
+                  <a:srgbClr val="1A1815"/>
                 </a:solidFill>
                 <a:latin typeface="PingFang SC"/>
               </a:rPr>
@@ -9396,7 +9452,7 @@
             </a:avLst>
           </a:prstGeom>
           <a:solidFill>
-            <a:srgbClr val="7C5CFF"/>
+            <a:srgbClr val="B8654A"/>
           </a:solidFill>
           <a:ln>
             <a:noFill/>
@@ -9448,9 +9504,9 @@
           <a:p>
             <a:pPr algn="l"/>
             <a:r>
-              <a:rPr sz="1650" b="1" i="0">
-                <a:solidFill>
-                  <a:srgbClr val="FFFFFF"/>
+              <a:rPr sz="1500" b="1" i="0">
+                <a:solidFill>
+                  <a:srgbClr val="1A1815"/>
                 </a:solidFill>
                 <a:latin typeface="PingFang SC"/>
               </a:rPr>
@@ -9483,9 +9539,9 @@
           <a:p>
             <a:pPr algn="l"/>
             <a:r>
-              <a:rPr sz="1350" b="0" i="0">
-                <a:solidFill>
-                  <a:srgbClr val="FFFFFF"/>
+              <a:rPr sz="1275" b="0" i="0">
+                <a:solidFill>
+                  <a:srgbClr val="1A1815"/>
                 </a:solidFill>
                 <a:latin typeface="PingFang SC"/>
               </a:rPr>
@@ -9558,7 +9614,7 @@
             </a:avLst>
           </a:prstGeom>
           <a:solidFill>
-            <a:srgbClr val="7C5CFF"/>
+            <a:srgbClr val="B8654A"/>
           </a:solidFill>
           <a:ln>
             <a:noFill/>
@@ -9610,9 +9666,9 @@
           <a:p>
             <a:pPr algn="l"/>
             <a:r>
-              <a:rPr sz="1650" b="1" i="0">
-                <a:solidFill>
-                  <a:srgbClr val="FFFFFF"/>
+              <a:rPr sz="1500" b="1" i="0">
+                <a:solidFill>
+                  <a:srgbClr val="1A1815"/>
                 </a:solidFill>
                 <a:latin typeface="PingFang SC"/>
               </a:rPr>
@@ -9645,9 +9701,9 @@
           <a:p>
             <a:pPr algn="l"/>
             <a:r>
-              <a:rPr sz="1350" b="0" i="0">
-                <a:solidFill>
-                  <a:srgbClr val="FFFFFF"/>
+              <a:rPr sz="1275" b="0" i="0">
+                <a:solidFill>
+                  <a:srgbClr val="1A1815"/>
                 </a:solidFill>
                 <a:latin typeface="PingFang SC"/>
               </a:rPr>
@@ -9720,7 +9776,7 @@
             </a:avLst>
           </a:prstGeom>
           <a:solidFill>
-            <a:srgbClr val="7C5CFF"/>
+            <a:srgbClr val="B8654A"/>
           </a:solidFill>
           <a:ln>
             <a:noFill/>
@@ -9772,9 +9828,9 @@
           <a:p>
             <a:pPr algn="l"/>
             <a:r>
-              <a:rPr sz="1650" b="1" i="0">
-                <a:solidFill>
-                  <a:srgbClr val="FFFFFF"/>
+              <a:rPr sz="1500" b="1" i="0">
+                <a:solidFill>
+                  <a:srgbClr val="1A1815"/>
                 </a:solidFill>
                 <a:latin typeface="PingFang SC"/>
               </a:rPr>
@@ -9796,18 +9852,18 @@
           </a:xfrm>
           <a:prstGeom prst="roundRect">
             <a:avLst>
-              <a:gd name="adj" fmla="val 10000"/>
+              <a:gd name="adj" fmla="val 7999"/>
             </a:avLst>
           </a:prstGeom>
           <a:solidFill>
             <a:srgbClr val="FFFFFF">
-              <a:alpha val="6000"/>
+              <a:alpha val="82000"/>
             </a:srgbClr>
           </a:solidFill>
           <a:ln w="12700">
             <a:solidFill>
-              <a:srgbClr val="FFFFFF">
-                <a:alpha val="12000"/>
+              <a:srgbClr val="1A1815">
+                <a:alpha val="7000"/>
               </a:srgbClr>
             </a:solidFill>
           </a:ln>
@@ -9843,7 +9899,7 @@
         <p:spPr>
           <a:xfrm>
             <a:off x="8496087" y="952500"/>
-            <a:ext cx="2781230" cy="209550"/>
+            <a:ext cx="2781230" cy="190500"/>
           </a:xfrm>
           <a:prstGeom prst="rect">
             <a:avLst/>
@@ -9858,9 +9914,9 @@
           <a:p>
             <a:pPr algn="l"/>
             <a:r>
-              <a:rPr sz="1200" b="1" i="0" spc="300">
-                <a:solidFill>
-                  <a:srgbClr val="00D4FF"/>
+              <a:rPr sz="1050" b="1" i="0" spc="300">
+                <a:solidFill>
+                  <a:srgbClr val="D4956B"/>
                 </a:solidFill>
                 <a:latin typeface="PingFang SC"/>
               </a:rPr>
@@ -9877,7 +9933,7 @@
         </p:nvSpPr>
         <p:spPr>
           <a:xfrm>
-            <a:off x="8496087" y="1266825"/>
+            <a:off x="8496087" y="1257300"/>
             <a:ext cx="2781230" cy="542925"/>
           </a:xfrm>
           <a:prstGeom prst="rect">
@@ -9895,7 +9951,7 @@
             <a:r>
               <a:rPr sz="3600" b="1" i="0">
                 <a:solidFill>
-                  <a:srgbClr val="FFFFFF"/>
+                  <a:srgbClr val="1A1815"/>
                 </a:solidFill>
                 <a:latin typeface="PingFang SC"/>
               </a:rPr>
@@ -9912,7 +9968,7 @@
         </p:nvSpPr>
         <p:spPr>
           <a:xfrm>
-            <a:off x="9315216" y="1571625"/>
+            <a:off x="9315216" y="1562100"/>
             <a:ext cx="371465" cy="180975"/>
           </a:xfrm>
           <a:prstGeom prst="rect">
@@ -9930,7 +9986,7 @@
             <a:r>
               <a:rPr sz="1050" b="1" i="0">
                 <a:solidFill>
-                  <a:srgbClr val="00D4FF"/>
+                  <a:srgbClr val="D4956B"/>
                 </a:solidFill>
                 <a:latin typeface="PingFang SC"/>
               </a:rPr>
@@ -9948,7 +10004,7 @@
         <p:spPr>
           <a:xfrm>
             <a:off x="9581910" y="1533525"/>
-            <a:ext cx="1600159" cy="238125"/>
+            <a:ext cx="1600159" cy="219075"/>
           </a:xfrm>
           <a:prstGeom prst="rect">
             <a:avLst/>
@@ -9963,9 +10019,9 @@
           <a:p>
             <a:pPr algn="l"/>
             <a:r>
-              <a:rPr sz="1350" b="0" i="0">
-                <a:solidFill>
-                  <a:srgbClr val="BCC4D8"/>
+              <a:rPr sz="1275" b="0" i="0">
+                <a:solidFill>
+                  <a:srgbClr val="5C5548"/>
                 </a:solidFill>
                 <a:latin typeface="PingFang SC"/>
               </a:rPr>
@@ -9982,7 +10038,7 @@
         </p:nvSpPr>
         <p:spPr>
           <a:xfrm>
-            <a:off x="8496087" y="1762125"/>
+            <a:off x="8496087" y="1752600"/>
             <a:ext cx="1390615" cy="171450"/>
           </a:xfrm>
           <a:prstGeom prst="rect">
@@ -10000,7 +10056,7 @@
             <a:r>
               <a:rPr sz="900" b="0" i="0" spc="100">
                 <a:solidFill>
-                  <a:srgbClr val="6B7392"/>
+                  <a:srgbClr val="9C9588"/>
                 </a:solidFill>
                 <a:latin typeface="PingFang SC"/>
               </a:rPr>
@@ -10017,7 +10073,7 @@
         </p:nvSpPr>
         <p:spPr>
           <a:xfrm>
-            <a:off x="8496087" y="1876425"/>
+            <a:off x="8496087" y="1866900"/>
             <a:ext cx="1390615" cy="238125"/>
           </a:xfrm>
           <a:prstGeom prst="rect">
@@ -10035,7 +10091,7 @@
             <a:r>
               <a:rPr sz="1350" b="1" i="0">
                 <a:solidFill>
-                  <a:srgbClr val="FFFFFF"/>
+                  <a:srgbClr val="1A1815"/>
                 </a:solidFill>
                 <a:latin typeface="PingFang SC"/>
               </a:rPr>
@@ -10052,7 +10108,7 @@
         </p:nvSpPr>
         <p:spPr>
           <a:xfrm>
-            <a:off x="9886702" y="1762125"/>
+            <a:off x="9886702" y="1752600"/>
             <a:ext cx="1390615" cy="171450"/>
           </a:xfrm>
           <a:prstGeom prst="rect">
@@ -10070,7 +10126,7 @@
             <a:r>
               <a:rPr sz="900" b="0" i="0" spc="100">
                 <a:solidFill>
-                  <a:srgbClr val="6B7392"/>
+                  <a:srgbClr val="9C9588"/>
                 </a:solidFill>
                 <a:latin typeface="PingFang SC"/>
               </a:rPr>
@@ -10087,7 +10143,7 @@
         </p:nvSpPr>
         <p:spPr>
           <a:xfrm>
-            <a:off x="9886702" y="1876425"/>
+            <a:off x="9886702" y="1866900"/>
             <a:ext cx="1390615" cy="238125"/>
           </a:xfrm>
           <a:prstGeom prst="rect">
@@ -10105,7 +10161,7 @@
             <a:r>
               <a:rPr sz="1350" b="1" i="0">
                 <a:solidFill>
-                  <a:srgbClr val="FFFFFF"/>
+                  <a:srgbClr val="1A1815"/>
                 </a:solidFill>
                 <a:latin typeface="PingFang SC"/>
               </a:rPr>
@@ -10178,7 +10234,7 @@
             </a:avLst>
           </a:prstGeom>
           <a:solidFill>
-            <a:srgbClr val="7C5CFF"/>
+            <a:srgbClr val="B8654A"/>
           </a:solidFill>
           <a:ln>
             <a:noFill/>
@@ -10230,9 +10286,9 @@
           <a:p>
             <a:pPr algn="l"/>
             <a:r>
-              <a:rPr sz="1050" b="0" i="0">
-                <a:solidFill>
-                  <a:srgbClr val="BCC4D8"/>
+              <a:rPr sz="975" b="0" i="0">
+                <a:solidFill>
+                  <a:srgbClr val="5C5548"/>
                 </a:solidFill>
                 <a:latin typeface="PingFang SC"/>
               </a:rPr>
@@ -10254,18 +10310,18 @@
           </a:xfrm>
           <a:prstGeom prst="roundRect">
             <a:avLst>
-              <a:gd name="adj" fmla="val 10071"/>
+              <a:gd name="adj" fmla="val 8057"/>
             </a:avLst>
           </a:prstGeom>
           <a:solidFill>
             <a:srgbClr val="FFFFFF">
-              <a:alpha val="6000"/>
+              <a:alpha val="82000"/>
             </a:srgbClr>
           </a:solidFill>
           <a:ln w="12700">
             <a:solidFill>
-              <a:srgbClr val="FFFFFF">
-                <a:alpha val="12000"/>
+              <a:srgbClr val="1A1815">
+                <a:alpha val="7000"/>
               </a:srgbClr>
             </a:solidFill>
           </a:ln>
@@ -10301,7 +10357,7 @@
         <p:spPr>
           <a:xfrm>
             <a:off x="914377" y="3771900"/>
-            <a:ext cx="2781230" cy="209550"/>
+            <a:ext cx="2781230" cy="190500"/>
           </a:xfrm>
           <a:prstGeom prst="rect">
             <a:avLst/>
@@ -10316,9 +10372,9 @@
           <a:p>
             <a:pPr algn="l"/>
             <a:r>
-              <a:rPr sz="1200" b="1" i="0" spc="300">
-                <a:solidFill>
-                  <a:srgbClr val="00D4FF"/>
+              <a:rPr sz="1050" b="1" i="0" spc="300">
+                <a:solidFill>
+                  <a:srgbClr val="D4956B"/>
                 </a:solidFill>
                 <a:latin typeface="PingFang SC"/>
               </a:rPr>
@@ -10335,8 +10391,8 @@
         </p:nvSpPr>
         <p:spPr>
           <a:xfrm>
-            <a:off x="914377" y="4114800"/>
-            <a:ext cx="2781230" cy="1466850"/>
+            <a:off x="914377" y="4095750"/>
+            <a:ext cx="2781230" cy="1485900"/>
           </a:xfrm>
           <a:prstGeom prst="roundRect">
             <a:avLst>
@@ -10344,13 +10400,13 @@
             </a:avLst>
           </a:prstGeom>
           <a:solidFill>
-            <a:srgbClr val="7C5CFF">
+            <a:srgbClr val="B8654A">
               <a:alpha val="10000"/>
             </a:srgbClr>
           </a:solidFill>
           <a:ln w="12700">
             <a:solidFill>
-              <a:srgbClr val="7C5CFF">
+              <a:srgbClr val="B8654A">
                 <a:alpha val="40000"/>
               </a:srgbClr>
             </a:solidFill>
@@ -10386,7 +10442,7 @@
         </p:nvSpPr>
         <p:spPr>
           <a:xfrm>
-            <a:off x="914377" y="4733925"/>
+            <a:off x="914377" y="4724400"/>
             <a:ext cx="2781230" cy="228600"/>
           </a:xfrm>
           <a:prstGeom prst="rect">
@@ -10404,7 +10460,7 @@
             <a:r>
               <a:rPr sz="1050" b="0" i="0">
                 <a:solidFill>
-                  <a:srgbClr val="BCC4D8"/>
+                  <a:srgbClr val="5C5548"/>
                 </a:solidFill>
                 <a:latin typeface="PingFang SC"/>
               </a:rPr>
@@ -10426,18 +10482,18 @@
           </a:xfrm>
           <a:prstGeom prst="roundRect">
             <a:avLst>
-              <a:gd name="adj" fmla="val 10071"/>
+              <a:gd name="adj" fmla="val 8057"/>
             </a:avLst>
           </a:prstGeom>
           <a:solidFill>
             <a:srgbClr val="FFFFFF">
-              <a:alpha val="6000"/>
+              <a:alpha val="82000"/>
             </a:srgbClr>
           </a:solidFill>
           <a:ln w="12700">
             <a:solidFill>
-              <a:srgbClr val="FFFFFF">
-                <a:alpha val="12000"/>
+              <a:srgbClr val="1A1815">
+                <a:alpha val="7000"/>
               </a:srgbClr>
             </a:solidFill>
           </a:ln>
@@ -10473,7 +10529,7 @@
         <p:spPr>
           <a:xfrm>
             <a:off x="4686182" y="3848100"/>
-            <a:ext cx="6591135" cy="400050"/>
+            <a:ext cx="6591135" cy="371475"/>
           </a:xfrm>
           <a:prstGeom prst="rect">
             <a:avLst/>
@@ -10488,9 +10544,9 @@
           <a:p>
             <a:pPr algn="l"/>
             <a:r>
-              <a:rPr sz="2250" b="1" i="0">
-                <a:solidFill>
-                  <a:srgbClr val="FFFFFF"/>
+              <a:rPr sz="2100" b="1" i="0">
+                <a:solidFill>
+                  <a:srgbClr val="1A1815"/>
                 </a:solidFill>
                 <a:latin typeface="PingFang SC"/>
               </a:rPr>
@@ -10507,8 +10563,8 @@
         </p:nvSpPr>
         <p:spPr>
           <a:xfrm>
-            <a:off x="4686182" y="4286250"/>
-            <a:ext cx="6591135" cy="1295400"/>
+            <a:off x="4686182" y="4267200"/>
+            <a:ext cx="6591135" cy="1314450"/>
           </a:xfrm>
           <a:prstGeom prst="rect">
             <a:avLst/>
@@ -10527,9 +10583,9 @@
               </a:spcAft>
             </a:pPr>
             <a:r>
-              <a:rPr sz="1350">
-                <a:solidFill>
-                  <a:srgbClr val="BCC4D8"/>
+              <a:rPr sz="1275">
+                <a:solidFill>
+                  <a:srgbClr val="5C5548"/>
                 </a:solidFill>
                 <a:latin typeface="PingFang SC"/>
               </a:rPr>
@@ -10543,9 +10599,9 @@
               </a:spcAft>
             </a:pPr>
             <a:r>
-              <a:rPr sz="1350">
-                <a:solidFill>
-                  <a:srgbClr val="BCC4D8"/>
+              <a:rPr sz="1275">
+                <a:solidFill>
+                  <a:srgbClr val="5C5548"/>
                 </a:solidFill>
                 <a:latin typeface="PingFang SC"/>
               </a:rPr>
@@ -10578,9 +10634,9 @@
           <a:p>
             <a:pPr algn="l"/>
             <a:r>
-              <a:rPr sz="1050" b="0" i="0">
-                <a:solidFill>
-                  <a:srgbClr val="6B7392"/>
+              <a:rPr sz="975" b="0" i="0">
+                <a:solidFill>
+                  <a:srgbClr val="9C9588"/>
                 </a:solidFill>
                 <a:latin typeface="PingFang SC"/>
               </a:rPr>
@@ -10613,9 +10669,9 @@
           <a:p>
             <a:pPr algn="r"/>
             <a:r>
-              <a:rPr sz="1050" b="0" i="0">
-                <a:solidFill>
-                  <a:srgbClr val="6B7392"/>
+              <a:rPr sz="975" b="0" i="0">
+                <a:solidFill>
+                  <a:srgbClr val="9C9588"/>
                 </a:solidFill>
                 <a:latin typeface="SF Mono"/>
               </a:rPr>
@@ -10656,12 +10712,20 @@
           <a:prstGeom prst="rect">
             <a:avLst/>
           </a:prstGeom>
-          <a:solidFill>
-            <a:srgbClr val="0A0E27"/>
-          </a:solidFill>
           <a:ln>
             <a:noFill/>
           </a:ln>
+          <a:gradFill>
+            <a:gsLst>
+              <a:gs pos="0">
+                <a:srgbClr val="F5F0E8"/>
+              </a:gs>
+              <a:gs pos="100000">
+                <a:srgbClr val="EDE6D8"/>
+              </a:gs>
+            </a:gsLst>
+            <a:lin ang="5400000" scaled="1"/>
+          </a:gradFill>
         </p:spPr>
         <p:style>
           <a:lnRef idx="1">
@@ -10698,18 +10762,18 @@
           </a:xfrm>
           <a:prstGeom prst="roundRect">
             <a:avLst>
-              <a:gd name="adj" fmla="val 4844"/>
+              <a:gd name="adj" fmla="val 3875"/>
             </a:avLst>
           </a:prstGeom>
           <a:solidFill>
             <a:srgbClr val="FFFFFF">
-              <a:alpha val="6000"/>
+              <a:alpha val="82000"/>
             </a:srgbClr>
           </a:solidFill>
           <a:ln w="12700">
             <a:solidFill>
-              <a:srgbClr val="FFFFFF">
-                <a:alpha val="12000"/>
+              <a:srgbClr val="1A1815">
+                <a:alpha val="7000"/>
               </a:srgbClr>
             </a:solidFill>
           </a:ln>
@@ -10745,7 +10809,7 @@
         <p:spPr>
           <a:xfrm>
             <a:off x="914377" y="952500"/>
-            <a:ext cx="10362940" cy="209550"/>
+            <a:ext cx="10362940" cy="190500"/>
           </a:xfrm>
           <a:prstGeom prst="rect">
             <a:avLst/>
@@ -10760,9 +10824,9 @@
           <a:p>
             <a:pPr algn="l"/>
             <a:r>
-              <a:rPr sz="1200" b="1" i="0" spc="300">
-                <a:solidFill>
-                  <a:srgbClr val="00D4FF"/>
+              <a:rPr sz="1050" b="1" i="0" spc="300">
+                <a:solidFill>
+                  <a:srgbClr val="D4956B"/>
                 </a:solidFill>
                 <a:latin typeface="PingFang SC"/>
               </a:rPr>
@@ -10779,8 +10843,8 @@
         </p:nvSpPr>
         <p:spPr>
           <a:xfrm>
-            <a:off x="914377" y="1276350"/>
-            <a:ext cx="10362940" cy="685800"/>
+            <a:off x="914377" y="1257300"/>
+            <a:ext cx="10362940" cy="638175"/>
           </a:xfrm>
           <a:prstGeom prst="rect">
             <a:avLst/>
@@ -10795,9 +10859,9 @@
           <a:p>
             <a:pPr algn="l"/>
             <a:r>
-              <a:rPr sz="4500" b="1" i="0">
-                <a:solidFill>
-                  <a:srgbClr val="FFFFFF"/>
+              <a:rPr sz="4200" b="1" i="0">
+                <a:solidFill>
+                  <a:srgbClr val="1A1815"/>
                 </a:solidFill>
                 <a:latin typeface="PingFang SC"/>
               </a:rPr>
@@ -10814,8 +10878,8 @@
         </p:nvSpPr>
         <p:spPr>
           <a:xfrm>
-            <a:off x="914377" y="2133600"/>
-            <a:ext cx="10362940" cy="400050"/>
+            <a:off x="914377" y="2066925"/>
+            <a:ext cx="10362940" cy="371475"/>
           </a:xfrm>
           <a:prstGeom prst="rect">
             <a:avLst/>
@@ -10830,9 +10894,9 @@
           <a:p>
             <a:pPr algn="l"/>
             <a:r>
-              <a:rPr sz="2250" b="0" i="0">
-                <a:solidFill>
-                  <a:srgbClr val="BCC4D8"/>
+              <a:rPr sz="2100" b="0" i="0">
+                <a:solidFill>
+                  <a:srgbClr val="5C5548"/>
                 </a:solidFill>
                 <a:latin typeface="PingFang SC"/>
               </a:rPr>
@@ -10856,7 +10920,7 @@
             <a:avLst/>
           </a:prstGeom>
           <a:solidFill>
-            <a:srgbClr val="7C5CFF"/>
+            <a:srgbClr val="B8654A"/>
           </a:solidFill>
           <a:ln>
             <a:noFill/>
@@ -10893,7 +10957,7 @@
         <p:spPr>
           <a:xfrm>
             <a:off x="914377" y="5410200"/>
-            <a:ext cx="10362940" cy="238125"/>
+            <a:ext cx="10362940" cy="219075"/>
           </a:xfrm>
           <a:prstGeom prst="rect">
             <a:avLst/>
@@ -10908,9 +10972,9 @@
           <a:p>
             <a:pPr algn="l"/>
             <a:r>
-              <a:rPr sz="1350" b="0" i="0">
-                <a:solidFill>
-                  <a:srgbClr val="BCC4D8"/>
+              <a:rPr sz="1275" b="0" i="0">
+                <a:solidFill>
+                  <a:srgbClr val="5C5548"/>
                 </a:solidFill>
                 <a:latin typeface="PingFang SC"/>
               </a:rPr>
@@ -10943,9 +11007,9 @@
           <a:p>
             <a:pPr algn="l"/>
             <a:r>
-              <a:rPr sz="1050" b="0" i="0">
-                <a:solidFill>
-                  <a:srgbClr val="6B7392"/>
+              <a:rPr sz="975" b="0" i="0">
+                <a:solidFill>
+                  <a:srgbClr val="9C9588"/>
                 </a:solidFill>
                 <a:latin typeface="PingFang SC"/>
               </a:rPr>
@@ -10978,9 +11042,9 @@
           <a:p>
             <a:pPr algn="r"/>
             <a:r>
-              <a:rPr sz="1050" b="0" i="0">
-                <a:solidFill>
-                  <a:srgbClr val="6B7392"/>
+              <a:rPr sz="975" b="0" i="0">
+                <a:solidFill>
+                  <a:srgbClr val="9C9588"/>
                 </a:solidFill>
                 <a:latin typeface="SF Mono"/>
               </a:rPr>

--- a/examples/dify-intro/deck.pptx
+++ b/examples/dify-intro/deck.pptx
@@ -3222,7 +3222,7 @@
             <a:pPr algn="r"/>
             <a:r>
               <a:rPr sz="11925" b="1" i="0" spc="600">
-                <a:latin typeface="PingFang SC"/>
+                <a:latin typeface="'Noto Sans SC', 'PingFang SC', 'Microsoft YaHei', sans-serif"/>
                 <a:solidFill>
                   <a:srgbClr val="B8654A">
                     <a:alpha val="6999"/>
@@ -3262,7 +3262,7 @@
                 <a:solidFill>
                   <a:srgbClr val="D4956B"/>
                 </a:solidFill>
-                <a:latin typeface="PingFang SC"/>
+                <a:latin typeface="'Noto Sans SC', 'PingFang SC', 'Microsoft YaHei', sans-serif"/>
               </a:rPr>
               <a:t>PRODUCT INTRO · 2026 Q2</a:t>
             </a:r>
@@ -3297,7 +3297,7 @@
                 <a:solidFill>
                   <a:srgbClr val="1A1815"/>
                 </a:solidFill>
-                <a:latin typeface="PingFang SC"/>
+                <a:latin typeface="'Noto Sans SC', 'PingFang SC', 'Microsoft YaHei', sans-serif"/>
               </a:rPr>
               <a:t>Dify 企业介绍</a:t>
             </a:r>
@@ -3332,7 +3332,7 @@
                 <a:solidFill>
                   <a:srgbClr val="1A1815"/>
                 </a:solidFill>
-                <a:latin typeface="PingFang SC"/>
+                <a:latin typeface="'Noto Sans SC', 'PingFang SC', 'Microsoft YaHei', sans-serif"/>
               </a:rPr>
               <a:t>下一代 AI 应用开发平台</a:t>
             </a:r>
@@ -3418,7 +3418,7 @@
                 <a:solidFill>
                   <a:srgbClr val="FFFFFF"/>
                 </a:solidFill>
-                <a:latin typeface="PingFang SC"/>
+                <a:latin typeface="'Noto Sans SC', 'PingFang SC', 'Microsoft YaHei', sans-serif"/>
               </a:rPr>
               <a:t>PRODUCTION-READY</a:t>
             </a:r>
@@ -3453,7 +3453,7 @@
                 <a:solidFill>
                   <a:srgbClr val="5C5548"/>
                 </a:solidFill>
-                <a:latin typeface="PingFang SC"/>
+                <a:latin typeface="'Noto Sans SC', 'PingFang SC', 'Microsoft YaHei', sans-serif"/>
               </a:rPr>
               <a:t>把生成式 AI 的不确定，变成产品落地的确定</a:t>
             </a:r>
@@ -3531,7 +3531,7 @@
                 <a:solidFill>
                   <a:srgbClr val="9C9588"/>
                 </a:solidFill>
-                <a:latin typeface="PingFang SC"/>
+                <a:latin typeface="'Noto Sans SC', 'PingFang SC', 'Microsoft YaHei', sans-serif"/>
               </a:rPr>
               <a:t>PRESENTED BY</a:t>
             </a:r>
@@ -3566,7 +3566,7 @@
                 <a:solidFill>
                   <a:srgbClr val="1A1815"/>
                 </a:solidFill>
-                <a:latin typeface="PingFang SC"/>
+                <a:latin typeface="'Noto Sans SC', 'PingFang SC', 'Microsoft YaHei', sans-serif"/>
               </a:rPr>
               <a:t>Dify Team</a:t>
             </a:r>
@@ -3601,7 +3601,7 @@
                 <a:solidFill>
                   <a:srgbClr val="9C9588"/>
                 </a:solidFill>
-                <a:latin typeface="PingFang SC"/>
+                <a:latin typeface="'Noto Sans SC', 'PingFang SC', 'Microsoft YaHei', sans-serif"/>
               </a:rPr>
               <a:t>DATE</a:t>
             </a:r>
@@ -3636,7 +3636,7 @@
                 <a:solidFill>
                   <a:srgbClr val="1A1815"/>
                 </a:solidFill>
-                <a:latin typeface="PingFang SC"/>
+                <a:latin typeface="'Noto Sans SC', 'PingFang SC', 'Microsoft YaHei', sans-serif"/>
               </a:rPr>
               <a:t>2026 Q2</a:t>
             </a:r>
@@ -3671,7 +3671,7 @@
                 <a:solidFill>
                   <a:srgbClr val="9C9588"/>
                 </a:solidFill>
-                <a:latin typeface="PingFang SC"/>
+                <a:latin typeface="'Noto Sans SC', 'PingFang SC', 'Microsoft YaHei', sans-serif"/>
               </a:rPr>
               <a:t>AUDIENCE</a:t>
             </a:r>
@@ -3706,7 +3706,7 @@
                 <a:solidFill>
                   <a:srgbClr val="1A1815"/>
                 </a:solidFill>
-                <a:latin typeface="PingFang SC"/>
+                <a:latin typeface="'Noto Sans SC', 'PingFang SC', 'Microsoft YaHei', sans-serif"/>
               </a:rPr>
               <a:t>企业客户 / 投资人</a:t>
             </a:r>
@@ -3741,7 +3741,7 @@
                 <a:solidFill>
                   <a:srgbClr val="9C9588"/>
                 </a:solidFill>
-                <a:latin typeface="PingFang SC"/>
+                <a:latin typeface="'Noto Sans SC', 'PingFang SC', 'Microsoft YaHei', sans-serif"/>
               </a:rPr>
               <a:t>Dify 企业介绍</a:t>
             </a:r>
@@ -3776,7 +3776,7 @@
                 <a:solidFill>
                   <a:srgbClr val="9C9588"/>
                 </a:solidFill>
-                <a:latin typeface="SF Mono"/>
+                <a:latin typeface="'IBM Plex Mono', 'SF Mono', 'JetBrains Mono', Menlo, monospace"/>
               </a:rPr>
               <a:t>01 / 08</a:t>
             </a:r>
@@ -3931,7 +3931,7 @@
                 <a:solidFill>
                   <a:srgbClr val="D4956B"/>
                 </a:solidFill>
-                <a:latin typeface="PingFang SC"/>
+                <a:latin typeface="'Noto Sans SC', 'PingFang SC', 'Microsoft YaHei', sans-serif"/>
               </a:rPr>
               <a:t>全球开发者</a:t>
             </a:r>
@@ -3966,7 +3966,7 @@
                 <a:solidFill>
                   <a:srgbClr val="1A1815"/>
                 </a:solidFill>
-                <a:latin typeface="PingFang SC"/>
+                <a:latin typeface="'Noto Sans SC', 'PingFang SC', 'Microsoft YaHei', sans-serif"/>
               </a:rPr>
               <a:t>180</a:t>
             </a:r>
@@ -4001,7 +4001,7 @@
                 <a:solidFill>
                   <a:srgbClr val="5C5548"/>
                 </a:solidFill>
-                <a:latin typeface="PingFang SC"/>
+                <a:latin typeface="'Noto Sans SC', 'PingFang SC', 'Microsoft YaHei', sans-serif"/>
               </a:rPr>
               <a:t>万+</a:t>
             </a:r>
@@ -4036,7 +4036,7 @@
                 <a:solidFill>
                   <a:srgbClr val="7A8B5E"/>
                 </a:solidFill>
-                <a:latin typeface="PingFang SC"/>
+                <a:latin typeface="'Noto Sans SC', 'PingFang SC', 'Microsoft YaHei', sans-serif"/>
               </a:rPr>
               <a:t>↑ 180% YoY</a:t>
             </a:r>
@@ -4114,7 +4114,7 @@
                 <a:solidFill>
                   <a:srgbClr val="5C5548"/>
                 </a:solidFill>
-                <a:latin typeface="PingFang SC"/>
+                <a:latin typeface="'Noto Sans SC', 'PingFang SC', 'Microsoft YaHei', sans-serif"/>
               </a:rPr>
               <a:t>覆盖 130+ 个国家与地区</a:t>
             </a:r>
@@ -4200,7 +4200,7 @@
                 <a:solidFill>
                   <a:srgbClr val="D4956B"/>
                 </a:solidFill>
-                <a:latin typeface="PingFang SC"/>
+                <a:latin typeface="'Noto Sans SC', 'PingFang SC', 'Microsoft YaHei', sans-serif"/>
               </a:rPr>
               <a:t>企业客户</a:t>
             </a:r>
@@ -4235,7 +4235,7 @@
                 <a:solidFill>
                   <a:srgbClr val="1A1815"/>
                 </a:solidFill>
-                <a:latin typeface="PingFang SC"/>
+                <a:latin typeface="'Noto Sans SC', 'PingFang SC', 'Microsoft YaHei', sans-serif"/>
               </a:rPr>
               <a:t>12000</a:t>
             </a:r>
@@ -4270,7 +4270,7 @@
                 <a:solidFill>
                   <a:srgbClr val="5C5548"/>
                 </a:solidFill>
-                <a:latin typeface="PingFang SC"/>
+                <a:latin typeface="'Noto Sans SC', 'PingFang SC', 'Microsoft YaHei', sans-serif"/>
               </a:rPr>
               <a:t>+</a:t>
             </a:r>
@@ -4305,7 +4305,7 @@
                 <a:solidFill>
                   <a:srgbClr val="7A8B5E"/>
                 </a:solidFill>
-                <a:latin typeface="PingFang SC"/>
+                <a:latin typeface="'Noto Sans SC', 'PingFang SC', 'Microsoft YaHei', sans-serif"/>
               </a:rPr>
               <a:t>↑ Fortune 500 中的 23 家</a:t>
             </a:r>
@@ -4383,7 +4383,7 @@
                 <a:solidFill>
                   <a:srgbClr val="5C5548"/>
                 </a:solidFill>
-                <a:latin typeface="PingFang SC"/>
+                <a:latin typeface="'Noto Sans SC', 'PingFang SC', 'Microsoft YaHei', sans-serif"/>
               </a:rPr>
               <a:t>金融、零售、教育、政务皆有落地</a:t>
             </a:r>
@@ -4418,7 +4418,7 @@
                 <a:solidFill>
                   <a:srgbClr val="9C9588"/>
                 </a:solidFill>
-                <a:latin typeface="PingFang SC"/>
+                <a:latin typeface="'Noto Sans SC', 'PingFang SC', 'Microsoft YaHei', sans-serif"/>
               </a:rPr>
               <a:t>Dify 企业介绍</a:t>
             </a:r>
@@ -4453,7 +4453,7 @@
                 <a:solidFill>
                   <a:srgbClr val="9C9588"/>
                 </a:solidFill>
-                <a:latin typeface="SF Mono"/>
+                <a:latin typeface="'IBM Plex Mono', 'SF Mono', 'JetBrains Mono', Menlo, monospace"/>
               </a:rPr>
               <a:t>02 / 08</a:t>
             </a:r>
@@ -4608,7 +4608,7 @@
                 <a:solidFill>
                   <a:srgbClr val="D4956B"/>
                 </a:solidFill>
-                <a:latin typeface="PingFang SC"/>
+                <a:latin typeface="'Noto Sans SC', 'PingFang SC', 'Microsoft YaHei', sans-serif"/>
               </a:rPr>
               <a:t>为什么选择 Dify</a:t>
             </a:r>
@@ -4643,7 +4643,7 @@
                 <a:solidFill>
                   <a:srgbClr val="1A1815"/>
                 </a:solidFill>
-                <a:latin typeface="PingFang SC"/>
+                <a:latin typeface="'Noto Sans SC', 'PingFang SC', 'Microsoft YaHei', sans-serif"/>
               </a:rPr>
               <a:t>把模型能力和业务流程缝起来</a:t>
             </a:r>
@@ -4682,7 +4682,7 @@
                 <a:solidFill>
                   <a:srgbClr val="5C5548"/>
                 </a:solidFill>
-                <a:latin typeface="PingFang SC"/>
+                <a:latin typeface="'Noto Sans SC', 'PingFang SC', 'Microsoft YaHei', sans-serif"/>
               </a:rPr>
               <a:t>Dify 不是又一个聊天机器人，而是把 LLM 能力变成稳定可交付的业务流程。从 prompt 编排到工具调用、从知识库到日志评测，全链路可观测、可回滚。</a:t>
             </a:r>
@@ -4698,7 +4698,7 @@
                 <a:solidFill>
                   <a:srgbClr val="5C5548"/>
                 </a:solidFill>
-                <a:latin typeface="PingFang SC"/>
+                <a:latin typeface="'Noto Sans SC', 'PingFang SC', 'Microsoft YaHei', sans-serif"/>
               </a:rPr>
               <a:t>工程团队不需要重复造轮子。市场团队不需要等着 IT 排期。运维团队不需要担心 token 失控。</a:t>
             </a:r>
@@ -4784,7 +4784,7 @@
                 <a:solidFill>
                   <a:srgbClr val="1A1815"/>
                 </a:solidFill>
-                <a:latin typeface="PingFang SC"/>
+                <a:latin typeface="'Noto Sans SC', 'PingFang SC', 'Microsoft YaHei', sans-serif"/>
               </a:rPr>
               <a:t>核心模块</a:t>
             </a:r>
@@ -4864,7 +4864,7 @@
                 <a:solidFill>
                   <a:srgbClr val="FFFFFF"/>
                 </a:solidFill>
-                <a:latin typeface="PingFang SC"/>
+                <a:latin typeface="'Noto Sans SC', 'PingFang SC', 'Microsoft YaHei', sans-serif"/>
               </a:rPr>
               <a:t>01</a:t>
             </a:r>
@@ -4899,7 +4899,7 @@
                 <a:solidFill>
                   <a:srgbClr val="1A1815"/>
                 </a:solidFill>
-                <a:latin typeface="PingFang SC"/>
+                <a:latin typeface="'Noto Sans SC', 'PingFang SC', 'Microsoft YaHei', sans-serif"/>
               </a:rPr>
               <a:t>Workflow</a:t>
             </a:r>
@@ -4934,7 +4934,7 @@
                 <a:solidFill>
                   <a:srgbClr val="5C5548"/>
                 </a:solidFill>
-                <a:latin typeface="PingFang SC"/>
+                <a:latin typeface="'Noto Sans SC', 'PingFang SC', 'Microsoft YaHei', sans-serif"/>
               </a:rPr>
               <a:t>可视化编排</a:t>
             </a:r>
@@ -5014,7 +5014,7 @@
                 <a:solidFill>
                   <a:srgbClr val="FFFFFF"/>
                 </a:solidFill>
-                <a:latin typeface="PingFang SC"/>
+                <a:latin typeface="'Noto Sans SC', 'PingFang SC', 'Microsoft YaHei', sans-serif"/>
               </a:rPr>
               <a:t>02</a:t>
             </a:r>
@@ -5049,7 +5049,7 @@
                 <a:solidFill>
                   <a:srgbClr val="1A1815"/>
                 </a:solidFill>
-                <a:latin typeface="PingFang SC"/>
+                <a:latin typeface="'Noto Sans SC', 'PingFang SC', 'Microsoft YaHei', sans-serif"/>
               </a:rPr>
               <a:t>Agent</a:t>
             </a:r>
@@ -5084,7 +5084,7 @@
                 <a:solidFill>
                   <a:srgbClr val="5C5548"/>
                 </a:solidFill>
-                <a:latin typeface="PingFang SC"/>
+                <a:latin typeface="'Noto Sans SC', 'PingFang SC', 'Microsoft YaHei', sans-serif"/>
               </a:rPr>
               <a:t>工具调用框架</a:t>
             </a:r>
@@ -5164,7 +5164,7 @@
                 <a:solidFill>
                   <a:srgbClr val="FFFFFF"/>
                 </a:solidFill>
-                <a:latin typeface="PingFang SC"/>
+                <a:latin typeface="'Noto Sans SC', 'PingFang SC', 'Microsoft YaHei', sans-serif"/>
               </a:rPr>
               <a:t>03</a:t>
             </a:r>
@@ -5199,7 +5199,7 @@
                 <a:solidFill>
                   <a:srgbClr val="1A1815"/>
                 </a:solidFill>
-                <a:latin typeface="PingFang SC"/>
+                <a:latin typeface="'Noto Sans SC', 'PingFang SC', 'Microsoft YaHei', sans-serif"/>
               </a:rPr>
               <a:t>Knowledge</a:t>
             </a:r>
@@ -5234,7 +5234,7 @@
                 <a:solidFill>
                   <a:srgbClr val="5C5548"/>
                 </a:solidFill>
-                <a:latin typeface="PingFang SC"/>
+                <a:latin typeface="'Noto Sans SC', 'PingFang SC', 'Microsoft YaHei', sans-serif"/>
               </a:rPr>
               <a:t>RAG 引擎</a:t>
             </a:r>
@@ -5314,7 +5314,7 @@
                 <a:solidFill>
                   <a:srgbClr val="FFFFFF"/>
                 </a:solidFill>
-                <a:latin typeface="PingFang SC"/>
+                <a:latin typeface="'Noto Sans SC', 'PingFang SC', 'Microsoft YaHei', sans-serif"/>
               </a:rPr>
               <a:t>04</a:t>
             </a:r>
@@ -5349,7 +5349,7 @@
                 <a:solidFill>
                   <a:srgbClr val="1A1815"/>
                 </a:solidFill>
-                <a:latin typeface="PingFang SC"/>
+                <a:latin typeface="'Noto Sans SC', 'PingFang SC', 'Microsoft YaHei', sans-serif"/>
               </a:rPr>
               <a:t>LLMOps</a:t>
             </a:r>
@@ -5384,7 +5384,7 @@
                 <a:solidFill>
                   <a:srgbClr val="5C5548"/>
                 </a:solidFill>
-                <a:latin typeface="PingFang SC"/>
+                <a:latin typeface="'Noto Sans SC', 'PingFang SC', 'Microsoft YaHei', sans-serif"/>
               </a:rPr>
               <a:t>评测与监控</a:t>
             </a:r>
@@ -5419,7 +5419,7 @@
                 <a:solidFill>
                   <a:srgbClr val="9C9588"/>
                 </a:solidFill>
-                <a:latin typeface="PingFang SC"/>
+                <a:latin typeface="'Noto Sans SC', 'PingFang SC', 'Microsoft YaHei', sans-serif"/>
               </a:rPr>
               <a:t>Dify 企业介绍</a:t>
             </a:r>
@@ -5454,7 +5454,7 @@
                 <a:solidFill>
                   <a:srgbClr val="9C9588"/>
                 </a:solidFill>
-                <a:latin typeface="SF Mono"/>
+                <a:latin typeface="'IBM Plex Mono', 'SF Mono', 'JetBrains Mono', Menlo, monospace"/>
               </a:rPr>
               <a:t>03 / 08</a:t>
             </a:r>
@@ -5609,7 +5609,7 @@
                 <a:solidFill>
                   <a:srgbClr val="D4956B"/>
                 </a:solidFill>
-                <a:latin typeface="PingFang SC"/>
+                <a:latin typeface="'Noto Sans SC', 'PingFang SC', 'Microsoft YaHei', sans-serif"/>
               </a:rPr>
               <a:t>搭建一个 AI 应用</a:t>
             </a:r>
@@ -5644,7 +5644,7 @@
                 <a:solidFill>
                   <a:srgbClr val="1A1815"/>
                 </a:solidFill>
-                <a:latin typeface="PingFang SC"/>
+                <a:latin typeface="'Noto Sans SC', 'PingFang SC', 'Microsoft YaHei', sans-serif"/>
               </a:rPr>
               <a:t>5</a:t>
             </a:r>
@@ -5679,7 +5679,7 @@
                 <a:solidFill>
                   <a:srgbClr val="5C5548"/>
                 </a:solidFill>
-                <a:latin typeface="PingFang SC"/>
+                <a:latin typeface="'Noto Sans SC', 'PingFang SC', 'Microsoft YaHei', sans-serif"/>
               </a:rPr>
               <a:t>分钟</a:t>
             </a:r>
@@ -5757,7 +5757,7 @@
                 <a:solidFill>
                   <a:srgbClr val="5C5548"/>
                 </a:solidFill>
-                <a:latin typeface="PingFang SC"/>
+                <a:latin typeface="'Noto Sans SC', 'PingFang SC', 'Microsoft YaHei', sans-serif"/>
               </a:rPr>
               <a:t>从模板到上线</a:t>
             </a:r>
@@ -5843,7 +5843,7 @@
                 <a:solidFill>
                   <a:srgbClr val="D4956B"/>
                 </a:solidFill>
-                <a:latin typeface="PingFang SC"/>
+                <a:latin typeface="'Noto Sans SC', 'PingFang SC', 'Microsoft YaHei', sans-serif"/>
               </a:rPr>
               <a:t>支持模型数</a:t>
             </a:r>
@@ -5878,7 +5878,7 @@
                 <a:solidFill>
                   <a:srgbClr val="1A1815"/>
                 </a:solidFill>
-                <a:latin typeface="PingFang SC"/>
+                <a:latin typeface="'Noto Sans SC', 'PingFang SC', 'Microsoft YaHei', sans-serif"/>
               </a:rPr>
               <a:t>200</a:t>
             </a:r>
@@ -5913,7 +5913,7 @@
                 <a:solidFill>
                   <a:srgbClr val="5C5548"/>
                 </a:solidFill>
-                <a:latin typeface="PingFang SC"/>
+                <a:latin typeface="'Noto Sans SC', 'PingFang SC', 'Microsoft YaHei', sans-serif"/>
               </a:rPr>
               <a:t>+</a:t>
             </a:r>
@@ -5991,7 +5991,7 @@
                 <a:solidFill>
                   <a:srgbClr val="5C5548"/>
                 </a:solidFill>
-                <a:latin typeface="PingFang SC"/>
+                <a:latin typeface="'Noto Sans SC', 'PingFang SC', 'Microsoft YaHei', sans-serif"/>
               </a:rPr>
               <a:t>OpenAI / Anthropic / 国产</a:t>
             </a:r>
@@ -6077,7 +6077,7 @@
                 <a:solidFill>
                   <a:srgbClr val="D4956B"/>
                 </a:solidFill>
-                <a:latin typeface="PingFang SC"/>
+                <a:latin typeface="'Noto Sans SC', 'PingFang SC', 'Microsoft YaHei', sans-serif"/>
               </a:rPr>
               <a:t>可观测性</a:t>
             </a:r>
@@ -6112,7 +6112,7 @@
                 <a:solidFill>
                   <a:srgbClr val="1A1815"/>
                 </a:solidFill>
-                <a:latin typeface="PingFang SC"/>
+                <a:latin typeface="'Noto Sans SC', 'PingFang SC', 'Microsoft YaHei', sans-serif"/>
               </a:rPr>
               <a:t>100</a:t>
             </a:r>
@@ -6147,7 +6147,7 @@
                 <a:solidFill>
                   <a:srgbClr val="5C5548"/>
                 </a:solidFill>
-                <a:latin typeface="PingFang SC"/>
+                <a:latin typeface="'Noto Sans SC', 'PingFang SC', 'Microsoft YaHei', sans-serif"/>
               </a:rPr>
               <a:t>%</a:t>
             </a:r>
@@ -6225,7 +6225,7 @@
                 <a:solidFill>
                   <a:srgbClr val="5C5548"/>
                 </a:solidFill>
-                <a:latin typeface="PingFang SC"/>
+                <a:latin typeface="'Noto Sans SC', 'PingFang SC', 'Microsoft YaHei', sans-serif"/>
               </a:rPr>
               <a:t>全链路日志与评测</a:t>
             </a:r>
@@ -6260,7 +6260,7 @@
                 <a:solidFill>
                   <a:srgbClr val="9C9588"/>
                 </a:solidFill>
-                <a:latin typeface="PingFang SC"/>
+                <a:latin typeface="'Noto Sans SC', 'PingFang SC', 'Microsoft YaHei', sans-serif"/>
               </a:rPr>
               <a:t>Dify 企业介绍</a:t>
             </a:r>
@@ -6295,7 +6295,7 @@
                 <a:solidFill>
                   <a:srgbClr val="9C9588"/>
                 </a:solidFill>
-                <a:latin typeface="SF Mono"/>
+                <a:latin typeface="'IBM Plex Mono', 'SF Mono', 'JetBrains Mono', Menlo, monospace"/>
               </a:rPr>
               <a:t>04 / 08</a:t>
             </a:r>
@@ -6495,7 +6495,7 @@
                 <a:solidFill>
                   <a:srgbClr val="1A1815"/>
                 </a:solidFill>
-                <a:latin typeface="PingFang SC"/>
+                <a:latin typeface="'Noto Serif SC', 'Playfair Display', 'Times New Roman', serif"/>
               </a:rPr>
               <a:t>AI 应用的瓶颈不是模型，而是工程化。</a:t>
             </a:r>
@@ -6573,7 +6573,7 @@
                 <a:solidFill>
                   <a:srgbClr val="1A1815"/>
                 </a:solidFill>
-                <a:latin typeface="PingFang SC"/>
+                <a:latin typeface="'Noto Sans SC', 'PingFang SC', 'Microsoft YaHei', sans-serif"/>
               </a:rPr>
               <a:t>Dify 创始团队</a:t>
             </a:r>
@@ -6608,7 +6608,7 @@
                 <a:solidFill>
                   <a:srgbClr val="9C9588"/>
                 </a:solidFill>
-                <a:latin typeface="PingFang SC"/>
+                <a:latin typeface="'Noto Sans SC', 'PingFang SC', 'Microsoft YaHei', sans-serif"/>
               </a:rPr>
               <a:t>2024 年技术分享会</a:t>
             </a:r>
@@ -6694,7 +6694,7 @@
                 <a:solidFill>
                   <a:srgbClr val="D4956B"/>
                 </a:solidFill>
-                <a:latin typeface="PingFang SC"/>
+                <a:latin typeface="'Noto Sans SC', 'PingFang SC', 'Microsoft YaHei', sans-serif"/>
               </a:rPr>
               <a:t>模型延迟</a:t>
             </a:r>
@@ -6729,7 +6729,7 @@
                 <a:solidFill>
                   <a:srgbClr val="1A1815"/>
                 </a:solidFill>
-                <a:latin typeface="PingFang SC"/>
+                <a:latin typeface="'Noto Sans SC', 'PingFang SC', 'Microsoft YaHei', sans-serif"/>
               </a:rPr>
               <a:t>&lt;200</a:t>
             </a:r>
@@ -6744,7 +6744,7 @@
         </p:nvSpPr>
         <p:spPr>
           <a:xfrm>
-            <a:off x="914377" y="2000250"/>
+            <a:off x="914377" y="1800225"/>
             <a:ext cx="1447763" cy="219075"/>
           </a:xfrm>
           <a:prstGeom prst="rect">
@@ -6764,7 +6764,7 @@
                 <a:solidFill>
                   <a:srgbClr val="5C5548"/>
                 </a:solidFill>
-                <a:latin typeface="PingFang SC"/>
+                <a:latin typeface="'Noto Sans SC', 'PingFang SC', 'Microsoft YaHei', sans-serif"/>
               </a:rPr>
               <a:t>ms</a:t>
             </a:r>
@@ -6779,7 +6779,7 @@
         </p:nvSpPr>
         <p:spPr>
           <a:xfrm>
-            <a:off x="914377" y="2390775"/>
+            <a:off x="914377" y="2209800"/>
             <a:ext cx="571485" cy="28575"/>
           </a:xfrm>
           <a:prstGeom prst="rect">
@@ -6893,7 +6893,7 @@
                 <a:solidFill>
                   <a:srgbClr val="D4956B"/>
                 </a:solidFill>
-                <a:latin typeface="PingFang SC"/>
+                <a:latin typeface="'Noto Sans SC', 'PingFang SC', 'Microsoft YaHei', sans-serif"/>
               </a:rPr>
               <a:t>成本下降</a:t>
             </a:r>
@@ -6928,7 +6928,7 @@
                 <a:solidFill>
                   <a:srgbClr val="1A1815"/>
                 </a:solidFill>
-                <a:latin typeface="PingFang SC"/>
+                <a:latin typeface="'Noto Sans SC', 'PingFang SC', 'Microsoft YaHei', sans-serif"/>
               </a:rPr>
               <a:t>60</a:t>
             </a:r>
@@ -6963,7 +6963,7 @@
                 <a:solidFill>
                   <a:srgbClr val="5C5548"/>
                 </a:solidFill>
-                <a:latin typeface="PingFang SC"/>
+                <a:latin typeface="'Noto Sans SC', 'PingFang SC', 'Microsoft YaHei', sans-serif"/>
               </a:rPr>
               <a:t>%</a:t>
             </a:r>
@@ -7092,7 +7092,7 @@
                 <a:solidFill>
                   <a:srgbClr val="D4956B"/>
                 </a:solidFill>
-                <a:latin typeface="PingFang SC"/>
+                <a:latin typeface="'Noto Sans SC', 'PingFang SC', 'Microsoft YaHei', sans-serif"/>
               </a:rPr>
               <a:t>上线周期</a:t>
             </a:r>
@@ -7127,7 +7127,7 @@
                 <a:solidFill>
                   <a:srgbClr val="1A1815"/>
                 </a:solidFill>
-                <a:latin typeface="PingFang SC"/>
+                <a:latin typeface="'Noto Sans SC', 'PingFang SC', 'Microsoft YaHei', sans-serif"/>
               </a:rPr>
               <a:t>1/10</a:t>
             </a:r>
@@ -7205,7 +7205,7 @@
                 <a:solidFill>
                   <a:srgbClr val="5C5548"/>
                 </a:solidFill>
-                <a:latin typeface="PingFang SC"/>
+                <a:latin typeface="'Noto Sans SC', 'PingFang SC', 'Microsoft YaHei', sans-serif"/>
               </a:rPr>
               <a:t>对比传统开发</a:t>
             </a:r>
@@ -7291,7 +7291,7 @@
                 <a:solidFill>
                   <a:srgbClr val="D4956B"/>
                 </a:solidFill>
-                <a:latin typeface="PingFang SC"/>
+                <a:latin typeface="'Noto Sans SC', 'PingFang SC', 'Microsoft YaHei', sans-serif"/>
               </a:rPr>
               <a:t>客户留存</a:t>
             </a:r>
@@ -7326,7 +7326,7 @@
                 <a:solidFill>
                   <a:srgbClr val="1A1815"/>
                 </a:solidFill>
-                <a:latin typeface="PingFang SC"/>
+                <a:latin typeface="'Noto Sans SC', 'PingFang SC', 'Microsoft YaHei', sans-serif"/>
               </a:rPr>
               <a:t>94</a:t>
             </a:r>
@@ -7361,7 +7361,7 @@
                 <a:solidFill>
                   <a:srgbClr val="5C5548"/>
                 </a:solidFill>
-                <a:latin typeface="PingFang SC"/>
+                <a:latin typeface="'Noto Sans SC', 'PingFang SC', 'Microsoft YaHei', sans-serif"/>
               </a:rPr>
               <a:t>%</a:t>
             </a:r>
@@ -7439,7 +7439,7 @@
                 <a:solidFill>
                   <a:srgbClr val="9C9588"/>
                 </a:solidFill>
-                <a:latin typeface="PingFang SC"/>
+                <a:latin typeface="'Noto Sans SC', 'PingFang SC', 'Microsoft YaHei', sans-serif"/>
               </a:rPr>
               <a:t>Dify 企业介绍</a:t>
             </a:r>
@@ -7474,7 +7474,7 @@
                 <a:solidFill>
                   <a:srgbClr val="9C9588"/>
                 </a:solidFill>
-                <a:latin typeface="SF Mono"/>
+                <a:latin typeface="'IBM Plex Mono', 'SF Mono', 'JetBrains Mono', Menlo, monospace"/>
               </a:rPr>
               <a:t>05 / 08</a:t>
             </a:r>
@@ -7629,7 +7629,7 @@
                 <a:solidFill>
                   <a:srgbClr val="D4956B"/>
                 </a:solidFill>
-                <a:latin typeface="PingFang SC"/>
+                <a:latin typeface="'Noto Sans SC', 'PingFang SC', 'Microsoft YaHei', sans-serif"/>
               </a:rPr>
               <a:t>ARCHITECTURE</a:t>
             </a:r>
@@ -7664,7 +7664,7 @@
                 <a:solidFill>
                   <a:srgbClr val="1A1815"/>
                 </a:solidFill>
-                <a:latin typeface="PingFang SC"/>
+                <a:latin typeface="'Noto Sans SC', 'PingFang SC', 'Microsoft YaHei', sans-serif"/>
               </a:rPr>
               <a:t>分层架构：从数据层到编排层</a:t>
             </a:r>
@@ -7699,7 +7699,7 @@
                 <a:solidFill>
                   <a:srgbClr val="5C5548"/>
                 </a:solidFill>
-                <a:latin typeface="PingFang SC"/>
+                <a:latin typeface="'Noto Sans SC', 'PingFang SC', 'Microsoft YaHei', sans-serif"/>
               </a:rPr>
               <a:t>每一层都可独立替换，整体可观测</a:t>
             </a:r>
@@ -7785,7 +7785,7 @@
                 <a:solidFill>
                   <a:srgbClr val="1A1815"/>
                 </a:solidFill>
-                <a:latin typeface="PingFang SC"/>
+                <a:latin typeface="'Noto Sans SC', 'PingFang SC', 'Microsoft YaHei', sans-serif"/>
               </a:rPr>
               <a:t>数据层</a:t>
             </a:r>
@@ -7908,7 +7908,7 @@
                 <a:solidFill>
                   <a:srgbClr val="FFFFFF"/>
                 </a:solidFill>
-                <a:latin typeface="PingFang SC"/>
+                <a:latin typeface="'Noto Sans SC', 'PingFang SC', 'Microsoft YaHei', sans-serif"/>
               </a:rPr>
               <a:t>01</a:t>
             </a:r>
@@ -7943,7 +7943,7 @@
                 <a:solidFill>
                   <a:srgbClr val="1A1815"/>
                 </a:solidFill>
-                <a:latin typeface="PingFang SC"/>
+                <a:latin typeface="'Noto Sans SC', 'PingFang SC', 'Microsoft YaHei', sans-serif"/>
               </a:rPr>
               <a:t>向量库</a:t>
             </a:r>
@@ -8023,7 +8023,7 @@
                 <a:solidFill>
                   <a:srgbClr val="FFFFFF"/>
                 </a:solidFill>
-                <a:latin typeface="PingFang SC"/>
+                <a:latin typeface="'Noto Sans SC', 'PingFang SC', 'Microsoft YaHei', sans-serif"/>
               </a:rPr>
               <a:t>02</a:t>
             </a:r>
@@ -8058,7 +8058,7 @@
                 <a:solidFill>
                   <a:srgbClr val="5C5548"/>
                 </a:solidFill>
-                <a:latin typeface="PingFang SC"/>
+                <a:latin typeface="'Noto Sans SC', 'PingFang SC', 'Microsoft YaHei', sans-serif"/>
               </a:rPr>
               <a:t>对象存储</a:t>
             </a:r>
@@ -8138,7 +8138,7 @@
                 <a:solidFill>
                   <a:srgbClr val="FFFFFF"/>
                 </a:solidFill>
-                <a:latin typeface="PingFang SC"/>
+                <a:latin typeface="'Noto Sans SC', 'PingFang SC', 'Microsoft YaHei', sans-serif"/>
               </a:rPr>
               <a:t>03</a:t>
             </a:r>
@@ -8173,7 +8173,7 @@
                 <a:solidFill>
                   <a:srgbClr val="5C5548"/>
                 </a:solidFill>
-                <a:latin typeface="PingFang SC"/>
+                <a:latin typeface="'Noto Sans SC', 'PingFang SC', 'Microsoft YaHei', sans-serif"/>
               </a:rPr>
               <a:t>审计日志</a:t>
             </a:r>
@@ -8259,7 +8259,7 @@
                 <a:solidFill>
                   <a:srgbClr val="1A1815"/>
                 </a:solidFill>
-                <a:latin typeface="PingFang SC"/>
+                <a:latin typeface="'Noto Sans SC', 'PingFang SC', 'Microsoft YaHei', sans-serif"/>
               </a:rPr>
               <a:t>能力层</a:t>
             </a:r>
@@ -8382,7 +8382,7 @@
                 <a:solidFill>
                   <a:srgbClr val="FFFFFF"/>
                 </a:solidFill>
-                <a:latin typeface="PingFang SC"/>
+                <a:latin typeface="'Noto Sans SC', 'PingFang SC', 'Microsoft YaHei', sans-serif"/>
               </a:rPr>
               <a:t>01</a:t>
             </a:r>
@@ -8417,7 +8417,7 @@
                 <a:solidFill>
                   <a:srgbClr val="1A1815"/>
                 </a:solidFill>
-                <a:latin typeface="PingFang SC"/>
+                <a:latin typeface="'Noto Sans SC', 'PingFang SC', 'Microsoft YaHei', sans-serif"/>
               </a:rPr>
               <a:t>模型路由</a:t>
             </a:r>
@@ -8497,7 +8497,7 @@
                 <a:solidFill>
                   <a:srgbClr val="FFFFFF"/>
                 </a:solidFill>
-                <a:latin typeface="PingFang SC"/>
+                <a:latin typeface="'Noto Sans SC', 'PingFang SC', 'Microsoft YaHei', sans-serif"/>
               </a:rPr>
               <a:t>02</a:t>
             </a:r>
@@ -8532,7 +8532,7 @@
                 <a:solidFill>
                   <a:srgbClr val="5C5548"/>
                 </a:solidFill>
-                <a:latin typeface="PingFang SC"/>
+                <a:latin typeface="'Noto Sans SC', 'PingFang SC', 'Microsoft YaHei', sans-serif"/>
               </a:rPr>
               <a:t>工具调用</a:t>
             </a:r>
@@ -8612,7 +8612,7 @@
                 <a:solidFill>
                   <a:srgbClr val="FFFFFF"/>
                 </a:solidFill>
-                <a:latin typeface="PingFang SC"/>
+                <a:latin typeface="'Noto Sans SC', 'PingFang SC', 'Microsoft YaHei', sans-serif"/>
               </a:rPr>
               <a:t>03</a:t>
             </a:r>
@@ -8647,7 +8647,7 @@
                 <a:solidFill>
                   <a:srgbClr val="5C5548"/>
                 </a:solidFill>
-                <a:latin typeface="PingFang SC"/>
+                <a:latin typeface="'Noto Sans SC', 'PingFang SC', 'Microsoft YaHei', sans-serif"/>
               </a:rPr>
               <a:t>知识检索</a:t>
             </a:r>
@@ -8733,7 +8733,7 @@
                 <a:solidFill>
                   <a:srgbClr val="1A1815"/>
                 </a:solidFill>
-                <a:latin typeface="PingFang SC"/>
+                <a:latin typeface="'Noto Sans SC', 'PingFang SC', 'Microsoft YaHei', sans-serif"/>
               </a:rPr>
               <a:t>编排层</a:t>
             </a:r>
@@ -8856,7 +8856,7 @@
                 <a:solidFill>
                   <a:srgbClr val="FFFFFF"/>
                 </a:solidFill>
-                <a:latin typeface="PingFang SC"/>
+                <a:latin typeface="'Noto Sans SC', 'PingFang SC', 'Microsoft YaHei', sans-serif"/>
               </a:rPr>
               <a:t>01</a:t>
             </a:r>
@@ -8891,7 +8891,7 @@
                 <a:solidFill>
                   <a:srgbClr val="1A1815"/>
                 </a:solidFill>
-                <a:latin typeface="PingFang SC"/>
+                <a:latin typeface="'Noto Sans SC', 'PingFang SC', 'Microsoft YaHei', sans-serif"/>
               </a:rPr>
               <a:t>Workflow</a:t>
             </a:r>
@@ -8971,7 +8971,7 @@
                 <a:solidFill>
                   <a:srgbClr val="FFFFFF"/>
                 </a:solidFill>
-                <a:latin typeface="PingFang SC"/>
+                <a:latin typeface="'Noto Sans SC', 'PingFang SC', 'Microsoft YaHei', sans-serif"/>
               </a:rPr>
               <a:t>02</a:t>
             </a:r>
@@ -9006,7 +9006,7 @@
                 <a:solidFill>
                   <a:srgbClr val="5C5548"/>
                 </a:solidFill>
-                <a:latin typeface="PingFang SC"/>
+                <a:latin typeface="'Noto Sans SC', 'PingFang SC', 'Microsoft YaHei', sans-serif"/>
               </a:rPr>
               <a:t>Agent</a:t>
             </a:r>
@@ -9086,7 +9086,7 @@
                 <a:solidFill>
                   <a:srgbClr val="FFFFFF"/>
                 </a:solidFill>
-                <a:latin typeface="PingFang SC"/>
+                <a:latin typeface="'Noto Sans SC', 'PingFang SC', 'Microsoft YaHei', sans-serif"/>
               </a:rPr>
               <a:t>03</a:t>
             </a:r>
@@ -9121,7 +9121,7 @@
                 <a:solidFill>
                   <a:srgbClr val="5C5548"/>
                 </a:solidFill>
-                <a:latin typeface="PingFang SC"/>
+                <a:latin typeface="'Noto Sans SC', 'PingFang SC', 'Microsoft YaHei', sans-serif"/>
               </a:rPr>
               <a:t>Chat 流</a:t>
             </a:r>
@@ -9156,7 +9156,7 @@
                 <a:solidFill>
                   <a:srgbClr val="9C9588"/>
                 </a:solidFill>
-                <a:latin typeface="PingFang SC"/>
+                <a:latin typeface="'Noto Sans SC', 'PingFang SC', 'Microsoft YaHei', sans-serif"/>
               </a:rPr>
               <a:t>Dify 企业介绍</a:t>
             </a:r>
@@ -9191,7 +9191,7 @@
                 <a:solidFill>
                   <a:srgbClr val="9C9588"/>
                 </a:solidFill>
-                <a:latin typeface="SF Mono"/>
+                <a:latin typeface="'IBM Plex Mono', 'SF Mono', 'JetBrains Mono', Menlo, monospace"/>
               </a:rPr>
               <a:t>06 / 08</a:t>
             </a:r>
@@ -9346,7 +9346,7 @@
                 <a:solidFill>
                   <a:srgbClr val="D4956B"/>
                 </a:solidFill>
-                <a:latin typeface="PingFang SC"/>
+                <a:latin typeface="'Noto Sans SC', 'PingFang SC', 'Microsoft YaHei', sans-serif"/>
               </a:rPr>
               <a:t>模型调用量月环比</a:t>
             </a:r>
@@ -9381,7 +9381,7 @@
                 <a:solidFill>
                   <a:srgbClr val="1A1815"/>
                 </a:solidFill>
-                <a:latin typeface="PingFang SC"/>
+                <a:latin typeface="'Noto Sans SC', 'PingFang SC', 'Microsoft YaHei', sans-serif"/>
               </a:rPr>
               <a:t>GPT-4</a:t>
             </a:r>
@@ -9508,7 +9508,7 @@
                 <a:solidFill>
                   <a:srgbClr val="1A1815"/>
                 </a:solidFill>
-                <a:latin typeface="PingFang SC"/>
+                <a:latin typeface="'Noto Sans SC', 'PingFang SC', 'Microsoft YaHei', sans-serif"/>
               </a:rPr>
               <a:t>42 亿</a:t>
             </a:r>
@@ -9543,7 +9543,7 @@
                 <a:solidFill>
                   <a:srgbClr val="1A1815"/>
                 </a:solidFill>
-                <a:latin typeface="PingFang SC"/>
+                <a:latin typeface="'Noto Sans SC', 'PingFang SC', 'Microsoft YaHei', sans-serif"/>
               </a:rPr>
               <a:t>Claude</a:t>
             </a:r>
@@ -9670,7 +9670,7 @@
                 <a:solidFill>
                   <a:srgbClr val="1A1815"/>
                 </a:solidFill>
-                <a:latin typeface="PingFang SC"/>
+                <a:latin typeface="'Noto Sans SC', 'PingFang SC', 'Microsoft YaHei', sans-serif"/>
               </a:rPr>
               <a:t>31 亿</a:t>
             </a:r>
@@ -9705,7 +9705,7 @@
                 <a:solidFill>
                   <a:srgbClr val="1A1815"/>
                 </a:solidFill>
-                <a:latin typeface="PingFang SC"/>
+                <a:latin typeface="'Noto Sans SC', 'PingFang SC', 'Microsoft YaHei', sans-serif"/>
               </a:rPr>
               <a:t>Gemini</a:t>
             </a:r>
@@ -9832,7 +9832,7 @@
                 <a:solidFill>
                   <a:srgbClr val="1A1815"/>
                 </a:solidFill>
-                <a:latin typeface="PingFang SC"/>
+                <a:latin typeface="'Noto Sans SC', 'PingFang SC', 'Microsoft YaHei', sans-serif"/>
               </a:rPr>
               <a:t>18 亿</a:t>
             </a:r>
@@ -9918,7 +9918,7 @@
                 <a:solidFill>
                   <a:srgbClr val="D4956B"/>
                 </a:solidFill>
-                <a:latin typeface="PingFang SC"/>
+                <a:latin typeface="'Noto Sans SC', 'PingFang SC', 'Microsoft YaHei', sans-serif"/>
               </a:rPr>
               <a:t>运行指标</a:t>
             </a:r>
@@ -9933,7 +9933,7 @@
         </p:nvSpPr>
         <p:spPr>
           <a:xfrm>
-            <a:off x="8496087" y="1257300"/>
+            <a:off x="8496087" y="1228725"/>
             <a:ext cx="2781230" cy="542925"/>
           </a:xfrm>
           <a:prstGeom prst="rect">
@@ -9953,7 +9953,7 @@
                 <a:solidFill>
                   <a:srgbClr val="1A1815"/>
                 </a:solidFill>
-                <a:latin typeface="PingFang SC"/>
+                <a:latin typeface="'Noto Sans SC', 'PingFang SC', 'Microsoft YaHei', sans-serif"/>
               </a:rPr>
               <a:t>187</a:t>
             </a:r>
@@ -9968,7 +9968,7 @@
         </p:nvSpPr>
         <p:spPr>
           <a:xfrm>
-            <a:off x="9315216" y="1562100"/>
+            <a:off x="9315216" y="1533525"/>
             <a:ext cx="371465" cy="180975"/>
           </a:xfrm>
           <a:prstGeom prst="rect">
@@ -9988,7 +9988,7 @@
                 <a:solidFill>
                   <a:srgbClr val="D4956B"/>
                 </a:solidFill>
-                <a:latin typeface="PingFang SC"/>
+                <a:latin typeface="'Noto Sans SC', 'PingFang SC', 'Microsoft YaHei', sans-serif"/>
               </a:rPr>
               <a:t>ms</a:t>
             </a:r>
@@ -10003,7 +10003,7 @@
         </p:nvSpPr>
         <p:spPr>
           <a:xfrm>
-            <a:off x="9581910" y="1533525"/>
+            <a:off x="9581910" y="1504950"/>
             <a:ext cx="1600159" cy="219075"/>
           </a:xfrm>
           <a:prstGeom prst="rect">
@@ -10023,7 +10023,7 @@
                 <a:solidFill>
                   <a:srgbClr val="5C5548"/>
                 </a:solidFill>
-                <a:latin typeface="PingFang SC"/>
+                <a:latin typeface="'Noto Sans SC', 'PingFang SC', 'Microsoft YaHei', sans-serif"/>
               </a:rPr>
               <a:t>API 平均响应</a:t>
             </a:r>
@@ -10038,7 +10038,7 @@
         </p:nvSpPr>
         <p:spPr>
           <a:xfrm>
-            <a:off x="8496087" y="1752600"/>
+            <a:off x="8496087" y="1762125"/>
             <a:ext cx="1390615" cy="171450"/>
           </a:xfrm>
           <a:prstGeom prst="rect">
@@ -10058,7 +10058,7 @@
                 <a:solidFill>
                   <a:srgbClr val="9C9588"/>
                 </a:solidFill>
-                <a:latin typeface="PingFang SC"/>
+                <a:latin typeface="'Noto Sans SC', 'PingFang SC', 'Microsoft YaHei', sans-serif"/>
               </a:rPr>
               <a:t>99 分位</a:t>
             </a:r>
@@ -10073,7 +10073,7 @@
         </p:nvSpPr>
         <p:spPr>
           <a:xfrm>
-            <a:off x="8496087" y="1866900"/>
+            <a:off x="8496087" y="1895475"/>
             <a:ext cx="1390615" cy="238125"/>
           </a:xfrm>
           <a:prstGeom prst="rect">
@@ -10093,7 +10093,7 @@
                 <a:solidFill>
                   <a:srgbClr val="1A1815"/>
                 </a:solidFill>
-                <a:latin typeface="PingFang SC"/>
+                <a:latin typeface="'Noto Sans SC', 'PingFang SC', 'Microsoft YaHei', sans-serif"/>
               </a:rPr>
               <a:t>420 ms</a:t>
             </a:r>
@@ -10108,7 +10108,7 @@
         </p:nvSpPr>
         <p:spPr>
           <a:xfrm>
-            <a:off x="9886702" y="1752600"/>
+            <a:off x="9886702" y="1762125"/>
             <a:ext cx="1390615" cy="171450"/>
           </a:xfrm>
           <a:prstGeom prst="rect">
@@ -10128,7 +10128,7 @@
                 <a:solidFill>
                   <a:srgbClr val="9C9588"/>
                 </a:solidFill>
-                <a:latin typeface="PingFang SC"/>
+                <a:latin typeface="'Noto Sans SC', 'PingFang SC', 'Microsoft YaHei', sans-serif"/>
               </a:rPr>
               <a:t>错误率</a:t>
             </a:r>
@@ -10143,7 +10143,7 @@
         </p:nvSpPr>
         <p:spPr>
           <a:xfrm>
-            <a:off x="9886702" y="1866900"/>
+            <a:off x="9886702" y="1895475"/>
             <a:ext cx="1390615" cy="238125"/>
           </a:xfrm>
           <a:prstGeom prst="rect">
@@ -10163,7 +10163,7 @@
                 <a:solidFill>
                   <a:srgbClr val="1A1815"/>
                 </a:solidFill>
-                <a:latin typeface="PingFang SC"/>
+                <a:latin typeface="'Noto Sans SC', 'PingFang SC', 'Microsoft YaHei', sans-serif"/>
               </a:rPr>
               <a:t>0.03%</a:t>
             </a:r>
@@ -10290,7 +10290,7 @@
                 <a:solidFill>
                   <a:srgbClr val="5C5548"/>
                 </a:solidFill>
-                <a:latin typeface="PingFang SC"/>
+                <a:latin typeface="'Noto Sans SC', 'PingFang SC', 'Microsoft YaHei', sans-serif"/>
               </a:rPr>
               <a:t>SLA 99% 达标</a:t>
             </a:r>
@@ -10376,7 +10376,7 @@
                 <a:solidFill>
                   <a:srgbClr val="D4956B"/>
                 </a:solidFill>
-                <a:latin typeface="PingFang SC"/>
+                <a:latin typeface="'Noto Sans SC', 'PingFang SC', 'Microsoft YaHei', sans-serif"/>
               </a:rPr>
               <a:t>界面预览</a:t>
             </a:r>
@@ -10462,7 +10462,7 @@
                 <a:solidFill>
                   <a:srgbClr val="5C5548"/>
                 </a:solidFill>
-                <a:latin typeface="PingFang SC"/>
+                <a:latin typeface="'Noto Sans SC', 'PingFang SC', 'Microsoft YaHei', sans-serif"/>
               </a:rPr>
               <a:t>Workflow 编排画布概念图</a:t>
             </a:r>
@@ -10548,7 +10548,7 @@
                 <a:solidFill>
                   <a:srgbClr val="1A1815"/>
                 </a:solidFill>
-                <a:latin typeface="PingFang SC"/>
+                <a:latin typeface="'Noto Sans SC', 'PingFang SC', 'Microsoft YaHei', sans-serif"/>
               </a:rPr>
               <a:t>落地案例</a:t>
             </a:r>
@@ -10587,7 +10587,7 @@
                 <a:solidFill>
                   <a:srgbClr val="5C5548"/>
                 </a:solidFill>
-                <a:latin typeface="PingFang SC"/>
+                <a:latin typeface="'Noto Sans SC', 'PingFang SC', 'Microsoft YaHei', sans-serif"/>
               </a:rPr>
               <a:t>某头部券商：用 Dify 把 17 个内部系统的接口能力封装成 Agent 工具，把客户经理日均处理工单数从 23 提升到 78。</a:t>
             </a:r>
@@ -10603,7 +10603,7 @@
                 <a:solidFill>
                   <a:srgbClr val="5C5548"/>
                 </a:solidFill>
-                <a:latin typeface="PingFang SC"/>
+                <a:latin typeface="'Noto Sans SC', 'PingFang SC', 'Microsoft YaHei', sans-serif"/>
               </a:rPr>
               <a:t>某省级政务平台：基于 Dify 知识库构建公文助手，问答准确率从 62% 提升到 91%。</a:t>
             </a:r>
@@ -10638,7 +10638,7 @@
                 <a:solidFill>
                   <a:srgbClr val="9C9588"/>
                 </a:solidFill>
-                <a:latin typeface="PingFang SC"/>
+                <a:latin typeface="'Noto Sans SC', 'PingFang SC', 'Microsoft YaHei', sans-serif"/>
               </a:rPr>
               <a:t>Dify 企业介绍</a:t>
             </a:r>
@@ -10673,7 +10673,7 @@
                 <a:solidFill>
                   <a:srgbClr val="9C9588"/>
                 </a:solidFill>
-                <a:latin typeface="SF Mono"/>
+                <a:latin typeface="'IBM Plex Mono', 'SF Mono', 'JetBrains Mono', Menlo, monospace"/>
               </a:rPr>
               <a:t>07 / 08</a:t>
             </a:r>
@@ -10828,7 +10828,7 @@
                 <a:solidFill>
                   <a:srgbClr val="D4956B"/>
                 </a:solidFill>
-                <a:latin typeface="PingFang SC"/>
+                <a:latin typeface="'Noto Sans SC', 'PingFang SC', 'Microsoft YaHei', sans-serif"/>
               </a:rPr>
               <a:t>THANK YOU</a:t>
             </a:r>
@@ -10863,7 +10863,7 @@
                 <a:solidFill>
                   <a:srgbClr val="1A1815"/>
                 </a:solidFill>
-                <a:latin typeface="PingFang SC"/>
+                <a:latin typeface="'Noto Sans SC', 'PingFang SC', 'Microsoft YaHei', sans-serif"/>
               </a:rPr>
               <a:t>让我们一起，把 AI 装进每一个业务流程</a:t>
             </a:r>
@@ -10898,7 +10898,7 @@
                 <a:solidFill>
                   <a:srgbClr val="5C5548"/>
                 </a:solidFill>
-                <a:latin typeface="PingFang SC"/>
+                <a:latin typeface="'Noto Sans SC', 'PingFang SC', 'Microsoft YaHei', sans-serif"/>
               </a:rPr>
               <a:t>联系 sales@dify.ai 安排技术演示</a:t>
             </a:r>
@@ -10976,7 +10976,7 @@
                 <a:solidFill>
                   <a:srgbClr val="5C5548"/>
                 </a:solidFill>
-                <a:latin typeface="PingFang SC"/>
+                <a:latin typeface="'Noto Sans SC', 'PingFang SC', 'Microsoft YaHei', sans-serif"/>
               </a:rPr>
               <a:t>Dify · 2026</a:t>
             </a:r>
@@ -11011,7 +11011,7 @@
                 <a:solidFill>
                   <a:srgbClr val="9C9588"/>
                 </a:solidFill>
-                <a:latin typeface="PingFang SC"/>
+                <a:latin typeface="'Noto Sans SC', 'PingFang SC', 'Microsoft YaHei', sans-serif"/>
               </a:rPr>
               <a:t>Dify 企业介绍</a:t>
             </a:r>
@@ -11046,7 +11046,7 @@
                 <a:solidFill>
                   <a:srgbClr val="9C9588"/>
                 </a:solidFill>
-                <a:latin typeface="SF Mono"/>
+                <a:latin typeface="'IBM Plex Mono', 'SF Mono', 'JetBrains Mono', Menlo, monospace"/>
               </a:rPr>
               <a:t>08 / 08</a:t>
             </a:r>

--- a/examples/dify-intro/deck.pptx
+++ b/examples/dify-intro/deck.pptx
@@ -3095,36 +3095,694 @@
         <p:nvPr/>
       </p:nvGrpSpPr>
       <p:grpSpPr/>
-      <p:pic>
-        <p:nvPicPr>
-          <p:cNvPr id="2" name="Picture 1" descr="01-cover.png"/>
-          <p:cNvPicPr>
-            <a:picLocks noChangeAspect="1"/>
-          </p:cNvPicPr>
-          <p:nvPr/>
-        </p:nvPicPr>
-        <p:blipFill>
-          <a:blip r:embed="rId2">
-            <a:extLst>
-              <a:ext uri="{96DAC541-7B7A-43D3-8B79-37D633B846F1}">
-                <asvg:svgBlip xmlns:asvg="http://schemas.microsoft.com/office/drawing/2016/SVG/main" r:embed="rId3"/>
-              </a:ext>
-            </a:extLst>
-          </a:blip>
-          <a:stretch>
-            <a:fillRect/>
-          </a:stretch>
-        </p:blipFill>
-        <p:spPr>
-          <a:xfrm>
-            <a:off x="0" y="0"/>
-            <a:ext cx="12191695" cy="6858000"/>
-          </a:xfrm>
-          <a:prstGeom prst="rect">
-            <a:avLst/>
-          </a:prstGeom>
-        </p:spPr>
-      </p:pic>
+      <p:sp>
+        <p:nvSpPr>
+          <p:cNvPr id="2" name="Rectangle 1"/>
+          <p:cNvSpPr/>
+          <p:nvPr/>
+        </p:nvSpPr>
+        <p:spPr>
+          <a:xfrm>
+            <a:off x="-91440" y="-91440"/>
+            <a:ext cx="12374575" cy="7040880"/>
+          </a:xfrm>
+          <a:prstGeom prst="rect">
+            <a:avLst/>
+          </a:prstGeom>
+          <a:ln>
+            <a:noFill/>
+          </a:ln>
+          <a:gradFill>
+            <a:gsLst>
+              <a:gs pos="0">
+                <a:srgbClr val="F5F0E8"/>
+              </a:gs>
+              <a:gs pos="100000">
+                <a:srgbClr val="EDE6D8"/>
+              </a:gs>
+            </a:gsLst>
+            <a:lin ang="5400000" scaled="1"/>
+          </a:gradFill>
+        </p:spPr>
+        <p:style>
+          <a:lnRef idx="1">
+            <a:schemeClr val="accent1"/>
+          </a:lnRef>
+          <a:fillRef idx="3">
+            <a:schemeClr val="accent1"/>
+          </a:fillRef>
+          <a:effectRef idx="2">
+            <a:schemeClr val="accent1"/>
+          </a:effectRef>
+          <a:fontRef idx="minor">
+            <a:schemeClr val="lt1"/>
+          </a:fontRef>
+        </p:style>
+        <p:txBody>
+          <a:bodyPr rtlCol="0" anchor="ctr"/>
+          <a:lstStyle/>
+          <a:p>
+            <a:pPr algn="ctr"/>
+          </a:p>
+        </p:txBody>
+      </p:sp>
+      <p:sp>
+        <p:nvSpPr>
+          <p:cNvPr id="3" name="Rounded Rectangle 2"/>
+          <p:cNvSpPr/>
+          <p:nvPr/>
+        </p:nvSpPr>
+        <p:spPr>
+          <a:xfrm>
+            <a:off x="533386" y="533400"/>
+            <a:ext cx="11124921" cy="5505450"/>
+          </a:xfrm>
+          <a:prstGeom prst="roundRect">
+            <a:avLst>
+              <a:gd name="adj" fmla="val 3875"/>
+            </a:avLst>
+          </a:prstGeom>
+          <a:solidFill>
+            <a:srgbClr val="FFFFFF">
+              <a:alpha val="82000"/>
+            </a:srgbClr>
+          </a:solidFill>
+          <a:ln w="12700">
+            <a:solidFill>
+              <a:srgbClr val="1A1815">
+                <a:alpha val="7000"/>
+              </a:srgbClr>
+            </a:solidFill>
+          </a:ln>
+        </p:spPr>
+        <p:style>
+          <a:lnRef idx="1">
+            <a:schemeClr val="accent1"/>
+          </a:lnRef>
+          <a:fillRef idx="3">
+            <a:schemeClr val="accent1"/>
+          </a:fillRef>
+          <a:effectRef idx="2">
+            <a:schemeClr val="accent1"/>
+          </a:effectRef>
+          <a:fontRef idx="minor">
+            <a:schemeClr val="lt1"/>
+          </a:fontRef>
+        </p:style>
+        <p:txBody>
+          <a:bodyPr rtlCol="0" anchor="ctr"/>
+          <a:lstStyle/>
+          <a:p>
+            <a:pPr algn="ctr"/>
+          </a:p>
+        </p:txBody>
+      </p:sp>
+      <p:sp>
+        <p:nvSpPr>
+          <p:cNvPr id="4" name="TextBox 3"/>
+          <p:cNvSpPr txBox="1"/>
+          <p:nvPr/>
+        </p:nvSpPr>
+        <p:spPr>
+          <a:xfrm>
+            <a:off x="914377" y="3990975"/>
+            <a:ext cx="10362940" cy="1743075"/>
+          </a:xfrm>
+          <a:prstGeom prst="rect">
+            <a:avLst/>
+          </a:prstGeom>
+          <a:noFill/>
+        </p:spPr>
+        <p:txBody>
+          <a:bodyPr wrap="square" lIns="0" rIns="0" tIns="0" bIns="0">
+            <a:spAutoFit/>
+          </a:bodyPr>
+          <a:lstStyle/>
+          <a:p>
+            <a:pPr algn="r"/>
+            <a:r>
+              <a:rPr sz="11925" b="1" i="0" spc="600">
+                <a:latin typeface="Noto Sans SC"/>
+                <a:solidFill>
+                  <a:srgbClr val="B8654A">
+                    <a:alpha val="6999"/>
+                  </a:srgbClr>
+                </a:solidFill>
+              </a:rPr>
+              <a:t>2026 FUTURE</a:t>
+            </a:r>
+          </a:p>
+        </p:txBody>
+      </p:sp>
+      <p:sp>
+        <p:nvSpPr>
+          <p:cNvPr id="5" name="TextBox 4"/>
+          <p:cNvSpPr txBox="1"/>
+          <p:nvPr/>
+        </p:nvSpPr>
+        <p:spPr>
+          <a:xfrm>
+            <a:off x="914377" y="952500"/>
+            <a:ext cx="10362940" cy="190500"/>
+          </a:xfrm>
+          <a:prstGeom prst="rect">
+            <a:avLst/>
+          </a:prstGeom>
+          <a:noFill/>
+        </p:spPr>
+        <p:txBody>
+          <a:bodyPr wrap="square" lIns="0" rIns="0" tIns="0" bIns="0">
+            <a:spAutoFit/>
+          </a:bodyPr>
+          <a:lstStyle/>
+          <a:p>
+            <a:pPr algn="l"/>
+            <a:r>
+              <a:rPr sz="1050" b="1" i="0" spc="300">
+                <a:solidFill>
+                  <a:srgbClr val="D4956B"/>
+                </a:solidFill>
+                <a:latin typeface="Noto Sans SC"/>
+              </a:rPr>
+              <a:t>PRODUCT INTRO · 2026 Q2</a:t>
+            </a:r>
+          </a:p>
+        </p:txBody>
+      </p:sp>
+      <p:sp>
+        <p:nvSpPr>
+          <p:cNvPr id="6" name="TextBox 5"/>
+          <p:cNvSpPr txBox="1"/>
+          <p:nvPr/>
+        </p:nvSpPr>
+        <p:spPr>
+          <a:xfrm>
+            <a:off x="914377" y="1257300"/>
+            <a:ext cx="10362940" cy="638175"/>
+          </a:xfrm>
+          <a:prstGeom prst="rect">
+            <a:avLst/>
+          </a:prstGeom>
+          <a:noFill/>
+        </p:spPr>
+        <p:txBody>
+          <a:bodyPr wrap="square" lIns="0" rIns="0" tIns="0" bIns="0">
+            <a:spAutoFit/>
+          </a:bodyPr>
+          <a:lstStyle/>
+          <a:p>
+            <a:pPr algn="l"/>
+            <a:r>
+              <a:rPr sz="4200" b="1" i="0">
+                <a:solidFill>
+                  <a:srgbClr val="1A1815"/>
+                </a:solidFill>
+                <a:latin typeface="Noto Sans SC"/>
+              </a:rPr>
+              <a:t>Dify 企业介绍</a:t>
+            </a:r>
+          </a:p>
+        </p:txBody>
+      </p:sp>
+      <p:sp>
+        <p:nvSpPr>
+          <p:cNvPr id="7" name="TextBox 6"/>
+          <p:cNvSpPr txBox="1"/>
+          <p:nvPr/>
+        </p:nvSpPr>
+        <p:spPr>
+          <a:xfrm>
+            <a:off x="914377" y="1895475"/>
+            <a:ext cx="10362940" cy="638175"/>
+          </a:xfrm>
+          <a:prstGeom prst="rect">
+            <a:avLst/>
+          </a:prstGeom>
+          <a:noFill/>
+        </p:spPr>
+        <p:txBody>
+          <a:bodyPr wrap="square" lIns="0" rIns="0" tIns="0" bIns="0">
+            <a:spAutoFit/>
+          </a:bodyPr>
+          <a:lstStyle/>
+          <a:p>
+            <a:pPr algn="l"/>
+            <a:r>
+              <a:rPr sz="4200" b="1" i="0">
+                <a:solidFill>
+                  <a:srgbClr val="1A1815"/>
+                </a:solidFill>
+                <a:latin typeface="Noto Sans SC"/>
+              </a:rPr>
+              <a:t>下一代 AI 应用开发平台</a:t>
+            </a:r>
+          </a:p>
+        </p:txBody>
+      </p:sp>
+      <p:sp>
+        <p:nvSpPr>
+          <p:cNvPr id="8" name="Rounded Rectangle 7"/>
+          <p:cNvSpPr/>
+          <p:nvPr/>
+        </p:nvSpPr>
+        <p:spPr>
+          <a:xfrm>
+            <a:off x="914377" y="2571750"/>
+            <a:ext cx="1447763" cy="228600"/>
+          </a:xfrm>
+          <a:prstGeom prst="roundRect">
+            <a:avLst>
+              <a:gd name="adj" fmla="val 50000"/>
+            </a:avLst>
+          </a:prstGeom>
+          <a:solidFill>
+            <a:srgbClr val="B8654A">
+              <a:alpha val="22000"/>
+            </a:srgbClr>
+          </a:solidFill>
+          <a:ln w="6350">
+            <a:solidFill>
+              <a:srgbClr val="B8654A">
+                <a:alpha val="55000"/>
+              </a:srgbClr>
+            </a:solidFill>
+          </a:ln>
+        </p:spPr>
+        <p:style>
+          <a:lnRef idx="1">
+            <a:schemeClr val="accent1"/>
+          </a:lnRef>
+          <a:fillRef idx="3">
+            <a:schemeClr val="accent1"/>
+          </a:fillRef>
+          <a:effectRef idx="2">
+            <a:schemeClr val="accent1"/>
+          </a:effectRef>
+          <a:fontRef idx="minor">
+            <a:schemeClr val="lt1"/>
+          </a:fontRef>
+        </p:style>
+        <p:txBody>
+          <a:bodyPr rtlCol="0" anchor="ctr"/>
+          <a:lstStyle/>
+          <a:p>
+            <a:pPr algn="ctr"/>
+          </a:p>
+        </p:txBody>
+      </p:sp>
+      <p:sp>
+        <p:nvSpPr>
+          <p:cNvPr id="9" name="TextBox 8"/>
+          <p:cNvSpPr txBox="1"/>
+          <p:nvPr/>
+        </p:nvSpPr>
+        <p:spPr>
+          <a:xfrm>
+            <a:off x="914377" y="2600325"/>
+            <a:ext cx="1447763" cy="171450"/>
+          </a:xfrm>
+          <a:prstGeom prst="rect">
+            <a:avLst/>
+          </a:prstGeom>
+          <a:noFill/>
+        </p:spPr>
+        <p:txBody>
+          <a:bodyPr wrap="square" lIns="0" rIns="0" tIns="0" bIns="0">
+            <a:spAutoFit/>
+          </a:bodyPr>
+          <a:lstStyle/>
+          <a:p>
+            <a:pPr algn="ctr"/>
+            <a:r>
+              <a:rPr sz="900" b="1" i="0" spc="100">
+                <a:solidFill>
+                  <a:srgbClr val="FFFFFF"/>
+                </a:solidFill>
+                <a:latin typeface="Noto Sans SC"/>
+              </a:rPr>
+              <a:t>PRODUCTION-READY</a:t>
+            </a:r>
+          </a:p>
+        </p:txBody>
+      </p:sp>
+      <p:sp>
+        <p:nvSpPr>
+          <p:cNvPr id="10" name="TextBox 9"/>
+          <p:cNvSpPr txBox="1"/>
+          <p:nvPr/>
+        </p:nvSpPr>
+        <p:spPr>
+          <a:xfrm>
+            <a:off x="914377" y="3048000"/>
+            <a:ext cx="10362940" cy="371475"/>
+          </a:xfrm>
+          <a:prstGeom prst="rect">
+            <a:avLst/>
+          </a:prstGeom>
+          <a:noFill/>
+        </p:spPr>
+        <p:txBody>
+          <a:bodyPr wrap="square" lIns="0" rIns="0" tIns="0" bIns="0">
+            <a:spAutoFit/>
+          </a:bodyPr>
+          <a:lstStyle/>
+          <a:p>
+            <a:pPr algn="l"/>
+            <a:r>
+              <a:rPr sz="2100" b="0" i="0">
+                <a:solidFill>
+                  <a:srgbClr val="5C5548"/>
+                </a:solidFill>
+                <a:latin typeface="Noto Sans SC"/>
+              </a:rPr>
+              <a:t>把生成式 AI 的不确定，变成产品落地的确定</a:t>
+            </a:r>
+          </a:p>
+        </p:txBody>
+      </p:sp>
+      <p:sp>
+        <p:nvSpPr>
+          <p:cNvPr id="11" name="Rectangle 10"/>
+          <p:cNvSpPr/>
+          <p:nvPr/>
+        </p:nvSpPr>
+        <p:spPr>
+          <a:xfrm>
+            <a:off x="914377" y="4895850"/>
+            <a:ext cx="1142971" cy="38100"/>
+          </a:xfrm>
+          <a:prstGeom prst="rect">
+            <a:avLst/>
+          </a:prstGeom>
+          <a:solidFill>
+            <a:srgbClr val="B8654A"/>
+          </a:solidFill>
+          <a:ln>
+            <a:noFill/>
+          </a:ln>
+        </p:spPr>
+        <p:style>
+          <a:lnRef idx="1">
+            <a:schemeClr val="accent1"/>
+          </a:lnRef>
+          <a:fillRef idx="3">
+            <a:schemeClr val="accent1"/>
+          </a:fillRef>
+          <a:effectRef idx="2">
+            <a:schemeClr val="accent1"/>
+          </a:effectRef>
+          <a:fontRef idx="minor">
+            <a:schemeClr val="lt1"/>
+          </a:fontRef>
+        </p:style>
+        <p:txBody>
+          <a:bodyPr rtlCol="0" anchor="ctr"/>
+          <a:lstStyle/>
+          <a:p>
+            <a:pPr algn="ctr"/>
+          </a:p>
+        </p:txBody>
+      </p:sp>
+      <p:sp>
+        <p:nvSpPr>
+          <p:cNvPr id="12" name="TextBox 11"/>
+          <p:cNvSpPr txBox="1"/>
+          <p:nvPr/>
+        </p:nvSpPr>
+        <p:spPr>
+          <a:xfrm>
+            <a:off x="914377" y="5181600"/>
+            <a:ext cx="3447963" cy="171450"/>
+          </a:xfrm>
+          <a:prstGeom prst="rect">
+            <a:avLst/>
+          </a:prstGeom>
+          <a:noFill/>
+        </p:spPr>
+        <p:txBody>
+          <a:bodyPr wrap="square" lIns="0" rIns="0" tIns="0" bIns="0">
+            <a:spAutoFit/>
+          </a:bodyPr>
+          <a:lstStyle/>
+          <a:p>
+            <a:pPr algn="l"/>
+            <a:r>
+              <a:rPr sz="900" b="0" i="0" spc="200">
+                <a:solidFill>
+                  <a:srgbClr val="9C9588"/>
+                </a:solidFill>
+                <a:latin typeface="Noto Sans SC"/>
+              </a:rPr>
+              <a:t>PRESENTED BY</a:t>
+            </a:r>
+          </a:p>
+        </p:txBody>
+      </p:sp>
+      <p:sp>
+        <p:nvSpPr>
+          <p:cNvPr id="13" name="TextBox 12"/>
+          <p:cNvSpPr txBox="1"/>
+          <p:nvPr/>
+        </p:nvSpPr>
+        <p:spPr>
+          <a:xfrm>
+            <a:off x="914377" y="5391150"/>
+            <a:ext cx="3447963" cy="209550"/>
+          </a:xfrm>
+          <a:prstGeom prst="rect">
+            <a:avLst/>
+          </a:prstGeom>
+          <a:noFill/>
+        </p:spPr>
+        <p:txBody>
+          <a:bodyPr wrap="square" lIns="0" rIns="0" tIns="0" bIns="0">
+            <a:spAutoFit/>
+          </a:bodyPr>
+          <a:lstStyle/>
+          <a:p>
+            <a:pPr algn="l"/>
+            <a:r>
+              <a:rPr sz="1350" b="1" i="0">
+                <a:solidFill>
+                  <a:srgbClr val="1A1815"/>
+                </a:solidFill>
+                <a:latin typeface="Noto Sans SC"/>
+              </a:rPr>
+              <a:t>Dify Team</a:t>
+            </a:r>
+          </a:p>
+        </p:txBody>
+      </p:sp>
+      <p:sp>
+        <p:nvSpPr>
+          <p:cNvPr id="14" name="TextBox 13"/>
+          <p:cNvSpPr txBox="1"/>
+          <p:nvPr/>
+        </p:nvSpPr>
+        <p:spPr>
+          <a:xfrm>
+            <a:off x="4362340" y="5181600"/>
+            <a:ext cx="3447963" cy="171450"/>
+          </a:xfrm>
+          <a:prstGeom prst="rect">
+            <a:avLst/>
+          </a:prstGeom>
+          <a:noFill/>
+        </p:spPr>
+        <p:txBody>
+          <a:bodyPr wrap="square" lIns="0" rIns="0" tIns="0" bIns="0">
+            <a:spAutoFit/>
+          </a:bodyPr>
+          <a:lstStyle/>
+          <a:p>
+            <a:pPr algn="l"/>
+            <a:r>
+              <a:rPr sz="900" b="0" i="0" spc="200">
+                <a:solidFill>
+                  <a:srgbClr val="9C9588"/>
+                </a:solidFill>
+                <a:latin typeface="Noto Sans SC"/>
+              </a:rPr>
+              <a:t>DATE</a:t>
+            </a:r>
+          </a:p>
+        </p:txBody>
+      </p:sp>
+      <p:sp>
+        <p:nvSpPr>
+          <p:cNvPr id="15" name="TextBox 14"/>
+          <p:cNvSpPr txBox="1"/>
+          <p:nvPr/>
+        </p:nvSpPr>
+        <p:spPr>
+          <a:xfrm>
+            <a:off x="4362340" y="5391150"/>
+            <a:ext cx="3447963" cy="209550"/>
+          </a:xfrm>
+          <a:prstGeom prst="rect">
+            <a:avLst/>
+          </a:prstGeom>
+          <a:noFill/>
+        </p:spPr>
+        <p:txBody>
+          <a:bodyPr wrap="square" lIns="0" rIns="0" tIns="0" bIns="0">
+            <a:spAutoFit/>
+          </a:bodyPr>
+          <a:lstStyle/>
+          <a:p>
+            <a:pPr algn="l"/>
+            <a:r>
+              <a:rPr sz="1350" b="1" i="0">
+                <a:solidFill>
+                  <a:srgbClr val="1A1815"/>
+                </a:solidFill>
+                <a:latin typeface="Noto Sans SC"/>
+              </a:rPr>
+              <a:t>2026 Q2</a:t>
+            </a:r>
+          </a:p>
+        </p:txBody>
+      </p:sp>
+      <p:sp>
+        <p:nvSpPr>
+          <p:cNvPr id="16" name="TextBox 15"/>
+          <p:cNvSpPr txBox="1"/>
+          <p:nvPr/>
+        </p:nvSpPr>
+        <p:spPr>
+          <a:xfrm>
+            <a:off x="7810304" y="5181600"/>
+            <a:ext cx="3447963" cy="171450"/>
+          </a:xfrm>
+          <a:prstGeom prst="rect">
+            <a:avLst/>
+          </a:prstGeom>
+          <a:noFill/>
+        </p:spPr>
+        <p:txBody>
+          <a:bodyPr wrap="square" lIns="0" rIns="0" tIns="0" bIns="0">
+            <a:spAutoFit/>
+          </a:bodyPr>
+          <a:lstStyle/>
+          <a:p>
+            <a:pPr algn="l"/>
+            <a:r>
+              <a:rPr sz="900" b="0" i="0" spc="200">
+                <a:solidFill>
+                  <a:srgbClr val="9C9588"/>
+                </a:solidFill>
+                <a:latin typeface="Noto Sans SC"/>
+              </a:rPr>
+              <a:t>AUDIENCE</a:t>
+            </a:r>
+          </a:p>
+        </p:txBody>
+      </p:sp>
+      <p:sp>
+        <p:nvSpPr>
+          <p:cNvPr id="17" name="TextBox 16"/>
+          <p:cNvSpPr txBox="1"/>
+          <p:nvPr/>
+        </p:nvSpPr>
+        <p:spPr>
+          <a:xfrm>
+            <a:off x="7810304" y="5391150"/>
+            <a:ext cx="3447963" cy="209550"/>
+          </a:xfrm>
+          <a:prstGeom prst="rect">
+            <a:avLst/>
+          </a:prstGeom>
+          <a:noFill/>
+        </p:spPr>
+        <p:txBody>
+          <a:bodyPr wrap="square" lIns="0" rIns="0" tIns="0" bIns="0">
+            <a:spAutoFit/>
+          </a:bodyPr>
+          <a:lstStyle/>
+          <a:p>
+            <a:pPr algn="l"/>
+            <a:r>
+              <a:rPr sz="1350" b="1" i="0">
+                <a:solidFill>
+                  <a:srgbClr val="1A1815"/>
+                </a:solidFill>
+                <a:latin typeface="Noto Sans SC"/>
+              </a:rPr>
+              <a:t>企业客户 / 投资人</a:t>
+            </a:r>
+          </a:p>
+        </p:txBody>
+      </p:sp>
+      <p:sp>
+        <p:nvSpPr>
+          <p:cNvPr id="18" name="TextBox 17"/>
+          <p:cNvSpPr txBox="1"/>
+          <p:nvPr/>
+        </p:nvSpPr>
+        <p:spPr>
+          <a:xfrm>
+            <a:off x="533386" y="6610350"/>
+            <a:ext cx="5714857" cy="190500"/>
+          </a:xfrm>
+          <a:prstGeom prst="rect">
+            <a:avLst/>
+          </a:prstGeom>
+          <a:noFill/>
+        </p:spPr>
+        <p:txBody>
+          <a:bodyPr wrap="square" lIns="0" rIns="0" tIns="0" bIns="0">
+            <a:spAutoFit/>
+          </a:bodyPr>
+          <a:lstStyle/>
+          <a:p>
+            <a:pPr algn="l"/>
+            <a:r>
+              <a:rPr sz="975" b="0" i="0">
+                <a:solidFill>
+                  <a:srgbClr val="9C9588"/>
+                </a:solidFill>
+                <a:latin typeface="Noto Sans SC"/>
+              </a:rPr>
+              <a:t>Dify 企业介绍</a:t>
+            </a:r>
+          </a:p>
+        </p:txBody>
+      </p:sp>
+      <p:sp>
+        <p:nvSpPr>
+          <p:cNvPr id="19" name="TextBox 18"/>
+          <p:cNvSpPr txBox="1"/>
+          <p:nvPr/>
+        </p:nvSpPr>
+        <p:spPr>
+          <a:xfrm>
+            <a:off x="9753356" y="6610350"/>
+            <a:ext cx="1904952" cy="190500"/>
+          </a:xfrm>
+          <a:prstGeom prst="rect">
+            <a:avLst/>
+          </a:prstGeom>
+          <a:noFill/>
+        </p:spPr>
+        <p:txBody>
+          <a:bodyPr wrap="square" lIns="0" rIns="0" tIns="0" bIns="0">
+            <a:spAutoFit/>
+          </a:bodyPr>
+          <a:lstStyle/>
+          <a:p>
+            <a:pPr algn="r"/>
+            <a:r>
+              <a:rPr sz="975" b="0" i="0">
+                <a:solidFill>
+                  <a:srgbClr val="9C9588"/>
+                </a:solidFill>
+                <a:latin typeface="IBM Plex Mono"/>
+              </a:rPr>
+              <a:t>01 / 08</a:t>
+            </a:r>
+          </a:p>
+        </p:txBody>
+      </p:sp>
     </p:spTree>
   </p:cSld>
   <p:clrMapOvr>
@@ -3143,36 +3801,665 @@
         <p:nvPr/>
       </p:nvGrpSpPr>
       <p:grpSpPr/>
-      <p:pic>
-        <p:nvPicPr>
-          <p:cNvPr id="2" name="Picture 1" descr="02-two-col-symmetric-demo.png"/>
-          <p:cNvPicPr>
-            <a:picLocks noChangeAspect="1"/>
-          </p:cNvPicPr>
-          <p:nvPr/>
-        </p:nvPicPr>
-        <p:blipFill>
-          <a:blip r:embed="rId2">
-            <a:extLst>
-              <a:ext uri="{96DAC541-7B7A-43D3-8B79-37D633B846F1}">
-                <asvg:svgBlip xmlns:asvg="http://schemas.microsoft.com/office/drawing/2016/SVG/main" r:embed="rId3"/>
-              </a:ext>
-            </a:extLst>
-          </a:blip>
-          <a:stretch>
-            <a:fillRect/>
-          </a:stretch>
-        </p:blipFill>
-        <p:spPr>
-          <a:xfrm>
-            <a:off x="0" y="0"/>
-            <a:ext cx="12191695" cy="6858000"/>
-          </a:xfrm>
-          <a:prstGeom prst="rect">
-            <a:avLst/>
-          </a:prstGeom>
-        </p:spPr>
-      </p:pic>
+      <p:sp>
+        <p:nvSpPr>
+          <p:cNvPr id="2" name="Rectangle 1"/>
+          <p:cNvSpPr/>
+          <p:nvPr/>
+        </p:nvSpPr>
+        <p:spPr>
+          <a:xfrm>
+            <a:off x="-91440" y="-91440"/>
+            <a:ext cx="12374575" cy="7040880"/>
+          </a:xfrm>
+          <a:prstGeom prst="rect">
+            <a:avLst/>
+          </a:prstGeom>
+          <a:ln>
+            <a:noFill/>
+          </a:ln>
+          <a:gradFill>
+            <a:gsLst>
+              <a:gs pos="0">
+                <a:srgbClr val="F5F0E8"/>
+              </a:gs>
+              <a:gs pos="100000">
+                <a:srgbClr val="EDE6D8"/>
+              </a:gs>
+            </a:gsLst>
+            <a:lin ang="5400000" scaled="1"/>
+          </a:gradFill>
+        </p:spPr>
+        <p:style>
+          <a:lnRef idx="1">
+            <a:schemeClr val="accent1"/>
+          </a:lnRef>
+          <a:fillRef idx="3">
+            <a:schemeClr val="accent1"/>
+          </a:fillRef>
+          <a:effectRef idx="2">
+            <a:schemeClr val="accent1"/>
+          </a:effectRef>
+          <a:fontRef idx="minor">
+            <a:schemeClr val="lt1"/>
+          </a:fontRef>
+        </p:style>
+        <p:txBody>
+          <a:bodyPr rtlCol="0" anchor="ctr"/>
+          <a:lstStyle/>
+          <a:p>
+            <a:pPr algn="ctr"/>
+          </a:p>
+        </p:txBody>
+      </p:sp>
+      <p:sp>
+        <p:nvSpPr>
+          <p:cNvPr id="3" name="Rounded Rectangle 2"/>
+          <p:cNvSpPr/>
+          <p:nvPr/>
+        </p:nvSpPr>
+        <p:spPr>
+          <a:xfrm>
+            <a:off x="533386" y="533400"/>
+            <a:ext cx="5467213" cy="5505450"/>
+          </a:xfrm>
+          <a:prstGeom prst="roundRect">
+            <a:avLst>
+              <a:gd name="adj" fmla="val 3902"/>
+            </a:avLst>
+          </a:prstGeom>
+          <a:solidFill>
+            <a:srgbClr val="FFFFFF">
+              <a:alpha val="82000"/>
+            </a:srgbClr>
+          </a:solidFill>
+          <a:ln w="12700">
+            <a:solidFill>
+              <a:srgbClr val="1A1815">
+                <a:alpha val="7000"/>
+              </a:srgbClr>
+            </a:solidFill>
+          </a:ln>
+        </p:spPr>
+        <p:style>
+          <a:lnRef idx="1">
+            <a:schemeClr val="accent1"/>
+          </a:lnRef>
+          <a:fillRef idx="3">
+            <a:schemeClr val="accent1"/>
+          </a:fillRef>
+          <a:effectRef idx="2">
+            <a:schemeClr val="accent1"/>
+          </a:effectRef>
+          <a:fontRef idx="minor">
+            <a:schemeClr val="lt1"/>
+          </a:fontRef>
+        </p:style>
+        <p:txBody>
+          <a:bodyPr rtlCol="0" anchor="ctr"/>
+          <a:lstStyle/>
+          <a:p>
+            <a:pPr algn="ctr"/>
+          </a:p>
+        </p:txBody>
+      </p:sp>
+      <p:sp>
+        <p:nvSpPr>
+          <p:cNvPr id="4" name="TextBox 3"/>
+          <p:cNvSpPr txBox="1"/>
+          <p:nvPr/>
+        </p:nvSpPr>
+        <p:spPr>
+          <a:xfrm>
+            <a:off x="914377" y="952500"/>
+            <a:ext cx="4705232" cy="190500"/>
+          </a:xfrm>
+          <a:prstGeom prst="rect">
+            <a:avLst/>
+          </a:prstGeom>
+          <a:noFill/>
+        </p:spPr>
+        <p:txBody>
+          <a:bodyPr wrap="square" lIns="0" rIns="0" tIns="0" bIns="0">
+            <a:spAutoFit/>
+          </a:bodyPr>
+          <a:lstStyle/>
+          <a:p>
+            <a:pPr algn="l"/>
+            <a:r>
+              <a:rPr sz="1050" b="1" i="0" spc="300">
+                <a:solidFill>
+                  <a:srgbClr val="D4956B"/>
+                </a:solidFill>
+                <a:latin typeface="Noto Sans SC"/>
+              </a:rPr>
+              <a:t>全球开发者</a:t>
+            </a:r>
+          </a:p>
+        </p:txBody>
+      </p:sp>
+      <p:sp>
+        <p:nvSpPr>
+          <p:cNvPr id="5" name="TextBox 4"/>
+          <p:cNvSpPr txBox="1"/>
+          <p:nvPr/>
+        </p:nvSpPr>
+        <p:spPr>
+          <a:xfrm>
+            <a:off x="914377" y="1352550"/>
+            <a:ext cx="4705232" cy="1143000"/>
+          </a:xfrm>
+          <a:prstGeom prst="rect">
+            <a:avLst/>
+          </a:prstGeom>
+          <a:noFill/>
+        </p:spPr>
+        <p:txBody>
+          <a:bodyPr wrap="none" lIns="0" rIns="0" tIns="0" bIns="0">
+            <a:spAutoFit/>
+          </a:bodyPr>
+          <a:lstStyle/>
+          <a:p>
+            <a:pPr algn="l"/>
+            <a:r>
+              <a:rPr sz="7500" b="1" i="0">
+                <a:solidFill>
+                  <a:srgbClr val="1A1815"/>
+                </a:solidFill>
+                <a:latin typeface="Noto Sans SC"/>
+              </a:rPr>
+              <a:t>180</a:t>
+            </a:r>
+          </a:p>
+        </p:txBody>
+      </p:sp>
+      <p:sp>
+        <p:nvSpPr>
+          <p:cNvPr id="6" name="TextBox 5"/>
+          <p:cNvSpPr txBox="1"/>
+          <p:nvPr/>
+        </p:nvSpPr>
+        <p:spPr>
+          <a:xfrm>
+            <a:off x="2562160" y="2019300"/>
+            <a:ext cx="504812" cy="371475"/>
+          </a:xfrm>
+          <a:prstGeom prst="rect">
+            <a:avLst/>
+          </a:prstGeom>
+          <a:noFill/>
+        </p:spPr>
+        <p:txBody>
+          <a:bodyPr wrap="square" lIns="0" rIns="0" tIns="0" bIns="0">
+            <a:spAutoFit/>
+          </a:bodyPr>
+          <a:lstStyle/>
+          <a:p>
+            <a:pPr algn="l"/>
+            <a:r>
+              <a:rPr sz="2100" b="1" i="0">
+                <a:solidFill>
+                  <a:srgbClr val="5C5548"/>
+                </a:solidFill>
+                <a:latin typeface="Noto Sans SC"/>
+              </a:rPr>
+              <a:t>万+</a:t>
+            </a:r>
+          </a:p>
+        </p:txBody>
+      </p:sp>
+      <p:sp>
+        <p:nvSpPr>
+          <p:cNvPr id="7" name="TextBox 6"/>
+          <p:cNvSpPr txBox="1"/>
+          <p:nvPr/>
+        </p:nvSpPr>
+        <p:spPr>
+          <a:xfrm>
+            <a:off x="914377" y="2457450"/>
+            <a:ext cx="4705232" cy="285750"/>
+          </a:xfrm>
+          <a:prstGeom prst="rect">
+            <a:avLst/>
+          </a:prstGeom>
+          <a:noFill/>
+        </p:spPr>
+        <p:txBody>
+          <a:bodyPr wrap="square" lIns="0" rIns="0" tIns="0" bIns="0">
+            <a:spAutoFit/>
+          </a:bodyPr>
+          <a:lstStyle/>
+          <a:p>
+            <a:pPr algn="l"/>
+            <a:r>
+              <a:rPr sz="1650" b="1" i="0">
+                <a:solidFill>
+                  <a:srgbClr val="7A8B5E"/>
+                </a:solidFill>
+                <a:latin typeface="Noto Sans SC"/>
+              </a:rPr>
+              <a:t>↑ 180% YoY</a:t>
+            </a:r>
+          </a:p>
+        </p:txBody>
+      </p:sp>
+      <p:sp>
+        <p:nvSpPr>
+          <p:cNvPr id="8" name="Rectangle 7"/>
+          <p:cNvSpPr/>
+          <p:nvPr/>
+        </p:nvSpPr>
+        <p:spPr>
+          <a:xfrm>
+            <a:off x="914377" y="5048250"/>
+            <a:ext cx="571485" cy="28575"/>
+          </a:xfrm>
+          <a:prstGeom prst="rect">
+            <a:avLst/>
+          </a:prstGeom>
+          <a:solidFill>
+            <a:srgbClr val="B8654A"/>
+          </a:solidFill>
+          <a:ln>
+            <a:noFill/>
+          </a:ln>
+        </p:spPr>
+        <p:style>
+          <a:lnRef idx="1">
+            <a:schemeClr val="accent1"/>
+          </a:lnRef>
+          <a:fillRef idx="3">
+            <a:schemeClr val="accent1"/>
+          </a:fillRef>
+          <a:effectRef idx="2">
+            <a:schemeClr val="accent1"/>
+          </a:effectRef>
+          <a:fontRef idx="minor">
+            <a:schemeClr val="lt1"/>
+          </a:fontRef>
+        </p:style>
+        <p:txBody>
+          <a:bodyPr rtlCol="0" anchor="ctr"/>
+          <a:lstStyle/>
+          <a:p>
+            <a:pPr algn="ctr"/>
+          </a:p>
+        </p:txBody>
+      </p:sp>
+      <p:sp>
+        <p:nvSpPr>
+          <p:cNvPr id="9" name="TextBox 8"/>
+          <p:cNvSpPr txBox="1"/>
+          <p:nvPr/>
+        </p:nvSpPr>
+        <p:spPr>
+          <a:xfrm>
+            <a:off x="914377" y="5181600"/>
+            <a:ext cx="4705232" cy="190500"/>
+          </a:xfrm>
+          <a:prstGeom prst="rect">
+            <a:avLst/>
+          </a:prstGeom>
+          <a:noFill/>
+        </p:spPr>
+        <p:txBody>
+          <a:bodyPr wrap="square" lIns="0" rIns="0" tIns="0" bIns="0">
+            <a:spAutoFit/>
+          </a:bodyPr>
+          <a:lstStyle/>
+          <a:p>
+            <a:pPr algn="l"/>
+            <a:r>
+              <a:rPr sz="975" b="0" i="0">
+                <a:solidFill>
+                  <a:srgbClr val="5C5548"/>
+                </a:solidFill>
+                <a:latin typeface="Noto Sans SC"/>
+              </a:rPr>
+              <a:t>覆盖 130+ 个国家与地区</a:t>
+            </a:r>
+          </a:p>
+        </p:txBody>
+      </p:sp>
+      <p:sp>
+        <p:nvSpPr>
+          <p:cNvPr id="10" name="Rounded Rectangle 9"/>
+          <p:cNvSpPr/>
+          <p:nvPr/>
+        </p:nvSpPr>
+        <p:spPr>
+          <a:xfrm>
+            <a:off x="6191095" y="533400"/>
+            <a:ext cx="5467213" cy="5505450"/>
+          </a:xfrm>
+          <a:prstGeom prst="roundRect">
+            <a:avLst>
+              <a:gd name="adj" fmla="val 3902"/>
+            </a:avLst>
+          </a:prstGeom>
+          <a:solidFill>
+            <a:srgbClr val="FFFFFF">
+              <a:alpha val="82000"/>
+            </a:srgbClr>
+          </a:solidFill>
+          <a:ln w="12700">
+            <a:solidFill>
+              <a:srgbClr val="1A1815">
+                <a:alpha val="7000"/>
+              </a:srgbClr>
+            </a:solidFill>
+          </a:ln>
+        </p:spPr>
+        <p:style>
+          <a:lnRef idx="1">
+            <a:schemeClr val="accent1"/>
+          </a:lnRef>
+          <a:fillRef idx="3">
+            <a:schemeClr val="accent1"/>
+          </a:fillRef>
+          <a:effectRef idx="2">
+            <a:schemeClr val="accent1"/>
+          </a:effectRef>
+          <a:fontRef idx="minor">
+            <a:schemeClr val="lt1"/>
+          </a:fontRef>
+        </p:style>
+        <p:txBody>
+          <a:bodyPr rtlCol="0" anchor="ctr"/>
+          <a:lstStyle/>
+          <a:p>
+            <a:pPr algn="ctr"/>
+          </a:p>
+        </p:txBody>
+      </p:sp>
+      <p:sp>
+        <p:nvSpPr>
+          <p:cNvPr id="11" name="TextBox 10"/>
+          <p:cNvSpPr txBox="1"/>
+          <p:nvPr/>
+        </p:nvSpPr>
+        <p:spPr>
+          <a:xfrm>
+            <a:off x="6572085" y="952500"/>
+            <a:ext cx="4705232" cy="190500"/>
+          </a:xfrm>
+          <a:prstGeom prst="rect">
+            <a:avLst/>
+          </a:prstGeom>
+          <a:noFill/>
+        </p:spPr>
+        <p:txBody>
+          <a:bodyPr wrap="square" lIns="0" rIns="0" tIns="0" bIns="0">
+            <a:spAutoFit/>
+          </a:bodyPr>
+          <a:lstStyle/>
+          <a:p>
+            <a:pPr algn="l"/>
+            <a:r>
+              <a:rPr sz="1050" b="1" i="0" spc="300">
+                <a:solidFill>
+                  <a:srgbClr val="D4956B"/>
+                </a:solidFill>
+                <a:latin typeface="Noto Sans SC"/>
+              </a:rPr>
+              <a:t>企业客户</a:t>
+            </a:r>
+          </a:p>
+        </p:txBody>
+      </p:sp>
+      <p:sp>
+        <p:nvSpPr>
+          <p:cNvPr id="12" name="TextBox 11"/>
+          <p:cNvSpPr txBox="1"/>
+          <p:nvPr/>
+        </p:nvSpPr>
+        <p:spPr>
+          <a:xfrm>
+            <a:off x="6572085" y="1352550"/>
+            <a:ext cx="4705232" cy="1143000"/>
+          </a:xfrm>
+          <a:prstGeom prst="rect">
+            <a:avLst/>
+          </a:prstGeom>
+          <a:noFill/>
+        </p:spPr>
+        <p:txBody>
+          <a:bodyPr wrap="none" lIns="0" rIns="0" tIns="0" bIns="0">
+            <a:spAutoFit/>
+          </a:bodyPr>
+          <a:lstStyle/>
+          <a:p>
+            <a:pPr algn="l"/>
+            <a:r>
+              <a:rPr sz="7500" b="1" i="0">
+                <a:solidFill>
+                  <a:srgbClr val="1A1815"/>
+                </a:solidFill>
+                <a:latin typeface="Noto Sans SC"/>
+              </a:rPr>
+              <a:t>12000</a:t>
+            </a:r>
+          </a:p>
+        </p:txBody>
+      </p:sp>
+      <p:sp>
+        <p:nvSpPr>
+          <p:cNvPr id="13" name="TextBox 12"/>
+          <p:cNvSpPr txBox="1"/>
+          <p:nvPr/>
+        </p:nvSpPr>
+        <p:spPr>
+          <a:xfrm>
+            <a:off x="9267593" y="2019300"/>
+            <a:ext cx="342891" cy="371475"/>
+          </a:xfrm>
+          <a:prstGeom prst="rect">
+            <a:avLst/>
+          </a:prstGeom>
+          <a:noFill/>
+        </p:spPr>
+        <p:txBody>
+          <a:bodyPr wrap="square" lIns="0" rIns="0" tIns="0" bIns="0">
+            <a:spAutoFit/>
+          </a:bodyPr>
+          <a:lstStyle/>
+          <a:p>
+            <a:pPr algn="l"/>
+            <a:r>
+              <a:rPr sz="2100" b="1" i="0">
+                <a:solidFill>
+                  <a:srgbClr val="5C5548"/>
+                </a:solidFill>
+                <a:latin typeface="Noto Sans SC"/>
+              </a:rPr>
+              <a:t>+</a:t>
+            </a:r>
+          </a:p>
+        </p:txBody>
+      </p:sp>
+      <p:sp>
+        <p:nvSpPr>
+          <p:cNvPr id="14" name="TextBox 13"/>
+          <p:cNvSpPr txBox="1"/>
+          <p:nvPr/>
+        </p:nvSpPr>
+        <p:spPr>
+          <a:xfrm>
+            <a:off x="6572085" y="2457450"/>
+            <a:ext cx="4705232" cy="285750"/>
+          </a:xfrm>
+          <a:prstGeom prst="rect">
+            <a:avLst/>
+          </a:prstGeom>
+          <a:noFill/>
+        </p:spPr>
+        <p:txBody>
+          <a:bodyPr wrap="square" lIns="0" rIns="0" tIns="0" bIns="0">
+            <a:spAutoFit/>
+          </a:bodyPr>
+          <a:lstStyle/>
+          <a:p>
+            <a:pPr algn="l"/>
+            <a:r>
+              <a:rPr sz="1650" b="1" i="0">
+                <a:solidFill>
+                  <a:srgbClr val="7A8B5E"/>
+                </a:solidFill>
+                <a:latin typeface="Noto Sans SC"/>
+              </a:rPr>
+              <a:t>↑ Fortune 500 中的 23 家</a:t>
+            </a:r>
+          </a:p>
+        </p:txBody>
+      </p:sp>
+      <p:sp>
+        <p:nvSpPr>
+          <p:cNvPr id="15" name="Rectangle 14"/>
+          <p:cNvSpPr/>
+          <p:nvPr/>
+        </p:nvSpPr>
+        <p:spPr>
+          <a:xfrm>
+            <a:off x="6572085" y="5048250"/>
+            <a:ext cx="571485" cy="28575"/>
+          </a:xfrm>
+          <a:prstGeom prst="rect">
+            <a:avLst/>
+          </a:prstGeom>
+          <a:solidFill>
+            <a:srgbClr val="B8654A"/>
+          </a:solidFill>
+          <a:ln>
+            <a:noFill/>
+          </a:ln>
+        </p:spPr>
+        <p:style>
+          <a:lnRef idx="1">
+            <a:schemeClr val="accent1"/>
+          </a:lnRef>
+          <a:fillRef idx="3">
+            <a:schemeClr val="accent1"/>
+          </a:fillRef>
+          <a:effectRef idx="2">
+            <a:schemeClr val="accent1"/>
+          </a:effectRef>
+          <a:fontRef idx="minor">
+            <a:schemeClr val="lt1"/>
+          </a:fontRef>
+        </p:style>
+        <p:txBody>
+          <a:bodyPr rtlCol="0" anchor="ctr"/>
+          <a:lstStyle/>
+          <a:p>
+            <a:pPr algn="ctr"/>
+          </a:p>
+        </p:txBody>
+      </p:sp>
+      <p:sp>
+        <p:nvSpPr>
+          <p:cNvPr id="16" name="TextBox 15"/>
+          <p:cNvSpPr txBox="1"/>
+          <p:nvPr/>
+        </p:nvSpPr>
+        <p:spPr>
+          <a:xfrm>
+            <a:off x="6572085" y="5181600"/>
+            <a:ext cx="4705232" cy="190500"/>
+          </a:xfrm>
+          <a:prstGeom prst="rect">
+            <a:avLst/>
+          </a:prstGeom>
+          <a:noFill/>
+        </p:spPr>
+        <p:txBody>
+          <a:bodyPr wrap="square" lIns="0" rIns="0" tIns="0" bIns="0">
+            <a:spAutoFit/>
+          </a:bodyPr>
+          <a:lstStyle/>
+          <a:p>
+            <a:pPr algn="l"/>
+            <a:r>
+              <a:rPr sz="975" b="0" i="0">
+                <a:solidFill>
+                  <a:srgbClr val="5C5548"/>
+                </a:solidFill>
+                <a:latin typeface="Noto Sans SC"/>
+              </a:rPr>
+              <a:t>金融、零售、教育、政务皆有落地</a:t>
+            </a:r>
+          </a:p>
+        </p:txBody>
+      </p:sp>
+      <p:sp>
+        <p:nvSpPr>
+          <p:cNvPr id="17" name="TextBox 16"/>
+          <p:cNvSpPr txBox="1"/>
+          <p:nvPr/>
+        </p:nvSpPr>
+        <p:spPr>
+          <a:xfrm>
+            <a:off x="533386" y="6610350"/>
+            <a:ext cx="5714857" cy="190500"/>
+          </a:xfrm>
+          <a:prstGeom prst="rect">
+            <a:avLst/>
+          </a:prstGeom>
+          <a:noFill/>
+        </p:spPr>
+        <p:txBody>
+          <a:bodyPr wrap="square" lIns="0" rIns="0" tIns="0" bIns="0">
+            <a:spAutoFit/>
+          </a:bodyPr>
+          <a:lstStyle/>
+          <a:p>
+            <a:pPr algn="l"/>
+            <a:r>
+              <a:rPr sz="975" b="0" i="0">
+                <a:solidFill>
+                  <a:srgbClr val="9C9588"/>
+                </a:solidFill>
+                <a:latin typeface="Noto Sans SC"/>
+              </a:rPr>
+              <a:t>Dify 企业介绍</a:t>
+            </a:r>
+          </a:p>
+        </p:txBody>
+      </p:sp>
+      <p:sp>
+        <p:nvSpPr>
+          <p:cNvPr id="18" name="TextBox 17"/>
+          <p:cNvSpPr txBox="1"/>
+          <p:nvPr/>
+        </p:nvSpPr>
+        <p:spPr>
+          <a:xfrm>
+            <a:off x="9753356" y="6610350"/>
+            <a:ext cx="1904952" cy="190500"/>
+          </a:xfrm>
+          <a:prstGeom prst="rect">
+            <a:avLst/>
+          </a:prstGeom>
+          <a:noFill/>
+        </p:spPr>
+        <p:txBody>
+          <a:bodyPr wrap="square" lIns="0" rIns="0" tIns="0" bIns="0">
+            <a:spAutoFit/>
+          </a:bodyPr>
+          <a:lstStyle/>
+          <a:p>
+            <a:pPr algn="r"/>
+            <a:r>
+              <a:rPr sz="975" b="0" i="0">
+                <a:solidFill>
+                  <a:srgbClr val="9C9588"/>
+                </a:solidFill>
+                <a:latin typeface="IBM Plex Mono"/>
+              </a:rPr>
+              <a:t>02 / 08</a:t>
+            </a:r>
+          </a:p>
+        </p:txBody>
+      </p:sp>
     </p:spTree>
   </p:cSld>
   <p:clrMapOvr>
@@ -3191,36 +4478,989 @@
         <p:nvPr/>
       </p:nvGrpSpPr>
       <p:grpSpPr/>
-      <p:pic>
-        <p:nvPicPr>
-          <p:cNvPr id="2" name="Picture 1" descr="03-two-col-asymmetric-demo.png"/>
-          <p:cNvPicPr>
-            <a:picLocks noChangeAspect="1"/>
-          </p:cNvPicPr>
-          <p:nvPr/>
-        </p:nvPicPr>
-        <p:blipFill>
-          <a:blip r:embed="rId2">
-            <a:extLst>
-              <a:ext uri="{96DAC541-7B7A-43D3-8B79-37D633B846F1}">
-                <asvg:svgBlip xmlns:asvg="http://schemas.microsoft.com/office/drawing/2016/SVG/main" r:embed="rId3"/>
-              </a:ext>
-            </a:extLst>
-          </a:blip>
-          <a:stretch>
-            <a:fillRect/>
-          </a:stretch>
-        </p:blipFill>
-        <p:spPr>
-          <a:xfrm>
-            <a:off x="0" y="0"/>
-            <a:ext cx="12191695" cy="6858000"/>
-          </a:xfrm>
-          <a:prstGeom prst="rect">
-            <a:avLst/>
-          </a:prstGeom>
-        </p:spPr>
-      </p:pic>
+      <p:sp>
+        <p:nvSpPr>
+          <p:cNvPr id="2" name="Rectangle 1"/>
+          <p:cNvSpPr/>
+          <p:nvPr/>
+        </p:nvSpPr>
+        <p:spPr>
+          <a:xfrm>
+            <a:off x="-91440" y="-91440"/>
+            <a:ext cx="12374575" cy="7040880"/>
+          </a:xfrm>
+          <a:prstGeom prst="rect">
+            <a:avLst/>
+          </a:prstGeom>
+          <a:ln>
+            <a:noFill/>
+          </a:ln>
+          <a:gradFill>
+            <a:gsLst>
+              <a:gs pos="0">
+                <a:srgbClr val="F5F0E8"/>
+              </a:gs>
+              <a:gs pos="100000">
+                <a:srgbClr val="EDE6D8"/>
+              </a:gs>
+            </a:gsLst>
+            <a:lin ang="5400000" scaled="1"/>
+          </a:gradFill>
+        </p:spPr>
+        <p:style>
+          <a:lnRef idx="1">
+            <a:schemeClr val="accent1"/>
+          </a:lnRef>
+          <a:fillRef idx="3">
+            <a:schemeClr val="accent1"/>
+          </a:fillRef>
+          <a:effectRef idx="2">
+            <a:schemeClr val="accent1"/>
+          </a:effectRef>
+          <a:fontRef idx="minor">
+            <a:schemeClr val="lt1"/>
+          </a:fontRef>
+        </p:style>
+        <p:txBody>
+          <a:bodyPr rtlCol="0" anchor="ctr"/>
+          <a:lstStyle/>
+          <a:p>
+            <a:pPr algn="ctr"/>
+          </a:p>
+        </p:txBody>
+      </p:sp>
+      <p:sp>
+        <p:nvSpPr>
+          <p:cNvPr id="3" name="Rounded Rectangle 2"/>
+          <p:cNvSpPr/>
+          <p:nvPr/>
+        </p:nvSpPr>
+        <p:spPr>
+          <a:xfrm>
+            <a:off x="533386" y="533400"/>
+            <a:ext cx="7391215" cy="5505450"/>
+          </a:xfrm>
+          <a:prstGeom prst="roundRect">
+            <a:avLst>
+              <a:gd name="adj" fmla="val 3875"/>
+            </a:avLst>
+          </a:prstGeom>
+          <a:solidFill>
+            <a:srgbClr val="FFFFFF">
+              <a:alpha val="82000"/>
+            </a:srgbClr>
+          </a:solidFill>
+          <a:ln w="12700">
+            <a:solidFill>
+              <a:srgbClr val="1A1815">
+                <a:alpha val="7000"/>
+              </a:srgbClr>
+            </a:solidFill>
+          </a:ln>
+        </p:spPr>
+        <p:style>
+          <a:lnRef idx="1">
+            <a:schemeClr val="accent1"/>
+          </a:lnRef>
+          <a:fillRef idx="3">
+            <a:schemeClr val="accent1"/>
+          </a:fillRef>
+          <a:effectRef idx="2">
+            <a:schemeClr val="accent1"/>
+          </a:effectRef>
+          <a:fontRef idx="minor">
+            <a:schemeClr val="lt1"/>
+          </a:fontRef>
+        </p:style>
+        <p:txBody>
+          <a:bodyPr rtlCol="0" anchor="ctr"/>
+          <a:lstStyle/>
+          <a:p>
+            <a:pPr algn="ctr"/>
+          </a:p>
+        </p:txBody>
+      </p:sp>
+      <p:sp>
+        <p:nvSpPr>
+          <p:cNvPr id="4" name="TextBox 3"/>
+          <p:cNvSpPr txBox="1"/>
+          <p:nvPr/>
+        </p:nvSpPr>
+        <p:spPr>
+          <a:xfrm>
+            <a:off x="914377" y="952500"/>
+            <a:ext cx="6629234" cy="190500"/>
+          </a:xfrm>
+          <a:prstGeom prst="rect">
+            <a:avLst/>
+          </a:prstGeom>
+          <a:noFill/>
+        </p:spPr>
+        <p:txBody>
+          <a:bodyPr wrap="square" lIns="0" rIns="0" tIns="0" bIns="0">
+            <a:spAutoFit/>
+          </a:bodyPr>
+          <a:lstStyle/>
+          <a:p>
+            <a:pPr algn="l"/>
+            <a:r>
+              <a:rPr sz="1050" b="1" i="0" spc="300">
+                <a:solidFill>
+                  <a:srgbClr val="D4956B"/>
+                </a:solidFill>
+                <a:latin typeface="Noto Sans SC"/>
+              </a:rPr>
+              <a:t>为什么选择 Dify</a:t>
+            </a:r>
+          </a:p>
+        </p:txBody>
+      </p:sp>
+      <p:sp>
+        <p:nvSpPr>
+          <p:cNvPr id="5" name="TextBox 4"/>
+          <p:cNvSpPr txBox="1"/>
+          <p:nvPr/>
+        </p:nvSpPr>
+        <p:spPr>
+          <a:xfrm>
+            <a:off x="914377" y="1333500"/>
+            <a:ext cx="6629234" cy="371475"/>
+          </a:xfrm>
+          <a:prstGeom prst="rect">
+            <a:avLst/>
+          </a:prstGeom>
+          <a:noFill/>
+        </p:spPr>
+        <p:txBody>
+          <a:bodyPr wrap="square" lIns="0" rIns="0" tIns="0" bIns="0">
+            <a:spAutoFit/>
+          </a:bodyPr>
+          <a:lstStyle/>
+          <a:p>
+            <a:pPr algn="l"/>
+            <a:r>
+              <a:rPr sz="2100" b="1" i="0">
+                <a:solidFill>
+                  <a:srgbClr val="1A1815"/>
+                </a:solidFill>
+                <a:latin typeface="Noto Sans SC"/>
+              </a:rPr>
+              <a:t>把模型能力和业务流程缝起来</a:t>
+            </a:r>
+          </a:p>
+        </p:txBody>
+      </p:sp>
+      <p:sp>
+        <p:nvSpPr>
+          <p:cNvPr id="6" name="TextBox 5"/>
+          <p:cNvSpPr txBox="1"/>
+          <p:nvPr/>
+        </p:nvSpPr>
+        <p:spPr>
+          <a:xfrm>
+            <a:off x="914377" y="1752600"/>
+            <a:ext cx="6629234" cy="3829050"/>
+          </a:xfrm>
+          <a:prstGeom prst="rect">
+            <a:avLst/>
+          </a:prstGeom>
+          <a:noFill/>
+        </p:spPr>
+        <p:txBody>
+          <a:bodyPr wrap="square" lIns="0" rIns="0" tIns="0" bIns="0">
+            <a:spAutoFit/>
+          </a:bodyPr>
+          <a:lstStyle/>
+          <a:p>
+            <a:pPr>
+              <a:spcAft>
+                <a:spcPts val="800"/>
+              </a:spcAft>
+            </a:pPr>
+            <a:r>
+              <a:rPr sz="1275">
+                <a:solidFill>
+                  <a:srgbClr val="5C5548"/>
+                </a:solidFill>
+                <a:latin typeface="Noto Sans SC"/>
+              </a:rPr>
+              <a:t>Dify 不是又一个聊天机器人，而是把 LLM 能力变成稳定可交付的业务流程。从 prompt 编排到工具调用、从知识库到日志评测，全链路可观测、可回滚。</a:t>
+            </a:r>
+          </a:p>
+          <a:p>
+            <a:pPr>
+              <a:spcAft>
+                <a:spcPts val="800"/>
+              </a:spcAft>
+            </a:pPr>
+            <a:r>
+              <a:rPr sz="1275">
+                <a:solidFill>
+                  <a:srgbClr val="5C5548"/>
+                </a:solidFill>
+                <a:latin typeface="Noto Sans SC"/>
+              </a:rPr>
+              <a:t>工程团队不需要重复造轮子。市场团队不需要等着 IT 排期。运维团队不需要担心 token 失控。</a:t>
+            </a:r>
+          </a:p>
+        </p:txBody>
+      </p:sp>
+      <p:sp>
+        <p:nvSpPr>
+          <p:cNvPr id="7" name="Rounded Rectangle 6"/>
+          <p:cNvSpPr/>
+          <p:nvPr/>
+        </p:nvSpPr>
+        <p:spPr>
+          <a:xfrm>
+            <a:off x="8115096" y="533400"/>
+            <a:ext cx="3543211" cy="5505450"/>
+          </a:xfrm>
+          <a:prstGeom prst="roundRect">
+            <a:avLst>
+              <a:gd name="adj" fmla="val 6021"/>
+            </a:avLst>
+          </a:prstGeom>
+          <a:solidFill>
+            <a:srgbClr val="FFFFFF">
+              <a:alpha val="82000"/>
+            </a:srgbClr>
+          </a:solidFill>
+          <a:ln w="12700">
+            <a:solidFill>
+              <a:srgbClr val="1A1815">
+                <a:alpha val="7000"/>
+              </a:srgbClr>
+            </a:solidFill>
+          </a:ln>
+        </p:spPr>
+        <p:style>
+          <a:lnRef idx="1">
+            <a:schemeClr val="accent1"/>
+          </a:lnRef>
+          <a:fillRef idx="3">
+            <a:schemeClr val="accent1"/>
+          </a:fillRef>
+          <a:effectRef idx="2">
+            <a:schemeClr val="accent1"/>
+          </a:effectRef>
+          <a:fontRef idx="minor">
+            <a:schemeClr val="lt1"/>
+          </a:fontRef>
+        </p:style>
+        <p:txBody>
+          <a:bodyPr rtlCol="0" anchor="ctr"/>
+          <a:lstStyle/>
+          <a:p>
+            <a:pPr algn="ctr"/>
+          </a:p>
+        </p:txBody>
+      </p:sp>
+      <p:sp>
+        <p:nvSpPr>
+          <p:cNvPr id="8" name="TextBox 7"/>
+          <p:cNvSpPr txBox="1"/>
+          <p:nvPr/>
+        </p:nvSpPr>
+        <p:spPr>
+          <a:xfrm>
+            <a:off x="8496087" y="914400"/>
+            <a:ext cx="2781230" cy="333375"/>
+          </a:xfrm>
+          <a:prstGeom prst="rect">
+            <a:avLst/>
+          </a:prstGeom>
+          <a:noFill/>
+        </p:spPr>
+        <p:txBody>
+          <a:bodyPr wrap="square" lIns="0" rIns="0" tIns="0" bIns="0">
+            <a:spAutoFit/>
+          </a:bodyPr>
+          <a:lstStyle/>
+          <a:p>
+            <a:pPr algn="l"/>
+            <a:r>
+              <a:rPr sz="2100" b="1" i="0">
+                <a:solidFill>
+                  <a:srgbClr val="1A1815"/>
+                </a:solidFill>
+                <a:latin typeface="Noto Sans SC"/>
+              </a:rPr>
+              <a:t>核心模块</a:t>
+            </a:r>
+          </a:p>
+        </p:txBody>
+      </p:sp>
+      <p:sp>
+        <p:nvSpPr>
+          <p:cNvPr id="9" name="Rounded Rectangle 8"/>
+          <p:cNvSpPr/>
+          <p:nvPr/>
+        </p:nvSpPr>
+        <p:spPr>
+          <a:xfrm>
+            <a:off x="8496087" y="1438275"/>
+            <a:ext cx="304792" cy="304800"/>
+          </a:xfrm>
+          <a:prstGeom prst="roundRect">
+            <a:avLst>
+              <a:gd name="adj" fmla="val 25000"/>
+            </a:avLst>
+          </a:prstGeom>
+          <a:solidFill>
+            <a:srgbClr val="B8654A"/>
+          </a:solidFill>
+          <a:ln>
+            <a:noFill/>
+          </a:ln>
+        </p:spPr>
+        <p:style>
+          <a:lnRef idx="1">
+            <a:schemeClr val="accent1"/>
+          </a:lnRef>
+          <a:fillRef idx="3">
+            <a:schemeClr val="accent1"/>
+          </a:fillRef>
+          <a:effectRef idx="2">
+            <a:schemeClr val="accent1"/>
+          </a:effectRef>
+          <a:fontRef idx="minor">
+            <a:schemeClr val="lt1"/>
+          </a:fontRef>
+        </p:style>
+        <p:txBody>
+          <a:bodyPr rtlCol="0" anchor="ctr"/>
+          <a:lstStyle/>
+          <a:p>
+            <a:pPr algn="ctr"/>
+          </a:p>
+        </p:txBody>
+      </p:sp>
+      <p:sp>
+        <p:nvSpPr>
+          <p:cNvPr id="10" name="TextBox 9"/>
+          <p:cNvSpPr txBox="1"/>
+          <p:nvPr/>
+        </p:nvSpPr>
+        <p:spPr>
+          <a:xfrm>
+            <a:off x="8496087" y="1495425"/>
+            <a:ext cx="304792" cy="209550"/>
+          </a:xfrm>
+          <a:prstGeom prst="rect">
+            <a:avLst/>
+          </a:prstGeom>
+          <a:noFill/>
+        </p:spPr>
+        <p:txBody>
+          <a:bodyPr wrap="square" lIns="0" rIns="0" tIns="0" bIns="0">
+            <a:spAutoFit/>
+          </a:bodyPr>
+          <a:lstStyle/>
+          <a:p>
+            <a:pPr algn="ctr"/>
+            <a:r>
+              <a:rPr sz="1125" b="1" i="0">
+                <a:solidFill>
+                  <a:srgbClr val="FFFFFF"/>
+                </a:solidFill>
+                <a:latin typeface="Noto Sans SC"/>
+              </a:rPr>
+              <a:t>01</a:t>
+            </a:r>
+          </a:p>
+        </p:txBody>
+      </p:sp>
+      <p:sp>
+        <p:nvSpPr>
+          <p:cNvPr id="11" name="TextBox 10"/>
+          <p:cNvSpPr txBox="1"/>
+          <p:nvPr/>
+        </p:nvSpPr>
+        <p:spPr>
+          <a:xfrm>
+            <a:off x="8953276" y="1476375"/>
+            <a:ext cx="2324041" cy="228600"/>
+          </a:xfrm>
+          <a:prstGeom prst="rect">
+            <a:avLst/>
+          </a:prstGeom>
+          <a:noFill/>
+        </p:spPr>
+        <p:txBody>
+          <a:bodyPr wrap="square" lIns="0" rIns="0" tIns="0" bIns="0">
+            <a:spAutoFit/>
+          </a:bodyPr>
+          <a:lstStyle/>
+          <a:p>
+            <a:pPr algn="l"/>
+            <a:r>
+              <a:rPr sz="1350" b="1" i="0">
+                <a:solidFill>
+                  <a:srgbClr val="1A1815"/>
+                </a:solidFill>
+                <a:latin typeface="Noto Sans SC"/>
+              </a:rPr>
+              <a:t>Workflow</a:t>
+            </a:r>
+          </a:p>
+        </p:txBody>
+      </p:sp>
+      <p:sp>
+        <p:nvSpPr>
+          <p:cNvPr id="12" name="TextBox 11"/>
+          <p:cNvSpPr txBox="1"/>
+          <p:nvPr/>
+        </p:nvSpPr>
+        <p:spPr>
+          <a:xfrm>
+            <a:off x="8953276" y="1704975"/>
+            <a:ext cx="2324041" cy="209550"/>
+          </a:xfrm>
+          <a:prstGeom prst="rect">
+            <a:avLst/>
+          </a:prstGeom>
+          <a:noFill/>
+        </p:spPr>
+        <p:txBody>
+          <a:bodyPr wrap="square" lIns="0" rIns="0" tIns="0" bIns="0">
+            <a:spAutoFit/>
+          </a:bodyPr>
+          <a:lstStyle/>
+          <a:p>
+            <a:pPr algn="l"/>
+            <a:r>
+              <a:rPr sz="1050" b="0" i="0">
+                <a:solidFill>
+                  <a:srgbClr val="5C5548"/>
+                </a:solidFill>
+                <a:latin typeface="Noto Sans SC"/>
+              </a:rPr>
+              <a:t>可视化编排</a:t>
+            </a:r>
+          </a:p>
+        </p:txBody>
+      </p:sp>
+      <p:sp>
+        <p:nvSpPr>
+          <p:cNvPr id="13" name="Rounded Rectangle 12"/>
+          <p:cNvSpPr/>
+          <p:nvPr/>
+        </p:nvSpPr>
+        <p:spPr>
+          <a:xfrm>
+            <a:off x="8496087" y="2200275"/>
+            <a:ext cx="304792" cy="304800"/>
+          </a:xfrm>
+          <a:prstGeom prst="roundRect">
+            <a:avLst>
+              <a:gd name="adj" fmla="val 25000"/>
+            </a:avLst>
+          </a:prstGeom>
+          <a:solidFill>
+            <a:srgbClr val="B8654A"/>
+          </a:solidFill>
+          <a:ln>
+            <a:noFill/>
+          </a:ln>
+        </p:spPr>
+        <p:style>
+          <a:lnRef idx="1">
+            <a:schemeClr val="accent1"/>
+          </a:lnRef>
+          <a:fillRef idx="3">
+            <a:schemeClr val="accent1"/>
+          </a:fillRef>
+          <a:effectRef idx="2">
+            <a:schemeClr val="accent1"/>
+          </a:effectRef>
+          <a:fontRef idx="minor">
+            <a:schemeClr val="lt1"/>
+          </a:fontRef>
+        </p:style>
+        <p:txBody>
+          <a:bodyPr rtlCol="0" anchor="ctr"/>
+          <a:lstStyle/>
+          <a:p>
+            <a:pPr algn="ctr"/>
+          </a:p>
+        </p:txBody>
+      </p:sp>
+      <p:sp>
+        <p:nvSpPr>
+          <p:cNvPr id="14" name="TextBox 13"/>
+          <p:cNvSpPr txBox="1"/>
+          <p:nvPr/>
+        </p:nvSpPr>
+        <p:spPr>
+          <a:xfrm>
+            <a:off x="8496087" y="2257425"/>
+            <a:ext cx="304792" cy="209550"/>
+          </a:xfrm>
+          <a:prstGeom prst="rect">
+            <a:avLst/>
+          </a:prstGeom>
+          <a:noFill/>
+        </p:spPr>
+        <p:txBody>
+          <a:bodyPr wrap="square" lIns="0" rIns="0" tIns="0" bIns="0">
+            <a:spAutoFit/>
+          </a:bodyPr>
+          <a:lstStyle/>
+          <a:p>
+            <a:pPr algn="ctr"/>
+            <a:r>
+              <a:rPr sz="1125" b="1" i="0">
+                <a:solidFill>
+                  <a:srgbClr val="FFFFFF"/>
+                </a:solidFill>
+                <a:latin typeface="Noto Sans SC"/>
+              </a:rPr>
+              <a:t>02</a:t>
+            </a:r>
+          </a:p>
+        </p:txBody>
+      </p:sp>
+      <p:sp>
+        <p:nvSpPr>
+          <p:cNvPr id="15" name="TextBox 14"/>
+          <p:cNvSpPr txBox="1"/>
+          <p:nvPr/>
+        </p:nvSpPr>
+        <p:spPr>
+          <a:xfrm>
+            <a:off x="8953276" y="2238375"/>
+            <a:ext cx="2324041" cy="228600"/>
+          </a:xfrm>
+          <a:prstGeom prst="rect">
+            <a:avLst/>
+          </a:prstGeom>
+          <a:noFill/>
+        </p:spPr>
+        <p:txBody>
+          <a:bodyPr wrap="square" lIns="0" rIns="0" tIns="0" bIns="0">
+            <a:spAutoFit/>
+          </a:bodyPr>
+          <a:lstStyle/>
+          <a:p>
+            <a:pPr algn="l"/>
+            <a:r>
+              <a:rPr sz="1350" b="1" i="0">
+                <a:solidFill>
+                  <a:srgbClr val="1A1815"/>
+                </a:solidFill>
+                <a:latin typeface="Noto Sans SC"/>
+              </a:rPr>
+              <a:t>Agent</a:t>
+            </a:r>
+          </a:p>
+        </p:txBody>
+      </p:sp>
+      <p:sp>
+        <p:nvSpPr>
+          <p:cNvPr id="16" name="TextBox 15"/>
+          <p:cNvSpPr txBox="1"/>
+          <p:nvPr/>
+        </p:nvSpPr>
+        <p:spPr>
+          <a:xfrm>
+            <a:off x="8953276" y="2466975"/>
+            <a:ext cx="2324041" cy="209550"/>
+          </a:xfrm>
+          <a:prstGeom prst="rect">
+            <a:avLst/>
+          </a:prstGeom>
+          <a:noFill/>
+        </p:spPr>
+        <p:txBody>
+          <a:bodyPr wrap="square" lIns="0" rIns="0" tIns="0" bIns="0">
+            <a:spAutoFit/>
+          </a:bodyPr>
+          <a:lstStyle/>
+          <a:p>
+            <a:pPr algn="l"/>
+            <a:r>
+              <a:rPr sz="1050" b="0" i="0">
+                <a:solidFill>
+                  <a:srgbClr val="5C5548"/>
+                </a:solidFill>
+                <a:latin typeface="Noto Sans SC"/>
+              </a:rPr>
+              <a:t>工具调用框架</a:t>
+            </a:r>
+          </a:p>
+        </p:txBody>
+      </p:sp>
+      <p:sp>
+        <p:nvSpPr>
+          <p:cNvPr id="17" name="Rounded Rectangle 16"/>
+          <p:cNvSpPr/>
+          <p:nvPr/>
+        </p:nvSpPr>
+        <p:spPr>
+          <a:xfrm>
+            <a:off x="8496087" y="2962275"/>
+            <a:ext cx="304792" cy="304800"/>
+          </a:xfrm>
+          <a:prstGeom prst="roundRect">
+            <a:avLst>
+              <a:gd name="adj" fmla="val 25000"/>
+            </a:avLst>
+          </a:prstGeom>
+          <a:solidFill>
+            <a:srgbClr val="B8654A"/>
+          </a:solidFill>
+          <a:ln>
+            <a:noFill/>
+          </a:ln>
+        </p:spPr>
+        <p:style>
+          <a:lnRef idx="1">
+            <a:schemeClr val="accent1"/>
+          </a:lnRef>
+          <a:fillRef idx="3">
+            <a:schemeClr val="accent1"/>
+          </a:fillRef>
+          <a:effectRef idx="2">
+            <a:schemeClr val="accent1"/>
+          </a:effectRef>
+          <a:fontRef idx="minor">
+            <a:schemeClr val="lt1"/>
+          </a:fontRef>
+        </p:style>
+        <p:txBody>
+          <a:bodyPr rtlCol="0" anchor="ctr"/>
+          <a:lstStyle/>
+          <a:p>
+            <a:pPr algn="ctr"/>
+          </a:p>
+        </p:txBody>
+      </p:sp>
+      <p:sp>
+        <p:nvSpPr>
+          <p:cNvPr id="18" name="TextBox 17"/>
+          <p:cNvSpPr txBox="1"/>
+          <p:nvPr/>
+        </p:nvSpPr>
+        <p:spPr>
+          <a:xfrm>
+            <a:off x="8496087" y="3019425"/>
+            <a:ext cx="304792" cy="209550"/>
+          </a:xfrm>
+          <a:prstGeom prst="rect">
+            <a:avLst/>
+          </a:prstGeom>
+          <a:noFill/>
+        </p:spPr>
+        <p:txBody>
+          <a:bodyPr wrap="square" lIns="0" rIns="0" tIns="0" bIns="0">
+            <a:spAutoFit/>
+          </a:bodyPr>
+          <a:lstStyle/>
+          <a:p>
+            <a:pPr algn="ctr"/>
+            <a:r>
+              <a:rPr sz="1125" b="1" i="0">
+                <a:solidFill>
+                  <a:srgbClr val="FFFFFF"/>
+                </a:solidFill>
+                <a:latin typeface="Noto Sans SC"/>
+              </a:rPr>
+              <a:t>03</a:t>
+            </a:r>
+          </a:p>
+        </p:txBody>
+      </p:sp>
+      <p:sp>
+        <p:nvSpPr>
+          <p:cNvPr id="19" name="TextBox 18"/>
+          <p:cNvSpPr txBox="1"/>
+          <p:nvPr/>
+        </p:nvSpPr>
+        <p:spPr>
+          <a:xfrm>
+            <a:off x="8953276" y="3000375"/>
+            <a:ext cx="2324041" cy="228600"/>
+          </a:xfrm>
+          <a:prstGeom prst="rect">
+            <a:avLst/>
+          </a:prstGeom>
+          <a:noFill/>
+        </p:spPr>
+        <p:txBody>
+          <a:bodyPr wrap="square" lIns="0" rIns="0" tIns="0" bIns="0">
+            <a:spAutoFit/>
+          </a:bodyPr>
+          <a:lstStyle/>
+          <a:p>
+            <a:pPr algn="l"/>
+            <a:r>
+              <a:rPr sz="1350" b="1" i="0">
+                <a:solidFill>
+                  <a:srgbClr val="1A1815"/>
+                </a:solidFill>
+                <a:latin typeface="Noto Sans SC"/>
+              </a:rPr>
+              <a:t>Knowledge</a:t>
+            </a:r>
+          </a:p>
+        </p:txBody>
+      </p:sp>
+      <p:sp>
+        <p:nvSpPr>
+          <p:cNvPr id="20" name="TextBox 19"/>
+          <p:cNvSpPr txBox="1"/>
+          <p:nvPr/>
+        </p:nvSpPr>
+        <p:spPr>
+          <a:xfrm>
+            <a:off x="8953276" y="3228975"/>
+            <a:ext cx="2324041" cy="209550"/>
+          </a:xfrm>
+          <a:prstGeom prst="rect">
+            <a:avLst/>
+          </a:prstGeom>
+          <a:noFill/>
+        </p:spPr>
+        <p:txBody>
+          <a:bodyPr wrap="square" lIns="0" rIns="0" tIns="0" bIns="0">
+            <a:spAutoFit/>
+          </a:bodyPr>
+          <a:lstStyle/>
+          <a:p>
+            <a:pPr algn="l"/>
+            <a:r>
+              <a:rPr sz="1050" b="0" i="0">
+                <a:solidFill>
+                  <a:srgbClr val="5C5548"/>
+                </a:solidFill>
+                <a:latin typeface="Noto Sans SC"/>
+              </a:rPr>
+              <a:t>RAG 引擎</a:t>
+            </a:r>
+          </a:p>
+        </p:txBody>
+      </p:sp>
+      <p:sp>
+        <p:nvSpPr>
+          <p:cNvPr id="21" name="Rounded Rectangle 20"/>
+          <p:cNvSpPr/>
+          <p:nvPr/>
+        </p:nvSpPr>
+        <p:spPr>
+          <a:xfrm>
+            <a:off x="8496087" y="3724275"/>
+            <a:ext cx="304792" cy="304800"/>
+          </a:xfrm>
+          <a:prstGeom prst="roundRect">
+            <a:avLst>
+              <a:gd name="adj" fmla="val 25000"/>
+            </a:avLst>
+          </a:prstGeom>
+          <a:solidFill>
+            <a:srgbClr val="B8654A"/>
+          </a:solidFill>
+          <a:ln>
+            <a:noFill/>
+          </a:ln>
+        </p:spPr>
+        <p:style>
+          <a:lnRef idx="1">
+            <a:schemeClr val="accent1"/>
+          </a:lnRef>
+          <a:fillRef idx="3">
+            <a:schemeClr val="accent1"/>
+          </a:fillRef>
+          <a:effectRef idx="2">
+            <a:schemeClr val="accent1"/>
+          </a:effectRef>
+          <a:fontRef idx="minor">
+            <a:schemeClr val="lt1"/>
+          </a:fontRef>
+        </p:style>
+        <p:txBody>
+          <a:bodyPr rtlCol="0" anchor="ctr"/>
+          <a:lstStyle/>
+          <a:p>
+            <a:pPr algn="ctr"/>
+          </a:p>
+        </p:txBody>
+      </p:sp>
+      <p:sp>
+        <p:nvSpPr>
+          <p:cNvPr id="22" name="TextBox 21"/>
+          <p:cNvSpPr txBox="1"/>
+          <p:nvPr/>
+        </p:nvSpPr>
+        <p:spPr>
+          <a:xfrm>
+            <a:off x="8496087" y="3781425"/>
+            <a:ext cx="304792" cy="209550"/>
+          </a:xfrm>
+          <a:prstGeom prst="rect">
+            <a:avLst/>
+          </a:prstGeom>
+          <a:noFill/>
+        </p:spPr>
+        <p:txBody>
+          <a:bodyPr wrap="square" lIns="0" rIns="0" tIns="0" bIns="0">
+            <a:spAutoFit/>
+          </a:bodyPr>
+          <a:lstStyle/>
+          <a:p>
+            <a:pPr algn="ctr"/>
+            <a:r>
+              <a:rPr sz="1125" b="1" i="0">
+                <a:solidFill>
+                  <a:srgbClr val="FFFFFF"/>
+                </a:solidFill>
+                <a:latin typeface="Noto Sans SC"/>
+              </a:rPr>
+              <a:t>04</a:t>
+            </a:r>
+          </a:p>
+        </p:txBody>
+      </p:sp>
+      <p:sp>
+        <p:nvSpPr>
+          <p:cNvPr id="23" name="TextBox 22"/>
+          <p:cNvSpPr txBox="1"/>
+          <p:nvPr/>
+        </p:nvSpPr>
+        <p:spPr>
+          <a:xfrm>
+            <a:off x="8953276" y="3762375"/>
+            <a:ext cx="2324041" cy="228600"/>
+          </a:xfrm>
+          <a:prstGeom prst="rect">
+            <a:avLst/>
+          </a:prstGeom>
+          <a:noFill/>
+        </p:spPr>
+        <p:txBody>
+          <a:bodyPr wrap="square" lIns="0" rIns="0" tIns="0" bIns="0">
+            <a:spAutoFit/>
+          </a:bodyPr>
+          <a:lstStyle/>
+          <a:p>
+            <a:pPr algn="l"/>
+            <a:r>
+              <a:rPr sz="1350" b="1" i="0">
+                <a:solidFill>
+                  <a:srgbClr val="1A1815"/>
+                </a:solidFill>
+                <a:latin typeface="Noto Sans SC"/>
+              </a:rPr>
+              <a:t>LLMOps</a:t>
+            </a:r>
+          </a:p>
+        </p:txBody>
+      </p:sp>
+      <p:sp>
+        <p:nvSpPr>
+          <p:cNvPr id="24" name="TextBox 23"/>
+          <p:cNvSpPr txBox="1"/>
+          <p:nvPr/>
+        </p:nvSpPr>
+        <p:spPr>
+          <a:xfrm>
+            <a:off x="8953276" y="3990975"/>
+            <a:ext cx="2324041" cy="209550"/>
+          </a:xfrm>
+          <a:prstGeom prst="rect">
+            <a:avLst/>
+          </a:prstGeom>
+          <a:noFill/>
+        </p:spPr>
+        <p:txBody>
+          <a:bodyPr wrap="square" lIns="0" rIns="0" tIns="0" bIns="0">
+            <a:spAutoFit/>
+          </a:bodyPr>
+          <a:lstStyle/>
+          <a:p>
+            <a:pPr algn="l"/>
+            <a:r>
+              <a:rPr sz="1050" b="0" i="0">
+                <a:solidFill>
+                  <a:srgbClr val="5C5548"/>
+                </a:solidFill>
+                <a:latin typeface="Noto Sans SC"/>
+              </a:rPr>
+              <a:t>评测与监控</a:t>
+            </a:r>
+          </a:p>
+        </p:txBody>
+      </p:sp>
+      <p:sp>
+        <p:nvSpPr>
+          <p:cNvPr id="25" name="TextBox 24"/>
+          <p:cNvSpPr txBox="1"/>
+          <p:nvPr/>
+        </p:nvSpPr>
+        <p:spPr>
+          <a:xfrm>
+            <a:off x="533386" y="6610350"/>
+            <a:ext cx="5714857" cy="190500"/>
+          </a:xfrm>
+          <a:prstGeom prst="rect">
+            <a:avLst/>
+          </a:prstGeom>
+          <a:noFill/>
+        </p:spPr>
+        <p:txBody>
+          <a:bodyPr wrap="square" lIns="0" rIns="0" tIns="0" bIns="0">
+            <a:spAutoFit/>
+          </a:bodyPr>
+          <a:lstStyle/>
+          <a:p>
+            <a:pPr algn="l"/>
+            <a:r>
+              <a:rPr sz="975" b="0" i="0">
+                <a:solidFill>
+                  <a:srgbClr val="9C9588"/>
+                </a:solidFill>
+                <a:latin typeface="Noto Sans SC"/>
+              </a:rPr>
+              <a:t>Dify 企业介绍</a:t>
+            </a:r>
+          </a:p>
+        </p:txBody>
+      </p:sp>
+      <p:sp>
+        <p:nvSpPr>
+          <p:cNvPr id="26" name="TextBox 25"/>
+          <p:cNvSpPr txBox="1"/>
+          <p:nvPr/>
+        </p:nvSpPr>
+        <p:spPr>
+          <a:xfrm>
+            <a:off x="9753356" y="6610350"/>
+            <a:ext cx="1904952" cy="190500"/>
+          </a:xfrm>
+          <a:prstGeom prst="rect">
+            <a:avLst/>
+          </a:prstGeom>
+          <a:noFill/>
+        </p:spPr>
+        <p:txBody>
+          <a:bodyPr wrap="square" lIns="0" rIns="0" tIns="0" bIns="0">
+            <a:spAutoFit/>
+          </a:bodyPr>
+          <a:lstStyle/>
+          <a:p>
+            <a:pPr algn="r"/>
+            <a:r>
+              <a:rPr sz="975" b="0" i="0">
+                <a:solidFill>
+                  <a:srgbClr val="9C9588"/>
+                </a:solidFill>
+                <a:latin typeface="IBM Plex Mono"/>
+              </a:rPr>
+              <a:t>03 / 08</a:t>
+            </a:r>
+          </a:p>
+        </p:txBody>
+      </p:sp>
     </p:spTree>
   </p:cSld>
   <p:clrMapOvr>
@@ -3239,36 +5479,829 @@
         <p:nvPr/>
       </p:nvGrpSpPr>
       <p:grpSpPr/>
-      <p:pic>
-        <p:nvPicPr>
-          <p:cNvPr id="2" name="Picture 1" descr="04-three-col-demo.png"/>
-          <p:cNvPicPr>
-            <a:picLocks noChangeAspect="1"/>
-          </p:cNvPicPr>
-          <p:nvPr/>
-        </p:nvPicPr>
-        <p:blipFill>
-          <a:blip r:embed="rId2">
-            <a:extLst>
-              <a:ext uri="{96DAC541-7B7A-43D3-8B79-37D633B846F1}">
-                <asvg:svgBlip xmlns:asvg="http://schemas.microsoft.com/office/drawing/2016/SVG/main" r:embed="rId3"/>
-              </a:ext>
-            </a:extLst>
-          </a:blip>
-          <a:stretch>
-            <a:fillRect/>
-          </a:stretch>
-        </p:blipFill>
-        <p:spPr>
-          <a:xfrm>
-            <a:off x="0" y="0"/>
-            <a:ext cx="12191695" cy="6858000"/>
-          </a:xfrm>
-          <a:prstGeom prst="rect">
-            <a:avLst/>
-          </a:prstGeom>
-        </p:spPr>
-      </p:pic>
+      <p:sp>
+        <p:nvSpPr>
+          <p:cNvPr id="2" name="Rectangle 1"/>
+          <p:cNvSpPr/>
+          <p:nvPr/>
+        </p:nvSpPr>
+        <p:spPr>
+          <a:xfrm>
+            <a:off x="-91440" y="-91440"/>
+            <a:ext cx="12374575" cy="7040880"/>
+          </a:xfrm>
+          <a:prstGeom prst="rect">
+            <a:avLst/>
+          </a:prstGeom>
+          <a:ln>
+            <a:noFill/>
+          </a:ln>
+          <a:gradFill>
+            <a:gsLst>
+              <a:gs pos="0">
+                <a:srgbClr val="F5F0E8"/>
+              </a:gs>
+              <a:gs pos="100000">
+                <a:srgbClr val="EDE6D8"/>
+              </a:gs>
+            </a:gsLst>
+            <a:lin ang="5400000" scaled="1"/>
+          </a:gradFill>
+        </p:spPr>
+        <p:style>
+          <a:lnRef idx="1">
+            <a:schemeClr val="accent1"/>
+          </a:lnRef>
+          <a:fillRef idx="3">
+            <a:schemeClr val="accent1"/>
+          </a:fillRef>
+          <a:effectRef idx="2">
+            <a:schemeClr val="accent1"/>
+          </a:effectRef>
+          <a:fontRef idx="minor">
+            <a:schemeClr val="lt1"/>
+          </a:fontRef>
+        </p:style>
+        <p:txBody>
+          <a:bodyPr rtlCol="0" anchor="ctr"/>
+          <a:lstStyle/>
+          <a:p>
+            <a:pPr algn="ctr"/>
+          </a:p>
+        </p:txBody>
+      </p:sp>
+      <p:sp>
+        <p:nvSpPr>
+          <p:cNvPr id="3" name="Rounded Rectangle 2"/>
+          <p:cNvSpPr/>
+          <p:nvPr/>
+        </p:nvSpPr>
+        <p:spPr>
+          <a:xfrm>
+            <a:off x="533386" y="533400"/>
+            <a:ext cx="3581310" cy="5505450"/>
+          </a:xfrm>
+          <a:prstGeom prst="roundRect">
+            <a:avLst>
+              <a:gd name="adj" fmla="val 5957"/>
+            </a:avLst>
+          </a:prstGeom>
+          <a:solidFill>
+            <a:srgbClr val="FFFFFF">
+              <a:alpha val="82000"/>
+            </a:srgbClr>
+          </a:solidFill>
+          <a:ln w="12700">
+            <a:solidFill>
+              <a:srgbClr val="1A1815">
+                <a:alpha val="7000"/>
+              </a:srgbClr>
+            </a:solidFill>
+          </a:ln>
+        </p:spPr>
+        <p:style>
+          <a:lnRef idx="1">
+            <a:schemeClr val="accent1"/>
+          </a:lnRef>
+          <a:fillRef idx="3">
+            <a:schemeClr val="accent1"/>
+          </a:fillRef>
+          <a:effectRef idx="2">
+            <a:schemeClr val="accent1"/>
+          </a:effectRef>
+          <a:fontRef idx="minor">
+            <a:schemeClr val="lt1"/>
+          </a:fontRef>
+        </p:style>
+        <p:txBody>
+          <a:bodyPr rtlCol="0" anchor="ctr"/>
+          <a:lstStyle/>
+          <a:p>
+            <a:pPr algn="ctr"/>
+          </a:p>
+        </p:txBody>
+      </p:sp>
+      <p:sp>
+        <p:nvSpPr>
+          <p:cNvPr id="4" name="TextBox 3"/>
+          <p:cNvSpPr txBox="1"/>
+          <p:nvPr/>
+        </p:nvSpPr>
+        <p:spPr>
+          <a:xfrm>
+            <a:off x="914377" y="952500"/>
+            <a:ext cx="2819329" cy="190500"/>
+          </a:xfrm>
+          <a:prstGeom prst="rect">
+            <a:avLst/>
+          </a:prstGeom>
+          <a:noFill/>
+        </p:spPr>
+        <p:txBody>
+          <a:bodyPr wrap="square" lIns="0" rIns="0" tIns="0" bIns="0">
+            <a:spAutoFit/>
+          </a:bodyPr>
+          <a:lstStyle/>
+          <a:p>
+            <a:pPr algn="l"/>
+            <a:r>
+              <a:rPr sz="1050" b="1" i="0" spc="300">
+                <a:solidFill>
+                  <a:srgbClr val="D4956B"/>
+                </a:solidFill>
+                <a:latin typeface="Noto Sans SC"/>
+              </a:rPr>
+              <a:t>搭建一个 AI 应用</a:t>
+            </a:r>
+          </a:p>
+        </p:txBody>
+      </p:sp>
+      <p:sp>
+        <p:nvSpPr>
+          <p:cNvPr id="5" name="TextBox 4"/>
+          <p:cNvSpPr txBox="1"/>
+          <p:nvPr/>
+        </p:nvSpPr>
+        <p:spPr>
+          <a:xfrm>
+            <a:off x="914377" y="1352550"/>
+            <a:ext cx="2819329" cy="1000125"/>
+          </a:xfrm>
+          <a:prstGeom prst="rect">
+            <a:avLst/>
+          </a:prstGeom>
+          <a:noFill/>
+        </p:spPr>
+        <p:txBody>
+          <a:bodyPr wrap="square" lIns="0" rIns="0" tIns="0" bIns="0">
+            <a:spAutoFit/>
+          </a:bodyPr>
+          <a:lstStyle/>
+          <a:p>
+            <a:pPr algn="l"/>
+            <a:r>
+              <a:rPr sz="6600" b="1" i="0">
+                <a:solidFill>
+                  <a:srgbClr val="1A1815"/>
+                </a:solidFill>
+                <a:latin typeface="Noto Sans SC"/>
+              </a:rPr>
+              <a:t>5</a:t>
+            </a:r>
+          </a:p>
+        </p:txBody>
+      </p:sp>
+      <p:sp>
+        <p:nvSpPr>
+          <p:cNvPr id="6" name="TextBox 5"/>
+          <p:cNvSpPr txBox="1"/>
+          <p:nvPr/>
+        </p:nvSpPr>
+        <p:spPr>
+          <a:xfrm>
+            <a:off x="1447763" y="1943100"/>
+            <a:ext cx="457188" cy="314325"/>
+          </a:xfrm>
+          <a:prstGeom prst="rect">
+            <a:avLst/>
+          </a:prstGeom>
+          <a:noFill/>
+        </p:spPr>
+        <p:txBody>
+          <a:bodyPr wrap="square" lIns="0" rIns="0" tIns="0" bIns="0">
+            <a:spAutoFit/>
+          </a:bodyPr>
+          <a:lstStyle/>
+          <a:p>
+            <a:pPr algn="l"/>
+            <a:r>
+              <a:rPr sz="1800" b="1" i="0">
+                <a:solidFill>
+                  <a:srgbClr val="5C5548"/>
+                </a:solidFill>
+                <a:latin typeface="Noto Sans SC"/>
+              </a:rPr>
+              <a:t>分钟</a:t>
+            </a:r>
+          </a:p>
+        </p:txBody>
+      </p:sp>
+      <p:sp>
+        <p:nvSpPr>
+          <p:cNvPr id="7" name="Rectangle 6"/>
+          <p:cNvSpPr/>
+          <p:nvPr/>
+        </p:nvSpPr>
+        <p:spPr>
+          <a:xfrm>
+            <a:off x="914377" y="5048250"/>
+            <a:ext cx="571485" cy="28575"/>
+          </a:xfrm>
+          <a:prstGeom prst="rect">
+            <a:avLst/>
+          </a:prstGeom>
+          <a:solidFill>
+            <a:srgbClr val="B8654A"/>
+          </a:solidFill>
+          <a:ln>
+            <a:noFill/>
+          </a:ln>
+        </p:spPr>
+        <p:style>
+          <a:lnRef idx="1">
+            <a:schemeClr val="accent1"/>
+          </a:lnRef>
+          <a:fillRef idx="3">
+            <a:schemeClr val="accent1"/>
+          </a:fillRef>
+          <a:effectRef idx="2">
+            <a:schemeClr val="accent1"/>
+          </a:effectRef>
+          <a:fontRef idx="minor">
+            <a:schemeClr val="lt1"/>
+          </a:fontRef>
+        </p:style>
+        <p:txBody>
+          <a:bodyPr rtlCol="0" anchor="ctr"/>
+          <a:lstStyle/>
+          <a:p>
+            <a:pPr algn="ctr"/>
+          </a:p>
+        </p:txBody>
+      </p:sp>
+      <p:sp>
+        <p:nvSpPr>
+          <p:cNvPr id="8" name="TextBox 7"/>
+          <p:cNvSpPr txBox="1"/>
+          <p:nvPr/>
+        </p:nvSpPr>
+        <p:spPr>
+          <a:xfrm>
+            <a:off x="914377" y="5181600"/>
+            <a:ext cx="2819329" cy="190500"/>
+          </a:xfrm>
+          <a:prstGeom prst="rect">
+            <a:avLst/>
+          </a:prstGeom>
+          <a:noFill/>
+        </p:spPr>
+        <p:txBody>
+          <a:bodyPr wrap="square" lIns="0" rIns="0" tIns="0" bIns="0">
+            <a:spAutoFit/>
+          </a:bodyPr>
+          <a:lstStyle/>
+          <a:p>
+            <a:pPr algn="l"/>
+            <a:r>
+              <a:rPr sz="975" b="0" i="0">
+                <a:solidFill>
+                  <a:srgbClr val="5C5548"/>
+                </a:solidFill>
+                <a:latin typeface="Noto Sans SC"/>
+              </a:rPr>
+              <a:t>从模板到上线</a:t>
+            </a:r>
+          </a:p>
+        </p:txBody>
+      </p:sp>
+      <p:sp>
+        <p:nvSpPr>
+          <p:cNvPr id="9" name="Rounded Rectangle 8"/>
+          <p:cNvSpPr/>
+          <p:nvPr/>
+        </p:nvSpPr>
+        <p:spPr>
+          <a:xfrm>
+            <a:off x="4305192" y="533400"/>
+            <a:ext cx="3581310" cy="5505450"/>
+          </a:xfrm>
+          <a:prstGeom prst="roundRect">
+            <a:avLst>
+              <a:gd name="adj" fmla="val 5957"/>
+            </a:avLst>
+          </a:prstGeom>
+          <a:solidFill>
+            <a:srgbClr val="FFFFFF">
+              <a:alpha val="82000"/>
+            </a:srgbClr>
+          </a:solidFill>
+          <a:ln w="12700">
+            <a:solidFill>
+              <a:srgbClr val="1A1815">
+                <a:alpha val="7000"/>
+              </a:srgbClr>
+            </a:solidFill>
+          </a:ln>
+        </p:spPr>
+        <p:style>
+          <a:lnRef idx="1">
+            <a:schemeClr val="accent1"/>
+          </a:lnRef>
+          <a:fillRef idx="3">
+            <a:schemeClr val="accent1"/>
+          </a:fillRef>
+          <a:effectRef idx="2">
+            <a:schemeClr val="accent1"/>
+          </a:effectRef>
+          <a:fontRef idx="minor">
+            <a:schemeClr val="lt1"/>
+          </a:fontRef>
+        </p:style>
+        <p:txBody>
+          <a:bodyPr rtlCol="0" anchor="ctr"/>
+          <a:lstStyle/>
+          <a:p>
+            <a:pPr algn="ctr"/>
+          </a:p>
+        </p:txBody>
+      </p:sp>
+      <p:sp>
+        <p:nvSpPr>
+          <p:cNvPr id="10" name="TextBox 9"/>
+          <p:cNvSpPr txBox="1"/>
+          <p:nvPr/>
+        </p:nvSpPr>
+        <p:spPr>
+          <a:xfrm>
+            <a:off x="4686182" y="952500"/>
+            <a:ext cx="2819329" cy="190500"/>
+          </a:xfrm>
+          <a:prstGeom prst="rect">
+            <a:avLst/>
+          </a:prstGeom>
+          <a:noFill/>
+        </p:spPr>
+        <p:txBody>
+          <a:bodyPr wrap="square" lIns="0" rIns="0" tIns="0" bIns="0">
+            <a:spAutoFit/>
+          </a:bodyPr>
+          <a:lstStyle/>
+          <a:p>
+            <a:pPr algn="l"/>
+            <a:r>
+              <a:rPr sz="1050" b="1" i="0" spc="300">
+                <a:solidFill>
+                  <a:srgbClr val="D4956B"/>
+                </a:solidFill>
+                <a:latin typeface="Noto Sans SC"/>
+              </a:rPr>
+              <a:t>支持模型数</a:t>
+            </a:r>
+          </a:p>
+        </p:txBody>
+      </p:sp>
+      <p:sp>
+        <p:nvSpPr>
+          <p:cNvPr id="11" name="TextBox 10"/>
+          <p:cNvSpPr txBox="1"/>
+          <p:nvPr/>
+        </p:nvSpPr>
+        <p:spPr>
+          <a:xfrm>
+            <a:off x="4686182" y="1352550"/>
+            <a:ext cx="2819329" cy="1000125"/>
+          </a:xfrm>
+          <a:prstGeom prst="rect">
+            <a:avLst/>
+          </a:prstGeom>
+          <a:noFill/>
+        </p:spPr>
+        <p:txBody>
+          <a:bodyPr wrap="square" lIns="0" rIns="0" tIns="0" bIns="0">
+            <a:spAutoFit/>
+          </a:bodyPr>
+          <a:lstStyle/>
+          <a:p>
+            <a:pPr algn="l"/>
+            <a:r>
+              <a:rPr sz="6600" b="1" i="0">
+                <a:solidFill>
+                  <a:srgbClr val="1A1815"/>
+                </a:solidFill>
+                <a:latin typeface="Noto Sans SC"/>
+              </a:rPr>
+              <a:t>200</a:t>
+            </a:r>
+          </a:p>
+        </p:txBody>
+      </p:sp>
+      <p:sp>
+        <p:nvSpPr>
+          <p:cNvPr id="12" name="TextBox 11"/>
+          <p:cNvSpPr txBox="1"/>
+          <p:nvPr/>
+        </p:nvSpPr>
+        <p:spPr>
+          <a:xfrm>
+            <a:off x="6133946" y="1943100"/>
+            <a:ext cx="323841" cy="314325"/>
+          </a:xfrm>
+          <a:prstGeom prst="rect">
+            <a:avLst/>
+          </a:prstGeom>
+          <a:noFill/>
+        </p:spPr>
+        <p:txBody>
+          <a:bodyPr wrap="square" lIns="0" rIns="0" tIns="0" bIns="0">
+            <a:spAutoFit/>
+          </a:bodyPr>
+          <a:lstStyle/>
+          <a:p>
+            <a:pPr algn="l"/>
+            <a:r>
+              <a:rPr sz="1800" b="1" i="0">
+                <a:solidFill>
+                  <a:srgbClr val="5C5548"/>
+                </a:solidFill>
+                <a:latin typeface="Noto Sans SC"/>
+              </a:rPr>
+              <a:t>+</a:t>
+            </a:r>
+          </a:p>
+        </p:txBody>
+      </p:sp>
+      <p:sp>
+        <p:nvSpPr>
+          <p:cNvPr id="13" name="Rectangle 12"/>
+          <p:cNvSpPr/>
+          <p:nvPr/>
+        </p:nvSpPr>
+        <p:spPr>
+          <a:xfrm>
+            <a:off x="4686182" y="5048250"/>
+            <a:ext cx="571485" cy="28575"/>
+          </a:xfrm>
+          <a:prstGeom prst="rect">
+            <a:avLst/>
+          </a:prstGeom>
+          <a:solidFill>
+            <a:srgbClr val="B8654A"/>
+          </a:solidFill>
+          <a:ln>
+            <a:noFill/>
+          </a:ln>
+        </p:spPr>
+        <p:style>
+          <a:lnRef idx="1">
+            <a:schemeClr val="accent1"/>
+          </a:lnRef>
+          <a:fillRef idx="3">
+            <a:schemeClr val="accent1"/>
+          </a:fillRef>
+          <a:effectRef idx="2">
+            <a:schemeClr val="accent1"/>
+          </a:effectRef>
+          <a:fontRef idx="minor">
+            <a:schemeClr val="lt1"/>
+          </a:fontRef>
+        </p:style>
+        <p:txBody>
+          <a:bodyPr rtlCol="0" anchor="ctr"/>
+          <a:lstStyle/>
+          <a:p>
+            <a:pPr algn="ctr"/>
+          </a:p>
+        </p:txBody>
+      </p:sp>
+      <p:sp>
+        <p:nvSpPr>
+          <p:cNvPr id="14" name="TextBox 13"/>
+          <p:cNvSpPr txBox="1"/>
+          <p:nvPr/>
+        </p:nvSpPr>
+        <p:spPr>
+          <a:xfrm>
+            <a:off x="4686182" y="5181600"/>
+            <a:ext cx="2819329" cy="190500"/>
+          </a:xfrm>
+          <a:prstGeom prst="rect">
+            <a:avLst/>
+          </a:prstGeom>
+          <a:noFill/>
+        </p:spPr>
+        <p:txBody>
+          <a:bodyPr wrap="square" lIns="0" rIns="0" tIns="0" bIns="0">
+            <a:spAutoFit/>
+          </a:bodyPr>
+          <a:lstStyle/>
+          <a:p>
+            <a:pPr algn="l"/>
+            <a:r>
+              <a:rPr sz="975" b="0" i="0">
+                <a:solidFill>
+                  <a:srgbClr val="5C5548"/>
+                </a:solidFill>
+                <a:latin typeface="Noto Sans SC"/>
+              </a:rPr>
+              <a:t>OpenAI / Anthropic / 国产</a:t>
+            </a:r>
+          </a:p>
+        </p:txBody>
+      </p:sp>
+      <p:sp>
+        <p:nvSpPr>
+          <p:cNvPr id="15" name="Rounded Rectangle 14"/>
+          <p:cNvSpPr/>
+          <p:nvPr/>
+        </p:nvSpPr>
+        <p:spPr>
+          <a:xfrm>
+            <a:off x="8076997" y="533400"/>
+            <a:ext cx="3581310" cy="5505450"/>
+          </a:xfrm>
+          <a:prstGeom prst="roundRect">
+            <a:avLst>
+              <a:gd name="adj" fmla="val 5957"/>
+            </a:avLst>
+          </a:prstGeom>
+          <a:solidFill>
+            <a:srgbClr val="FFFFFF">
+              <a:alpha val="82000"/>
+            </a:srgbClr>
+          </a:solidFill>
+          <a:ln w="12700">
+            <a:solidFill>
+              <a:srgbClr val="1A1815">
+                <a:alpha val="7000"/>
+              </a:srgbClr>
+            </a:solidFill>
+          </a:ln>
+        </p:spPr>
+        <p:style>
+          <a:lnRef idx="1">
+            <a:schemeClr val="accent1"/>
+          </a:lnRef>
+          <a:fillRef idx="3">
+            <a:schemeClr val="accent1"/>
+          </a:fillRef>
+          <a:effectRef idx="2">
+            <a:schemeClr val="accent1"/>
+          </a:effectRef>
+          <a:fontRef idx="minor">
+            <a:schemeClr val="lt1"/>
+          </a:fontRef>
+        </p:style>
+        <p:txBody>
+          <a:bodyPr rtlCol="0" anchor="ctr"/>
+          <a:lstStyle/>
+          <a:p>
+            <a:pPr algn="ctr"/>
+          </a:p>
+        </p:txBody>
+      </p:sp>
+      <p:sp>
+        <p:nvSpPr>
+          <p:cNvPr id="16" name="TextBox 15"/>
+          <p:cNvSpPr txBox="1"/>
+          <p:nvPr/>
+        </p:nvSpPr>
+        <p:spPr>
+          <a:xfrm>
+            <a:off x="8457988" y="952500"/>
+            <a:ext cx="2819329" cy="190500"/>
+          </a:xfrm>
+          <a:prstGeom prst="rect">
+            <a:avLst/>
+          </a:prstGeom>
+          <a:noFill/>
+        </p:spPr>
+        <p:txBody>
+          <a:bodyPr wrap="square" lIns="0" rIns="0" tIns="0" bIns="0">
+            <a:spAutoFit/>
+          </a:bodyPr>
+          <a:lstStyle/>
+          <a:p>
+            <a:pPr algn="l"/>
+            <a:r>
+              <a:rPr sz="1050" b="1" i="0" spc="300">
+                <a:solidFill>
+                  <a:srgbClr val="D4956B"/>
+                </a:solidFill>
+                <a:latin typeface="Noto Sans SC"/>
+              </a:rPr>
+              <a:t>可观测性</a:t>
+            </a:r>
+          </a:p>
+        </p:txBody>
+      </p:sp>
+      <p:sp>
+        <p:nvSpPr>
+          <p:cNvPr id="17" name="TextBox 16"/>
+          <p:cNvSpPr txBox="1"/>
+          <p:nvPr/>
+        </p:nvSpPr>
+        <p:spPr>
+          <a:xfrm>
+            <a:off x="8457988" y="1352550"/>
+            <a:ext cx="2819329" cy="1000125"/>
+          </a:xfrm>
+          <a:prstGeom prst="rect">
+            <a:avLst/>
+          </a:prstGeom>
+          <a:noFill/>
+        </p:spPr>
+        <p:txBody>
+          <a:bodyPr wrap="square" lIns="0" rIns="0" tIns="0" bIns="0">
+            <a:spAutoFit/>
+          </a:bodyPr>
+          <a:lstStyle/>
+          <a:p>
+            <a:pPr algn="l"/>
+            <a:r>
+              <a:rPr sz="6600" b="1" i="0">
+                <a:solidFill>
+                  <a:srgbClr val="1A1815"/>
+                </a:solidFill>
+                <a:latin typeface="Noto Sans SC"/>
+              </a:rPr>
+              <a:t>100</a:t>
+            </a:r>
+          </a:p>
+        </p:txBody>
+      </p:sp>
+      <p:sp>
+        <p:nvSpPr>
+          <p:cNvPr id="18" name="TextBox 17"/>
+          <p:cNvSpPr txBox="1"/>
+          <p:nvPr/>
+        </p:nvSpPr>
+        <p:spPr>
+          <a:xfrm>
+            <a:off x="9905752" y="1943100"/>
+            <a:ext cx="323841" cy="314325"/>
+          </a:xfrm>
+          <a:prstGeom prst="rect">
+            <a:avLst/>
+          </a:prstGeom>
+          <a:noFill/>
+        </p:spPr>
+        <p:txBody>
+          <a:bodyPr wrap="square" lIns="0" rIns="0" tIns="0" bIns="0">
+            <a:spAutoFit/>
+          </a:bodyPr>
+          <a:lstStyle/>
+          <a:p>
+            <a:pPr algn="l"/>
+            <a:r>
+              <a:rPr sz="1800" b="1" i="0">
+                <a:solidFill>
+                  <a:srgbClr val="5C5548"/>
+                </a:solidFill>
+                <a:latin typeface="Noto Sans SC"/>
+              </a:rPr>
+              <a:t>%</a:t>
+            </a:r>
+          </a:p>
+        </p:txBody>
+      </p:sp>
+      <p:sp>
+        <p:nvSpPr>
+          <p:cNvPr id="19" name="Rectangle 18"/>
+          <p:cNvSpPr/>
+          <p:nvPr/>
+        </p:nvSpPr>
+        <p:spPr>
+          <a:xfrm>
+            <a:off x="8457988" y="5048250"/>
+            <a:ext cx="571485" cy="28575"/>
+          </a:xfrm>
+          <a:prstGeom prst="rect">
+            <a:avLst/>
+          </a:prstGeom>
+          <a:solidFill>
+            <a:srgbClr val="B8654A"/>
+          </a:solidFill>
+          <a:ln>
+            <a:noFill/>
+          </a:ln>
+        </p:spPr>
+        <p:style>
+          <a:lnRef idx="1">
+            <a:schemeClr val="accent1"/>
+          </a:lnRef>
+          <a:fillRef idx="3">
+            <a:schemeClr val="accent1"/>
+          </a:fillRef>
+          <a:effectRef idx="2">
+            <a:schemeClr val="accent1"/>
+          </a:effectRef>
+          <a:fontRef idx="minor">
+            <a:schemeClr val="lt1"/>
+          </a:fontRef>
+        </p:style>
+        <p:txBody>
+          <a:bodyPr rtlCol="0" anchor="ctr"/>
+          <a:lstStyle/>
+          <a:p>
+            <a:pPr algn="ctr"/>
+          </a:p>
+        </p:txBody>
+      </p:sp>
+      <p:sp>
+        <p:nvSpPr>
+          <p:cNvPr id="20" name="TextBox 19"/>
+          <p:cNvSpPr txBox="1"/>
+          <p:nvPr/>
+        </p:nvSpPr>
+        <p:spPr>
+          <a:xfrm>
+            <a:off x="8457988" y="5181600"/>
+            <a:ext cx="2819329" cy="190500"/>
+          </a:xfrm>
+          <a:prstGeom prst="rect">
+            <a:avLst/>
+          </a:prstGeom>
+          <a:noFill/>
+        </p:spPr>
+        <p:txBody>
+          <a:bodyPr wrap="square" lIns="0" rIns="0" tIns="0" bIns="0">
+            <a:spAutoFit/>
+          </a:bodyPr>
+          <a:lstStyle/>
+          <a:p>
+            <a:pPr algn="l"/>
+            <a:r>
+              <a:rPr sz="975" b="0" i="0">
+                <a:solidFill>
+                  <a:srgbClr val="5C5548"/>
+                </a:solidFill>
+                <a:latin typeface="Noto Sans SC"/>
+              </a:rPr>
+              <a:t>全链路日志与评测</a:t>
+            </a:r>
+          </a:p>
+        </p:txBody>
+      </p:sp>
+      <p:sp>
+        <p:nvSpPr>
+          <p:cNvPr id="21" name="TextBox 20"/>
+          <p:cNvSpPr txBox="1"/>
+          <p:nvPr/>
+        </p:nvSpPr>
+        <p:spPr>
+          <a:xfrm>
+            <a:off x="533386" y="6610350"/>
+            <a:ext cx="5714857" cy="190500"/>
+          </a:xfrm>
+          <a:prstGeom prst="rect">
+            <a:avLst/>
+          </a:prstGeom>
+          <a:noFill/>
+        </p:spPr>
+        <p:txBody>
+          <a:bodyPr wrap="square" lIns="0" rIns="0" tIns="0" bIns="0">
+            <a:spAutoFit/>
+          </a:bodyPr>
+          <a:lstStyle/>
+          <a:p>
+            <a:pPr algn="l"/>
+            <a:r>
+              <a:rPr sz="975" b="0" i="0">
+                <a:solidFill>
+                  <a:srgbClr val="9C9588"/>
+                </a:solidFill>
+                <a:latin typeface="Noto Sans SC"/>
+              </a:rPr>
+              <a:t>Dify 企业介绍</a:t>
+            </a:r>
+          </a:p>
+        </p:txBody>
+      </p:sp>
+      <p:sp>
+        <p:nvSpPr>
+          <p:cNvPr id="22" name="TextBox 21"/>
+          <p:cNvSpPr txBox="1"/>
+          <p:nvPr/>
+        </p:nvSpPr>
+        <p:spPr>
+          <a:xfrm>
+            <a:off x="9753356" y="6610350"/>
+            <a:ext cx="1904952" cy="190500"/>
+          </a:xfrm>
+          <a:prstGeom prst="rect">
+            <a:avLst/>
+          </a:prstGeom>
+          <a:noFill/>
+        </p:spPr>
+        <p:txBody>
+          <a:bodyPr wrap="square" lIns="0" rIns="0" tIns="0" bIns="0">
+            <a:spAutoFit/>
+          </a:bodyPr>
+          <a:lstStyle/>
+          <a:p>
+            <a:pPr algn="r"/>
+            <a:r>
+              <a:rPr sz="975" b="0" i="0">
+                <a:solidFill>
+                  <a:srgbClr val="9C9588"/>
+                </a:solidFill>
+                <a:latin typeface="IBM Plex Mono"/>
+              </a:rPr>
+              <a:t>04 / 08</a:t>
+            </a:r>
+          </a:p>
+        </p:txBody>
+      </p:sp>
     </p:spTree>
   </p:cSld>
   <p:clrMapOvr>
@@ -3287,36 +6320,1167 @@
         <p:nvPr/>
       </p:nvGrpSpPr>
       <p:grpSpPr/>
-      <p:pic>
-        <p:nvPicPr>
-          <p:cNvPr id="2" name="Picture 1" descr="05-major-minor-demo.png"/>
-          <p:cNvPicPr>
-            <a:picLocks noChangeAspect="1"/>
-          </p:cNvPicPr>
-          <p:nvPr/>
-        </p:nvPicPr>
-        <p:blipFill>
-          <a:blip r:embed="rId2">
-            <a:extLst>
-              <a:ext uri="{96DAC541-7B7A-43D3-8B79-37D633B846F1}">
-                <asvg:svgBlip xmlns:asvg="http://schemas.microsoft.com/office/drawing/2016/SVG/main" r:embed="rId3"/>
-              </a:ext>
-            </a:extLst>
-          </a:blip>
-          <a:stretch>
-            <a:fillRect/>
-          </a:stretch>
-        </p:blipFill>
-        <p:spPr>
-          <a:xfrm>
-            <a:off x="0" y="0"/>
-            <a:ext cx="12191695" cy="6858000"/>
-          </a:xfrm>
-          <a:prstGeom prst="rect">
-            <a:avLst/>
-          </a:prstGeom>
-        </p:spPr>
-      </p:pic>
+      <p:sp>
+        <p:nvSpPr>
+          <p:cNvPr id="2" name="Rectangle 1"/>
+          <p:cNvSpPr/>
+          <p:nvPr/>
+        </p:nvSpPr>
+        <p:spPr>
+          <a:xfrm>
+            <a:off x="-91440" y="-91440"/>
+            <a:ext cx="12374575" cy="7040880"/>
+          </a:xfrm>
+          <a:prstGeom prst="rect">
+            <a:avLst/>
+          </a:prstGeom>
+          <a:ln>
+            <a:noFill/>
+          </a:ln>
+          <a:gradFill>
+            <a:gsLst>
+              <a:gs pos="0">
+                <a:srgbClr val="F5F0E8"/>
+              </a:gs>
+              <a:gs pos="100000">
+                <a:srgbClr val="EDE6D8"/>
+              </a:gs>
+            </a:gsLst>
+            <a:lin ang="5400000" scaled="1"/>
+          </a:gradFill>
+        </p:spPr>
+        <p:style>
+          <a:lnRef idx="1">
+            <a:schemeClr val="accent1"/>
+          </a:lnRef>
+          <a:fillRef idx="3">
+            <a:schemeClr val="accent1"/>
+          </a:fillRef>
+          <a:effectRef idx="2">
+            <a:schemeClr val="accent1"/>
+          </a:effectRef>
+          <a:fontRef idx="minor">
+            <a:schemeClr val="lt1"/>
+          </a:fontRef>
+        </p:style>
+        <p:txBody>
+          <a:bodyPr rtlCol="0" anchor="ctr"/>
+          <a:lstStyle/>
+          <a:p>
+            <a:pPr algn="ctr"/>
+          </a:p>
+        </p:txBody>
+      </p:sp>
+      <p:sp>
+        <p:nvSpPr>
+          <p:cNvPr id="3" name="Rounded Rectangle 2"/>
+          <p:cNvSpPr/>
+          <p:nvPr/>
+        </p:nvSpPr>
+        <p:spPr>
+          <a:xfrm>
+            <a:off x="2933626" y="533400"/>
+            <a:ext cx="6324441" cy="5505450"/>
+          </a:xfrm>
+          <a:prstGeom prst="roundRect">
+            <a:avLst>
+              <a:gd name="adj" fmla="val 3875"/>
+            </a:avLst>
+          </a:prstGeom>
+          <a:solidFill>
+            <a:srgbClr val="FFFFFF">
+              <a:alpha val="82000"/>
+            </a:srgbClr>
+          </a:solidFill>
+          <a:ln w="12700">
+            <a:solidFill>
+              <a:srgbClr val="1A1815">
+                <a:alpha val="7000"/>
+              </a:srgbClr>
+            </a:solidFill>
+          </a:ln>
+        </p:spPr>
+        <p:style>
+          <a:lnRef idx="1">
+            <a:schemeClr val="accent1"/>
+          </a:lnRef>
+          <a:fillRef idx="3">
+            <a:schemeClr val="accent1"/>
+          </a:fillRef>
+          <a:effectRef idx="2">
+            <a:schemeClr val="accent1"/>
+          </a:effectRef>
+          <a:fontRef idx="minor">
+            <a:schemeClr val="lt1"/>
+          </a:fontRef>
+        </p:style>
+        <p:txBody>
+          <a:bodyPr rtlCol="0" anchor="ctr"/>
+          <a:lstStyle/>
+          <a:p>
+            <a:pPr algn="ctr"/>
+          </a:p>
+        </p:txBody>
+      </p:sp>
+      <p:sp>
+        <p:nvSpPr>
+          <p:cNvPr id="4" name="Rounded Rectangle 3"/>
+          <p:cNvSpPr/>
+          <p:nvPr/>
+        </p:nvSpPr>
+        <p:spPr>
+          <a:xfrm>
+            <a:off x="3314617" y="914400"/>
+            <a:ext cx="57148" cy="3695700"/>
+          </a:xfrm>
+          <a:prstGeom prst="roundRect">
+            <a:avLst>
+              <a:gd name="adj" fmla="val 50000"/>
+            </a:avLst>
+          </a:prstGeom>
+          <a:solidFill>
+            <a:srgbClr val="B8654A"/>
+          </a:solidFill>
+          <a:ln>
+            <a:noFill/>
+          </a:ln>
+        </p:spPr>
+        <p:style>
+          <a:lnRef idx="1">
+            <a:schemeClr val="accent1"/>
+          </a:lnRef>
+          <a:fillRef idx="3">
+            <a:schemeClr val="accent1"/>
+          </a:fillRef>
+          <a:effectRef idx="2">
+            <a:schemeClr val="accent1"/>
+          </a:effectRef>
+          <a:fontRef idx="minor">
+            <a:schemeClr val="lt1"/>
+          </a:fontRef>
+        </p:style>
+        <p:txBody>
+          <a:bodyPr rtlCol="0" anchor="ctr"/>
+          <a:lstStyle/>
+          <a:p>
+            <a:pPr algn="ctr"/>
+          </a:p>
+        </p:txBody>
+      </p:sp>
+      <p:sp>
+        <p:nvSpPr>
+          <p:cNvPr id="5" name="TextBox 4"/>
+          <p:cNvSpPr txBox="1"/>
+          <p:nvPr/>
+        </p:nvSpPr>
+        <p:spPr>
+          <a:xfrm>
+            <a:off x="3619409" y="1200150"/>
+            <a:ext cx="4952876" cy="3409950"/>
+          </a:xfrm>
+          <a:prstGeom prst="rect">
+            <a:avLst/>
+          </a:prstGeom>
+          <a:noFill/>
+        </p:spPr>
+        <p:txBody>
+          <a:bodyPr wrap="square" lIns="0" rIns="0" tIns="0" bIns="0" anchor="ctr">
+            <a:spAutoFit/>
+          </a:bodyPr>
+          <a:lstStyle/>
+          <a:p>
+            <a:pPr algn="l"/>
+            <a:r>
+              <a:rPr sz="3150" b="0" i="1">
+                <a:solidFill>
+                  <a:srgbClr val="1A1815"/>
+                </a:solidFill>
+                <a:latin typeface="Noto Serif SC"/>
+              </a:rPr>
+              <a:t>AI 应用的瓶颈不是模型，而是工程化。</a:t>
+            </a:r>
+          </a:p>
+        </p:txBody>
+      </p:sp>
+      <p:sp>
+        <p:nvSpPr>
+          <p:cNvPr id="6" name="Rectangle 5"/>
+          <p:cNvSpPr/>
+          <p:nvPr/>
+        </p:nvSpPr>
+        <p:spPr>
+          <a:xfrm>
+            <a:off x="3619409" y="4800600"/>
+            <a:ext cx="457188" cy="28575"/>
+          </a:xfrm>
+          <a:prstGeom prst="rect">
+            <a:avLst/>
+          </a:prstGeom>
+          <a:solidFill>
+            <a:srgbClr val="B8654A"/>
+          </a:solidFill>
+          <a:ln>
+            <a:noFill/>
+          </a:ln>
+        </p:spPr>
+        <p:style>
+          <a:lnRef idx="1">
+            <a:schemeClr val="accent1"/>
+          </a:lnRef>
+          <a:fillRef idx="3">
+            <a:schemeClr val="accent1"/>
+          </a:fillRef>
+          <a:effectRef idx="2">
+            <a:schemeClr val="accent1"/>
+          </a:effectRef>
+          <a:fontRef idx="minor">
+            <a:schemeClr val="lt1"/>
+          </a:fontRef>
+        </p:style>
+        <p:txBody>
+          <a:bodyPr rtlCol="0" anchor="ctr"/>
+          <a:lstStyle/>
+          <a:p>
+            <a:pPr algn="ctr"/>
+          </a:p>
+        </p:txBody>
+      </p:sp>
+      <p:sp>
+        <p:nvSpPr>
+          <p:cNvPr id="7" name="TextBox 6"/>
+          <p:cNvSpPr txBox="1"/>
+          <p:nvPr/>
+        </p:nvSpPr>
+        <p:spPr>
+          <a:xfrm>
+            <a:off x="3619409" y="4991100"/>
+            <a:ext cx="4952876" cy="266700"/>
+          </a:xfrm>
+          <a:prstGeom prst="rect">
+            <a:avLst/>
+          </a:prstGeom>
+          <a:noFill/>
+        </p:spPr>
+        <p:txBody>
+          <a:bodyPr wrap="square" lIns="0" rIns="0" tIns="0" bIns="0">
+            <a:spAutoFit/>
+          </a:bodyPr>
+          <a:lstStyle/>
+          <a:p>
+            <a:pPr algn="l"/>
+            <a:r>
+              <a:rPr sz="1500" b="1" i="0">
+                <a:solidFill>
+                  <a:srgbClr val="1A1815"/>
+                </a:solidFill>
+                <a:latin typeface="Noto Sans SC"/>
+              </a:rPr>
+              <a:t>Dify 创始团队</a:t>
+            </a:r>
+          </a:p>
+        </p:txBody>
+      </p:sp>
+      <p:sp>
+        <p:nvSpPr>
+          <p:cNvPr id="8" name="TextBox 7"/>
+          <p:cNvSpPr txBox="1"/>
+          <p:nvPr/>
+        </p:nvSpPr>
+        <p:spPr>
+          <a:xfrm>
+            <a:off x="3619409" y="5295900"/>
+            <a:ext cx="4952876" cy="209550"/>
+          </a:xfrm>
+          <a:prstGeom prst="rect">
+            <a:avLst/>
+          </a:prstGeom>
+          <a:noFill/>
+        </p:spPr>
+        <p:txBody>
+          <a:bodyPr wrap="square" lIns="0" rIns="0" tIns="0" bIns="0">
+            <a:spAutoFit/>
+          </a:bodyPr>
+          <a:lstStyle/>
+          <a:p>
+            <a:pPr algn="l"/>
+            <a:r>
+              <a:rPr sz="1275" b="0" i="0">
+                <a:solidFill>
+                  <a:srgbClr val="9C9588"/>
+                </a:solidFill>
+                <a:latin typeface="Noto Sans SC"/>
+              </a:rPr>
+              <a:t>2024 年技术分享会</a:t>
+            </a:r>
+          </a:p>
+        </p:txBody>
+      </p:sp>
+      <p:sp>
+        <p:nvSpPr>
+          <p:cNvPr id="9" name="Rounded Rectangle 8"/>
+          <p:cNvSpPr/>
+          <p:nvPr/>
+        </p:nvSpPr>
+        <p:spPr>
+          <a:xfrm>
+            <a:off x="533386" y="533400"/>
+            <a:ext cx="2209744" cy="2667000"/>
+          </a:xfrm>
+          <a:prstGeom prst="roundRect">
+            <a:avLst>
+              <a:gd name="adj" fmla="val 9655"/>
+            </a:avLst>
+          </a:prstGeom>
+          <a:solidFill>
+            <a:srgbClr val="FFFFFF">
+              <a:alpha val="82000"/>
+            </a:srgbClr>
+          </a:solidFill>
+          <a:ln w="12700">
+            <a:solidFill>
+              <a:srgbClr val="1A1815">
+                <a:alpha val="7000"/>
+              </a:srgbClr>
+            </a:solidFill>
+          </a:ln>
+        </p:spPr>
+        <p:style>
+          <a:lnRef idx="1">
+            <a:schemeClr val="accent1"/>
+          </a:lnRef>
+          <a:fillRef idx="3">
+            <a:schemeClr val="accent1"/>
+          </a:fillRef>
+          <a:effectRef idx="2">
+            <a:schemeClr val="accent1"/>
+          </a:effectRef>
+          <a:fontRef idx="minor">
+            <a:schemeClr val="lt1"/>
+          </a:fontRef>
+        </p:style>
+        <p:txBody>
+          <a:bodyPr rtlCol="0" anchor="ctr"/>
+          <a:lstStyle/>
+          <a:p>
+            <a:pPr algn="ctr"/>
+          </a:p>
+        </p:txBody>
+      </p:sp>
+      <p:sp>
+        <p:nvSpPr>
+          <p:cNvPr id="10" name="TextBox 9"/>
+          <p:cNvSpPr txBox="1"/>
+          <p:nvPr/>
+        </p:nvSpPr>
+        <p:spPr>
+          <a:xfrm>
+            <a:off x="914377" y="952500"/>
+            <a:ext cx="1447763" cy="190500"/>
+          </a:xfrm>
+          <a:prstGeom prst="rect">
+            <a:avLst/>
+          </a:prstGeom>
+          <a:noFill/>
+        </p:spPr>
+        <p:txBody>
+          <a:bodyPr wrap="square" lIns="0" rIns="0" tIns="0" bIns="0">
+            <a:spAutoFit/>
+          </a:bodyPr>
+          <a:lstStyle/>
+          <a:p>
+            <a:pPr algn="l"/>
+            <a:r>
+              <a:rPr sz="1050" b="1" i="0" spc="300">
+                <a:solidFill>
+                  <a:srgbClr val="D4956B"/>
+                </a:solidFill>
+                <a:latin typeface="Noto Sans SC"/>
+              </a:rPr>
+              <a:t>模型延迟</a:t>
+            </a:r>
+          </a:p>
+        </p:txBody>
+      </p:sp>
+      <p:sp>
+        <p:nvSpPr>
+          <p:cNvPr id="11" name="TextBox 10"/>
+          <p:cNvSpPr txBox="1"/>
+          <p:nvPr/>
+        </p:nvSpPr>
+        <p:spPr>
+          <a:xfrm>
+            <a:off x="914377" y="1352550"/>
+            <a:ext cx="1447763" cy="723900"/>
+          </a:xfrm>
+          <a:prstGeom prst="rect">
+            <a:avLst/>
+          </a:prstGeom>
+          <a:noFill/>
+        </p:spPr>
+        <p:txBody>
+          <a:bodyPr wrap="square" lIns="0" rIns="0" tIns="0" bIns="0">
+            <a:spAutoFit/>
+          </a:bodyPr>
+          <a:lstStyle/>
+          <a:p>
+            <a:pPr algn="l"/>
+            <a:r>
+              <a:rPr sz="4800" b="1" i="0">
+                <a:solidFill>
+                  <a:srgbClr val="1A1815"/>
+                </a:solidFill>
+                <a:latin typeface="Noto Sans SC"/>
+              </a:rPr>
+              <a:t>&lt;200</a:t>
+            </a:r>
+          </a:p>
+        </p:txBody>
+      </p:sp>
+      <p:sp>
+        <p:nvSpPr>
+          <p:cNvPr id="12" name="TextBox 11"/>
+          <p:cNvSpPr txBox="1"/>
+          <p:nvPr/>
+        </p:nvSpPr>
+        <p:spPr>
+          <a:xfrm>
+            <a:off x="914377" y="1800225"/>
+            <a:ext cx="1447763" cy="219075"/>
+          </a:xfrm>
+          <a:prstGeom prst="rect">
+            <a:avLst/>
+          </a:prstGeom>
+          <a:noFill/>
+        </p:spPr>
+        <p:txBody>
+          <a:bodyPr wrap="square" lIns="0" rIns="0" tIns="0" bIns="0">
+            <a:spAutoFit/>
+          </a:bodyPr>
+          <a:lstStyle/>
+          <a:p>
+            <a:pPr algn="l"/>
+            <a:r>
+              <a:rPr sz="1275" b="1" i="0">
+                <a:solidFill>
+                  <a:srgbClr val="5C5548"/>
+                </a:solidFill>
+                <a:latin typeface="Noto Sans SC"/>
+              </a:rPr>
+              <a:t>ms</a:t>
+            </a:r>
+          </a:p>
+        </p:txBody>
+      </p:sp>
+      <p:sp>
+        <p:nvSpPr>
+          <p:cNvPr id="13" name="Rectangle 12"/>
+          <p:cNvSpPr/>
+          <p:nvPr/>
+        </p:nvSpPr>
+        <p:spPr>
+          <a:xfrm>
+            <a:off x="914377" y="2228850"/>
+            <a:ext cx="571485" cy="28575"/>
+          </a:xfrm>
+          <a:prstGeom prst="rect">
+            <a:avLst/>
+          </a:prstGeom>
+          <a:solidFill>
+            <a:srgbClr val="B8654A"/>
+          </a:solidFill>
+          <a:ln>
+            <a:noFill/>
+          </a:ln>
+        </p:spPr>
+        <p:style>
+          <a:lnRef idx="1">
+            <a:schemeClr val="accent1"/>
+          </a:lnRef>
+          <a:fillRef idx="3">
+            <a:schemeClr val="accent1"/>
+          </a:fillRef>
+          <a:effectRef idx="2">
+            <a:schemeClr val="accent1"/>
+          </a:effectRef>
+          <a:fontRef idx="minor">
+            <a:schemeClr val="lt1"/>
+          </a:fontRef>
+        </p:style>
+        <p:txBody>
+          <a:bodyPr rtlCol="0" anchor="ctr"/>
+          <a:lstStyle/>
+          <a:p>
+            <a:pPr algn="ctr"/>
+          </a:p>
+        </p:txBody>
+      </p:sp>
+      <p:sp>
+        <p:nvSpPr>
+          <p:cNvPr id="14" name="Rounded Rectangle 13"/>
+          <p:cNvSpPr/>
+          <p:nvPr/>
+        </p:nvSpPr>
+        <p:spPr>
+          <a:xfrm>
+            <a:off x="533386" y="3371850"/>
+            <a:ext cx="2209744" cy="2667000"/>
+          </a:xfrm>
+          <a:prstGeom prst="roundRect">
+            <a:avLst>
+              <a:gd name="adj" fmla="val 9655"/>
+            </a:avLst>
+          </a:prstGeom>
+          <a:solidFill>
+            <a:srgbClr val="FFFFFF">
+              <a:alpha val="82000"/>
+            </a:srgbClr>
+          </a:solidFill>
+          <a:ln w="12700">
+            <a:solidFill>
+              <a:srgbClr val="1A1815">
+                <a:alpha val="7000"/>
+              </a:srgbClr>
+            </a:solidFill>
+          </a:ln>
+        </p:spPr>
+        <p:style>
+          <a:lnRef idx="1">
+            <a:schemeClr val="accent1"/>
+          </a:lnRef>
+          <a:fillRef idx="3">
+            <a:schemeClr val="accent1"/>
+          </a:fillRef>
+          <a:effectRef idx="2">
+            <a:schemeClr val="accent1"/>
+          </a:effectRef>
+          <a:fontRef idx="minor">
+            <a:schemeClr val="lt1"/>
+          </a:fontRef>
+        </p:style>
+        <p:txBody>
+          <a:bodyPr rtlCol="0" anchor="ctr"/>
+          <a:lstStyle/>
+          <a:p>
+            <a:pPr algn="ctr"/>
+          </a:p>
+        </p:txBody>
+      </p:sp>
+      <p:sp>
+        <p:nvSpPr>
+          <p:cNvPr id="15" name="TextBox 14"/>
+          <p:cNvSpPr txBox="1"/>
+          <p:nvPr/>
+        </p:nvSpPr>
+        <p:spPr>
+          <a:xfrm>
+            <a:off x="914377" y="3790950"/>
+            <a:ext cx="1447763" cy="190500"/>
+          </a:xfrm>
+          <a:prstGeom prst="rect">
+            <a:avLst/>
+          </a:prstGeom>
+          <a:noFill/>
+        </p:spPr>
+        <p:txBody>
+          <a:bodyPr wrap="square" lIns="0" rIns="0" tIns="0" bIns="0">
+            <a:spAutoFit/>
+          </a:bodyPr>
+          <a:lstStyle/>
+          <a:p>
+            <a:pPr algn="l"/>
+            <a:r>
+              <a:rPr sz="1050" b="1" i="0" spc="300">
+                <a:solidFill>
+                  <a:srgbClr val="D4956B"/>
+                </a:solidFill>
+                <a:latin typeface="Noto Sans SC"/>
+              </a:rPr>
+              <a:t>成本下降</a:t>
+            </a:r>
+          </a:p>
+        </p:txBody>
+      </p:sp>
+      <p:sp>
+        <p:nvSpPr>
+          <p:cNvPr id="16" name="TextBox 15"/>
+          <p:cNvSpPr txBox="1"/>
+          <p:nvPr/>
+        </p:nvSpPr>
+        <p:spPr>
+          <a:xfrm>
+            <a:off x="914377" y="4191000"/>
+            <a:ext cx="1447763" cy="723900"/>
+          </a:xfrm>
+          <a:prstGeom prst="rect">
+            <a:avLst/>
+          </a:prstGeom>
+          <a:noFill/>
+        </p:spPr>
+        <p:txBody>
+          <a:bodyPr wrap="square" lIns="0" rIns="0" tIns="0" bIns="0">
+            <a:spAutoFit/>
+          </a:bodyPr>
+          <a:lstStyle/>
+          <a:p>
+            <a:pPr algn="l"/>
+            <a:r>
+              <a:rPr sz="4800" b="1" i="0">
+                <a:solidFill>
+                  <a:srgbClr val="1A1815"/>
+                </a:solidFill>
+                <a:latin typeface="Noto Sans SC"/>
+              </a:rPr>
+              <a:t>60</a:t>
+            </a:r>
+          </a:p>
+        </p:txBody>
+      </p:sp>
+      <p:sp>
+        <p:nvSpPr>
+          <p:cNvPr id="17" name="TextBox 16"/>
+          <p:cNvSpPr txBox="1"/>
+          <p:nvPr/>
+        </p:nvSpPr>
+        <p:spPr>
+          <a:xfrm>
+            <a:off x="1657308" y="4619625"/>
+            <a:ext cx="285742" cy="219075"/>
+          </a:xfrm>
+          <a:prstGeom prst="rect">
+            <a:avLst/>
+          </a:prstGeom>
+          <a:noFill/>
+        </p:spPr>
+        <p:txBody>
+          <a:bodyPr wrap="square" lIns="0" rIns="0" tIns="0" bIns="0">
+            <a:spAutoFit/>
+          </a:bodyPr>
+          <a:lstStyle/>
+          <a:p>
+            <a:pPr algn="l"/>
+            <a:r>
+              <a:rPr sz="1275" b="1" i="0">
+                <a:solidFill>
+                  <a:srgbClr val="5C5548"/>
+                </a:solidFill>
+                <a:latin typeface="Noto Sans SC"/>
+              </a:rPr>
+              <a:t>%</a:t>
+            </a:r>
+          </a:p>
+        </p:txBody>
+      </p:sp>
+      <p:sp>
+        <p:nvSpPr>
+          <p:cNvPr id="18" name="Rectangle 17"/>
+          <p:cNvSpPr/>
+          <p:nvPr/>
+        </p:nvSpPr>
+        <p:spPr>
+          <a:xfrm>
+            <a:off x="914377" y="5048250"/>
+            <a:ext cx="571485" cy="28575"/>
+          </a:xfrm>
+          <a:prstGeom prst="rect">
+            <a:avLst/>
+          </a:prstGeom>
+          <a:solidFill>
+            <a:srgbClr val="B8654A"/>
+          </a:solidFill>
+          <a:ln>
+            <a:noFill/>
+          </a:ln>
+        </p:spPr>
+        <p:style>
+          <a:lnRef idx="1">
+            <a:schemeClr val="accent1"/>
+          </a:lnRef>
+          <a:fillRef idx="3">
+            <a:schemeClr val="accent1"/>
+          </a:fillRef>
+          <a:effectRef idx="2">
+            <a:schemeClr val="accent1"/>
+          </a:effectRef>
+          <a:fontRef idx="minor">
+            <a:schemeClr val="lt1"/>
+          </a:fontRef>
+        </p:style>
+        <p:txBody>
+          <a:bodyPr rtlCol="0" anchor="ctr"/>
+          <a:lstStyle/>
+          <a:p>
+            <a:pPr algn="ctr"/>
+          </a:p>
+        </p:txBody>
+      </p:sp>
+      <p:sp>
+        <p:nvSpPr>
+          <p:cNvPr id="19" name="Rounded Rectangle 18"/>
+          <p:cNvSpPr/>
+          <p:nvPr/>
+        </p:nvSpPr>
+        <p:spPr>
+          <a:xfrm>
+            <a:off x="9448563" y="533400"/>
+            <a:ext cx="2209744" cy="2667000"/>
+          </a:xfrm>
+          <a:prstGeom prst="roundRect">
+            <a:avLst>
+              <a:gd name="adj" fmla="val 9655"/>
+            </a:avLst>
+          </a:prstGeom>
+          <a:solidFill>
+            <a:srgbClr val="FFFFFF">
+              <a:alpha val="82000"/>
+            </a:srgbClr>
+          </a:solidFill>
+          <a:ln w="12700">
+            <a:solidFill>
+              <a:srgbClr val="1A1815">
+                <a:alpha val="7000"/>
+              </a:srgbClr>
+            </a:solidFill>
+          </a:ln>
+        </p:spPr>
+        <p:style>
+          <a:lnRef idx="1">
+            <a:schemeClr val="accent1"/>
+          </a:lnRef>
+          <a:fillRef idx="3">
+            <a:schemeClr val="accent1"/>
+          </a:fillRef>
+          <a:effectRef idx="2">
+            <a:schemeClr val="accent1"/>
+          </a:effectRef>
+          <a:fontRef idx="minor">
+            <a:schemeClr val="lt1"/>
+          </a:fontRef>
+        </p:style>
+        <p:txBody>
+          <a:bodyPr rtlCol="0" anchor="ctr"/>
+          <a:lstStyle/>
+          <a:p>
+            <a:pPr algn="ctr"/>
+          </a:p>
+        </p:txBody>
+      </p:sp>
+      <p:sp>
+        <p:nvSpPr>
+          <p:cNvPr id="20" name="TextBox 19"/>
+          <p:cNvSpPr txBox="1"/>
+          <p:nvPr/>
+        </p:nvSpPr>
+        <p:spPr>
+          <a:xfrm>
+            <a:off x="9829554" y="952500"/>
+            <a:ext cx="1447763" cy="190500"/>
+          </a:xfrm>
+          <a:prstGeom prst="rect">
+            <a:avLst/>
+          </a:prstGeom>
+          <a:noFill/>
+        </p:spPr>
+        <p:txBody>
+          <a:bodyPr wrap="square" lIns="0" rIns="0" tIns="0" bIns="0">
+            <a:spAutoFit/>
+          </a:bodyPr>
+          <a:lstStyle/>
+          <a:p>
+            <a:pPr algn="l"/>
+            <a:r>
+              <a:rPr sz="1050" b="1" i="0" spc="300">
+                <a:solidFill>
+                  <a:srgbClr val="D4956B"/>
+                </a:solidFill>
+                <a:latin typeface="Noto Sans SC"/>
+              </a:rPr>
+              <a:t>上线周期</a:t>
+            </a:r>
+          </a:p>
+        </p:txBody>
+      </p:sp>
+      <p:sp>
+        <p:nvSpPr>
+          <p:cNvPr id="21" name="TextBox 20"/>
+          <p:cNvSpPr txBox="1"/>
+          <p:nvPr/>
+        </p:nvSpPr>
+        <p:spPr>
+          <a:xfrm>
+            <a:off x="9829554" y="1352550"/>
+            <a:ext cx="1447763" cy="723900"/>
+          </a:xfrm>
+          <a:prstGeom prst="rect">
+            <a:avLst/>
+          </a:prstGeom>
+          <a:noFill/>
+        </p:spPr>
+        <p:txBody>
+          <a:bodyPr wrap="square" lIns="0" rIns="0" tIns="0" bIns="0">
+            <a:spAutoFit/>
+          </a:bodyPr>
+          <a:lstStyle/>
+          <a:p>
+            <a:pPr algn="l"/>
+            <a:r>
+              <a:rPr sz="4800" b="1" i="0">
+                <a:solidFill>
+                  <a:srgbClr val="1A1815"/>
+                </a:solidFill>
+                <a:latin typeface="Noto Sans SC"/>
+              </a:rPr>
+              <a:t>1/10</a:t>
+            </a:r>
+          </a:p>
+        </p:txBody>
+      </p:sp>
+      <p:sp>
+        <p:nvSpPr>
+          <p:cNvPr id="22" name="Rectangle 21"/>
+          <p:cNvSpPr/>
+          <p:nvPr/>
+        </p:nvSpPr>
+        <p:spPr>
+          <a:xfrm>
+            <a:off x="9829554" y="2209800"/>
+            <a:ext cx="571485" cy="28575"/>
+          </a:xfrm>
+          <a:prstGeom prst="rect">
+            <a:avLst/>
+          </a:prstGeom>
+          <a:solidFill>
+            <a:srgbClr val="B8654A"/>
+          </a:solidFill>
+          <a:ln>
+            <a:noFill/>
+          </a:ln>
+        </p:spPr>
+        <p:style>
+          <a:lnRef idx="1">
+            <a:schemeClr val="accent1"/>
+          </a:lnRef>
+          <a:fillRef idx="3">
+            <a:schemeClr val="accent1"/>
+          </a:fillRef>
+          <a:effectRef idx="2">
+            <a:schemeClr val="accent1"/>
+          </a:effectRef>
+          <a:fontRef idx="minor">
+            <a:schemeClr val="lt1"/>
+          </a:fontRef>
+        </p:style>
+        <p:txBody>
+          <a:bodyPr rtlCol="0" anchor="ctr"/>
+          <a:lstStyle/>
+          <a:p>
+            <a:pPr algn="ctr"/>
+          </a:p>
+        </p:txBody>
+      </p:sp>
+      <p:sp>
+        <p:nvSpPr>
+          <p:cNvPr id="23" name="TextBox 22"/>
+          <p:cNvSpPr txBox="1"/>
+          <p:nvPr/>
+        </p:nvSpPr>
+        <p:spPr>
+          <a:xfrm>
+            <a:off x="9829554" y="2343150"/>
+            <a:ext cx="1447763" cy="190500"/>
+          </a:xfrm>
+          <a:prstGeom prst="rect">
+            <a:avLst/>
+          </a:prstGeom>
+          <a:noFill/>
+        </p:spPr>
+        <p:txBody>
+          <a:bodyPr wrap="square" lIns="0" rIns="0" tIns="0" bIns="0">
+            <a:spAutoFit/>
+          </a:bodyPr>
+          <a:lstStyle/>
+          <a:p>
+            <a:pPr algn="l"/>
+            <a:r>
+              <a:rPr sz="975" b="0" i="0">
+                <a:solidFill>
+                  <a:srgbClr val="5C5548"/>
+                </a:solidFill>
+                <a:latin typeface="Noto Sans SC"/>
+              </a:rPr>
+              <a:t>对比传统开发</a:t>
+            </a:r>
+          </a:p>
+        </p:txBody>
+      </p:sp>
+      <p:sp>
+        <p:nvSpPr>
+          <p:cNvPr id="24" name="Rounded Rectangle 23"/>
+          <p:cNvSpPr/>
+          <p:nvPr/>
+        </p:nvSpPr>
+        <p:spPr>
+          <a:xfrm>
+            <a:off x="9448563" y="3371850"/>
+            <a:ext cx="2209744" cy="2667000"/>
+          </a:xfrm>
+          <a:prstGeom prst="roundRect">
+            <a:avLst>
+              <a:gd name="adj" fmla="val 9655"/>
+            </a:avLst>
+          </a:prstGeom>
+          <a:solidFill>
+            <a:srgbClr val="FFFFFF">
+              <a:alpha val="82000"/>
+            </a:srgbClr>
+          </a:solidFill>
+          <a:ln w="12700">
+            <a:solidFill>
+              <a:srgbClr val="1A1815">
+                <a:alpha val="7000"/>
+              </a:srgbClr>
+            </a:solidFill>
+          </a:ln>
+        </p:spPr>
+        <p:style>
+          <a:lnRef idx="1">
+            <a:schemeClr val="accent1"/>
+          </a:lnRef>
+          <a:fillRef idx="3">
+            <a:schemeClr val="accent1"/>
+          </a:fillRef>
+          <a:effectRef idx="2">
+            <a:schemeClr val="accent1"/>
+          </a:effectRef>
+          <a:fontRef idx="minor">
+            <a:schemeClr val="lt1"/>
+          </a:fontRef>
+        </p:style>
+        <p:txBody>
+          <a:bodyPr rtlCol="0" anchor="ctr"/>
+          <a:lstStyle/>
+          <a:p>
+            <a:pPr algn="ctr"/>
+          </a:p>
+        </p:txBody>
+      </p:sp>
+      <p:sp>
+        <p:nvSpPr>
+          <p:cNvPr id="25" name="TextBox 24"/>
+          <p:cNvSpPr txBox="1"/>
+          <p:nvPr/>
+        </p:nvSpPr>
+        <p:spPr>
+          <a:xfrm>
+            <a:off x="9829554" y="3790950"/>
+            <a:ext cx="1447763" cy="190500"/>
+          </a:xfrm>
+          <a:prstGeom prst="rect">
+            <a:avLst/>
+          </a:prstGeom>
+          <a:noFill/>
+        </p:spPr>
+        <p:txBody>
+          <a:bodyPr wrap="square" lIns="0" rIns="0" tIns="0" bIns="0">
+            <a:spAutoFit/>
+          </a:bodyPr>
+          <a:lstStyle/>
+          <a:p>
+            <a:pPr algn="l"/>
+            <a:r>
+              <a:rPr sz="1050" b="1" i="0" spc="300">
+                <a:solidFill>
+                  <a:srgbClr val="D4956B"/>
+                </a:solidFill>
+                <a:latin typeface="Noto Sans SC"/>
+              </a:rPr>
+              <a:t>客户留存</a:t>
+            </a:r>
+          </a:p>
+        </p:txBody>
+      </p:sp>
+      <p:sp>
+        <p:nvSpPr>
+          <p:cNvPr id="26" name="TextBox 25"/>
+          <p:cNvSpPr txBox="1"/>
+          <p:nvPr/>
+        </p:nvSpPr>
+        <p:spPr>
+          <a:xfrm>
+            <a:off x="9829554" y="4191000"/>
+            <a:ext cx="1447763" cy="723900"/>
+          </a:xfrm>
+          <a:prstGeom prst="rect">
+            <a:avLst/>
+          </a:prstGeom>
+          <a:noFill/>
+        </p:spPr>
+        <p:txBody>
+          <a:bodyPr wrap="square" lIns="0" rIns="0" tIns="0" bIns="0">
+            <a:spAutoFit/>
+          </a:bodyPr>
+          <a:lstStyle/>
+          <a:p>
+            <a:pPr algn="l"/>
+            <a:r>
+              <a:rPr sz="4800" b="1" i="0">
+                <a:solidFill>
+                  <a:srgbClr val="1A1815"/>
+                </a:solidFill>
+                <a:latin typeface="Noto Sans SC"/>
+              </a:rPr>
+              <a:t>94</a:t>
+            </a:r>
+          </a:p>
+        </p:txBody>
+      </p:sp>
+      <p:sp>
+        <p:nvSpPr>
+          <p:cNvPr id="27" name="TextBox 26"/>
+          <p:cNvSpPr txBox="1"/>
+          <p:nvPr/>
+        </p:nvSpPr>
+        <p:spPr>
+          <a:xfrm>
+            <a:off x="10572485" y="4619625"/>
+            <a:ext cx="285742" cy="219075"/>
+          </a:xfrm>
+          <a:prstGeom prst="rect">
+            <a:avLst/>
+          </a:prstGeom>
+          <a:noFill/>
+        </p:spPr>
+        <p:txBody>
+          <a:bodyPr wrap="square" lIns="0" rIns="0" tIns="0" bIns="0">
+            <a:spAutoFit/>
+          </a:bodyPr>
+          <a:lstStyle/>
+          <a:p>
+            <a:pPr algn="l"/>
+            <a:r>
+              <a:rPr sz="1275" b="1" i="0">
+                <a:solidFill>
+                  <a:srgbClr val="5C5548"/>
+                </a:solidFill>
+                <a:latin typeface="Noto Sans SC"/>
+              </a:rPr>
+              <a:t>%</a:t>
+            </a:r>
+          </a:p>
+        </p:txBody>
+      </p:sp>
+      <p:sp>
+        <p:nvSpPr>
+          <p:cNvPr id="28" name="Rectangle 27"/>
+          <p:cNvSpPr/>
+          <p:nvPr/>
+        </p:nvSpPr>
+        <p:spPr>
+          <a:xfrm>
+            <a:off x="9829554" y="5048250"/>
+            <a:ext cx="571485" cy="28575"/>
+          </a:xfrm>
+          <a:prstGeom prst="rect">
+            <a:avLst/>
+          </a:prstGeom>
+          <a:solidFill>
+            <a:srgbClr val="B8654A"/>
+          </a:solidFill>
+          <a:ln>
+            <a:noFill/>
+          </a:ln>
+        </p:spPr>
+        <p:style>
+          <a:lnRef idx="1">
+            <a:schemeClr val="accent1"/>
+          </a:lnRef>
+          <a:fillRef idx="3">
+            <a:schemeClr val="accent1"/>
+          </a:fillRef>
+          <a:effectRef idx="2">
+            <a:schemeClr val="accent1"/>
+          </a:effectRef>
+          <a:fontRef idx="minor">
+            <a:schemeClr val="lt1"/>
+          </a:fontRef>
+        </p:style>
+        <p:txBody>
+          <a:bodyPr rtlCol="0" anchor="ctr"/>
+          <a:lstStyle/>
+          <a:p>
+            <a:pPr algn="ctr"/>
+          </a:p>
+        </p:txBody>
+      </p:sp>
+      <p:sp>
+        <p:nvSpPr>
+          <p:cNvPr id="29" name="TextBox 28"/>
+          <p:cNvSpPr txBox="1"/>
+          <p:nvPr/>
+        </p:nvSpPr>
+        <p:spPr>
+          <a:xfrm>
+            <a:off x="533386" y="6610350"/>
+            <a:ext cx="5714857" cy="190500"/>
+          </a:xfrm>
+          <a:prstGeom prst="rect">
+            <a:avLst/>
+          </a:prstGeom>
+          <a:noFill/>
+        </p:spPr>
+        <p:txBody>
+          <a:bodyPr wrap="square" lIns="0" rIns="0" tIns="0" bIns="0">
+            <a:spAutoFit/>
+          </a:bodyPr>
+          <a:lstStyle/>
+          <a:p>
+            <a:pPr algn="l"/>
+            <a:r>
+              <a:rPr sz="975" b="0" i="0">
+                <a:solidFill>
+                  <a:srgbClr val="9C9588"/>
+                </a:solidFill>
+                <a:latin typeface="Noto Sans SC"/>
+              </a:rPr>
+              <a:t>Dify 企业介绍</a:t>
+            </a:r>
+          </a:p>
+        </p:txBody>
+      </p:sp>
+      <p:sp>
+        <p:nvSpPr>
+          <p:cNvPr id="30" name="TextBox 29"/>
+          <p:cNvSpPr txBox="1"/>
+          <p:nvPr/>
+        </p:nvSpPr>
+        <p:spPr>
+          <a:xfrm>
+            <a:off x="9753356" y="6610350"/>
+            <a:ext cx="1904952" cy="190500"/>
+          </a:xfrm>
+          <a:prstGeom prst="rect">
+            <a:avLst/>
+          </a:prstGeom>
+          <a:noFill/>
+        </p:spPr>
+        <p:txBody>
+          <a:bodyPr wrap="square" lIns="0" rIns="0" tIns="0" bIns="0">
+            <a:spAutoFit/>
+          </a:bodyPr>
+          <a:lstStyle/>
+          <a:p>
+            <a:pPr algn="r"/>
+            <a:r>
+              <a:rPr sz="975" b="0" i="0">
+                <a:solidFill>
+                  <a:srgbClr val="9C9588"/>
+                </a:solidFill>
+                <a:latin typeface="IBM Plex Mono"/>
+              </a:rPr>
+              <a:t>05 / 08</a:t>
+            </a:r>
+          </a:p>
+        </p:txBody>
+      </p:sp>
     </p:spTree>
   </p:cSld>
   <p:clrMapOvr>
@@ -3335,36 +7499,1705 @@
         <p:nvPr/>
       </p:nvGrpSpPr>
       <p:grpSpPr/>
-      <p:pic>
-        <p:nvPicPr>
-          <p:cNvPr id="2" name="Picture 1" descr="06-hero-top-demo.png"/>
-          <p:cNvPicPr>
-            <a:picLocks noChangeAspect="1"/>
-          </p:cNvPicPr>
-          <p:nvPr/>
-        </p:nvPicPr>
-        <p:blipFill>
-          <a:blip r:embed="rId2">
-            <a:extLst>
-              <a:ext uri="{96DAC541-7B7A-43D3-8B79-37D633B846F1}">
-                <asvg:svgBlip xmlns:asvg="http://schemas.microsoft.com/office/drawing/2016/SVG/main" r:embed="rId3"/>
-              </a:ext>
-            </a:extLst>
-          </a:blip>
-          <a:stretch>
-            <a:fillRect/>
-          </a:stretch>
-        </p:blipFill>
-        <p:spPr>
-          <a:xfrm>
-            <a:off x="0" y="0"/>
-            <a:ext cx="12191695" cy="6858000"/>
-          </a:xfrm>
-          <a:prstGeom prst="rect">
-            <a:avLst/>
-          </a:prstGeom>
-        </p:spPr>
-      </p:pic>
+      <p:sp>
+        <p:nvSpPr>
+          <p:cNvPr id="2" name="Rectangle 1"/>
+          <p:cNvSpPr/>
+          <p:nvPr/>
+        </p:nvSpPr>
+        <p:spPr>
+          <a:xfrm>
+            <a:off x="-91440" y="-91440"/>
+            <a:ext cx="12374575" cy="7040880"/>
+          </a:xfrm>
+          <a:prstGeom prst="rect">
+            <a:avLst/>
+          </a:prstGeom>
+          <a:ln>
+            <a:noFill/>
+          </a:ln>
+          <a:gradFill>
+            <a:gsLst>
+              <a:gs pos="0">
+                <a:srgbClr val="F5F0E8"/>
+              </a:gs>
+              <a:gs pos="100000">
+                <a:srgbClr val="EDE6D8"/>
+              </a:gs>
+            </a:gsLst>
+            <a:lin ang="5400000" scaled="1"/>
+          </a:gradFill>
+        </p:spPr>
+        <p:style>
+          <a:lnRef idx="1">
+            <a:schemeClr val="accent1"/>
+          </a:lnRef>
+          <a:fillRef idx="3">
+            <a:schemeClr val="accent1"/>
+          </a:fillRef>
+          <a:effectRef idx="2">
+            <a:schemeClr val="accent1"/>
+          </a:effectRef>
+          <a:fontRef idx="minor">
+            <a:schemeClr val="lt1"/>
+          </a:fontRef>
+        </p:style>
+        <p:txBody>
+          <a:bodyPr rtlCol="0" anchor="ctr"/>
+          <a:lstStyle/>
+          <a:p>
+            <a:pPr algn="ctr"/>
+          </a:p>
+        </p:txBody>
+      </p:sp>
+      <p:sp>
+        <p:nvSpPr>
+          <p:cNvPr id="3" name="Rounded Rectangle 2"/>
+          <p:cNvSpPr/>
+          <p:nvPr/>
+        </p:nvSpPr>
+        <p:spPr>
+          <a:xfrm>
+            <a:off x="533386" y="533400"/>
+            <a:ext cx="11124921" cy="2286000"/>
+          </a:xfrm>
+          <a:prstGeom prst="roundRect">
+            <a:avLst>
+              <a:gd name="adj" fmla="val 9333"/>
+            </a:avLst>
+          </a:prstGeom>
+          <a:solidFill>
+            <a:srgbClr val="FFFFFF">
+              <a:alpha val="82000"/>
+            </a:srgbClr>
+          </a:solidFill>
+          <a:ln w="12700">
+            <a:solidFill>
+              <a:srgbClr val="1A1815">
+                <a:alpha val="7000"/>
+              </a:srgbClr>
+            </a:solidFill>
+          </a:ln>
+        </p:spPr>
+        <p:style>
+          <a:lnRef idx="1">
+            <a:schemeClr val="accent1"/>
+          </a:lnRef>
+          <a:fillRef idx="3">
+            <a:schemeClr val="accent1"/>
+          </a:fillRef>
+          <a:effectRef idx="2">
+            <a:schemeClr val="accent1"/>
+          </a:effectRef>
+          <a:fontRef idx="minor">
+            <a:schemeClr val="lt1"/>
+          </a:fontRef>
+        </p:style>
+        <p:txBody>
+          <a:bodyPr rtlCol="0" anchor="ctr"/>
+          <a:lstStyle/>
+          <a:p>
+            <a:pPr algn="ctr"/>
+          </a:p>
+        </p:txBody>
+      </p:sp>
+      <p:sp>
+        <p:nvSpPr>
+          <p:cNvPr id="4" name="TextBox 3"/>
+          <p:cNvSpPr txBox="1"/>
+          <p:nvPr/>
+        </p:nvSpPr>
+        <p:spPr>
+          <a:xfrm>
+            <a:off x="914377" y="1181100"/>
+            <a:ext cx="10362940" cy="190500"/>
+          </a:xfrm>
+          <a:prstGeom prst="rect">
+            <a:avLst/>
+          </a:prstGeom>
+          <a:noFill/>
+        </p:spPr>
+        <p:txBody>
+          <a:bodyPr wrap="square" lIns="0" rIns="0" tIns="0" bIns="0">
+            <a:spAutoFit/>
+          </a:bodyPr>
+          <a:lstStyle/>
+          <a:p>
+            <a:pPr algn="l"/>
+            <a:r>
+              <a:rPr sz="1050" b="1" i="0" spc="300">
+                <a:solidFill>
+                  <a:srgbClr val="D4956B"/>
+                </a:solidFill>
+                <a:latin typeface="Noto Sans SC"/>
+              </a:rPr>
+              <a:t>ARCHITECTURE</a:t>
+            </a:r>
+          </a:p>
+        </p:txBody>
+      </p:sp>
+      <p:sp>
+        <p:nvSpPr>
+          <p:cNvPr id="5" name="TextBox 4"/>
+          <p:cNvSpPr txBox="1"/>
+          <p:nvPr/>
+        </p:nvSpPr>
+        <p:spPr>
+          <a:xfrm>
+            <a:off x="914377" y="1485900"/>
+            <a:ext cx="10362940" cy="476250"/>
+          </a:xfrm>
+          <a:prstGeom prst="rect">
+            <a:avLst/>
+          </a:prstGeom>
+          <a:noFill/>
+        </p:spPr>
+        <p:txBody>
+          <a:bodyPr wrap="square" lIns="0" rIns="0" tIns="0" bIns="0">
+            <a:spAutoFit/>
+          </a:bodyPr>
+          <a:lstStyle/>
+          <a:p>
+            <a:pPr algn="l"/>
+            <a:r>
+              <a:rPr sz="3150" b="1" i="0">
+                <a:solidFill>
+                  <a:srgbClr val="1A1815"/>
+                </a:solidFill>
+                <a:latin typeface="Noto Sans SC"/>
+              </a:rPr>
+              <a:t>分层架构：从数据层到编排层</a:t>
+            </a:r>
+          </a:p>
+        </p:txBody>
+      </p:sp>
+      <p:sp>
+        <p:nvSpPr>
+          <p:cNvPr id="6" name="TextBox 5"/>
+          <p:cNvSpPr txBox="1"/>
+          <p:nvPr/>
+        </p:nvSpPr>
+        <p:spPr>
+          <a:xfrm>
+            <a:off x="914377" y="2133600"/>
+            <a:ext cx="10362940" cy="266700"/>
+          </a:xfrm>
+          <a:prstGeom prst="rect">
+            <a:avLst/>
+          </a:prstGeom>
+          <a:noFill/>
+        </p:spPr>
+        <p:txBody>
+          <a:bodyPr wrap="square" lIns="0" rIns="0" tIns="0" bIns="0">
+            <a:spAutoFit/>
+          </a:bodyPr>
+          <a:lstStyle/>
+          <a:p>
+            <a:pPr algn="l"/>
+            <a:r>
+              <a:rPr sz="1500" b="0" i="0">
+                <a:solidFill>
+                  <a:srgbClr val="5C5548"/>
+                </a:solidFill>
+                <a:latin typeface="Noto Sans SC"/>
+              </a:rPr>
+              <a:t>每一层都可独立替换，整体可观测</a:t>
+            </a:r>
+          </a:p>
+        </p:txBody>
+      </p:sp>
+      <p:sp>
+        <p:nvSpPr>
+          <p:cNvPr id="7" name="Rounded Rectangle 6"/>
+          <p:cNvSpPr/>
+          <p:nvPr/>
+        </p:nvSpPr>
+        <p:spPr>
+          <a:xfrm>
+            <a:off x="533386" y="3009900"/>
+            <a:ext cx="3581310" cy="3028950"/>
+          </a:xfrm>
+          <a:prstGeom prst="roundRect">
+            <a:avLst>
+              <a:gd name="adj" fmla="val 7044"/>
+            </a:avLst>
+          </a:prstGeom>
+          <a:solidFill>
+            <a:srgbClr val="FFFFFF">
+              <a:alpha val="82000"/>
+            </a:srgbClr>
+          </a:solidFill>
+          <a:ln w="12700">
+            <a:solidFill>
+              <a:srgbClr val="1A1815">
+                <a:alpha val="7000"/>
+              </a:srgbClr>
+            </a:solidFill>
+          </a:ln>
+        </p:spPr>
+        <p:style>
+          <a:lnRef idx="1">
+            <a:schemeClr val="accent1"/>
+          </a:lnRef>
+          <a:fillRef idx="3">
+            <a:schemeClr val="accent1"/>
+          </a:fillRef>
+          <a:effectRef idx="2">
+            <a:schemeClr val="accent1"/>
+          </a:effectRef>
+          <a:fontRef idx="minor">
+            <a:schemeClr val="lt1"/>
+          </a:fontRef>
+        </p:style>
+        <p:txBody>
+          <a:bodyPr rtlCol="0" anchor="ctr"/>
+          <a:lstStyle/>
+          <a:p>
+            <a:pPr algn="ctr"/>
+          </a:p>
+        </p:txBody>
+      </p:sp>
+      <p:sp>
+        <p:nvSpPr>
+          <p:cNvPr id="8" name="TextBox 7"/>
+          <p:cNvSpPr txBox="1"/>
+          <p:nvPr/>
+        </p:nvSpPr>
+        <p:spPr>
+          <a:xfrm>
+            <a:off x="914377" y="3390900"/>
+            <a:ext cx="2819329" cy="333375"/>
+          </a:xfrm>
+          <a:prstGeom prst="rect">
+            <a:avLst/>
+          </a:prstGeom>
+          <a:noFill/>
+        </p:spPr>
+        <p:txBody>
+          <a:bodyPr wrap="square" lIns="0" rIns="0" tIns="0" bIns="0">
+            <a:spAutoFit/>
+          </a:bodyPr>
+          <a:lstStyle/>
+          <a:p>
+            <a:pPr algn="l"/>
+            <a:r>
+              <a:rPr sz="2100" b="1" i="0">
+                <a:solidFill>
+                  <a:srgbClr val="1A1815"/>
+                </a:solidFill>
+                <a:latin typeface="Noto Sans SC"/>
+              </a:rPr>
+              <a:t>数据层</a:t>
+            </a:r>
+          </a:p>
+        </p:txBody>
+      </p:sp>
+      <p:sp>
+        <p:nvSpPr>
+          <p:cNvPr id="9" name="Rectangle 8"/>
+          <p:cNvSpPr/>
+          <p:nvPr/>
+        </p:nvSpPr>
+        <p:spPr>
+          <a:xfrm>
+            <a:off x="800079" y="3914775"/>
+            <a:ext cx="38099" cy="304800"/>
+          </a:xfrm>
+          <a:prstGeom prst="rect">
+            <a:avLst/>
+          </a:prstGeom>
+          <a:solidFill>
+            <a:srgbClr val="B8654A"/>
+          </a:solidFill>
+          <a:ln>
+            <a:noFill/>
+          </a:ln>
+        </p:spPr>
+        <p:style>
+          <a:lnRef idx="1">
+            <a:schemeClr val="accent1"/>
+          </a:lnRef>
+          <a:fillRef idx="3">
+            <a:schemeClr val="accent1"/>
+          </a:fillRef>
+          <a:effectRef idx="2">
+            <a:schemeClr val="accent1"/>
+          </a:effectRef>
+          <a:fontRef idx="minor">
+            <a:schemeClr val="lt1"/>
+          </a:fontRef>
+        </p:style>
+        <p:txBody>
+          <a:bodyPr rtlCol="0" anchor="ctr"/>
+          <a:lstStyle/>
+          <a:p>
+            <a:pPr algn="ctr"/>
+          </a:p>
+        </p:txBody>
+      </p:sp>
+      <p:sp>
+        <p:nvSpPr>
+          <p:cNvPr id="10" name="Rounded Rectangle 9"/>
+          <p:cNvSpPr/>
+          <p:nvPr/>
+        </p:nvSpPr>
+        <p:spPr>
+          <a:xfrm>
+            <a:off x="914377" y="3914775"/>
+            <a:ext cx="304792" cy="304800"/>
+          </a:xfrm>
+          <a:prstGeom prst="roundRect">
+            <a:avLst>
+              <a:gd name="adj" fmla="val 25000"/>
+            </a:avLst>
+          </a:prstGeom>
+          <a:solidFill>
+            <a:srgbClr val="B8654A"/>
+          </a:solidFill>
+          <a:ln>
+            <a:noFill/>
+          </a:ln>
+        </p:spPr>
+        <p:style>
+          <a:lnRef idx="1">
+            <a:schemeClr val="accent1"/>
+          </a:lnRef>
+          <a:fillRef idx="3">
+            <a:schemeClr val="accent1"/>
+          </a:fillRef>
+          <a:effectRef idx="2">
+            <a:schemeClr val="accent1"/>
+          </a:effectRef>
+          <a:fontRef idx="minor">
+            <a:schemeClr val="lt1"/>
+          </a:fontRef>
+        </p:style>
+        <p:txBody>
+          <a:bodyPr rtlCol="0" anchor="ctr"/>
+          <a:lstStyle/>
+          <a:p>
+            <a:pPr algn="ctr"/>
+          </a:p>
+        </p:txBody>
+      </p:sp>
+      <p:sp>
+        <p:nvSpPr>
+          <p:cNvPr id="11" name="TextBox 10"/>
+          <p:cNvSpPr txBox="1"/>
+          <p:nvPr/>
+        </p:nvSpPr>
+        <p:spPr>
+          <a:xfrm>
+            <a:off x="914377" y="3971925"/>
+            <a:ext cx="304792" cy="209550"/>
+          </a:xfrm>
+          <a:prstGeom prst="rect">
+            <a:avLst/>
+          </a:prstGeom>
+          <a:noFill/>
+        </p:spPr>
+        <p:txBody>
+          <a:bodyPr wrap="square" lIns="0" rIns="0" tIns="0" bIns="0">
+            <a:spAutoFit/>
+          </a:bodyPr>
+          <a:lstStyle/>
+          <a:p>
+            <a:pPr algn="ctr"/>
+            <a:r>
+              <a:rPr sz="1125" b="1" i="0">
+                <a:solidFill>
+                  <a:srgbClr val="FFFFFF"/>
+                </a:solidFill>
+                <a:latin typeface="Noto Sans SC"/>
+              </a:rPr>
+              <a:t>01</a:t>
+            </a:r>
+          </a:p>
+        </p:txBody>
+      </p:sp>
+      <p:sp>
+        <p:nvSpPr>
+          <p:cNvPr id="12" name="TextBox 11"/>
+          <p:cNvSpPr txBox="1"/>
+          <p:nvPr/>
+        </p:nvSpPr>
+        <p:spPr>
+          <a:xfrm>
+            <a:off x="1371565" y="3952875"/>
+            <a:ext cx="2362140" cy="228600"/>
+          </a:xfrm>
+          <a:prstGeom prst="rect">
+            <a:avLst/>
+          </a:prstGeom>
+          <a:noFill/>
+        </p:spPr>
+        <p:txBody>
+          <a:bodyPr wrap="square" lIns="0" rIns="0" tIns="0" bIns="0">
+            <a:spAutoFit/>
+          </a:bodyPr>
+          <a:lstStyle/>
+          <a:p>
+            <a:pPr algn="l"/>
+            <a:r>
+              <a:rPr sz="1350" b="1" i="0">
+                <a:solidFill>
+                  <a:srgbClr val="1A1815"/>
+                </a:solidFill>
+                <a:latin typeface="Noto Sans SC"/>
+              </a:rPr>
+              <a:t>向量库</a:t>
+            </a:r>
+          </a:p>
+        </p:txBody>
+      </p:sp>
+      <p:sp>
+        <p:nvSpPr>
+          <p:cNvPr id="13" name="Rounded Rectangle 12"/>
+          <p:cNvSpPr/>
+          <p:nvPr/>
+        </p:nvSpPr>
+        <p:spPr>
+          <a:xfrm>
+            <a:off x="914377" y="4438650"/>
+            <a:ext cx="304792" cy="304800"/>
+          </a:xfrm>
+          <a:prstGeom prst="roundRect">
+            <a:avLst>
+              <a:gd name="adj" fmla="val 25000"/>
+            </a:avLst>
+          </a:prstGeom>
+          <a:solidFill>
+            <a:srgbClr val="B8654A"/>
+          </a:solidFill>
+          <a:ln>
+            <a:noFill/>
+          </a:ln>
+        </p:spPr>
+        <p:style>
+          <a:lnRef idx="1">
+            <a:schemeClr val="accent1"/>
+          </a:lnRef>
+          <a:fillRef idx="3">
+            <a:schemeClr val="accent1"/>
+          </a:fillRef>
+          <a:effectRef idx="2">
+            <a:schemeClr val="accent1"/>
+          </a:effectRef>
+          <a:fontRef idx="minor">
+            <a:schemeClr val="lt1"/>
+          </a:fontRef>
+        </p:style>
+        <p:txBody>
+          <a:bodyPr rtlCol="0" anchor="ctr"/>
+          <a:lstStyle/>
+          <a:p>
+            <a:pPr algn="ctr"/>
+          </a:p>
+        </p:txBody>
+      </p:sp>
+      <p:sp>
+        <p:nvSpPr>
+          <p:cNvPr id="14" name="TextBox 13"/>
+          <p:cNvSpPr txBox="1"/>
+          <p:nvPr/>
+        </p:nvSpPr>
+        <p:spPr>
+          <a:xfrm>
+            <a:off x="914377" y="4495800"/>
+            <a:ext cx="304792" cy="209550"/>
+          </a:xfrm>
+          <a:prstGeom prst="rect">
+            <a:avLst/>
+          </a:prstGeom>
+          <a:noFill/>
+        </p:spPr>
+        <p:txBody>
+          <a:bodyPr wrap="square" lIns="0" rIns="0" tIns="0" bIns="0">
+            <a:spAutoFit/>
+          </a:bodyPr>
+          <a:lstStyle/>
+          <a:p>
+            <a:pPr algn="ctr"/>
+            <a:r>
+              <a:rPr sz="1125" b="1" i="0">
+                <a:solidFill>
+                  <a:srgbClr val="FFFFFF"/>
+                </a:solidFill>
+                <a:latin typeface="Noto Sans SC"/>
+              </a:rPr>
+              <a:t>02</a:t>
+            </a:r>
+          </a:p>
+        </p:txBody>
+      </p:sp>
+      <p:sp>
+        <p:nvSpPr>
+          <p:cNvPr id="15" name="TextBox 14"/>
+          <p:cNvSpPr txBox="1"/>
+          <p:nvPr/>
+        </p:nvSpPr>
+        <p:spPr>
+          <a:xfrm>
+            <a:off x="1371565" y="4476750"/>
+            <a:ext cx="2362140" cy="228600"/>
+          </a:xfrm>
+          <a:prstGeom prst="rect">
+            <a:avLst/>
+          </a:prstGeom>
+          <a:noFill/>
+        </p:spPr>
+        <p:txBody>
+          <a:bodyPr wrap="square" lIns="0" rIns="0" tIns="0" bIns="0">
+            <a:spAutoFit/>
+          </a:bodyPr>
+          <a:lstStyle/>
+          <a:p>
+            <a:pPr algn="l"/>
+            <a:r>
+              <a:rPr sz="1350" b="1" i="0">
+                <a:solidFill>
+                  <a:srgbClr val="5C5548"/>
+                </a:solidFill>
+                <a:latin typeface="Noto Sans SC"/>
+              </a:rPr>
+              <a:t>对象存储</a:t>
+            </a:r>
+          </a:p>
+        </p:txBody>
+      </p:sp>
+      <p:sp>
+        <p:nvSpPr>
+          <p:cNvPr id="16" name="Rounded Rectangle 15"/>
+          <p:cNvSpPr/>
+          <p:nvPr/>
+        </p:nvSpPr>
+        <p:spPr>
+          <a:xfrm>
+            <a:off x="914377" y="4962525"/>
+            <a:ext cx="304792" cy="304800"/>
+          </a:xfrm>
+          <a:prstGeom prst="roundRect">
+            <a:avLst>
+              <a:gd name="adj" fmla="val 25000"/>
+            </a:avLst>
+          </a:prstGeom>
+          <a:solidFill>
+            <a:srgbClr val="B8654A"/>
+          </a:solidFill>
+          <a:ln>
+            <a:noFill/>
+          </a:ln>
+        </p:spPr>
+        <p:style>
+          <a:lnRef idx="1">
+            <a:schemeClr val="accent1"/>
+          </a:lnRef>
+          <a:fillRef idx="3">
+            <a:schemeClr val="accent1"/>
+          </a:fillRef>
+          <a:effectRef idx="2">
+            <a:schemeClr val="accent1"/>
+          </a:effectRef>
+          <a:fontRef idx="minor">
+            <a:schemeClr val="lt1"/>
+          </a:fontRef>
+        </p:style>
+        <p:txBody>
+          <a:bodyPr rtlCol="0" anchor="ctr"/>
+          <a:lstStyle/>
+          <a:p>
+            <a:pPr algn="ctr"/>
+          </a:p>
+        </p:txBody>
+      </p:sp>
+      <p:sp>
+        <p:nvSpPr>
+          <p:cNvPr id="17" name="TextBox 16"/>
+          <p:cNvSpPr txBox="1"/>
+          <p:nvPr/>
+        </p:nvSpPr>
+        <p:spPr>
+          <a:xfrm>
+            <a:off x="914377" y="5019675"/>
+            <a:ext cx="304792" cy="209550"/>
+          </a:xfrm>
+          <a:prstGeom prst="rect">
+            <a:avLst/>
+          </a:prstGeom>
+          <a:noFill/>
+        </p:spPr>
+        <p:txBody>
+          <a:bodyPr wrap="square" lIns="0" rIns="0" tIns="0" bIns="0">
+            <a:spAutoFit/>
+          </a:bodyPr>
+          <a:lstStyle/>
+          <a:p>
+            <a:pPr algn="ctr"/>
+            <a:r>
+              <a:rPr sz="1125" b="1" i="0">
+                <a:solidFill>
+                  <a:srgbClr val="FFFFFF"/>
+                </a:solidFill>
+                <a:latin typeface="Noto Sans SC"/>
+              </a:rPr>
+              <a:t>03</a:t>
+            </a:r>
+          </a:p>
+        </p:txBody>
+      </p:sp>
+      <p:sp>
+        <p:nvSpPr>
+          <p:cNvPr id="18" name="TextBox 17"/>
+          <p:cNvSpPr txBox="1"/>
+          <p:nvPr/>
+        </p:nvSpPr>
+        <p:spPr>
+          <a:xfrm>
+            <a:off x="1371565" y="5000625"/>
+            <a:ext cx="2362140" cy="228600"/>
+          </a:xfrm>
+          <a:prstGeom prst="rect">
+            <a:avLst/>
+          </a:prstGeom>
+          <a:noFill/>
+        </p:spPr>
+        <p:txBody>
+          <a:bodyPr wrap="square" lIns="0" rIns="0" tIns="0" bIns="0">
+            <a:spAutoFit/>
+          </a:bodyPr>
+          <a:lstStyle/>
+          <a:p>
+            <a:pPr algn="l"/>
+            <a:r>
+              <a:rPr sz="1350" b="1" i="0">
+                <a:solidFill>
+                  <a:srgbClr val="5C5548"/>
+                </a:solidFill>
+                <a:latin typeface="Noto Sans SC"/>
+              </a:rPr>
+              <a:t>审计日志</a:t>
+            </a:r>
+          </a:p>
+        </p:txBody>
+      </p:sp>
+      <p:sp>
+        <p:nvSpPr>
+          <p:cNvPr id="19" name="Rounded Rectangle 18"/>
+          <p:cNvSpPr/>
+          <p:nvPr/>
+        </p:nvSpPr>
+        <p:spPr>
+          <a:xfrm>
+            <a:off x="4305192" y="3009900"/>
+            <a:ext cx="3581310" cy="3028950"/>
+          </a:xfrm>
+          <a:prstGeom prst="roundRect">
+            <a:avLst>
+              <a:gd name="adj" fmla="val 7044"/>
+            </a:avLst>
+          </a:prstGeom>
+          <a:solidFill>
+            <a:srgbClr val="FFFFFF">
+              <a:alpha val="82000"/>
+            </a:srgbClr>
+          </a:solidFill>
+          <a:ln w="12700">
+            <a:solidFill>
+              <a:srgbClr val="1A1815">
+                <a:alpha val="7000"/>
+              </a:srgbClr>
+            </a:solidFill>
+          </a:ln>
+        </p:spPr>
+        <p:style>
+          <a:lnRef idx="1">
+            <a:schemeClr val="accent1"/>
+          </a:lnRef>
+          <a:fillRef idx="3">
+            <a:schemeClr val="accent1"/>
+          </a:fillRef>
+          <a:effectRef idx="2">
+            <a:schemeClr val="accent1"/>
+          </a:effectRef>
+          <a:fontRef idx="minor">
+            <a:schemeClr val="lt1"/>
+          </a:fontRef>
+        </p:style>
+        <p:txBody>
+          <a:bodyPr rtlCol="0" anchor="ctr"/>
+          <a:lstStyle/>
+          <a:p>
+            <a:pPr algn="ctr"/>
+          </a:p>
+        </p:txBody>
+      </p:sp>
+      <p:sp>
+        <p:nvSpPr>
+          <p:cNvPr id="20" name="TextBox 19"/>
+          <p:cNvSpPr txBox="1"/>
+          <p:nvPr/>
+        </p:nvSpPr>
+        <p:spPr>
+          <a:xfrm>
+            <a:off x="4686182" y="3390900"/>
+            <a:ext cx="2819329" cy="333375"/>
+          </a:xfrm>
+          <a:prstGeom prst="rect">
+            <a:avLst/>
+          </a:prstGeom>
+          <a:noFill/>
+        </p:spPr>
+        <p:txBody>
+          <a:bodyPr wrap="square" lIns="0" rIns="0" tIns="0" bIns="0">
+            <a:spAutoFit/>
+          </a:bodyPr>
+          <a:lstStyle/>
+          <a:p>
+            <a:pPr algn="l"/>
+            <a:r>
+              <a:rPr sz="2100" b="1" i="0">
+                <a:solidFill>
+                  <a:srgbClr val="1A1815"/>
+                </a:solidFill>
+                <a:latin typeface="Noto Sans SC"/>
+              </a:rPr>
+              <a:t>能力层</a:t>
+            </a:r>
+          </a:p>
+        </p:txBody>
+      </p:sp>
+      <p:sp>
+        <p:nvSpPr>
+          <p:cNvPr id="21" name="Rectangle 20"/>
+          <p:cNvSpPr/>
+          <p:nvPr/>
+        </p:nvSpPr>
+        <p:spPr>
+          <a:xfrm>
+            <a:off x="4571885" y="3914775"/>
+            <a:ext cx="38099" cy="304800"/>
+          </a:xfrm>
+          <a:prstGeom prst="rect">
+            <a:avLst/>
+          </a:prstGeom>
+          <a:solidFill>
+            <a:srgbClr val="B8654A"/>
+          </a:solidFill>
+          <a:ln>
+            <a:noFill/>
+          </a:ln>
+        </p:spPr>
+        <p:style>
+          <a:lnRef idx="1">
+            <a:schemeClr val="accent1"/>
+          </a:lnRef>
+          <a:fillRef idx="3">
+            <a:schemeClr val="accent1"/>
+          </a:fillRef>
+          <a:effectRef idx="2">
+            <a:schemeClr val="accent1"/>
+          </a:effectRef>
+          <a:fontRef idx="minor">
+            <a:schemeClr val="lt1"/>
+          </a:fontRef>
+        </p:style>
+        <p:txBody>
+          <a:bodyPr rtlCol="0" anchor="ctr"/>
+          <a:lstStyle/>
+          <a:p>
+            <a:pPr algn="ctr"/>
+          </a:p>
+        </p:txBody>
+      </p:sp>
+      <p:sp>
+        <p:nvSpPr>
+          <p:cNvPr id="22" name="Rounded Rectangle 21"/>
+          <p:cNvSpPr/>
+          <p:nvPr/>
+        </p:nvSpPr>
+        <p:spPr>
+          <a:xfrm>
+            <a:off x="4686182" y="3914775"/>
+            <a:ext cx="304792" cy="304800"/>
+          </a:xfrm>
+          <a:prstGeom prst="roundRect">
+            <a:avLst>
+              <a:gd name="adj" fmla="val 25000"/>
+            </a:avLst>
+          </a:prstGeom>
+          <a:solidFill>
+            <a:srgbClr val="B8654A"/>
+          </a:solidFill>
+          <a:ln>
+            <a:noFill/>
+          </a:ln>
+        </p:spPr>
+        <p:style>
+          <a:lnRef idx="1">
+            <a:schemeClr val="accent1"/>
+          </a:lnRef>
+          <a:fillRef idx="3">
+            <a:schemeClr val="accent1"/>
+          </a:fillRef>
+          <a:effectRef idx="2">
+            <a:schemeClr val="accent1"/>
+          </a:effectRef>
+          <a:fontRef idx="minor">
+            <a:schemeClr val="lt1"/>
+          </a:fontRef>
+        </p:style>
+        <p:txBody>
+          <a:bodyPr rtlCol="0" anchor="ctr"/>
+          <a:lstStyle/>
+          <a:p>
+            <a:pPr algn="ctr"/>
+          </a:p>
+        </p:txBody>
+      </p:sp>
+      <p:sp>
+        <p:nvSpPr>
+          <p:cNvPr id="23" name="TextBox 22"/>
+          <p:cNvSpPr txBox="1"/>
+          <p:nvPr/>
+        </p:nvSpPr>
+        <p:spPr>
+          <a:xfrm>
+            <a:off x="4686182" y="3971925"/>
+            <a:ext cx="304792" cy="209550"/>
+          </a:xfrm>
+          <a:prstGeom prst="rect">
+            <a:avLst/>
+          </a:prstGeom>
+          <a:noFill/>
+        </p:spPr>
+        <p:txBody>
+          <a:bodyPr wrap="square" lIns="0" rIns="0" tIns="0" bIns="0">
+            <a:spAutoFit/>
+          </a:bodyPr>
+          <a:lstStyle/>
+          <a:p>
+            <a:pPr algn="ctr"/>
+            <a:r>
+              <a:rPr sz="1125" b="1" i="0">
+                <a:solidFill>
+                  <a:srgbClr val="FFFFFF"/>
+                </a:solidFill>
+                <a:latin typeface="Noto Sans SC"/>
+              </a:rPr>
+              <a:t>01</a:t>
+            </a:r>
+          </a:p>
+        </p:txBody>
+      </p:sp>
+      <p:sp>
+        <p:nvSpPr>
+          <p:cNvPr id="24" name="TextBox 23"/>
+          <p:cNvSpPr txBox="1"/>
+          <p:nvPr/>
+        </p:nvSpPr>
+        <p:spPr>
+          <a:xfrm>
+            <a:off x="5143371" y="3952875"/>
+            <a:ext cx="2362140" cy="228600"/>
+          </a:xfrm>
+          <a:prstGeom prst="rect">
+            <a:avLst/>
+          </a:prstGeom>
+          <a:noFill/>
+        </p:spPr>
+        <p:txBody>
+          <a:bodyPr wrap="square" lIns="0" rIns="0" tIns="0" bIns="0">
+            <a:spAutoFit/>
+          </a:bodyPr>
+          <a:lstStyle/>
+          <a:p>
+            <a:pPr algn="l"/>
+            <a:r>
+              <a:rPr sz="1350" b="1" i="0">
+                <a:solidFill>
+                  <a:srgbClr val="1A1815"/>
+                </a:solidFill>
+                <a:latin typeface="Noto Sans SC"/>
+              </a:rPr>
+              <a:t>模型路由</a:t>
+            </a:r>
+          </a:p>
+        </p:txBody>
+      </p:sp>
+      <p:sp>
+        <p:nvSpPr>
+          <p:cNvPr id="25" name="Rounded Rectangle 24"/>
+          <p:cNvSpPr/>
+          <p:nvPr/>
+        </p:nvSpPr>
+        <p:spPr>
+          <a:xfrm>
+            <a:off x="4686182" y="4438650"/>
+            <a:ext cx="304792" cy="304800"/>
+          </a:xfrm>
+          <a:prstGeom prst="roundRect">
+            <a:avLst>
+              <a:gd name="adj" fmla="val 25000"/>
+            </a:avLst>
+          </a:prstGeom>
+          <a:solidFill>
+            <a:srgbClr val="B8654A"/>
+          </a:solidFill>
+          <a:ln>
+            <a:noFill/>
+          </a:ln>
+        </p:spPr>
+        <p:style>
+          <a:lnRef idx="1">
+            <a:schemeClr val="accent1"/>
+          </a:lnRef>
+          <a:fillRef idx="3">
+            <a:schemeClr val="accent1"/>
+          </a:fillRef>
+          <a:effectRef idx="2">
+            <a:schemeClr val="accent1"/>
+          </a:effectRef>
+          <a:fontRef idx="minor">
+            <a:schemeClr val="lt1"/>
+          </a:fontRef>
+        </p:style>
+        <p:txBody>
+          <a:bodyPr rtlCol="0" anchor="ctr"/>
+          <a:lstStyle/>
+          <a:p>
+            <a:pPr algn="ctr"/>
+          </a:p>
+        </p:txBody>
+      </p:sp>
+      <p:sp>
+        <p:nvSpPr>
+          <p:cNvPr id="26" name="TextBox 25"/>
+          <p:cNvSpPr txBox="1"/>
+          <p:nvPr/>
+        </p:nvSpPr>
+        <p:spPr>
+          <a:xfrm>
+            <a:off x="4686182" y="4495800"/>
+            <a:ext cx="304792" cy="209550"/>
+          </a:xfrm>
+          <a:prstGeom prst="rect">
+            <a:avLst/>
+          </a:prstGeom>
+          <a:noFill/>
+        </p:spPr>
+        <p:txBody>
+          <a:bodyPr wrap="square" lIns="0" rIns="0" tIns="0" bIns="0">
+            <a:spAutoFit/>
+          </a:bodyPr>
+          <a:lstStyle/>
+          <a:p>
+            <a:pPr algn="ctr"/>
+            <a:r>
+              <a:rPr sz="1125" b="1" i="0">
+                <a:solidFill>
+                  <a:srgbClr val="FFFFFF"/>
+                </a:solidFill>
+                <a:latin typeface="Noto Sans SC"/>
+              </a:rPr>
+              <a:t>02</a:t>
+            </a:r>
+          </a:p>
+        </p:txBody>
+      </p:sp>
+      <p:sp>
+        <p:nvSpPr>
+          <p:cNvPr id="27" name="TextBox 26"/>
+          <p:cNvSpPr txBox="1"/>
+          <p:nvPr/>
+        </p:nvSpPr>
+        <p:spPr>
+          <a:xfrm>
+            <a:off x="5143371" y="4476750"/>
+            <a:ext cx="2362140" cy="228600"/>
+          </a:xfrm>
+          <a:prstGeom prst="rect">
+            <a:avLst/>
+          </a:prstGeom>
+          <a:noFill/>
+        </p:spPr>
+        <p:txBody>
+          <a:bodyPr wrap="square" lIns="0" rIns="0" tIns="0" bIns="0">
+            <a:spAutoFit/>
+          </a:bodyPr>
+          <a:lstStyle/>
+          <a:p>
+            <a:pPr algn="l"/>
+            <a:r>
+              <a:rPr sz="1350" b="1" i="0">
+                <a:solidFill>
+                  <a:srgbClr val="5C5548"/>
+                </a:solidFill>
+                <a:latin typeface="Noto Sans SC"/>
+              </a:rPr>
+              <a:t>工具调用</a:t>
+            </a:r>
+          </a:p>
+        </p:txBody>
+      </p:sp>
+      <p:sp>
+        <p:nvSpPr>
+          <p:cNvPr id="28" name="Rounded Rectangle 27"/>
+          <p:cNvSpPr/>
+          <p:nvPr/>
+        </p:nvSpPr>
+        <p:spPr>
+          <a:xfrm>
+            <a:off x="4686182" y="4962525"/>
+            <a:ext cx="304792" cy="304800"/>
+          </a:xfrm>
+          <a:prstGeom prst="roundRect">
+            <a:avLst>
+              <a:gd name="adj" fmla="val 25000"/>
+            </a:avLst>
+          </a:prstGeom>
+          <a:solidFill>
+            <a:srgbClr val="B8654A"/>
+          </a:solidFill>
+          <a:ln>
+            <a:noFill/>
+          </a:ln>
+        </p:spPr>
+        <p:style>
+          <a:lnRef idx="1">
+            <a:schemeClr val="accent1"/>
+          </a:lnRef>
+          <a:fillRef idx="3">
+            <a:schemeClr val="accent1"/>
+          </a:fillRef>
+          <a:effectRef idx="2">
+            <a:schemeClr val="accent1"/>
+          </a:effectRef>
+          <a:fontRef idx="minor">
+            <a:schemeClr val="lt1"/>
+          </a:fontRef>
+        </p:style>
+        <p:txBody>
+          <a:bodyPr rtlCol="0" anchor="ctr"/>
+          <a:lstStyle/>
+          <a:p>
+            <a:pPr algn="ctr"/>
+          </a:p>
+        </p:txBody>
+      </p:sp>
+      <p:sp>
+        <p:nvSpPr>
+          <p:cNvPr id="29" name="TextBox 28"/>
+          <p:cNvSpPr txBox="1"/>
+          <p:nvPr/>
+        </p:nvSpPr>
+        <p:spPr>
+          <a:xfrm>
+            <a:off x="4686182" y="5019675"/>
+            <a:ext cx="304792" cy="209550"/>
+          </a:xfrm>
+          <a:prstGeom prst="rect">
+            <a:avLst/>
+          </a:prstGeom>
+          <a:noFill/>
+        </p:spPr>
+        <p:txBody>
+          <a:bodyPr wrap="square" lIns="0" rIns="0" tIns="0" bIns="0">
+            <a:spAutoFit/>
+          </a:bodyPr>
+          <a:lstStyle/>
+          <a:p>
+            <a:pPr algn="ctr"/>
+            <a:r>
+              <a:rPr sz="1125" b="1" i="0">
+                <a:solidFill>
+                  <a:srgbClr val="FFFFFF"/>
+                </a:solidFill>
+                <a:latin typeface="Noto Sans SC"/>
+              </a:rPr>
+              <a:t>03</a:t>
+            </a:r>
+          </a:p>
+        </p:txBody>
+      </p:sp>
+      <p:sp>
+        <p:nvSpPr>
+          <p:cNvPr id="30" name="TextBox 29"/>
+          <p:cNvSpPr txBox="1"/>
+          <p:nvPr/>
+        </p:nvSpPr>
+        <p:spPr>
+          <a:xfrm>
+            <a:off x="5143371" y="5000625"/>
+            <a:ext cx="2362140" cy="228600"/>
+          </a:xfrm>
+          <a:prstGeom prst="rect">
+            <a:avLst/>
+          </a:prstGeom>
+          <a:noFill/>
+        </p:spPr>
+        <p:txBody>
+          <a:bodyPr wrap="square" lIns="0" rIns="0" tIns="0" bIns="0">
+            <a:spAutoFit/>
+          </a:bodyPr>
+          <a:lstStyle/>
+          <a:p>
+            <a:pPr algn="l"/>
+            <a:r>
+              <a:rPr sz="1350" b="1" i="0">
+                <a:solidFill>
+                  <a:srgbClr val="5C5548"/>
+                </a:solidFill>
+                <a:latin typeface="Noto Sans SC"/>
+              </a:rPr>
+              <a:t>知识检索</a:t>
+            </a:r>
+          </a:p>
+        </p:txBody>
+      </p:sp>
+      <p:sp>
+        <p:nvSpPr>
+          <p:cNvPr id="31" name="Rounded Rectangle 30"/>
+          <p:cNvSpPr/>
+          <p:nvPr/>
+        </p:nvSpPr>
+        <p:spPr>
+          <a:xfrm>
+            <a:off x="8076997" y="3009900"/>
+            <a:ext cx="3581310" cy="3028950"/>
+          </a:xfrm>
+          <a:prstGeom prst="roundRect">
+            <a:avLst>
+              <a:gd name="adj" fmla="val 7044"/>
+            </a:avLst>
+          </a:prstGeom>
+          <a:solidFill>
+            <a:srgbClr val="FFFFFF">
+              <a:alpha val="82000"/>
+            </a:srgbClr>
+          </a:solidFill>
+          <a:ln w="12700">
+            <a:solidFill>
+              <a:srgbClr val="1A1815">
+                <a:alpha val="7000"/>
+              </a:srgbClr>
+            </a:solidFill>
+          </a:ln>
+        </p:spPr>
+        <p:style>
+          <a:lnRef idx="1">
+            <a:schemeClr val="accent1"/>
+          </a:lnRef>
+          <a:fillRef idx="3">
+            <a:schemeClr val="accent1"/>
+          </a:fillRef>
+          <a:effectRef idx="2">
+            <a:schemeClr val="accent1"/>
+          </a:effectRef>
+          <a:fontRef idx="minor">
+            <a:schemeClr val="lt1"/>
+          </a:fontRef>
+        </p:style>
+        <p:txBody>
+          <a:bodyPr rtlCol="0" anchor="ctr"/>
+          <a:lstStyle/>
+          <a:p>
+            <a:pPr algn="ctr"/>
+          </a:p>
+        </p:txBody>
+      </p:sp>
+      <p:sp>
+        <p:nvSpPr>
+          <p:cNvPr id="32" name="TextBox 31"/>
+          <p:cNvSpPr txBox="1"/>
+          <p:nvPr/>
+        </p:nvSpPr>
+        <p:spPr>
+          <a:xfrm>
+            <a:off x="8457988" y="3390900"/>
+            <a:ext cx="2819329" cy="333375"/>
+          </a:xfrm>
+          <a:prstGeom prst="rect">
+            <a:avLst/>
+          </a:prstGeom>
+          <a:noFill/>
+        </p:spPr>
+        <p:txBody>
+          <a:bodyPr wrap="square" lIns="0" rIns="0" tIns="0" bIns="0">
+            <a:spAutoFit/>
+          </a:bodyPr>
+          <a:lstStyle/>
+          <a:p>
+            <a:pPr algn="l"/>
+            <a:r>
+              <a:rPr sz="2100" b="1" i="0">
+                <a:solidFill>
+                  <a:srgbClr val="1A1815"/>
+                </a:solidFill>
+                <a:latin typeface="Noto Sans SC"/>
+              </a:rPr>
+              <a:t>编排层</a:t>
+            </a:r>
+          </a:p>
+        </p:txBody>
+      </p:sp>
+      <p:sp>
+        <p:nvSpPr>
+          <p:cNvPr id="33" name="Rectangle 32"/>
+          <p:cNvSpPr/>
+          <p:nvPr/>
+        </p:nvSpPr>
+        <p:spPr>
+          <a:xfrm>
+            <a:off x="8343691" y="3914775"/>
+            <a:ext cx="38099" cy="304800"/>
+          </a:xfrm>
+          <a:prstGeom prst="rect">
+            <a:avLst/>
+          </a:prstGeom>
+          <a:solidFill>
+            <a:srgbClr val="B8654A"/>
+          </a:solidFill>
+          <a:ln>
+            <a:noFill/>
+          </a:ln>
+        </p:spPr>
+        <p:style>
+          <a:lnRef idx="1">
+            <a:schemeClr val="accent1"/>
+          </a:lnRef>
+          <a:fillRef idx="3">
+            <a:schemeClr val="accent1"/>
+          </a:fillRef>
+          <a:effectRef idx="2">
+            <a:schemeClr val="accent1"/>
+          </a:effectRef>
+          <a:fontRef idx="minor">
+            <a:schemeClr val="lt1"/>
+          </a:fontRef>
+        </p:style>
+        <p:txBody>
+          <a:bodyPr rtlCol="0" anchor="ctr"/>
+          <a:lstStyle/>
+          <a:p>
+            <a:pPr algn="ctr"/>
+          </a:p>
+        </p:txBody>
+      </p:sp>
+      <p:sp>
+        <p:nvSpPr>
+          <p:cNvPr id="34" name="Rounded Rectangle 33"/>
+          <p:cNvSpPr/>
+          <p:nvPr/>
+        </p:nvSpPr>
+        <p:spPr>
+          <a:xfrm>
+            <a:off x="8457988" y="3914775"/>
+            <a:ext cx="304792" cy="304800"/>
+          </a:xfrm>
+          <a:prstGeom prst="roundRect">
+            <a:avLst>
+              <a:gd name="adj" fmla="val 25000"/>
+            </a:avLst>
+          </a:prstGeom>
+          <a:solidFill>
+            <a:srgbClr val="B8654A"/>
+          </a:solidFill>
+          <a:ln>
+            <a:noFill/>
+          </a:ln>
+        </p:spPr>
+        <p:style>
+          <a:lnRef idx="1">
+            <a:schemeClr val="accent1"/>
+          </a:lnRef>
+          <a:fillRef idx="3">
+            <a:schemeClr val="accent1"/>
+          </a:fillRef>
+          <a:effectRef idx="2">
+            <a:schemeClr val="accent1"/>
+          </a:effectRef>
+          <a:fontRef idx="minor">
+            <a:schemeClr val="lt1"/>
+          </a:fontRef>
+        </p:style>
+        <p:txBody>
+          <a:bodyPr rtlCol="0" anchor="ctr"/>
+          <a:lstStyle/>
+          <a:p>
+            <a:pPr algn="ctr"/>
+          </a:p>
+        </p:txBody>
+      </p:sp>
+      <p:sp>
+        <p:nvSpPr>
+          <p:cNvPr id="35" name="TextBox 34"/>
+          <p:cNvSpPr txBox="1"/>
+          <p:nvPr/>
+        </p:nvSpPr>
+        <p:spPr>
+          <a:xfrm>
+            <a:off x="8457988" y="3971925"/>
+            <a:ext cx="304792" cy="209550"/>
+          </a:xfrm>
+          <a:prstGeom prst="rect">
+            <a:avLst/>
+          </a:prstGeom>
+          <a:noFill/>
+        </p:spPr>
+        <p:txBody>
+          <a:bodyPr wrap="square" lIns="0" rIns="0" tIns="0" bIns="0">
+            <a:spAutoFit/>
+          </a:bodyPr>
+          <a:lstStyle/>
+          <a:p>
+            <a:pPr algn="ctr"/>
+            <a:r>
+              <a:rPr sz="1125" b="1" i="0">
+                <a:solidFill>
+                  <a:srgbClr val="FFFFFF"/>
+                </a:solidFill>
+                <a:latin typeface="Noto Sans SC"/>
+              </a:rPr>
+              <a:t>01</a:t>
+            </a:r>
+          </a:p>
+        </p:txBody>
+      </p:sp>
+      <p:sp>
+        <p:nvSpPr>
+          <p:cNvPr id="36" name="TextBox 35"/>
+          <p:cNvSpPr txBox="1"/>
+          <p:nvPr/>
+        </p:nvSpPr>
+        <p:spPr>
+          <a:xfrm>
+            <a:off x="8915176" y="3952875"/>
+            <a:ext cx="2362140" cy="228600"/>
+          </a:xfrm>
+          <a:prstGeom prst="rect">
+            <a:avLst/>
+          </a:prstGeom>
+          <a:noFill/>
+        </p:spPr>
+        <p:txBody>
+          <a:bodyPr wrap="square" lIns="0" rIns="0" tIns="0" bIns="0">
+            <a:spAutoFit/>
+          </a:bodyPr>
+          <a:lstStyle/>
+          <a:p>
+            <a:pPr algn="l"/>
+            <a:r>
+              <a:rPr sz="1350" b="1" i="0">
+                <a:solidFill>
+                  <a:srgbClr val="1A1815"/>
+                </a:solidFill>
+                <a:latin typeface="Noto Sans SC"/>
+              </a:rPr>
+              <a:t>Workflow</a:t>
+            </a:r>
+          </a:p>
+        </p:txBody>
+      </p:sp>
+      <p:sp>
+        <p:nvSpPr>
+          <p:cNvPr id="37" name="Rounded Rectangle 36"/>
+          <p:cNvSpPr/>
+          <p:nvPr/>
+        </p:nvSpPr>
+        <p:spPr>
+          <a:xfrm>
+            <a:off x="8457988" y="4438650"/>
+            <a:ext cx="304792" cy="304800"/>
+          </a:xfrm>
+          <a:prstGeom prst="roundRect">
+            <a:avLst>
+              <a:gd name="adj" fmla="val 25000"/>
+            </a:avLst>
+          </a:prstGeom>
+          <a:solidFill>
+            <a:srgbClr val="B8654A"/>
+          </a:solidFill>
+          <a:ln>
+            <a:noFill/>
+          </a:ln>
+        </p:spPr>
+        <p:style>
+          <a:lnRef idx="1">
+            <a:schemeClr val="accent1"/>
+          </a:lnRef>
+          <a:fillRef idx="3">
+            <a:schemeClr val="accent1"/>
+          </a:fillRef>
+          <a:effectRef idx="2">
+            <a:schemeClr val="accent1"/>
+          </a:effectRef>
+          <a:fontRef idx="minor">
+            <a:schemeClr val="lt1"/>
+          </a:fontRef>
+        </p:style>
+        <p:txBody>
+          <a:bodyPr rtlCol="0" anchor="ctr"/>
+          <a:lstStyle/>
+          <a:p>
+            <a:pPr algn="ctr"/>
+          </a:p>
+        </p:txBody>
+      </p:sp>
+      <p:sp>
+        <p:nvSpPr>
+          <p:cNvPr id="38" name="TextBox 37"/>
+          <p:cNvSpPr txBox="1"/>
+          <p:nvPr/>
+        </p:nvSpPr>
+        <p:spPr>
+          <a:xfrm>
+            <a:off x="8457988" y="4495800"/>
+            <a:ext cx="304792" cy="209550"/>
+          </a:xfrm>
+          <a:prstGeom prst="rect">
+            <a:avLst/>
+          </a:prstGeom>
+          <a:noFill/>
+        </p:spPr>
+        <p:txBody>
+          <a:bodyPr wrap="square" lIns="0" rIns="0" tIns="0" bIns="0">
+            <a:spAutoFit/>
+          </a:bodyPr>
+          <a:lstStyle/>
+          <a:p>
+            <a:pPr algn="ctr"/>
+            <a:r>
+              <a:rPr sz="1125" b="1" i="0">
+                <a:solidFill>
+                  <a:srgbClr val="FFFFFF"/>
+                </a:solidFill>
+                <a:latin typeface="Noto Sans SC"/>
+              </a:rPr>
+              <a:t>02</a:t>
+            </a:r>
+          </a:p>
+        </p:txBody>
+      </p:sp>
+      <p:sp>
+        <p:nvSpPr>
+          <p:cNvPr id="39" name="TextBox 38"/>
+          <p:cNvSpPr txBox="1"/>
+          <p:nvPr/>
+        </p:nvSpPr>
+        <p:spPr>
+          <a:xfrm>
+            <a:off x="8915176" y="4476750"/>
+            <a:ext cx="2362140" cy="228600"/>
+          </a:xfrm>
+          <a:prstGeom prst="rect">
+            <a:avLst/>
+          </a:prstGeom>
+          <a:noFill/>
+        </p:spPr>
+        <p:txBody>
+          <a:bodyPr wrap="square" lIns="0" rIns="0" tIns="0" bIns="0">
+            <a:spAutoFit/>
+          </a:bodyPr>
+          <a:lstStyle/>
+          <a:p>
+            <a:pPr algn="l"/>
+            <a:r>
+              <a:rPr sz="1350" b="1" i="0">
+                <a:solidFill>
+                  <a:srgbClr val="5C5548"/>
+                </a:solidFill>
+                <a:latin typeface="Noto Sans SC"/>
+              </a:rPr>
+              <a:t>Agent</a:t>
+            </a:r>
+          </a:p>
+        </p:txBody>
+      </p:sp>
+      <p:sp>
+        <p:nvSpPr>
+          <p:cNvPr id="40" name="Rounded Rectangle 39"/>
+          <p:cNvSpPr/>
+          <p:nvPr/>
+        </p:nvSpPr>
+        <p:spPr>
+          <a:xfrm>
+            <a:off x="8457988" y="4962525"/>
+            <a:ext cx="304792" cy="304800"/>
+          </a:xfrm>
+          <a:prstGeom prst="roundRect">
+            <a:avLst>
+              <a:gd name="adj" fmla="val 25000"/>
+            </a:avLst>
+          </a:prstGeom>
+          <a:solidFill>
+            <a:srgbClr val="B8654A"/>
+          </a:solidFill>
+          <a:ln>
+            <a:noFill/>
+          </a:ln>
+        </p:spPr>
+        <p:style>
+          <a:lnRef idx="1">
+            <a:schemeClr val="accent1"/>
+          </a:lnRef>
+          <a:fillRef idx="3">
+            <a:schemeClr val="accent1"/>
+          </a:fillRef>
+          <a:effectRef idx="2">
+            <a:schemeClr val="accent1"/>
+          </a:effectRef>
+          <a:fontRef idx="minor">
+            <a:schemeClr val="lt1"/>
+          </a:fontRef>
+        </p:style>
+        <p:txBody>
+          <a:bodyPr rtlCol="0" anchor="ctr"/>
+          <a:lstStyle/>
+          <a:p>
+            <a:pPr algn="ctr"/>
+          </a:p>
+        </p:txBody>
+      </p:sp>
+      <p:sp>
+        <p:nvSpPr>
+          <p:cNvPr id="41" name="TextBox 40"/>
+          <p:cNvSpPr txBox="1"/>
+          <p:nvPr/>
+        </p:nvSpPr>
+        <p:spPr>
+          <a:xfrm>
+            <a:off x="8457988" y="5019675"/>
+            <a:ext cx="304792" cy="209550"/>
+          </a:xfrm>
+          <a:prstGeom prst="rect">
+            <a:avLst/>
+          </a:prstGeom>
+          <a:noFill/>
+        </p:spPr>
+        <p:txBody>
+          <a:bodyPr wrap="square" lIns="0" rIns="0" tIns="0" bIns="0">
+            <a:spAutoFit/>
+          </a:bodyPr>
+          <a:lstStyle/>
+          <a:p>
+            <a:pPr algn="ctr"/>
+            <a:r>
+              <a:rPr sz="1125" b="1" i="0">
+                <a:solidFill>
+                  <a:srgbClr val="FFFFFF"/>
+                </a:solidFill>
+                <a:latin typeface="Noto Sans SC"/>
+              </a:rPr>
+              <a:t>03</a:t>
+            </a:r>
+          </a:p>
+        </p:txBody>
+      </p:sp>
+      <p:sp>
+        <p:nvSpPr>
+          <p:cNvPr id="42" name="TextBox 41"/>
+          <p:cNvSpPr txBox="1"/>
+          <p:nvPr/>
+        </p:nvSpPr>
+        <p:spPr>
+          <a:xfrm>
+            <a:off x="8915176" y="5000625"/>
+            <a:ext cx="2362140" cy="228600"/>
+          </a:xfrm>
+          <a:prstGeom prst="rect">
+            <a:avLst/>
+          </a:prstGeom>
+          <a:noFill/>
+        </p:spPr>
+        <p:txBody>
+          <a:bodyPr wrap="square" lIns="0" rIns="0" tIns="0" bIns="0">
+            <a:spAutoFit/>
+          </a:bodyPr>
+          <a:lstStyle/>
+          <a:p>
+            <a:pPr algn="l"/>
+            <a:r>
+              <a:rPr sz="1350" b="1" i="0">
+                <a:solidFill>
+                  <a:srgbClr val="5C5548"/>
+                </a:solidFill>
+                <a:latin typeface="Noto Sans SC"/>
+              </a:rPr>
+              <a:t>Chat 流</a:t>
+            </a:r>
+          </a:p>
+        </p:txBody>
+      </p:sp>
+      <p:sp>
+        <p:nvSpPr>
+          <p:cNvPr id="43" name="TextBox 42"/>
+          <p:cNvSpPr txBox="1"/>
+          <p:nvPr/>
+        </p:nvSpPr>
+        <p:spPr>
+          <a:xfrm>
+            <a:off x="533386" y="6610350"/>
+            <a:ext cx="5714857" cy="190500"/>
+          </a:xfrm>
+          <a:prstGeom prst="rect">
+            <a:avLst/>
+          </a:prstGeom>
+          <a:noFill/>
+        </p:spPr>
+        <p:txBody>
+          <a:bodyPr wrap="square" lIns="0" rIns="0" tIns="0" bIns="0">
+            <a:spAutoFit/>
+          </a:bodyPr>
+          <a:lstStyle/>
+          <a:p>
+            <a:pPr algn="l"/>
+            <a:r>
+              <a:rPr sz="975" b="0" i="0">
+                <a:solidFill>
+                  <a:srgbClr val="9C9588"/>
+                </a:solidFill>
+                <a:latin typeface="Noto Sans SC"/>
+              </a:rPr>
+              <a:t>Dify 企业介绍</a:t>
+            </a:r>
+          </a:p>
+        </p:txBody>
+      </p:sp>
+      <p:sp>
+        <p:nvSpPr>
+          <p:cNvPr id="44" name="TextBox 43"/>
+          <p:cNvSpPr txBox="1"/>
+          <p:nvPr/>
+        </p:nvSpPr>
+        <p:spPr>
+          <a:xfrm>
+            <a:off x="9753356" y="6610350"/>
+            <a:ext cx="1904952" cy="190500"/>
+          </a:xfrm>
+          <a:prstGeom prst="rect">
+            <a:avLst/>
+          </a:prstGeom>
+          <a:noFill/>
+        </p:spPr>
+        <p:txBody>
+          <a:bodyPr wrap="square" lIns="0" rIns="0" tIns="0" bIns="0">
+            <a:spAutoFit/>
+          </a:bodyPr>
+          <a:lstStyle/>
+          <a:p>
+            <a:pPr algn="r"/>
+            <a:r>
+              <a:rPr sz="975" b="0" i="0">
+                <a:solidFill>
+                  <a:srgbClr val="9C9588"/>
+                </a:solidFill>
+                <a:latin typeface="IBM Plex Mono"/>
+              </a:rPr>
+              <a:t>06 / 08</a:t>
+            </a:r>
+          </a:p>
+        </p:txBody>
+      </p:sp>
     </p:spTree>
   </p:cSld>
   <p:clrMapOvr>
@@ -3383,36 +9216,1470 @@
         <p:nvPr/>
       </p:nvGrpSpPr>
       <p:grpSpPr/>
-      <p:pic>
-        <p:nvPicPr>
-          <p:cNvPr id="2" name="Picture 1" descr="07-mixed-grid-demo.png"/>
-          <p:cNvPicPr>
-            <a:picLocks noChangeAspect="1"/>
-          </p:cNvPicPr>
-          <p:nvPr/>
-        </p:nvPicPr>
-        <p:blipFill>
-          <a:blip r:embed="rId2">
-            <a:extLst>
-              <a:ext uri="{96DAC541-7B7A-43D3-8B79-37D633B846F1}">
-                <asvg:svgBlip xmlns:asvg="http://schemas.microsoft.com/office/drawing/2016/SVG/main" r:embed="rId3"/>
-              </a:ext>
-            </a:extLst>
-          </a:blip>
-          <a:stretch>
-            <a:fillRect/>
-          </a:stretch>
-        </p:blipFill>
-        <p:spPr>
-          <a:xfrm>
-            <a:off x="0" y="0"/>
-            <a:ext cx="12191695" cy="6858000"/>
-          </a:xfrm>
-          <a:prstGeom prst="rect">
-            <a:avLst/>
-          </a:prstGeom>
-        </p:spPr>
-      </p:pic>
+      <p:sp>
+        <p:nvSpPr>
+          <p:cNvPr id="2" name="Rectangle 1"/>
+          <p:cNvSpPr/>
+          <p:nvPr/>
+        </p:nvSpPr>
+        <p:spPr>
+          <a:xfrm>
+            <a:off x="-91440" y="-91440"/>
+            <a:ext cx="12374575" cy="7040880"/>
+          </a:xfrm>
+          <a:prstGeom prst="rect">
+            <a:avLst/>
+          </a:prstGeom>
+          <a:ln>
+            <a:noFill/>
+          </a:ln>
+          <a:gradFill>
+            <a:gsLst>
+              <a:gs pos="0">
+                <a:srgbClr val="F5F0E8"/>
+              </a:gs>
+              <a:gs pos="100000">
+                <a:srgbClr val="EDE6D8"/>
+              </a:gs>
+            </a:gsLst>
+            <a:lin ang="5400000" scaled="1"/>
+          </a:gradFill>
+        </p:spPr>
+        <p:style>
+          <a:lnRef idx="1">
+            <a:schemeClr val="accent1"/>
+          </a:lnRef>
+          <a:fillRef idx="3">
+            <a:schemeClr val="accent1"/>
+          </a:fillRef>
+          <a:effectRef idx="2">
+            <a:schemeClr val="accent1"/>
+          </a:effectRef>
+          <a:fontRef idx="minor">
+            <a:schemeClr val="lt1"/>
+          </a:fontRef>
+        </p:style>
+        <p:txBody>
+          <a:bodyPr rtlCol="0" anchor="ctr"/>
+          <a:lstStyle/>
+          <a:p>
+            <a:pPr algn="ctr"/>
+          </a:p>
+        </p:txBody>
+      </p:sp>
+      <p:sp>
+        <p:nvSpPr>
+          <p:cNvPr id="3" name="Rounded Rectangle 2"/>
+          <p:cNvSpPr/>
+          <p:nvPr/>
+        </p:nvSpPr>
+        <p:spPr>
+          <a:xfrm>
+            <a:off x="533386" y="533400"/>
+            <a:ext cx="7391215" cy="2667000"/>
+          </a:xfrm>
+          <a:prstGeom prst="roundRect">
+            <a:avLst>
+              <a:gd name="adj" fmla="val 7999"/>
+            </a:avLst>
+          </a:prstGeom>
+          <a:solidFill>
+            <a:srgbClr val="FFFFFF">
+              <a:alpha val="82000"/>
+            </a:srgbClr>
+          </a:solidFill>
+          <a:ln w="12700">
+            <a:solidFill>
+              <a:srgbClr val="1A1815">
+                <a:alpha val="7000"/>
+              </a:srgbClr>
+            </a:solidFill>
+          </a:ln>
+        </p:spPr>
+        <p:style>
+          <a:lnRef idx="1">
+            <a:schemeClr val="accent1"/>
+          </a:lnRef>
+          <a:fillRef idx="3">
+            <a:schemeClr val="accent1"/>
+          </a:fillRef>
+          <a:effectRef idx="2">
+            <a:schemeClr val="accent1"/>
+          </a:effectRef>
+          <a:fontRef idx="minor">
+            <a:schemeClr val="lt1"/>
+          </a:fontRef>
+        </p:style>
+        <p:txBody>
+          <a:bodyPr rtlCol="0" anchor="ctr"/>
+          <a:lstStyle/>
+          <a:p>
+            <a:pPr algn="ctr"/>
+          </a:p>
+        </p:txBody>
+      </p:sp>
+      <p:sp>
+        <p:nvSpPr>
+          <p:cNvPr id="4" name="TextBox 3"/>
+          <p:cNvSpPr txBox="1"/>
+          <p:nvPr/>
+        </p:nvSpPr>
+        <p:spPr>
+          <a:xfrm>
+            <a:off x="914377" y="914400"/>
+            <a:ext cx="6629234" cy="190500"/>
+          </a:xfrm>
+          <a:prstGeom prst="rect">
+            <a:avLst/>
+          </a:prstGeom>
+          <a:noFill/>
+        </p:spPr>
+        <p:txBody>
+          <a:bodyPr wrap="square" lIns="0" rIns="0" tIns="0" bIns="0">
+            <a:spAutoFit/>
+          </a:bodyPr>
+          <a:lstStyle/>
+          <a:p>
+            <a:pPr algn="l"/>
+            <a:r>
+              <a:rPr sz="1050" b="1" i="0" spc="300">
+                <a:solidFill>
+                  <a:srgbClr val="D4956B"/>
+                </a:solidFill>
+                <a:latin typeface="Noto Sans SC"/>
+              </a:rPr>
+              <a:t>模型调用量月环比</a:t>
+            </a:r>
+          </a:p>
+        </p:txBody>
+      </p:sp>
+      <p:sp>
+        <p:nvSpPr>
+          <p:cNvPr id="5" name="TextBox 4"/>
+          <p:cNvSpPr txBox="1"/>
+          <p:nvPr/>
+        </p:nvSpPr>
+        <p:spPr>
+          <a:xfrm>
+            <a:off x="914377" y="1381125"/>
+            <a:ext cx="1523961" cy="209550"/>
+          </a:xfrm>
+          <a:prstGeom prst="rect">
+            <a:avLst/>
+          </a:prstGeom>
+          <a:noFill/>
+        </p:spPr>
+        <p:txBody>
+          <a:bodyPr wrap="square" lIns="0" rIns="0" tIns="0" bIns="0">
+            <a:spAutoFit/>
+          </a:bodyPr>
+          <a:lstStyle/>
+          <a:p>
+            <a:pPr algn="l"/>
+            <a:r>
+              <a:rPr sz="1275" b="0" i="0">
+                <a:solidFill>
+                  <a:srgbClr val="1A1815"/>
+                </a:solidFill>
+                <a:latin typeface="Noto Sans SC"/>
+              </a:rPr>
+              <a:t>GPT-4</a:t>
+            </a:r>
+          </a:p>
+        </p:txBody>
+      </p:sp>
+      <p:sp>
+        <p:nvSpPr>
+          <p:cNvPr id="6" name="Rounded Rectangle 5"/>
+          <p:cNvSpPr/>
+          <p:nvPr/>
+        </p:nvSpPr>
+        <p:spPr>
+          <a:xfrm>
+            <a:off x="2438339" y="1295400"/>
+            <a:ext cx="3771805" cy="352425"/>
+          </a:xfrm>
+          <a:prstGeom prst="roundRect">
+            <a:avLst>
+              <a:gd name="adj" fmla="val 15000"/>
+            </a:avLst>
+          </a:prstGeom>
+          <a:solidFill>
+            <a:srgbClr val="FFFFFF">
+              <a:alpha val="8000"/>
+            </a:srgbClr>
+          </a:solidFill>
+          <a:ln>
+            <a:noFill/>
+          </a:ln>
+        </p:spPr>
+        <p:style>
+          <a:lnRef idx="1">
+            <a:schemeClr val="accent1"/>
+          </a:lnRef>
+          <a:fillRef idx="3">
+            <a:schemeClr val="accent1"/>
+          </a:fillRef>
+          <a:effectRef idx="2">
+            <a:schemeClr val="accent1"/>
+          </a:effectRef>
+          <a:fontRef idx="minor">
+            <a:schemeClr val="lt1"/>
+          </a:fontRef>
+        </p:style>
+        <p:txBody>
+          <a:bodyPr rtlCol="0" anchor="ctr"/>
+          <a:lstStyle/>
+          <a:p>
+            <a:pPr algn="ctr"/>
+          </a:p>
+        </p:txBody>
+      </p:sp>
+      <p:sp>
+        <p:nvSpPr>
+          <p:cNvPr id="7" name="Rounded Rectangle 6"/>
+          <p:cNvSpPr/>
+          <p:nvPr/>
+        </p:nvSpPr>
+        <p:spPr>
+          <a:xfrm>
+            <a:off x="2438339" y="1295400"/>
+            <a:ext cx="3771805" cy="352425"/>
+          </a:xfrm>
+          <a:prstGeom prst="roundRect">
+            <a:avLst>
+              <a:gd name="adj" fmla="val 15000"/>
+            </a:avLst>
+          </a:prstGeom>
+          <a:solidFill>
+            <a:srgbClr val="B8654A"/>
+          </a:solidFill>
+          <a:ln>
+            <a:noFill/>
+          </a:ln>
+        </p:spPr>
+        <p:style>
+          <a:lnRef idx="1">
+            <a:schemeClr val="accent1"/>
+          </a:lnRef>
+          <a:fillRef idx="3">
+            <a:schemeClr val="accent1"/>
+          </a:fillRef>
+          <a:effectRef idx="2">
+            <a:schemeClr val="accent1"/>
+          </a:effectRef>
+          <a:fontRef idx="minor">
+            <a:schemeClr val="lt1"/>
+          </a:fontRef>
+        </p:style>
+        <p:txBody>
+          <a:bodyPr rtlCol="0" anchor="ctr"/>
+          <a:lstStyle/>
+          <a:p>
+            <a:pPr algn="ctr"/>
+          </a:p>
+        </p:txBody>
+      </p:sp>
+      <p:sp>
+        <p:nvSpPr>
+          <p:cNvPr id="8" name="TextBox 7"/>
+          <p:cNvSpPr txBox="1"/>
+          <p:nvPr/>
+        </p:nvSpPr>
+        <p:spPr>
+          <a:xfrm>
+            <a:off x="6324441" y="1362075"/>
+            <a:ext cx="1142971" cy="247650"/>
+          </a:xfrm>
+          <a:prstGeom prst="rect">
+            <a:avLst/>
+          </a:prstGeom>
+          <a:noFill/>
+        </p:spPr>
+        <p:txBody>
+          <a:bodyPr wrap="square" lIns="0" rIns="0" tIns="0" bIns="0">
+            <a:spAutoFit/>
+          </a:bodyPr>
+          <a:lstStyle/>
+          <a:p>
+            <a:pPr algn="l"/>
+            <a:r>
+              <a:rPr sz="1500" b="1" i="0">
+                <a:solidFill>
+                  <a:srgbClr val="1A1815"/>
+                </a:solidFill>
+                <a:latin typeface="Noto Sans SC"/>
+              </a:rPr>
+              <a:t>42 亿</a:t>
+            </a:r>
+          </a:p>
+        </p:txBody>
+      </p:sp>
+      <p:sp>
+        <p:nvSpPr>
+          <p:cNvPr id="9" name="TextBox 8"/>
+          <p:cNvSpPr txBox="1"/>
+          <p:nvPr/>
+        </p:nvSpPr>
+        <p:spPr>
+          <a:xfrm>
+            <a:off x="914377" y="1866900"/>
+            <a:ext cx="1523961" cy="209550"/>
+          </a:xfrm>
+          <a:prstGeom prst="rect">
+            <a:avLst/>
+          </a:prstGeom>
+          <a:noFill/>
+        </p:spPr>
+        <p:txBody>
+          <a:bodyPr wrap="square" lIns="0" rIns="0" tIns="0" bIns="0">
+            <a:spAutoFit/>
+          </a:bodyPr>
+          <a:lstStyle/>
+          <a:p>
+            <a:pPr algn="l"/>
+            <a:r>
+              <a:rPr sz="1275" b="0" i="0">
+                <a:solidFill>
+                  <a:srgbClr val="1A1815"/>
+                </a:solidFill>
+                <a:latin typeface="Noto Sans SC"/>
+              </a:rPr>
+              <a:t>Claude</a:t>
+            </a:r>
+          </a:p>
+        </p:txBody>
+      </p:sp>
+      <p:sp>
+        <p:nvSpPr>
+          <p:cNvPr id="10" name="Rounded Rectangle 9"/>
+          <p:cNvSpPr/>
+          <p:nvPr/>
+        </p:nvSpPr>
+        <p:spPr>
+          <a:xfrm>
+            <a:off x="2438339" y="1781175"/>
+            <a:ext cx="3771805" cy="352425"/>
+          </a:xfrm>
+          <a:prstGeom prst="roundRect">
+            <a:avLst>
+              <a:gd name="adj" fmla="val 15000"/>
+            </a:avLst>
+          </a:prstGeom>
+          <a:solidFill>
+            <a:srgbClr val="FFFFFF">
+              <a:alpha val="8000"/>
+            </a:srgbClr>
+          </a:solidFill>
+          <a:ln>
+            <a:noFill/>
+          </a:ln>
+        </p:spPr>
+        <p:style>
+          <a:lnRef idx="1">
+            <a:schemeClr val="accent1"/>
+          </a:lnRef>
+          <a:fillRef idx="3">
+            <a:schemeClr val="accent1"/>
+          </a:fillRef>
+          <a:effectRef idx="2">
+            <a:schemeClr val="accent1"/>
+          </a:effectRef>
+          <a:fontRef idx="minor">
+            <a:schemeClr val="lt1"/>
+          </a:fontRef>
+        </p:style>
+        <p:txBody>
+          <a:bodyPr rtlCol="0" anchor="ctr"/>
+          <a:lstStyle/>
+          <a:p>
+            <a:pPr algn="ctr"/>
+          </a:p>
+        </p:txBody>
+      </p:sp>
+      <p:sp>
+        <p:nvSpPr>
+          <p:cNvPr id="11" name="Rounded Rectangle 10"/>
+          <p:cNvSpPr/>
+          <p:nvPr/>
+        </p:nvSpPr>
+        <p:spPr>
+          <a:xfrm>
+            <a:off x="2438339" y="1781175"/>
+            <a:ext cx="2781230" cy="352425"/>
+          </a:xfrm>
+          <a:prstGeom prst="roundRect">
+            <a:avLst>
+              <a:gd name="adj" fmla="val 15000"/>
+            </a:avLst>
+          </a:prstGeom>
+          <a:solidFill>
+            <a:srgbClr val="B8654A"/>
+          </a:solidFill>
+          <a:ln>
+            <a:noFill/>
+          </a:ln>
+        </p:spPr>
+        <p:style>
+          <a:lnRef idx="1">
+            <a:schemeClr val="accent1"/>
+          </a:lnRef>
+          <a:fillRef idx="3">
+            <a:schemeClr val="accent1"/>
+          </a:fillRef>
+          <a:effectRef idx="2">
+            <a:schemeClr val="accent1"/>
+          </a:effectRef>
+          <a:fontRef idx="minor">
+            <a:schemeClr val="lt1"/>
+          </a:fontRef>
+        </p:style>
+        <p:txBody>
+          <a:bodyPr rtlCol="0" anchor="ctr"/>
+          <a:lstStyle/>
+          <a:p>
+            <a:pPr algn="ctr"/>
+          </a:p>
+        </p:txBody>
+      </p:sp>
+      <p:sp>
+        <p:nvSpPr>
+          <p:cNvPr id="12" name="TextBox 11"/>
+          <p:cNvSpPr txBox="1"/>
+          <p:nvPr/>
+        </p:nvSpPr>
+        <p:spPr>
+          <a:xfrm>
+            <a:off x="5333866" y="1847850"/>
+            <a:ext cx="1142971" cy="247650"/>
+          </a:xfrm>
+          <a:prstGeom prst="rect">
+            <a:avLst/>
+          </a:prstGeom>
+          <a:noFill/>
+        </p:spPr>
+        <p:txBody>
+          <a:bodyPr wrap="square" lIns="0" rIns="0" tIns="0" bIns="0">
+            <a:spAutoFit/>
+          </a:bodyPr>
+          <a:lstStyle/>
+          <a:p>
+            <a:pPr algn="l"/>
+            <a:r>
+              <a:rPr sz="1500" b="1" i="0">
+                <a:solidFill>
+                  <a:srgbClr val="1A1815"/>
+                </a:solidFill>
+                <a:latin typeface="Noto Sans SC"/>
+              </a:rPr>
+              <a:t>31 亿</a:t>
+            </a:r>
+          </a:p>
+        </p:txBody>
+      </p:sp>
+      <p:sp>
+        <p:nvSpPr>
+          <p:cNvPr id="13" name="TextBox 12"/>
+          <p:cNvSpPr txBox="1"/>
+          <p:nvPr/>
+        </p:nvSpPr>
+        <p:spPr>
+          <a:xfrm>
+            <a:off x="914377" y="2352675"/>
+            <a:ext cx="1523961" cy="209550"/>
+          </a:xfrm>
+          <a:prstGeom prst="rect">
+            <a:avLst/>
+          </a:prstGeom>
+          <a:noFill/>
+        </p:spPr>
+        <p:txBody>
+          <a:bodyPr wrap="square" lIns="0" rIns="0" tIns="0" bIns="0">
+            <a:spAutoFit/>
+          </a:bodyPr>
+          <a:lstStyle/>
+          <a:p>
+            <a:pPr algn="l"/>
+            <a:r>
+              <a:rPr sz="1275" b="0" i="0">
+                <a:solidFill>
+                  <a:srgbClr val="1A1815"/>
+                </a:solidFill>
+                <a:latin typeface="Noto Sans SC"/>
+              </a:rPr>
+              <a:t>Gemini</a:t>
+            </a:r>
+          </a:p>
+        </p:txBody>
+      </p:sp>
+      <p:sp>
+        <p:nvSpPr>
+          <p:cNvPr id="14" name="Rounded Rectangle 13"/>
+          <p:cNvSpPr/>
+          <p:nvPr/>
+        </p:nvSpPr>
+        <p:spPr>
+          <a:xfrm>
+            <a:off x="2438339" y="2266950"/>
+            <a:ext cx="3771805" cy="352425"/>
+          </a:xfrm>
+          <a:prstGeom prst="roundRect">
+            <a:avLst>
+              <a:gd name="adj" fmla="val 15000"/>
+            </a:avLst>
+          </a:prstGeom>
+          <a:solidFill>
+            <a:srgbClr val="FFFFFF">
+              <a:alpha val="8000"/>
+            </a:srgbClr>
+          </a:solidFill>
+          <a:ln>
+            <a:noFill/>
+          </a:ln>
+        </p:spPr>
+        <p:style>
+          <a:lnRef idx="1">
+            <a:schemeClr val="accent1"/>
+          </a:lnRef>
+          <a:fillRef idx="3">
+            <a:schemeClr val="accent1"/>
+          </a:fillRef>
+          <a:effectRef idx="2">
+            <a:schemeClr val="accent1"/>
+          </a:effectRef>
+          <a:fontRef idx="minor">
+            <a:schemeClr val="lt1"/>
+          </a:fontRef>
+        </p:style>
+        <p:txBody>
+          <a:bodyPr rtlCol="0" anchor="ctr"/>
+          <a:lstStyle/>
+          <a:p>
+            <a:pPr algn="ctr"/>
+          </a:p>
+        </p:txBody>
+      </p:sp>
+      <p:sp>
+        <p:nvSpPr>
+          <p:cNvPr id="15" name="Rounded Rectangle 14"/>
+          <p:cNvSpPr/>
+          <p:nvPr/>
+        </p:nvSpPr>
+        <p:spPr>
+          <a:xfrm>
+            <a:off x="2438339" y="2266950"/>
+            <a:ext cx="1609684" cy="352425"/>
+          </a:xfrm>
+          <a:prstGeom prst="roundRect">
+            <a:avLst>
+              <a:gd name="adj" fmla="val 15000"/>
+            </a:avLst>
+          </a:prstGeom>
+          <a:solidFill>
+            <a:srgbClr val="B8654A"/>
+          </a:solidFill>
+          <a:ln>
+            <a:noFill/>
+          </a:ln>
+        </p:spPr>
+        <p:style>
+          <a:lnRef idx="1">
+            <a:schemeClr val="accent1"/>
+          </a:lnRef>
+          <a:fillRef idx="3">
+            <a:schemeClr val="accent1"/>
+          </a:fillRef>
+          <a:effectRef idx="2">
+            <a:schemeClr val="accent1"/>
+          </a:effectRef>
+          <a:fontRef idx="minor">
+            <a:schemeClr val="lt1"/>
+          </a:fontRef>
+        </p:style>
+        <p:txBody>
+          <a:bodyPr rtlCol="0" anchor="ctr"/>
+          <a:lstStyle/>
+          <a:p>
+            <a:pPr algn="ctr"/>
+          </a:p>
+        </p:txBody>
+      </p:sp>
+      <p:sp>
+        <p:nvSpPr>
+          <p:cNvPr id="16" name="TextBox 15"/>
+          <p:cNvSpPr txBox="1"/>
+          <p:nvPr/>
+        </p:nvSpPr>
+        <p:spPr>
+          <a:xfrm>
+            <a:off x="4162320" y="2333625"/>
+            <a:ext cx="1142971" cy="247650"/>
+          </a:xfrm>
+          <a:prstGeom prst="rect">
+            <a:avLst/>
+          </a:prstGeom>
+          <a:noFill/>
+        </p:spPr>
+        <p:txBody>
+          <a:bodyPr wrap="square" lIns="0" rIns="0" tIns="0" bIns="0">
+            <a:spAutoFit/>
+          </a:bodyPr>
+          <a:lstStyle/>
+          <a:p>
+            <a:pPr algn="l"/>
+            <a:r>
+              <a:rPr sz="1500" b="1" i="0">
+                <a:solidFill>
+                  <a:srgbClr val="1A1815"/>
+                </a:solidFill>
+                <a:latin typeface="Noto Sans SC"/>
+              </a:rPr>
+              <a:t>18 亿</a:t>
+            </a:r>
+          </a:p>
+        </p:txBody>
+      </p:sp>
+      <p:sp>
+        <p:nvSpPr>
+          <p:cNvPr id="17" name="Rounded Rectangle 16"/>
+          <p:cNvSpPr/>
+          <p:nvPr/>
+        </p:nvSpPr>
+        <p:spPr>
+          <a:xfrm>
+            <a:off x="8115096" y="533400"/>
+            <a:ext cx="3543211" cy="2667000"/>
+          </a:xfrm>
+          <a:prstGeom prst="roundRect">
+            <a:avLst>
+              <a:gd name="adj" fmla="val 7999"/>
+            </a:avLst>
+          </a:prstGeom>
+          <a:solidFill>
+            <a:srgbClr val="FFFFFF">
+              <a:alpha val="82000"/>
+            </a:srgbClr>
+          </a:solidFill>
+          <a:ln w="12700">
+            <a:solidFill>
+              <a:srgbClr val="1A1815">
+                <a:alpha val="7000"/>
+              </a:srgbClr>
+            </a:solidFill>
+          </a:ln>
+        </p:spPr>
+        <p:style>
+          <a:lnRef idx="1">
+            <a:schemeClr val="accent1"/>
+          </a:lnRef>
+          <a:fillRef idx="3">
+            <a:schemeClr val="accent1"/>
+          </a:fillRef>
+          <a:effectRef idx="2">
+            <a:schemeClr val="accent1"/>
+          </a:effectRef>
+          <a:fontRef idx="minor">
+            <a:schemeClr val="lt1"/>
+          </a:fontRef>
+        </p:style>
+        <p:txBody>
+          <a:bodyPr rtlCol="0" anchor="ctr"/>
+          <a:lstStyle/>
+          <a:p>
+            <a:pPr algn="ctr"/>
+          </a:p>
+        </p:txBody>
+      </p:sp>
+      <p:sp>
+        <p:nvSpPr>
+          <p:cNvPr id="18" name="TextBox 17"/>
+          <p:cNvSpPr txBox="1"/>
+          <p:nvPr/>
+        </p:nvSpPr>
+        <p:spPr>
+          <a:xfrm>
+            <a:off x="8496087" y="952500"/>
+            <a:ext cx="2781230" cy="190500"/>
+          </a:xfrm>
+          <a:prstGeom prst="rect">
+            <a:avLst/>
+          </a:prstGeom>
+          <a:noFill/>
+        </p:spPr>
+        <p:txBody>
+          <a:bodyPr wrap="square" lIns="0" rIns="0" tIns="0" bIns="0">
+            <a:spAutoFit/>
+          </a:bodyPr>
+          <a:lstStyle/>
+          <a:p>
+            <a:pPr algn="l"/>
+            <a:r>
+              <a:rPr sz="1050" b="1" i="0" spc="300">
+                <a:solidFill>
+                  <a:srgbClr val="D4956B"/>
+                </a:solidFill>
+                <a:latin typeface="Noto Sans SC"/>
+              </a:rPr>
+              <a:t>运行指标</a:t>
+            </a:r>
+          </a:p>
+        </p:txBody>
+      </p:sp>
+      <p:sp>
+        <p:nvSpPr>
+          <p:cNvPr id="19" name="TextBox 18"/>
+          <p:cNvSpPr txBox="1"/>
+          <p:nvPr/>
+        </p:nvSpPr>
+        <p:spPr>
+          <a:xfrm>
+            <a:off x="8496087" y="1228725"/>
+            <a:ext cx="2781230" cy="542925"/>
+          </a:xfrm>
+          <a:prstGeom prst="rect">
+            <a:avLst/>
+          </a:prstGeom>
+          <a:noFill/>
+        </p:spPr>
+        <p:txBody>
+          <a:bodyPr wrap="none" lIns="0" rIns="0" tIns="0" bIns="0">
+            <a:spAutoFit/>
+          </a:bodyPr>
+          <a:lstStyle/>
+          <a:p>
+            <a:pPr algn="l"/>
+            <a:r>
+              <a:rPr sz="3600" b="1" i="0">
+                <a:solidFill>
+                  <a:srgbClr val="1A1815"/>
+                </a:solidFill>
+                <a:latin typeface="Noto Sans SC"/>
+              </a:rPr>
+              <a:t>187</a:t>
+            </a:r>
+          </a:p>
+        </p:txBody>
+      </p:sp>
+      <p:sp>
+        <p:nvSpPr>
+          <p:cNvPr id="20" name="TextBox 19"/>
+          <p:cNvSpPr txBox="1"/>
+          <p:nvPr/>
+        </p:nvSpPr>
+        <p:spPr>
+          <a:xfrm>
+            <a:off x="9315216" y="1533525"/>
+            <a:ext cx="371465" cy="180975"/>
+          </a:xfrm>
+          <a:prstGeom prst="rect">
+            <a:avLst/>
+          </a:prstGeom>
+          <a:noFill/>
+        </p:spPr>
+        <p:txBody>
+          <a:bodyPr wrap="square" lIns="0" rIns="0" tIns="0" bIns="0">
+            <a:spAutoFit/>
+          </a:bodyPr>
+          <a:lstStyle/>
+          <a:p>
+            <a:pPr algn="l"/>
+            <a:r>
+              <a:rPr sz="1050" b="1" i="0">
+                <a:solidFill>
+                  <a:srgbClr val="D4956B"/>
+                </a:solidFill>
+                <a:latin typeface="Noto Sans SC"/>
+              </a:rPr>
+              <a:t>ms</a:t>
+            </a:r>
+          </a:p>
+        </p:txBody>
+      </p:sp>
+      <p:sp>
+        <p:nvSpPr>
+          <p:cNvPr id="21" name="TextBox 20"/>
+          <p:cNvSpPr txBox="1"/>
+          <p:nvPr/>
+        </p:nvSpPr>
+        <p:spPr>
+          <a:xfrm>
+            <a:off x="9581910" y="1504950"/>
+            <a:ext cx="1600159" cy="219075"/>
+          </a:xfrm>
+          <a:prstGeom prst="rect">
+            <a:avLst/>
+          </a:prstGeom>
+          <a:noFill/>
+        </p:spPr>
+        <p:txBody>
+          <a:bodyPr wrap="square" lIns="0" rIns="0" tIns="0" bIns="0">
+            <a:spAutoFit/>
+          </a:bodyPr>
+          <a:lstStyle/>
+          <a:p>
+            <a:pPr algn="l"/>
+            <a:r>
+              <a:rPr sz="1275" b="0" i="0">
+                <a:solidFill>
+                  <a:srgbClr val="5C5548"/>
+                </a:solidFill>
+                <a:latin typeface="Noto Sans SC"/>
+              </a:rPr>
+              <a:t>API 平均响应</a:t>
+            </a:r>
+          </a:p>
+        </p:txBody>
+      </p:sp>
+      <p:sp>
+        <p:nvSpPr>
+          <p:cNvPr id="22" name="TextBox 21"/>
+          <p:cNvSpPr txBox="1"/>
+          <p:nvPr/>
+        </p:nvSpPr>
+        <p:spPr>
+          <a:xfrm>
+            <a:off x="8496087" y="1762125"/>
+            <a:ext cx="1390615" cy="171450"/>
+          </a:xfrm>
+          <a:prstGeom prst="rect">
+            <a:avLst/>
+          </a:prstGeom>
+          <a:noFill/>
+        </p:spPr>
+        <p:txBody>
+          <a:bodyPr wrap="square" lIns="0" rIns="0" tIns="0" bIns="0">
+            <a:spAutoFit/>
+          </a:bodyPr>
+          <a:lstStyle/>
+          <a:p>
+            <a:pPr algn="l"/>
+            <a:r>
+              <a:rPr sz="900" b="0" i="0" spc="100">
+                <a:solidFill>
+                  <a:srgbClr val="9C9588"/>
+                </a:solidFill>
+                <a:latin typeface="Noto Sans SC"/>
+              </a:rPr>
+              <a:t>99 分位</a:t>
+            </a:r>
+          </a:p>
+        </p:txBody>
+      </p:sp>
+      <p:sp>
+        <p:nvSpPr>
+          <p:cNvPr id="23" name="TextBox 22"/>
+          <p:cNvSpPr txBox="1"/>
+          <p:nvPr/>
+        </p:nvSpPr>
+        <p:spPr>
+          <a:xfrm>
+            <a:off x="8496087" y="1895475"/>
+            <a:ext cx="1390615" cy="238125"/>
+          </a:xfrm>
+          <a:prstGeom prst="rect">
+            <a:avLst/>
+          </a:prstGeom>
+          <a:noFill/>
+        </p:spPr>
+        <p:txBody>
+          <a:bodyPr wrap="square" lIns="0" rIns="0" tIns="0" bIns="0">
+            <a:spAutoFit/>
+          </a:bodyPr>
+          <a:lstStyle/>
+          <a:p>
+            <a:pPr algn="l"/>
+            <a:r>
+              <a:rPr sz="1350" b="1" i="0">
+                <a:solidFill>
+                  <a:srgbClr val="1A1815"/>
+                </a:solidFill>
+                <a:latin typeface="Noto Sans SC"/>
+              </a:rPr>
+              <a:t>420 ms</a:t>
+            </a:r>
+          </a:p>
+        </p:txBody>
+      </p:sp>
+      <p:sp>
+        <p:nvSpPr>
+          <p:cNvPr id="24" name="TextBox 23"/>
+          <p:cNvSpPr txBox="1"/>
+          <p:nvPr/>
+        </p:nvSpPr>
+        <p:spPr>
+          <a:xfrm>
+            <a:off x="9886702" y="1762125"/>
+            <a:ext cx="1390615" cy="171450"/>
+          </a:xfrm>
+          <a:prstGeom prst="rect">
+            <a:avLst/>
+          </a:prstGeom>
+          <a:noFill/>
+        </p:spPr>
+        <p:txBody>
+          <a:bodyPr wrap="square" lIns="0" rIns="0" tIns="0" bIns="0">
+            <a:spAutoFit/>
+          </a:bodyPr>
+          <a:lstStyle/>
+          <a:p>
+            <a:pPr algn="l"/>
+            <a:r>
+              <a:rPr sz="900" b="0" i="0" spc="100">
+                <a:solidFill>
+                  <a:srgbClr val="9C9588"/>
+                </a:solidFill>
+                <a:latin typeface="Noto Sans SC"/>
+              </a:rPr>
+              <a:t>错误率</a:t>
+            </a:r>
+          </a:p>
+        </p:txBody>
+      </p:sp>
+      <p:sp>
+        <p:nvSpPr>
+          <p:cNvPr id="25" name="TextBox 24"/>
+          <p:cNvSpPr txBox="1"/>
+          <p:nvPr/>
+        </p:nvSpPr>
+        <p:spPr>
+          <a:xfrm>
+            <a:off x="9886702" y="1895475"/>
+            <a:ext cx="1390615" cy="238125"/>
+          </a:xfrm>
+          <a:prstGeom prst="rect">
+            <a:avLst/>
+          </a:prstGeom>
+          <a:noFill/>
+        </p:spPr>
+        <p:txBody>
+          <a:bodyPr wrap="square" lIns="0" rIns="0" tIns="0" bIns="0">
+            <a:spAutoFit/>
+          </a:bodyPr>
+          <a:lstStyle/>
+          <a:p>
+            <a:pPr algn="l"/>
+            <a:r>
+              <a:rPr sz="1350" b="1" i="0">
+                <a:solidFill>
+                  <a:srgbClr val="1A1815"/>
+                </a:solidFill>
+                <a:latin typeface="Noto Sans SC"/>
+              </a:rPr>
+              <a:t>0.03%</a:t>
+            </a:r>
+          </a:p>
+        </p:txBody>
+      </p:sp>
+      <p:sp>
+        <p:nvSpPr>
+          <p:cNvPr id="26" name="Rounded Rectangle 25"/>
+          <p:cNvSpPr/>
+          <p:nvPr/>
+        </p:nvSpPr>
+        <p:spPr>
+          <a:xfrm>
+            <a:off x="8496087" y="2247900"/>
+            <a:ext cx="2781230" cy="57150"/>
+          </a:xfrm>
+          <a:prstGeom prst="roundRect">
+            <a:avLst>
+              <a:gd name="adj" fmla="val 50000"/>
+            </a:avLst>
+          </a:prstGeom>
+          <a:solidFill>
+            <a:srgbClr val="FFFFFF">
+              <a:alpha val="10000"/>
+            </a:srgbClr>
+          </a:solidFill>
+          <a:ln>
+            <a:noFill/>
+          </a:ln>
+        </p:spPr>
+        <p:style>
+          <a:lnRef idx="1">
+            <a:schemeClr val="accent1"/>
+          </a:lnRef>
+          <a:fillRef idx="3">
+            <a:schemeClr val="accent1"/>
+          </a:fillRef>
+          <a:effectRef idx="2">
+            <a:schemeClr val="accent1"/>
+          </a:effectRef>
+          <a:fontRef idx="minor">
+            <a:schemeClr val="lt1"/>
+          </a:fontRef>
+        </p:style>
+        <p:txBody>
+          <a:bodyPr rtlCol="0" anchor="ctr"/>
+          <a:lstStyle/>
+          <a:p>
+            <a:pPr algn="ctr"/>
+          </a:p>
+        </p:txBody>
+      </p:sp>
+      <p:sp>
+        <p:nvSpPr>
+          <p:cNvPr id="27" name="Rounded Rectangle 26"/>
+          <p:cNvSpPr/>
+          <p:nvPr/>
+        </p:nvSpPr>
+        <p:spPr>
+          <a:xfrm>
+            <a:off x="8496087" y="2247900"/>
+            <a:ext cx="2752656" cy="57150"/>
+          </a:xfrm>
+          <a:prstGeom prst="roundRect">
+            <a:avLst>
+              <a:gd name="adj" fmla="val 50000"/>
+            </a:avLst>
+          </a:prstGeom>
+          <a:solidFill>
+            <a:srgbClr val="B8654A"/>
+          </a:solidFill>
+          <a:ln>
+            <a:noFill/>
+          </a:ln>
+        </p:spPr>
+        <p:style>
+          <a:lnRef idx="1">
+            <a:schemeClr val="accent1"/>
+          </a:lnRef>
+          <a:fillRef idx="3">
+            <a:schemeClr val="accent1"/>
+          </a:fillRef>
+          <a:effectRef idx="2">
+            <a:schemeClr val="accent1"/>
+          </a:effectRef>
+          <a:fontRef idx="minor">
+            <a:schemeClr val="lt1"/>
+          </a:fontRef>
+        </p:style>
+        <p:txBody>
+          <a:bodyPr rtlCol="0" anchor="ctr"/>
+          <a:lstStyle/>
+          <a:p>
+            <a:pPr algn="ctr"/>
+          </a:p>
+        </p:txBody>
+      </p:sp>
+      <p:sp>
+        <p:nvSpPr>
+          <p:cNvPr id="28" name="TextBox 27"/>
+          <p:cNvSpPr txBox="1"/>
+          <p:nvPr/>
+        </p:nvSpPr>
+        <p:spPr>
+          <a:xfrm>
+            <a:off x="8496087" y="2381250"/>
+            <a:ext cx="2781230" cy="190500"/>
+          </a:xfrm>
+          <a:prstGeom prst="rect">
+            <a:avLst/>
+          </a:prstGeom>
+          <a:noFill/>
+        </p:spPr>
+        <p:txBody>
+          <a:bodyPr wrap="square" lIns="0" rIns="0" tIns="0" bIns="0">
+            <a:spAutoFit/>
+          </a:bodyPr>
+          <a:lstStyle/>
+          <a:p>
+            <a:pPr algn="l"/>
+            <a:r>
+              <a:rPr sz="975" b="0" i="0">
+                <a:solidFill>
+                  <a:srgbClr val="5C5548"/>
+                </a:solidFill>
+                <a:latin typeface="Noto Sans SC"/>
+              </a:rPr>
+              <a:t>SLA 99% 达标</a:t>
+            </a:r>
+          </a:p>
+        </p:txBody>
+      </p:sp>
+      <p:sp>
+        <p:nvSpPr>
+          <p:cNvPr id="29" name="Rounded Rectangle 28"/>
+          <p:cNvSpPr/>
+          <p:nvPr/>
+        </p:nvSpPr>
+        <p:spPr>
+          <a:xfrm>
+            <a:off x="533386" y="3390900"/>
+            <a:ext cx="3543211" cy="2647950"/>
+          </a:xfrm>
+          <a:prstGeom prst="roundRect">
+            <a:avLst>
+              <a:gd name="adj" fmla="val 8057"/>
+            </a:avLst>
+          </a:prstGeom>
+          <a:solidFill>
+            <a:srgbClr val="FFFFFF">
+              <a:alpha val="82000"/>
+            </a:srgbClr>
+          </a:solidFill>
+          <a:ln w="12700">
+            <a:solidFill>
+              <a:srgbClr val="1A1815">
+                <a:alpha val="7000"/>
+              </a:srgbClr>
+            </a:solidFill>
+          </a:ln>
+        </p:spPr>
+        <p:style>
+          <a:lnRef idx="1">
+            <a:schemeClr val="accent1"/>
+          </a:lnRef>
+          <a:fillRef idx="3">
+            <a:schemeClr val="accent1"/>
+          </a:fillRef>
+          <a:effectRef idx="2">
+            <a:schemeClr val="accent1"/>
+          </a:effectRef>
+          <a:fontRef idx="minor">
+            <a:schemeClr val="lt1"/>
+          </a:fontRef>
+        </p:style>
+        <p:txBody>
+          <a:bodyPr rtlCol="0" anchor="ctr"/>
+          <a:lstStyle/>
+          <a:p>
+            <a:pPr algn="ctr"/>
+          </a:p>
+        </p:txBody>
+      </p:sp>
+      <p:sp>
+        <p:nvSpPr>
+          <p:cNvPr id="30" name="TextBox 29"/>
+          <p:cNvSpPr txBox="1"/>
+          <p:nvPr/>
+        </p:nvSpPr>
+        <p:spPr>
+          <a:xfrm>
+            <a:off x="914377" y="3771900"/>
+            <a:ext cx="2781230" cy="190500"/>
+          </a:xfrm>
+          <a:prstGeom prst="rect">
+            <a:avLst/>
+          </a:prstGeom>
+          <a:noFill/>
+        </p:spPr>
+        <p:txBody>
+          <a:bodyPr wrap="square" lIns="0" rIns="0" tIns="0" bIns="0">
+            <a:spAutoFit/>
+          </a:bodyPr>
+          <a:lstStyle/>
+          <a:p>
+            <a:pPr algn="l"/>
+            <a:r>
+              <a:rPr sz="1050" b="1" i="0" spc="300">
+                <a:solidFill>
+                  <a:srgbClr val="D4956B"/>
+                </a:solidFill>
+                <a:latin typeface="Noto Sans SC"/>
+              </a:rPr>
+              <a:t>界面预览</a:t>
+            </a:r>
+          </a:p>
+        </p:txBody>
+      </p:sp>
+      <p:sp>
+        <p:nvSpPr>
+          <p:cNvPr id="31" name="Rounded Rectangle 30"/>
+          <p:cNvSpPr/>
+          <p:nvPr/>
+        </p:nvSpPr>
+        <p:spPr>
+          <a:xfrm>
+            <a:off x="914377" y="4095750"/>
+            <a:ext cx="2781230" cy="1485900"/>
+          </a:xfrm>
+          <a:prstGeom prst="roundRect">
+            <a:avLst>
+              <a:gd name="adj" fmla="val 5000"/>
+            </a:avLst>
+          </a:prstGeom>
+          <a:solidFill>
+            <a:srgbClr val="B8654A">
+              <a:alpha val="10000"/>
+            </a:srgbClr>
+          </a:solidFill>
+          <a:ln w="12700">
+            <a:solidFill>
+              <a:srgbClr val="B8654A">
+                <a:alpha val="40000"/>
+              </a:srgbClr>
+            </a:solidFill>
+          </a:ln>
+        </p:spPr>
+        <p:style>
+          <a:lnRef idx="1">
+            <a:schemeClr val="accent1"/>
+          </a:lnRef>
+          <a:fillRef idx="3">
+            <a:schemeClr val="accent1"/>
+          </a:fillRef>
+          <a:effectRef idx="2">
+            <a:schemeClr val="accent1"/>
+          </a:effectRef>
+          <a:fontRef idx="minor">
+            <a:schemeClr val="lt1"/>
+          </a:fontRef>
+        </p:style>
+        <p:txBody>
+          <a:bodyPr rtlCol="0" anchor="ctr"/>
+          <a:lstStyle/>
+          <a:p>
+            <a:pPr algn="ctr"/>
+          </a:p>
+        </p:txBody>
+      </p:sp>
+      <p:sp>
+        <p:nvSpPr>
+          <p:cNvPr id="32" name="TextBox 31"/>
+          <p:cNvSpPr txBox="1"/>
+          <p:nvPr/>
+        </p:nvSpPr>
+        <p:spPr>
+          <a:xfrm>
+            <a:off x="914377" y="4724400"/>
+            <a:ext cx="2781230" cy="228600"/>
+          </a:xfrm>
+          <a:prstGeom prst="rect">
+            <a:avLst/>
+          </a:prstGeom>
+          <a:noFill/>
+        </p:spPr>
+        <p:txBody>
+          <a:bodyPr wrap="square" lIns="0" rIns="0" tIns="0" bIns="0">
+            <a:spAutoFit/>
+          </a:bodyPr>
+          <a:lstStyle/>
+          <a:p>
+            <a:pPr algn="ctr"/>
+            <a:r>
+              <a:rPr sz="1050" b="0" i="0">
+                <a:solidFill>
+                  <a:srgbClr val="5C5548"/>
+                </a:solidFill>
+                <a:latin typeface="Noto Sans SC"/>
+              </a:rPr>
+              <a:t>Workflow 编排画布概念图</a:t>
+            </a:r>
+          </a:p>
+        </p:txBody>
+      </p:sp>
+      <p:sp>
+        <p:nvSpPr>
+          <p:cNvPr id="33" name="Rounded Rectangle 32"/>
+          <p:cNvSpPr/>
+          <p:nvPr/>
+        </p:nvSpPr>
+        <p:spPr>
+          <a:xfrm>
+            <a:off x="4305192" y="3390900"/>
+            <a:ext cx="7353116" cy="2647950"/>
+          </a:xfrm>
+          <a:prstGeom prst="roundRect">
+            <a:avLst>
+              <a:gd name="adj" fmla="val 8057"/>
+            </a:avLst>
+          </a:prstGeom>
+          <a:solidFill>
+            <a:srgbClr val="FFFFFF">
+              <a:alpha val="82000"/>
+            </a:srgbClr>
+          </a:solidFill>
+          <a:ln w="12700">
+            <a:solidFill>
+              <a:srgbClr val="1A1815">
+                <a:alpha val="7000"/>
+              </a:srgbClr>
+            </a:solidFill>
+          </a:ln>
+        </p:spPr>
+        <p:style>
+          <a:lnRef idx="1">
+            <a:schemeClr val="accent1"/>
+          </a:lnRef>
+          <a:fillRef idx="3">
+            <a:schemeClr val="accent1"/>
+          </a:fillRef>
+          <a:effectRef idx="2">
+            <a:schemeClr val="accent1"/>
+          </a:effectRef>
+          <a:fontRef idx="minor">
+            <a:schemeClr val="lt1"/>
+          </a:fontRef>
+        </p:style>
+        <p:txBody>
+          <a:bodyPr rtlCol="0" anchor="ctr"/>
+          <a:lstStyle/>
+          <a:p>
+            <a:pPr algn="ctr"/>
+          </a:p>
+        </p:txBody>
+      </p:sp>
+      <p:sp>
+        <p:nvSpPr>
+          <p:cNvPr id="34" name="TextBox 33"/>
+          <p:cNvSpPr txBox="1"/>
+          <p:nvPr/>
+        </p:nvSpPr>
+        <p:spPr>
+          <a:xfrm>
+            <a:off x="4686182" y="3848100"/>
+            <a:ext cx="6591135" cy="371475"/>
+          </a:xfrm>
+          <a:prstGeom prst="rect">
+            <a:avLst/>
+          </a:prstGeom>
+          <a:noFill/>
+        </p:spPr>
+        <p:txBody>
+          <a:bodyPr wrap="square" lIns="0" rIns="0" tIns="0" bIns="0">
+            <a:spAutoFit/>
+          </a:bodyPr>
+          <a:lstStyle/>
+          <a:p>
+            <a:pPr algn="l"/>
+            <a:r>
+              <a:rPr sz="2100" b="1" i="0">
+                <a:solidFill>
+                  <a:srgbClr val="1A1815"/>
+                </a:solidFill>
+                <a:latin typeface="Noto Sans SC"/>
+              </a:rPr>
+              <a:t>落地案例</a:t>
+            </a:r>
+          </a:p>
+        </p:txBody>
+      </p:sp>
+      <p:sp>
+        <p:nvSpPr>
+          <p:cNvPr id="35" name="TextBox 34"/>
+          <p:cNvSpPr txBox="1"/>
+          <p:nvPr/>
+        </p:nvSpPr>
+        <p:spPr>
+          <a:xfrm>
+            <a:off x="4686182" y="4267200"/>
+            <a:ext cx="6591135" cy="1314450"/>
+          </a:xfrm>
+          <a:prstGeom prst="rect">
+            <a:avLst/>
+          </a:prstGeom>
+          <a:noFill/>
+        </p:spPr>
+        <p:txBody>
+          <a:bodyPr wrap="square" lIns="0" rIns="0" tIns="0" bIns="0">
+            <a:spAutoFit/>
+          </a:bodyPr>
+          <a:lstStyle/>
+          <a:p>
+            <a:pPr>
+              <a:spcAft>
+                <a:spcPts val="800"/>
+              </a:spcAft>
+            </a:pPr>
+            <a:r>
+              <a:rPr sz="1275">
+                <a:solidFill>
+                  <a:srgbClr val="5C5548"/>
+                </a:solidFill>
+                <a:latin typeface="Noto Sans SC"/>
+              </a:rPr>
+              <a:t>某头部券商：用 Dify 把 17 个内部系统的接口能力封装成 Agent 工具，把客户经理日均处理工单数从 23 提升到 78。</a:t>
+            </a:r>
+          </a:p>
+          <a:p>
+            <a:pPr>
+              <a:spcAft>
+                <a:spcPts val="800"/>
+              </a:spcAft>
+            </a:pPr>
+            <a:r>
+              <a:rPr sz="1275">
+                <a:solidFill>
+                  <a:srgbClr val="5C5548"/>
+                </a:solidFill>
+                <a:latin typeface="Noto Sans SC"/>
+              </a:rPr>
+              <a:t>某省级政务平台：基于 Dify 知识库构建公文助手，问答准确率从 62% 提升到 91%。</a:t>
+            </a:r>
+          </a:p>
+        </p:txBody>
+      </p:sp>
+      <p:sp>
+        <p:nvSpPr>
+          <p:cNvPr id="36" name="TextBox 35"/>
+          <p:cNvSpPr txBox="1"/>
+          <p:nvPr/>
+        </p:nvSpPr>
+        <p:spPr>
+          <a:xfrm>
+            <a:off x="533386" y="6610350"/>
+            <a:ext cx="5714857" cy="190500"/>
+          </a:xfrm>
+          <a:prstGeom prst="rect">
+            <a:avLst/>
+          </a:prstGeom>
+          <a:noFill/>
+        </p:spPr>
+        <p:txBody>
+          <a:bodyPr wrap="square" lIns="0" rIns="0" tIns="0" bIns="0">
+            <a:spAutoFit/>
+          </a:bodyPr>
+          <a:lstStyle/>
+          <a:p>
+            <a:pPr algn="l"/>
+            <a:r>
+              <a:rPr sz="975" b="0" i="0">
+                <a:solidFill>
+                  <a:srgbClr val="9C9588"/>
+                </a:solidFill>
+                <a:latin typeface="Noto Sans SC"/>
+              </a:rPr>
+              <a:t>Dify 企业介绍</a:t>
+            </a:r>
+          </a:p>
+        </p:txBody>
+      </p:sp>
+      <p:sp>
+        <p:nvSpPr>
+          <p:cNvPr id="37" name="TextBox 36"/>
+          <p:cNvSpPr txBox="1"/>
+          <p:nvPr/>
+        </p:nvSpPr>
+        <p:spPr>
+          <a:xfrm>
+            <a:off x="9753356" y="6610350"/>
+            <a:ext cx="1904952" cy="190500"/>
+          </a:xfrm>
+          <a:prstGeom prst="rect">
+            <a:avLst/>
+          </a:prstGeom>
+          <a:noFill/>
+        </p:spPr>
+        <p:txBody>
+          <a:bodyPr wrap="square" lIns="0" rIns="0" tIns="0" bIns="0">
+            <a:spAutoFit/>
+          </a:bodyPr>
+          <a:lstStyle/>
+          <a:p>
+            <a:pPr algn="r"/>
+            <a:r>
+              <a:rPr sz="975" b="0" i="0">
+                <a:solidFill>
+                  <a:srgbClr val="9C9588"/>
+                </a:solidFill>
+                <a:latin typeface="IBM Plex Mono"/>
+              </a:rPr>
+              <a:t>07 / 08</a:t>
+            </a:r>
+          </a:p>
+        </p:txBody>
+      </p:sp>
     </p:spTree>
   </p:cSld>
   <p:clrMapOvr>
@@ -3431,36 +10698,361 @@
         <p:nvPr/>
       </p:nvGrpSpPr>
       <p:grpSpPr/>
-      <p:pic>
-        <p:nvPicPr>
-          <p:cNvPr id="2" name="Picture 1" descr="08-end.png"/>
-          <p:cNvPicPr>
-            <a:picLocks noChangeAspect="1"/>
-          </p:cNvPicPr>
-          <p:nvPr/>
-        </p:nvPicPr>
-        <p:blipFill>
-          <a:blip r:embed="rId2">
-            <a:extLst>
-              <a:ext uri="{96DAC541-7B7A-43D3-8B79-37D633B846F1}">
-                <asvg:svgBlip xmlns:asvg="http://schemas.microsoft.com/office/drawing/2016/SVG/main" r:embed="rId3"/>
-              </a:ext>
-            </a:extLst>
-          </a:blip>
-          <a:stretch>
-            <a:fillRect/>
-          </a:stretch>
-        </p:blipFill>
-        <p:spPr>
-          <a:xfrm>
-            <a:off x="0" y="0"/>
-            <a:ext cx="12191695" cy="6858000"/>
-          </a:xfrm>
-          <a:prstGeom prst="rect">
-            <a:avLst/>
-          </a:prstGeom>
-        </p:spPr>
-      </p:pic>
+      <p:sp>
+        <p:nvSpPr>
+          <p:cNvPr id="2" name="Rectangle 1"/>
+          <p:cNvSpPr/>
+          <p:nvPr/>
+        </p:nvSpPr>
+        <p:spPr>
+          <a:xfrm>
+            <a:off x="-91440" y="-91440"/>
+            <a:ext cx="12374575" cy="7040880"/>
+          </a:xfrm>
+          <a:prstGeom prst="rect">
+            <a:avLst/>
+          </a:prstGeom>
+          <a:ln>
+            <a:noFill/>
+          </a:ln>
+          <a:gradFill>
+            <a:gsLst>
+              <a:gs pos="0">
+                <a:srgbClr val="F5F0E8"/>
+              </a:gs>
+              <a:gs pos="100000">
+                <a:srgbClr val="EDE6D8"/>
+              </a:gs>
+            </a:gsLst>
+            <a:lin ang="5400000" scaled="1"/>
+          </a:gradFill>
+        </p:spPr>
+        <p:style>
+          <a:lnRef idx="1">
+            <a:schemeClr val="accent1"/>
+          </a:lnRef>
+          <a:fillRef idx="3">
+            <a:schemeClr val="accent1"/>
+          </a:fillRef>
+          <a:effectRef idx="2">
+            <a:schemeClr val="accent1"/>
+          </a:effectRef>
+          <a:fontRef idx="minor">
+            <a:schemeClr val="lt1"/>
+          </a:fontRef>
+        </p:style>
+        <p:txBody>
+          <a:bodyPr rtlCol="0" anchor="ctr"/>
+          <a:lstStyle/>
+          <a:p>
+            <a:pPr algn="ctr"/>
+          </a:p>
+        </p:txBody>
+      </p:sp>
+      <p:sp>
+        <p:nvSpPr>
+          <p:cNvPr id="3" name="Rounded Rectangle 2"/>
+          <p:cNvSpPr/>
+          <p:nvPr/>
+        </p:nvSpPr>
+        <p:spPr>
+          <a:xfrm>
+            <a:off x="533386" y="533400"/>
+            <a:ext cx="11124921" cy="5505450"/>
+          </a:xfrm>
+          <a:prstGeom prst="roundRect">
+            <a:avLst>
+              <a:gd name="adj" fmla="val 3875"/>
+            </a:avLst>
+          </a:prstGeom>
+          <a:solidFill>
+            <a:srgbClr val="FFFFFF">
+              <a:alpha val="82000"/>
+            </a:srgbClr>
+          </a:solidFill>
+          <a:ln w="12700">
+            <a:solidFill>
+              <a:srgbClr val="1A1815">
+                <a:alpha val="7000"/>
+              </a:srgbClr>
+            </a:solidFill>
+          </a:ln>
+        </p:spPr>
+        <p:style>
+          <a:lnRef idx="1">
+            <a:schemeClr val="accent1"/>
+          </a:lnRef>
+          <a:fillRef idx="3">
+            <a:schemeClr val="accent1"/>
+          </a:fillRef>
+          <a:effectRef idx="2">
+            <a:schemeClr val="accent1"/>
+          </a:effectRef>
+          <a:fontRef idx="minor">
+            <a:schemeClr val="lt1"/>
+          </a:fontRef>
+        </p:style>
+        <p:txBody>
+          <a:bodyPr rtlCol="0" anchor="ctr"/>
+          <a:lstStyle/>
+          <a:p>
+            <a:pPr algn="ctr"/>
+          </a:p>
+        </p:txBody>
+      </p:sp>
+      <p:sp>
+        <p:nvSpPr>
+          <p:cNvPr id="4" name="TextBox 3"/>
+          <p:cNvSpPr txBox="1"/>
+          <p:nvPr/>
+        </p:nvSpPr>
+        <p:spPr>
+          <a:xfrm>
+            <a:off x="914377" y="952500"/>
+            <a:ext cx="10362940" cy="190500"/>
+          </a:xfrm>
+          <a:prstGeom prst="rect">
+            <a:avLst/>
+          </a:prstGeom>
+          <a:noFill/>
+        </p:spPr>
+        <p:txBody>
+          <a:bodyPr wrap="square" lIns="0" rIns="0" tIns="0" bIns="0">
+            <a:spAutoFit/>
+          </a:bodyPr>
+          <a:lstStyle/>
+          <a:p>
+            <a:pPr algn="l"/>
+            <a:r>
+              <a:rPr sz="1050" b="1" i="0" spc="300">
+                <a:solidFill>
+                  <a:srgbClr val="D4956B"/>
+                </a:solidFill>
+                <a:latin typeface="Noto Sans SC"/>
+              </a:rPr>
+              <a:t>THANK YOU</a:t>
+            </a:r>
+          </a:p>
+        </p:txBody>
+      </p:sp>
+      <p:sp>
+        <p:nvSpPr>
+          <p:cNvPr id="5" name="TextBox 4"/>
+          <p:cNvSpPr txBox="1"/>
+          <p:nvPr/>
+        </p:nvSpPr>
+        <p:spPr>
+          <a:xfrm>
+            <a:off x="914377" y="1257300"/>
+            <a:ext cx="10362940" cy="638175"/>
+          </a:xfrm>
+          <a:prstGeom prst="rect">
+            <a:avLst/>
+          </a:prstGeom>
+          <a:noFill/>
+        </p:spPr>
+        <p:txBody>
+          <a:bodyPr wrap="square" lIns="0" rIns="0" tIns="0" bIns="0">
+            <a:spAutoFit/>
+          </a:bodyPr>
+          <a:lstStyle/>
+          <a:p>
+            <a:pPr algn="l"/>
+            <a:r>
+              <a:rPr sz="4200" b="1" i="0">
+                <a:solidFill>
+                  <a:srgbClr val="1A1815"/>
+                </a:solidFill>
+                <a:latin typeface="Noto Sans SC"/>
+              </a:rPr>
+              <a:t>让我们一起，把 AI 装进每一个业务流程</a:t>
+            </a:r>
+          </a:p>
+        </p:txBody>
+      </p:sp>
+      <p:sp>
+        <p:nvSpPr>
+          <p:cNvPr id="6" name="TextBox 5"/>
+          <p:cNvSpPr txBox="1"/>
+          <p:nvPr/>
+        </p:nvSpPr>
+        <p:spPr>
+          <a:xfrm>
+            <a:off x="914377" y="2066925"/>
+            <a:ext cx="10362940" cy="371475"/>
+          </a:xfrm>
+          <a:prstGeom prst="rect">
+            <a:avLst/>
+          </a:prstGeom>
+          <a:noFill/>
+        </p:spPr>
+        <p:txBody>
+          <a:bodyPr wrap="square" lIns="0" rIns="0" tIns="0" bIns="0">
+            <a:spAutoFit/>
+          </a:bodyPr>
+          <a:lstStyle/>
+          <a:p>
+            <a:pPr algn="l"/>
+            <a:r>
+              <a:rPr sz="2100" b="0" i="0">
+                <a:solidFill>
+                  <a:srgbClr val="5C5548"/>
+                </a:solidFill>
+                <a:latin typeface="Noto Sans SC"/>
+              </a:rPr>
+              <a:t>联系 sales@dify.ai 安排技术演示</a:t>
+            </a:r>
+          </a:p>
+        </p:txBody>
+      </p:sp>
+      <p:sp>
+        <p:nvSpPr>
+          <p:cNvPr id="7" name="Rectangle 6"/>
+          <p:cNvSpPr/>
+          <p:nvPr/>
+        </p:nvSpPr>
+        <p:spPr>
+          <a:xfrm>
+            <a:off x="914377" y="4895850"/>
+            <a:ext cx="1142971" cy="38100"/>
+          </a:xfrm>
+          <a:prstGeom prst="rect">
+            <a:avLst/>
+          </a:prstGeom>
+          <a:solidFill>
+            <a:srgbClr val="B8654A"/>
+          </a:solidFill>
+          <a:ln>
+            <a:noFill/>
+          </a:ln>
+        </p:spPr>
+        <p:style>
+          <a:lnRef idx="1">
+            <a:schemeClr val="accent1"/>
+          </a:lnRef>
+          <a:fillRef idx="3">
+            <a:schemeClr val="accent1"/>
+          </a:fillRef>
+          <a:effectRef idx="2">
+            <a:schemeClr val="accent1"/>
+          </a:effectRef>
+          <a:fontRef idx="minor">
+            <a:schemeClr val="lt1"/>
+          </a:fontRef>
+        </p:style>
+        <p:txBody>
+          <a:bodyPr rtlCol="0" anchor="ctr"/>
+          <a:lstStyle/>
+          <a:p>
+            <a:pPr algn="ctr"/>
+          </a:p>
+        </p:txBody>
+      </p:sp>
+      <p:sp>
+        <p:nvSpPr>
+          <p:cNvPr id="8" name="TextBox 7"/>
+          <p:cNvSpPr txBox="1"/>
+          <p:nvPr/>
+        </p:nvSpPr>
+        <p:spPr>
+          <a:xfrm>
+            <a:off x="914377" y="5410200"/>
+            <a:ext cx="10362940" cy="219075"/>
+          </a:xfrm>
+          <a:prstGeom prst="rect">
+            <a:avLst/>
+          </a:prstGeom>
+          <a:noFill/>
+        </p:spPr>
+        <p:txBody>
+          <a:bodyPr wrap="square" lIns="0" rIns="0" tIns="0" bIns="0">
+            <a:spAutoFit/>
+          </a:bodyPr>
+          <a:lstStyle/>
+          <a:p>
+            <a:pPr algn="l"/>
+            <a:r>
+              <a:rPr sz="1275" b="0" i="0">
+                <a:solidFill>
+                  <a:srgbClr val="5C5548"/>
+                </a:solidFill>
+                <a:latin typeface="Noto Sans SC"/>
+              </a:rPr>
+              <a:t>Dify · 2026</a:t>
+            </a:r>
+          </a:p>
+        </p:txBody>
+      </p:sp>
+      <p:sp>
+        <p:nvSpPr>
+          <p:cNvPr id="9" name="TextBox 8"/>
+          <p:cNvSpPr txBox="1"/>
+          <p:nvPr/>
+        </p:nvSpPr>
+        <p:spPr>
+          <a:xfrm>
+            <a:off x="533386" y="6610350"/>
+            <a:ext cx="5714857" cy="190500"/>
+          </a:xfrm>
+          <a:prstGeom prst="rect">
+            <a:avLst/>
+          </a:prstGeom>
+          <a:noFill/>
+        </p:spPr>
+        <p:txBody>
+          <a:bodyPr wrap="square" lIns="0" rIns="0" tIns="0" bIns="0">
+            <a:spAutoFit/>
+          </a:bodyPr>
+          <a:lstStyle/>
+          <a:p>
+            <a:pPr algn="l"/>
+            <a:r>
+              <a:rPr sz="975" b="0" i="0">
+                <a:solidFill>
+                  <a:srgbClr val="9C9588"/>
+                </a:solidFill>
+                <a:latin typeface="Noto Sans SC"/>
+              </a:rPr>
+              <a:t>Dify 企业介绍</a:t>
+            </a:r>
+          </a:p>
+        </p:txBody>
+      </p:sp>
+      <p:sp>
+        <p:nvSpPr>
+          <p:cNvPr id="10" name="TextBox 9"/>
+          <p:cNvSpPr txBox="1"/>
+          <p:nvPr/>
+        </p:nvSpPr>
+        <p:spPr>
+          <a:xfrm>
+            <a:off x="9753356" y="6610350"/>
+            <a:ext cx="1904952" cy="190500"/>
+          </a:xfrm>
+          <a:prstGeom prst="rect">
+            <a:avLst/>
+          </a:prstGeom>
+          <a:noFill/>
+        </p:spPr>
+        <p:txBody>
+          <a:bodyPr wrap="square" lIns="0" rIns="0" tIns="0" bIns="0">
+            <a:spAutoFit/>
+          </a:bodyPr>
+          <a:lstStyle/>
+          <a:p>
+            <a:pPr algn="r"/>
+            <a:r>
+              <a:rPr sz="975" b="0" i="0">
+                <a:solidFill>
+                  <a:srgbClr val="9C9588"/>
+                </a:solidFill>
+                <a:latin typeface="IBM Plex Mono"/>
+              </a:rPr>
+              <a:t>08 / 08</a:t>
+            </a:r>
+          </a:p>
+        </p:txBody>
+      </p:sp>
     </p:spTree>
   </p:cSld>
   <p:clrMapOvr>
